--- a/Presentación - EcoMapa.pptx
+++ b/Presentación - EcoMapa.pptx
@@ -3151,8 +3151,8 @@
         </p:nvSpPr>
         <p:spPr>
           <a:xfrm>
-            <a:off x="731520" y="548640"/>
-            <a:ext cx="5669280" cy="384048"/>
+            <a:off x="731520" y="502920"/>
+            <a:ext cx="5852160" cy="384048"/>
           </a:xfrm>
           <a:prstGeom prst="roundRect">
             <a:avLst/>
@@ -3214,7 +3214,7 @@
         </p:blipFill>
         <p:spPr>
           <a:xfrm>
-            <a:off x="731520" y="1234440"/>
+            <a:off x="731520" y="1188720"/>
             <a:ext cx="1645920" cy="1645920"/>
           </a:xfrm>
           <a:prstGeom prst="rect">
@@ -3238,7 +3238,7 @@
         </p:blipFill>
         <p:spPr>
           <a:xfrm>
-            <a:off x="2651760" y="1234440"/>
+            <a:off x="2651760" y="1188720"/>
             <a:ext cx="1645920" cy="1645920"/>
           </a:xfrm>
           <a:prstGeom prst="rect">
@@ -3254,8 +3254,8 @@
         </p:nvSpPr>
         <p:spPr>
           <a:xfrm>
-            <a:off x="731520" y="3017520"/>
-            <a:ext cx="10698480" cy="1645920"/>
+            <a:off x="731520" y="2971800"/>
+            <a:ext cx="10698480" cy="1691640"/>
           </a:xfrm>
           <a:prstGeom prst="rect">
             <a:avLst/>
@@ -3277,7 +3277,7 @@
               </a:defRPr>
             </a:pPr>
             <a:r>
-              <a:t>EcoMapa V2.1</a:t>
+              <a:t>ECOMAPA V2.1</a:t>
             </a:r>
           </a:p>
           <a:p>
@@ -3293,7 +3293,7 @@
               </a:defRPr>
             </a:pPr>
             <a:r>
-              <a:t>Plataforma Inteligente de Economía Circular con IA Multimodal y Geolocalización Urbana</a:t>
+              <a:t>Asistente Inteligente de Reciclaje con Geolocalización e Inteligencia Artificial</a:t>
             </a:r>
           </a:p>
           <a:p>
@@ -3309,7 +3309,7 @@
               </a:defRPr>
             </a:pPr>
             <a:r>
-              <a:t>Defensa Académica Final — Tecnicatura Superior en Desarrollo de Software</a:t>
+              <a:t>Tecnología aplicada al cuidado ambiental, economía circular y gestión urbana</a:t>
             </a:r>
           </a:p>
         </p:txBody>
@@ -3322,8 +3322,8 @@
         </p:nvSpPr>
         <p:spPr>
           <a:xfrm>
-            <a:off x="731520" y="4846320"/>
-            <a:ext cx="3383280" cy="1463040"/>
+            <a:off x="731520" y="4892040"/>
+            <a:ext cx="3383280" cy="1417320"/>
           </a:xfrm>
           <a:prstGeom prst="roundRect">
             <a:avLst/>
@@ -3364,7 +3364,7 @@
               </a:defRPr>
             </a:pPr>
             <a:r>
-              <a:t>EQUIPO DE DESARROLLO</a:t>
+              <a:t>PRESENTADO POR</a:t>
             </a:r>
           </a:p>
           <a:p>
@@ -3380,11 +3380,11 @@
               </a:defRPr>
             </a:pPr>
             <a:r>
-              <a:t>Naomi Ailín Soria Jofré</a:t>
+              <a:t>Romero Gerardo</a:t>
             </a:r>
             <a:br/>
             <a:r>
-              <a:t>Gerardo Jesús Romero</a:t>
+              <a:t>y Soria Naomi</a:t>
             </a:r>
           </a:p>
           <a:p>
@@ -3413,8 +3413,8 @@
         </p:nvSpPr>
         <p:spPr>
           <a:xfrm>
-            <a:off x="4389120" y="4846320"/>
-            <a:ext cx="3383280" cy="1463040"/>
+            <a:off x="4389120" y="4892040"/>
+            <a:ext cx="3383280" cy="1417320"/>
           </a:xfrm>
           <a:prstGeom prst="roundRect">
             <a:avLst/>
@@ -3504,8 +3504,8 @@
         </p:nvSpPr>
         <p:spPr>
           <a:xfrm>
-            <a:off x="8046720" y="4846320"/>
-            <a:ext cx="3383280" cy="1463040"/>
+            <a:off x="8046720" y="4892040"/>
+            <a:ext cx="3383280" cy="1417320"/>
           </a:xfrm>
           <a:prstGeom prst="roundRect">
             <a:avLst/>
@@ -3546,7 +3546,7 @@
               </a:defRPr>
             </a:pPr>
             <a:r>
-              <a:t>STACK TECNOLÓGICO</a:t>
+              <a:t>CICLO LECTIVO Y SEDE</a:t>
             </a:r>
           </a:p>
           <a:p>
@@ -3562,11 +3562,11 @@
               </a:defRPr>
             </a:pPr>
             <a:r>
-              <a:t>Google Gemini AI • Jetpack Compose</a:t>
+              <a:t>Práctica Profesionalizante I y II</a:t>
             </a:r>
             <a:br/>
             <a:r>
-              <a:t>Supabase • PostGIS • React 19</a:t>
+              <a:t>Villa del Rosario, Córdoba</a:t>
             </a:r>
           </a:p>
           <a:p>
@@ -3582,7 +3582,7 @@
               </a:defRPr>
             </a:pPr>
             <a:r>
-              <a:t>Octubre de 2026 — Córdoba</a:t>
+              <a:t>Octubre de 2026</a:t>
             </a:r>
           </a:p>
         </p:txBody>
@@ -3656,14 +3656,14 @@
         </p:nvSpPr>
         <p:spPr>
           <a:xfrm>
-            <a:off x="731520" y="411480"/>
+            <a:off x="731520" y="384048"/>
             <a:ext cx="3474720" cy="347472"/>
           </a:xfrm>
           <a:prstGeom prst="roundRect">
             <a:avLst/>
           </a:prstGeom>
           <a:solidFill>
-            <a:srgbClr val="10B981"/>
+            <a:srgbClr val="8B5CF6"/>
           </a:solidFill>
           <a:ln>
             <a:noFill/>
@@ -3696,7 +3696,7 @@
               </a:defRPr>
             </a:pPr>
             <a:r>
-              <a:t>09. VIABILIDAD COMERCIAL</a:t>
+              <a:t>09. DIFERENCIACIÓN</a:t>
             </a:r>
           </a:p>
         </p:txBody>
@@ -3717,7 +3717,7 @@
         </p:blipFill>
         <p:spPr>
           <a:xfrm>
-            <a:off x="11064240" y="365760"/>
+            <a:off x="11064240" y="347472"/>
             <a:ext cx="594360" cy="594360"/>
           </a:xfrm>
           <a:prstGeom prst="rect">
@@ -3733,8 +3733,8 @@
         </p:nvSpPr>
         <p:spPr>
           <a:xfrm>
-            <a:off x="731520" y="777240"/>
-            <a:ext cx="10515600" cy="731520"/>
+            <a:off x="731520" y="749808"/>
+            <a:ext cx="10515600" cy="777240"/>
           </a:xfrm>
           <a:prstGeom prst="rect">
             <a:avLst/>
@@ -3748,7 +3748,7 @@
           <a:lstStyle/>
           <a:p>
             <a:pPr>
-              <a:defRPr sz="2600" b="1">
+              <a:defRPr sz="2500" b="1">
                 <a:solidFill>
                   <a:srgbClr val="FFFFFF"/>
                 </a:solidFill>
@@ -3756,7 +3756,78 @@
               </a:defRPr>
             </a:pPr>
             <a:r>
-              <a:t>Modelo Híbrido SaaS B2G y B2B</a:t>
+              <a:t>Competencia y Ventaja Competitiva</a:t>
+            </a:r>
+          </a:p>
+          <a:p>
+            <a:pPr>
+              <a:spcBef>
+                <a:spcPts val="300"/>
+              </a:spcBef>
+              <a:defRPr sz="1300">
+                <a:solidFill>
+                  <a:srgbClr val="94A3B8"/>
+                </a:solidFill>
+                <a:latin typeface="Arial"/>
+              </a:defRPr>
+            </a:pPr>
+            <a:r>
+              <a:t>Por qué EcoMapa supera a las iniciativas tradicionales de mapas estáticos</a:t>
+            </a:r>
+          </a:p>
+        </p:txBody>
+      </p:sp>
+      <p:sp>
+        <p:nvSpPr>
+          <p:cNvPr id="6" name="Rounded Rectangle 5"/>
+          <p:cNvSpPr/>
+          <p:nvPr/>
+        </p:nvSpPr>
+        <p:spPr>
+          <a:xfrm>
+            <a:off x="731520" y="1783080"/>
+            <a:ext cx="5257800" cy="1371600"/>
+          </a:xfrm>
+          <a:prstGeom prst="roundRect">
+            <a:avLst/>
+          </a:prstGeom>
+          <a:solidFill>
+            <a:srgbClr val="1E293B"/>
+          </a:solidFill>
+          <a:ln w="19050">
+            <a:solidFill>
+              <a:srgbClr val="10B981"/>
+            </a:solidFill>
+          </a:ln>
+        </p:spPr>
+        <p:style>
+          <a:lnRef idx="1">
+            <a:schemeClr val="accent1"/>
+          </a:lnRef>
+          <a:fillRef idx="3">
+            <a:schemeClr val="accent1"/>
+          </a:fillRef>
+          <a:effectRef idx="2">
+            <a:schemeClr val="accent1"/>
+          </a:effectRef>
+          <a:fontRef idx="minor">
+            <a:schemeClr val="lt1"/>
+          </a:fontRef>
+        </p:style>
+        <p:txBody>
+          <a:bodyPr rtlCol="0" anchor="ctr" wrap="square" lIns="228600" rIns="228600" tIns="164592"/>
+          <a:lstStyle/>
+          <a:p>
+            <a:pPr algn="ctr">
+              <a:defRPr sz="1200" b="1">
+                <a:solidFill>
+                  <a:srgbClr val="10B981"/>
+                </a:solidFill>
+                <a:latin typeface="Arial"/>
+              </a:defRPr>
+            </a:pPr>
+            <a:r>
+              <a:t>IA MULTIMODAL INTEGRADA</a:t>
             </a:r>
           </a:p>
           <a:p>
@@ -3764,29 +3835,29 @@
               <a:spcBef>
                 <a:spcPts val="400"/>
               </a:spcBef>
-              <a:defRPr sz="1300">
-                <a:solidFill>
-                  <a:srgbClr val="94A3B8"/>
-                </a:solidFill>
-                <a:latin typeface="Arial"/>
-              </a:defRPr>
-            </a:pPr>
-            <a:r>
-              <a:t>Flujos de ingresos recurrentes y estructura de costos operativos ultra-liviana</a:t>
-            </a:r>
-          </a:p>
-        </p:txBody>
-      </p:sp>
-      <p:sp>
-        <p:nvSpPr>
-          <p:cNvPr id="6" name="Rounded Rectangle 5"/>
+              <a:defRPr sz="1050">
+                <a:solidFill>
+                  <a:srgbClr val="E2E8F0"/>
+                </a:solidFill>
+                <a:latin typeface="Arial"/>
+              </a:defRPr>
+            </a:pPr>
+            <a:r>
+              <a:t>No requiere buscar en largos listados PDF: basta una foto o pregunta en lenguaje natural con Google Gemini.</a:t>
+            </a:r>
+          </a:p>
+        </p:txBody>
+      </p:sp>
+      <p:sp>
+        <p:nvSpPr>
+          <p:cNvPr id="7" name="Rounded Rectangle 6"/>
           <p:cNvSpPr/>
           <p:nvPr/>
         </p:nvSpPr>
         <p:spPr>
           <a:xfrm>
-            <a:off x="731520" y="1828800"/>
-            <a:ext cx="3383280" cy="4480560"/>
+            <a:off x="6172200" y="1783080"/>
+            <a:ext cx="5257800" cy="1371600"/>
           </a:xfrm>
           <a:prstGeom prst="roundRect">
             <a:avLst/>
@@ -3815,7 +3886,7 @@
           </a:fontRef>
         </p:style>
         <p:txBody>
-          <a:bodyPr rtlCol="0" anchor="ctr" wrap="square" lIns="228600" rIns="228600" tIns="228600"/>
+          <a:bodyPr rtlCol="0" anchor="ctr" wrap="square" lIns="228600" rIns="228600" tIns="164592"/>
           <a:lstStyle/>
           <a:p>
             <a:pPr algn="ctr">
@@ -3827,29 +3898,84 @@
               </a:defRPr>
             </a:pPr>
             <a:r>
-              <a:t>B2G: MUNICIPIOS (GIRSU SaaS)</a:t>
+              <a:t>GEOLOCALIZACIÓN Y GPS NATIVO</a:t>
             </a:r>
           </a:p>
           <a:p>
             <a:pPr>
               <a:spcBef>
-                <a:spcPts val="300"/>
+                <a:spcPts val="400"/>
               </a:spcBef>
-              <a:defRPr sz="1000">
-                <a:solidFill>
-                  <a:srgbClr val="94A3B8"/>
-                </a:solidFill>
-                <a:latin typeface="Arial"/>
-              </a:defRPr>
-            </a:pPr>
-            <a:r>
-              <a:t>Suscripción Anual por Tramo Poblacional</a:t>
+              <a:defRPr sz="1050">
+                <a:solidFill>
+                  <a:srgbClr val="E2E8F0"/>
+                </a:solidFill>
+                <a:latin typeface="Arial"/>
+              </a:defRPr>
+            </a:pPr>
+            <a:r>
+              <a:t>Cálculo euclidiano PostGIS y botón de navegación turn-by-turn en Google Maps con guiado por voz.</a:t>
+            </a:r>
+          </a:p>
+        </p:txBody>
+      </p:sp>
+      <p:sp>
+        <p:nvSpPr>
+          <p:cNvPr id="8" name="Rounded Rectangle 7"/>
+          <p:cNvSpPr/>
+          <p:nvPr/>
+        </p:nvSpPr>
+        <p:spPr>
+          <a:xfrm>
+            <a:off x="731520" y="3291839"/>
+            <a:ext cx="5257800" cy="1371600"/>
+          </a:xfrm>
+          <a:prstGeom prst="roundRect">
+            <a:avLst/>
+          </a:prstGeom>
+          <a:solidFill>
+            <a:srgbClr val="1E293B"/>
+          </a:solidFill>
+          <a:ln w="19050">
+            <a:solidFill>
+              <a:srgbClr val="F59E0B"/>
+            </a:solidFill>
+          </a:ln>
+        </p:spPr>
+        <p:style>
+          <a:lnRef idx="1">
+            <a:schemeClr val="accent1"/>
+          </a:lnRef>
+          <a:fillRef idx="3">
+            <a:schemeClr val="accent1"/>
+          </a:fillRef>
+          <a:effectRef idx="2">
+            <a:schemeClr val="accent1"/>
+          </a:effectRef>
+          <a:fontRef idx="minor">
+            <a:schemeClr val="lt1"/>
+          </a:fontRef>
+        </p:style>
+        <p:txBody>
+          <a:bodyPr rtlCol="0" anchor="ctr" wrap="square" lIns="228600" rIns="228600" tIns="164592"/>
+          <a:lstStyle/>
+          <a:p>
+            <a:pPr algn="ctr">
+              <a:defRPr sz="1200" b="1">
+                <a:solidFill>
+                  <a:srgbClr val="F59E0B"/>
+                </a:solidFill>
+                <a:latin typeface="Arial"/>
+              </a:defRPr>
+            </a:pPr>
+            <a:r>
+              <a:t>SISTEMA DE GAMIFICACIÓN</a:t>
             </a:r>
           </a:p>
           <a:p>
             <a:pPr>
               <a:spcBef>
-                <a:spcPts val="700"/>
+                <a:spcPts val="400"/>
               </a:spcBef>
               <a:defRPr sz="1050">
                 <a:solidFill>
@@ -3859,85 +3985,21 @@
               </a:defRPr>
             </a:pPr>
             <a:r>
-              <a:t>• Tier Comunal (&lt; 10.000 hab.): $450 USD/mes.</a:t>
-            </a:r>
-          </a:p>
-          <a:p>
-            <a:pPr>
-              <a:spcBef>
-                <a:spcPts val="700"/>
-              </a:spcBef>
-              <a:defRPr sz="1050">
-                <a:solidFill>
-                  <a:srgbClr val="E2E8F0"/>
-                </a:solidFill>
-                <a:latin typeface="Arial"/>
-              </a:defRPr>
-            </a:pPr>
-            <a:r>
-              <a:t>• Tier Urbano (10k a 50k hab.): $850 USD/mes.</a:t>
-            </a:r>
-          </a:p>
-          <a:p>
-            <a:pPr>
-              <a:spcBef>
-                <a:spcPts val="700"/>
-              </a:spcBef>
-              <a:defRPr sz="1050">
-                <a:solidFill>
-                  <a:srgbClr val="E2E8F0"/>
-                </a:solidFill>
-                <a:latin typeface="Arial"/>
-              </a:defRPr>
-            </a:pPr>
-            <a:r>
-              <a:t>• Tier Metrópoli (&gt; 50.000 hab.): $1.500 USD/mes.</a:t>
-            </a:r>
-          </a:p>
-          <a:p>
-            <a:pPr>
-              <a:spcBef>
-                <a:spcPts val="700"/>
-              </a:spcBef>
-              <a:defRPr sz="1050">
-                <a:solidFill>
-                  <a:srgbClr val="E2E8F0"/>
-                </a:solidFill>
-                <a:latin typeface="Arial"/>
-              </a:defRPr>
-            </a:pPr>
-            <a:r>
-              <a:t>• Ahorro directo en combustible de camiones (-35%).</a:t>
-            </a:r>
-          </a:p>
-          <a:p>
-            <a:pPr>
-              <a:spcBef>
-                <a:spcPts val="700"/>
-              </a:spcBef>
-              <a:defRPr sz="1050">
-                <a:solidFill>
-                  <a:srgbClr val="E2E8F0"/>
-                </a:solidFill>
-                <a:latin typeface="Arial"/>
-              </a:defRPr>
-            </a:pPr>
-            <a:r>
-              <a:t>• Cumplimiento auditable de metas ambientales.</a:t>
-            </a:r>
-          </a:p>
-        </p:txBody>
-      </p:sp>
-      <p:sp>
-        <p:nvSpPr>
-          <p:cNvPr id="7" name="Rounded Rectangle 6"/>
+              <a:t>Incentivos tangibles en comercios locales que sostienen el compromiso del usuario en el tiempo.</a:t>
+            </a:r>
+          </a:p>
+        </p:txBody>
+      </p:sp>
+      <p:sp>
+        <p:nvSpPr>
+          <p:cNvPr id="9" name="Rounded Rectangle 8"/>
           <p:cNvSpPr/>
           <p:nvPr/>
         </p:nvSpPr>
         <p:spPr>
           <a:xfrm>
-            <a:off x="4389120" y="1828800"/>
-            <a:ext cx="3383280" cy="4480560"/>
+            <a:off x="6172200" y="3291839"/>
+            <a:ext cx="5257800" cy="1371600"/>
           </a:xfrm>
           <a:prstGeom prst="roundRect">
             <a:avLst/>
@@ -3966,7 +4028,7 @@
           </a:fontRef>
         </p:style>
         <p:txBody>
-          <a:bodyPr rtlCol="0" anchor="ctr" wrap="square" lIns="228600" rIns="228600" tIns="228600"/>
+          <a:bodyPr rtlCol="0" anchor="ctr" wrap="square" lIns="228600" rIns="228600" tIns="164592"/>
           <a:lstStyle/>
           <a:p>
             <a:pPr algn="ctr">
@@ -3978,29 +4040,13 @@
               </a:defRPr>
             </a:pPr>
             <a:r>
-              <a:t>B2B: EMPRESAS Y MARCAS (REP)</a:t>
+              <a:t>PANEL ADMINISTRATIVO MUNICIPAL</a:t>
             </a:r>
           </a:p>
           <a:p>
             <a:pPr>
               <a:spcBef>
-                <a:spcPts val="300"/>
-              </a:spcBef>
-              <a:defRPr sz="1000">
-                <a:solidFill>
-                  <a:srgbClr val="94A3B8"/>
-                </a:solidFill>
-                <a:latin typeface="Arial"/>
-              </a:defRPr>
-            </a:pPr>
-            <a:r>
-              <a:t>Suscripción Mensual y Patrocinios</a:t>
-            </a:r>
-          </a:p>
-          <a:p>
-            <a:pPr>
-              <a:spcBef>
-                <a:spcPts val="700"/>
+                <a:spcPts val="400"/>
               </a:spcBef>
               <a:defRPr sz="1050">
                 <a:solidFill>
@@ -4010,85 +4056,21 @@
               </a:defRPr>
             </a:pPr>
             <a:r>
-              <a:t>• Presencia destacada de puntos limpios corporativos.</a:t>
-            </a:r>
-          </a:p>
-          <a:p>
-            <a:pPr>
-              <a:spcBef>
-                <a:spcPts val="700"/>
-              </a:spcBef>
-              <a:defRPr sz="1050">
-                <a:solidFill>
-                  <a:srgbClr val="E2E8F0"/>
-                </a:solidFill>
-                <a:latin typeface="Arial"/>
-              </a:defRPr>
-            </a:pPr>
-            <a:r>
-              <a:t>• Publicación de cupones con medición de canjes.</a:t>
-            </a:r>
-          </a:p>
-          <a:p>
-            <a:pPr>
-              <a:spcBef>
-                <a:spcPts val="700"/>
-              </a:spcBef>
-              <a:defRPr sz="1050">
-                <a:solidFill>
-                  <a:srgbClr val="E2E8F0"/>
-                </a:solidFill>
-                <a:latin typeface="Arial"/>
-              </a:defRPr>
-            </a:pPr>
-            <a:r>
-              <a:t>• Certificados de huella hídrica y de carbono mitigada.</a:t>
-            </a:r>
-          </a:p>
-          <a:p>
-            <a:pPr>
-              <a:spcBef>
-                <a:spcPts val="700"/>
-              </a:spcBef>
-              <a:defRPr sz="1050">
-                <a:solidFill>
-                  <a:srgbClr val="E2E8F0"/>
-                </a:solidFill>
-                <a:latin typeface="Arial"/>
-              </a:defRPr>
-            </a:pPr>
-            <a:r>
-              <a:t>• Cumplimiento legal de Responsabilidad Extendida.</a:t>
-            </a:r>
-          </a:p>
-          <a:p>
-            <a:pPr>
-              <a:spcBef>
-                <a:spcPts val="700"/>
-              </a:spcBef>
-              <a:defRPr sz="1050">
-                <a:solidFill>
-                  <a:srgbClr val="E2E8F0"/>
-                </a:solidFill>
-                <a:latin typeface="Arial"/>
-              </a:defRPr>
-            </a:pPr>
-            <a:r>
-              <a:t>• Tarifas desde $120 a $380 USD/mes por empresa.</a:t>
-            </a:r>
-          </a:p>
-        </p:txBody>
-      </p:sp>
-      <p:sp>
-        <p:nvSpPr>
-          <p:cNvPr id="8" name="Rounded Rectangle 7"/>
+              <a:t>Herramientas de gestión y coordinación de cuadrillas para retiros voluminosos en tiempo real.</a:t>
+            </a:r>
+          </a:p>
+        </p:txBody>
+      </p:sp>
+      <p:sp>
+        <p:nvSpPr>
+          <p:cNvPr id="10" name="Rounded Rectangle 9"/>
           <p:cNvSpPr/>
           <p:nvPr/>
         </p:nvSpPr>
         <p:spPr>
           <a:xfrm>
-            <a:off x="8046720" y="1828800"/>
-            <a:ext cx="3383280" cy="4480560"/>
+            <a:off x="731520" y="4800600"/>
+            <a:ext cx="5257800" cy="1371600"/>
           </a:xfrm>
           <a:prstGeom prst="roundRect">
             <a:avLst/>
@@ -4098,7 +4080,7 @@
           </a:solidFill>
           <a:ln w="19050">
             <a:solidFill>
-              <a:srgbClr val="10B981"/>
+              <a:srgbClr val="3B82F6"/>
             </a:solidFill>
           </a:ln>
         </p:spPr>
@@ -4117,41 +4099,96 @@
           </a:fontRef>
         </p:style>
         <p:txBody>
-          <a:bodyPr rtlCol="0" anchor="ctr" wrap="square" lIns="228600" rIns="228600" tIns="228600"/>
+          <a:bodyPr rtlCol="0" anchor="ctr" wrap="square" lIns="228600" rIns="228600" tIns="164592"/>
           <a:lstStyle/>
           <a:p>
             <a:pPr algn="ctr">
               <a:defRPr sz="1200" b="1">
                 <a:solidFill>
-                  <a:srgbClr val="10B981"/>
-                </a:solidFill>
-                <a:latin typeface="Arial"/>
-              </a:defRPr>
-            </a:pPr>
-            <a:r>
-              <a:t>B2C: CIUDADANO (ACCESO LIBRE)</a:t>
+                  <a:srgbClr val="3B82F6"/>
+                </a:solidFill>
+                <a:latin typeface="Arial"/>
+              </a:defRPr>
+            </a:pPr>
+            <a:r>
+              <a:t>EDUCACIÓN AMBIENTAL INTERACTIVA</a:t>
             </a:r>
           </a:p>
           <a:p>
             <a:pPr>
               <a:spcBef>
-                <a:spcPts val="300"/>
+                <a:spcPts val="400"/>
               </a:spcBef>
-              <a:defRPr sz="1000">
-                <a:solidFill>
-                  <a:srgbClr val="94A3B8"/>
-                </a:solidFill>
-                <a:latin typeface="Arial"/>
-              </a:defRPr>
-            </a:pPr>
-            <a:r>
-              <a:t>Impacto Social y Adopción Masiva</a:t>
+              <a:defRPr sz="1050">
+                <a:solidFill>
+                  <a:srgbClr val="E2E8F0"/>
+                </a:solidFill>
+                <a:latin typeface="Arial"/>
+              </a:defRPr>
+            </a:pPr>
+            <a:r>
+              <a:t>Consejos de acondicionamiento de materiales en el momento exacto del descarte.</a:t>
+            </a:r>
+          </a:p>
+        </p:txBody>
+      </p:sp>
+      <p:sp>
+        <p:nvSpPr>
+          <p:cNvPr id="11" name="Rounded Rectangle 10"/>
+          <p:cNvSpPr/>
+          <p:nvPr/>
+        </p:nvSpPr>
+        <p:spPr>
+          <a:xfrm>
+            <a:off x="6172200" y="4800600"/>
+            <a:ext cx="5257800" cy="1371600"/>
+          </a:xfrm>
+          <a:prstGeom prst="roundRect">
+            <a:avLst/>
+          </a:prstGeom>
+          <a:solidFill>
+            <a:srgbClr val="1E293B"/>
+          </a:solidFill>
+          <a:ln w="19050">
+            <a:solidFill>
+              <a:srgbClr val="F43F5E"/>
+            </a:solidFill>
+          </a:ln>
+        </p:spPr>
+        <p:style>
+          <a:lnRef idx="1">
+            <a:schemeClr val="accent1"/>
+          </a:lnRef>
+          <a:fillRef idx="3">
+            <a:schemeClr val="accent1"/>
+          </a:fillRef>
+          <a:effectRef idx="2">
+            <a:schemeClr val="accent1"/>
+          </a:effectRef>
+          <a:fontRef idx="minor">
+            <a:schemeClr val="lt1"/>
+          </a:fontRef>
+        </p:style>
+        <p:txBody>
+          <a:bodyPr rtlCol="0" anchor="ctr" wrap="square" lIns="228600" rIns="228600" tIns="164592"/>
+          <a:lstStyle/>
+          <a:p>
+            <a:pPr algn="ctr">
+              <a:defRPr sz="1200" b="1">
+                <a:solidFill>
+                  <a:srgbClr val="F43F5E"/>
+                </a:solidFill>
+                <a:latin typeface="Arial"/>
+              </a:defRPr>
+            </a:pPr>
+            <a:r>
+              <a:t>ARQUITECTURA MULTI-TENANT</a:t>
             </a:r>
           </a:p>
           <a:p>
             <a:pPr>
               <a:spcBef>
-                <a:spcPts val="700"/>
+                <a:spcPts val="400"/>
               </a:spcBef>
               <a:defRPr sz="1050">
                 <a:solidFill>
@@ -4161,71 +4198,7 @@
               </a:defRPr>
             </a:pPr>
             <a:r>
-              <a:t>• Aplicación móvil 100% gratuita de por vida.</a:t>
-            </a:r>
-          </a:p>
-          <a:p>
-            <a:pPr>
-              <a:spcBef>
-                <a:spcPts val="700"/>
-              </a:spcBef>
-              <a:defRPr sz="1050">
-                <a:solidFill>
-                  <a:srgbClr val="E2E8F0"/>
-                </a:solidFill>
-                <a:latin typeface="Arial"/>
-              </a:defRPr>
-            </a:pPr>
-            <a:r>
-              <a:t>• Sin publicidad invasiva ni comercialización de datos.</a:t>
-            </a:r>
-          </a:p>
-          <a:p>
-            <a:pPr>
-              <a:spcBef>
-                <a:spcPts val="700"/>
-              </a:spcBef>
-              <a:defRPr sz="1050">
-                <a:solidFill>
-                  <a:srgbClr val="E2E8F0"/>
-                </a:solidFill>
-                <a:latin typeface="Arial"/>
-              </a:defRPr>
-            </a:pPr>
-            <a:r>
-              <a:t>• Incentivo económico real mediante cupones canjeables.</a:t>
-            </a:r>
-          </a:p>
-          <a:p>
-            <a:pPr>
-              <a:spcBef>
-                <a:spcPts val="700"/>
-              </a:spcBef>
-              <a:defRPr sz="1050">
-                <a:solidFill>
-                  <a:srgbClr val="E2E8F0"/>
-                </a:solidFill>
-                <a:latin typeface="Arial"/>
-              </a:defRPr>
-            </a:pPr>
-            <a:r>
-              <a:t>• Tasa de adopción estimada: 35-42% del padrón.</a:t>
-            </a:r>
-          </a:p>
-          <a:p>
-            <a:pPr>
-              <a:spcBef>
-                <a:spcPts val="700"/>
-              </a:spcBef>
-              <a:defRPr sz="1050">
-                <a:solidFill>
-                  <a:srgbClr val="E2E8F0"/>
-                </a:solidFill>
-                <a:latin typeface="Arial"/>
-              </a:defRPr>
-            </a:pPr>
-            <a:r>
-              <a:t>• Enfoque de democratización tecnológica comunitaria.</a:t>
+              <a:t>Aislamiento de datos para servir a múltiples comunas y ciudades sobre una única plataforma.</a:t>
             </a:r>
           </a:p>
         </p:txBody>
@@ -4299,14 +4272,14 @@
         </p:nvSpPr>
         <p:spPr>
           <a:xfrm>
-            <a:off x="731520" y="411480"/>
+            <a:off x="731520" y="384048"/>
             <a:ext cx="3474720" cy="347472"/>
           </a:xfrm>
           <a:prstGeom prst="roundRect">
             <a:avLst/>
           </a:prstGeom>
           <a:solidFill>
-            <a:srgbClr val="06B6D4"/>
+            <a:srgbClr val="3B82F6"/>
           </a:solidFill>
           <a:ln>
             <a:noFill/>
@@ -4339,7 +4312,7 @@
               </a:defRPr>
             </a:pPr>
             <a:r>
-              <a:t>10. VALIDACIÓN Y RENDIMIENTO</a:t>
+              <a:t>10. STACK TECNOLÓGICO</a:t>
             </a:r>
           </a:p>
         </p:txBody>
@@ -4360,7 +4333,7 @@
         </p:blipFill>
         <p:spPr>
           <a:xfrm>
-            <a:off x="11064240" y="365760"/>
+            <a:off x="11064240" y="347472"/>
             <a:ext cx="594360" cy="594360"/>
           </a:xfrm>
           <a:prstGeom prst="rect">
@@ -4376,8 +4349,8 @@
         </p:nvSpPr>
         <p:spPr>
           <a:xfrm>
-            <a:off x="731520" y="777240"/>
-            <a:ext cx="10515600" cy="731520"/>
+            <a:off x="731520" y="749808"/>
+            <a:ext cx="10515600" cy="777240"/>
           </a:xfrm>
           <a:prstGeom prst="rect">
             <a:avLst/>
@@ -4391,7 +4364,7 @@
           <a:lstStyle/>
           <a:p>
             <a:pPr>
-              <a:defRPr sz="2600" b="1">
+              <a:defRPr sz="2500" b="1">
                 <a:solidFill>
                   <a:srgbClr val="FFFFFF"/>
                 </a:solidFill>
@@ -4399,13 +4372,13 @@
               </a:defRPr>
             </a:pPr>
             <a:r>
-              <a:t>Métricas de Desempeño y Pruebas en Campo</a:t>
+              <a:t>Tecnologías Utilizadas en el Desarrollo</a:t>
             </a:r>
           </a:p>
           <a:p>
             <a:pPr>
               <a:spcBef>
-                <a:spcPts val="400"/>
+                <a:spcPts val="300"/>
               </a:spcBef>
               <a:defRPr sz="1300">
                 <a:solidFill>
@@ -4415,7 +4388,7 @@
               </a:defRPr>
             </a:pPr>
             <a:r>
-              <a:t>Resultados de la suite automatizada de pruebas y validación real en Villa del Rosario y Matorrales</a:t>
+              <a:t>Una arquitectura moderna diseñada para ofrecer rapidez, escalabilidad y robustez</a:t>
             </a:r>
           </a:p>
         </p:txBody>
@@ -4428,8 +4401,83 @@
         </p:nvSpPr>
         <p:spPr>
           <a:xfrm>
-            <a:off x="731520" y="1828800"/>
-            <a:ext cx="2468880" cy="3017520"/>
+            <a:off x="731520" y="1783080"/>
+            <a:ext cx="10698480" cy="822960"/>
+          </a:xfrm>
+          <a:prstGeom prst="roundRect">
+            <a:avLst/>
+          </a:prstGeom>
+          <a:solidFill>
+            <a:srgbClr val="1E293B"/>
+          </a:solidFill>
+          <a:ln w="19050">
+            <a:solidFill>
+              <a:srgbClr val="10B981"/>
+            </a:solidFill>
+          </a:ln>
+        </p:spPr>
+        <p:style>
+          <a:lnRef idx="1">
+            <a:schemeClr val="accent1"/>
+          </a:lnRef>
+          <a:fillRef idx="3">
+            <a:schemeClr val="accent1"/>
+          </a:fillRef>
+          <a:effectRef idx="2">
+            <a:schemeClr val="accent1"/>
+          </a:effectRef>
+          <a:fontRef idx="minor">
+            <a:schemeClr val="lt1"/>
+          </a:fontRef>
+        </p:style>
+        <p:txBody>
+          <a:bodyPr rtlCol="0" anchor="ctr" wrap="square" lIns="228600" rIns="228600" tIns="109728"/>
+          <a:lstStyle/>
+          <a:p>
+            <a:pPr algn="ctr">
+              <a:defRPr sz="1150" b="1">
+                <a:solidFill>
+                  <a:srgbClr val="10B981"/>
+                </a:solidFill>
+                <a:latin typeface="Arial"/>
+              </a:defRPr>
+            </a:pPr>
+            <a:r>
+              <a:t>APP MÓVIL</a:t>
+            </a:r>
+          </a:p>
+          <a:p>
+            <a:pPr>
+              <a:spcBef>
+                <a:spcPts val="200"/>
+              </a:spcBef>
+              <a:defRPr sz="1000">
+                <a:solidFill>
+                  <a:srgbClr val="E2E8F0"/>
+                </a:solidFill>
+                <a:latin typeface="Arial"/>
+              </a:defRPr>
+            </a:pPr>
+            <a:r>
+              <a:t>Kotlin • Jetpack Compose • Room • Retrofit • CameraX</a:t>
+            </a:r>
+            <a:br/>
+            <a:r>
+              <a:t>Diseño reactivo moderno, arquitectura MVVM y soporte offline de datos.</a:t>
+            </a:r>
+          </a:p>
+        </p:txBody>
+      </p:sp>
+      <p:sp>
+        <p:nvSpPr>
+          <p:cNvPr id="7" name="Rounded Rectangle 6"/>
+          <p:cNvSpPr/>
+          <p:nvPr/>
+        </p:nvSpPr>
+        <p:spPr>
+          <a:xfrm>
+            <a:off x="731520" y="2697480"/>
+            <a:ext cx="10698480" cy="822960"/>
           </a:xfrm>
           <a:prstGeom prst="roundRect">
             <a:avLst/>
@@ -4458,11 +4506,11 @@
           </a:fontRef>
         </p:style>
         <p:txBody>
-          <a:bodyPr rtlCol="0" anchor="ctr" wrap="square" lIns="228600" rIns="228600" tIns="182880" bIns="182880"/>
+          <a:bodyPr rtlCol="0" anchor="ctr" wrap="square" lIns="228600" rIns="228600" tIns="109728"/>
           <a:lstStyle/>
           <a:p>
             <a:pPr algn="ctr">
-              <a:defRPr sz="3600" b="1">
+              <a:defRPr sz="1150" b="1">
                 <a:solidFill>
                   <a:srgbClr val="06B6D4"/>
                 </a:solidFill>
@@ -4470,126 +4518,27 @@
               </a:defRPr>
             </a:pPr>
             <a:r>
-              <a:t>~520 ms</a:t>
+              <a:t>PLATAFORMA WEB</a:t>
             </a:r>
           </a:p>
           <a:p>
             <a:pPr>
               <a:spcBef>
-                <a:spcPts val="400"/>
+                <a:spcPts val="200"/>
               </a:spcBef>
-              <a:defRPr sz="1300" b="1">
-                <a:solidFill>
-                  <a:srgbClr val="FFFFFF"/>
-                </a:solidFill>
-                <a:latin typeface="Arial"/>
-              </a:defRPr>
-            </a:pPr>
-            <a:r>
-              <a:t>Inferencia Gemini</a:t>
-            </a:r>
-          </a:p>
-          <a:p>
-            <a:pPr>
-              <a:spcBef>
-                <a:spcPts val="600"/>
-              </a:spcBef>
-              <a:defRPr sz="1100">
-                <a:solidFill>
-                  <a:srgbClr val="94A3B8"/>
-                </a:solidFill>
-                <a:latin typeface="Arial"/>
-              </a:defRPr>
-            </a:pPr>
-            <a:r>
-              <a:t>Tiempo de respuesta de la IA multimodal procesando fotografía Base64 y clasificando material en Supabase Edge Functions.</a:t>
-            </a:r>
-          </a:p>
-        </p:txBody>
-      </p:sp>
-      <p:sp>
-        <p:nvSpPr>
-          <p:cNvPr id="7" name="Rounded Rectangle 6"/>
-          <p:cNvSpPr/>
-          <p:nvPr/>
-        </p:nvSpPr>
-        <p:spPr>
-          <a:xfrm>
-            <a:off x="3474720" y="1828800"/>
-            <a:ext cx="2468880" cy="3017520"/>
-          </a:xfrm>
-          <a:prstGeom prst="roundRect">
-            <a:avLst/>
-          </a:prstGeom>
-          <a:solidFill>
-            <a:srgbClr val="1E293B"/>
-          </a:solidFill>
-          <a:ln w="19050">
-            <a:solidFill>
-              <a:srgbClr val="10B981"/>
-            </a:solidFill>
-          </a:ln>
-        </p:spPr>
-        <p:style>
-          <a:lnRef idx="1">
-            <a:schemeClr val="accent1"/>
-          </a:lnRef>
-          <a:fillRef idx="3">
-            <a:schemeClr val="accent1"/>
-          </a:fillRef>
-          <a:effectRef idx="2">
-            <a:schemeClr val="accent1"/>
-          </a:effectRef>
-          <a:fontRef idx="minor">
-            <a:schemeClr val="lt1"/>
-          </a:fontRef>
-        </p:style>
-        <p:txBody>
-          <a:bodyPr rtlCol="0" anchor="ctr" wrap="square" lIns="228600" rIns="228600" tIns="182880" bIns="182880"/>
-          <a:lstStyle/>
-          <a:p>
-            <a:pPr algn="ctr">
-              <a:defRPr sz="3600" b="1">
-                <a:solidFill>
-                  <a:srgbClr val="10B981"/>
-                </a:solidFill>
-                <a:latin typeface="Arial"/>
-              </a:defRPr>
-            </a:pPr>
-            <a:r>
-              <a:t>~95 ms</a:t>
-            </a:r>
-          </a:p>
-          <a:p>
-            <a:pPr>
-              <a:spcBef>
-                <a:spcPts val="400"/>
-              </a:spcBef>
-              <a:defRPr sz="1300" b="1">
-                <a:solidFill>
-                  <a:srgbClr val="FFFFFF"/>
-                </a:solidFill>
-                <a:latin typeface="Arial"/>
-              </a:defRPr>
-            </a:pPr>
-            <a:r>
-              <a:t>Consulta PostGIS RPC</a:t>
-            </a:r>
-          </a:p>
-          <a:p>
-            <a:pPr>
-              <a:spcBef>
-                <a:spcPts val="600"/>
-              </a:spcBef>
-              <a:defRPr sz="1100">
-                <a:solidFill>
-                  <a:srgbClr val="94A3B8"/>
-                </a:solidFill>
-                <a:latin typeface="Arial"/>
-              </a:defRPr>
-            </a:pPr>
-            <a:r>
-              <a:t>Cálculo de contenedor más cercano con filtrado espacial GiST y proyección esférica 4326.</a:t>
+              <a:defRPr sz="1000">
+                <a:solidFill>
+                  <a:srgbClr val="E2E8F0"/>
+                </a:solidFill>
+                <a:latin typeface="Arial"/>
+              </a:defRPr>
+            </a:pPr>
+            <a:r>
+              <a:t>React 19 • TypeScript • Vite • Tailwind CSS • Leaflet</a:t>
+            </a:r>
+            <a:br/>
+            <a:r>
+              <a:t>Paneles ultra-rápidos, mapas interactivos y control de accesos por roles.</a:t>
             </a:r>
           </a:p>
         </p:txBody>
@@ -4602,8 +4551,8 @@
         </p:nvSpPr>
         <p:spPr>
           <a:xfrm>
-            <a:off x="6217920" y="1828800"/>
-            <a:ext cx="2468880" cy="3017520"/>
+            <a:off x="731520" y="3611880"/>
+            <a:ext cx="10698480" cy="822960"/>
           </a:xfrm>
           <a:prstGeom prst="roundRect">
             <a:avLst/>
@@ -4632,11 +4581,11 @@
           </a:fontRef>
         </p:style>
         <p:txBody>
-          <a:bodyPr rtlCol="0" anchor="ctr" wrap="square" lIns="228600" rIns="228600" tIns="182880" bIns="182880"/>
+          <a:bodyPr rtlCol="0" anchor="ctr" wrap="square" lIns="228600" rIns="228600" tIns="109728"/>
           <a:lstStyle/>
           <a:p>
             <a:pPr algn="ctr">
-              <a:defRPr sz="3600" b="1">
+              <a:defRPr sz="1150" b="1">
                 <a:solidFill>
                   <a:srgbClr val="F59E0B"/>
                 </a:solidFill>
@@ -4644,39 +4593,27 @@
               </a:defRPr>
             </a:pPr>
             <a:r>
-              <a:t>21.8 MB</a:t>
+              <a:t>BACKEND Y BASE DE DATOS</a:t>
             </a:r>
           </a:p>
           <a:p>
             <a:pPr>
               <a:spcBef>
-                <a:spcPts val="400"/>
+                <a:spcPts val="200"/>
               </a:spcBef>
-              <a:defRPr sz="1300" b="1">
-                <a:solidFill>
-                  <a:srgbClr val="FFFFFF"/>
-                </a:solidFill>
-                <a:latin typeface="Arial"/>
-              </a:defRPr>
-            </a:pPr>
-            <a:r>
-              <a:t>Tamaño de APK</a:t>
-            </a:r>
-          </a:p>
-          <a:p>
-            <a:pPr>
-              <a:spcBef>
-                <a:spcPts val="600"/>
-              </a:spcBef>
-              <a:defRPr sz="1100">
-                <a:solidFill>
-                  <a:srgbClr val="94A3B8"/>
-                </a:solidFill>
-                <a:latin typeface="Arial"/>
-              </a:defRPr>
-            </a:pPr>
-            <a:r>
-              <a:t>Paquete optimizado con R8 / ProGuard, reducción de assets y librerías nativas compiladas.</a:t>
+              <a:defRPr sz="1000">
+                <a:solidFill>
+                  <a:srgbClr val="E2E8F0"/>
+                </a:solidFill>
+                <a:latin typeface="Arial"/>
+              </a:defRPr>
+            </a:pPr>
+            <a:r>
+              <a:t>Supabase Platform • PostgreSQL 15 • PostGIS • RLS</a:t>
+            </a:r>
+            <a:br/>
+            <a:r>
+              <a:t>Seguridad a nivel de fila, funciones espaciales y almacenamiento en la nube.</a:t>
             </a:r>
           </a:p>
         </p:txBody>
@@ -4689,8 +4626,8 @@
         </p:nvSpPr>
         <p:spPr>
           <a:xfrm>
-            <a:off x="8961120" y="1828800"/>
-            <a:ext cx="2468880" cy="3017520"/>
+            <a:off x="731520" y="4526280"/>
+            <a:ext cx="10698480" cy="822960"/>
           </a:xfrm>
           <a:prstGeom prst="roundRect">
             <a:avLst/>
@@ -4719,11 +4656,11 @@
           </a:fontRef>
         </p:style>
         <p:txBody>
-          <a:bodyPr rtlCol="0" anchor="ctr" wrap="square" lIns="228600" rIns="228600" tIns="182880" bIns="182880"/>
+          <a:bodyPr rtlCol="0" anchor="ctr" wrap="square" lIns="228600" rIns="228600" tIns="109728"/>
           <a:lstStyle/>
           <a:p>
             <a:pPr algn="ctr">
-              <a:defRPr sz="3600" b="1">
+              <a:defRPr sz="1150" b="1">
                 <a:solidFill>
                   <a:srgbClr val="8B5CF6"/>
                 </a:solidFill>
@@ -4731,39 +4668,27 @@
               </a:defRPr>
             </a:pPr>
             <a:r>
-              <a:t>100%</a:t>
+              <a:t>INTELIGENCIA ARTIFICIAL</a:t>
             </a:r>
           </a:p>
           <a:p>
             <a:pPr>
               <a:spcBef>
-                <a:spcPts val="400"/>
+                <a:spcPts val="200"/>
               </a:spcBef>
-              <a:defRPr sz="1300" b="1">
-                <a:solidFill>
-                  <a:srgbClr val="FFFFFF"/>
-                </a:solidFill>
-                <a:latin typeface="Arial"/>
-              </a:defRPr>
-            </a:pPr>
-            <a:r>
-              <a:t>Tasa Éxito en Campo</a:t>
-            </a:r>
-          </a:p>
-          <a:p>
-            <a:pPr>
-              <a:spcBef>
-                <a:spcPts val="600"/>
-              </a:spcBef>
-              <a:defRPr sz="1100">
-                <a:solidFill>
-                  <a:srgbClr val="94A3B8"/>
-                </a:solidFill>
-                <a:latin typeface="Arial"/>
-              </a:defRPr>
-            </a:pPr>
-            <a:r>
-              <a:t>Resolución correcta de los casos de prueba (botella PET, cartón, pilas y voluminosos) en Villa del Rosario y Matorrales.</a:t>
+              <a:defRPr sz="1000">
+                <a:solidFill>
+                  <a:srgbClr val="E2E8F0"/>
+                </a:solidFill>
+                <a:latin typeface="Arial"/>
+              </a:defRPr>
+            </a:pPr>
+            <a:r>
+              <a:t>Google Gemini 1.5 Flash (Visión y Lenguaje Natural)</a:t>
+            </a:r>
+            <a:br/>
+            <a:r>
+              <a:t>Inferencia multimodal en tiempo real vía Edge Functions en Deno.</a:t>
             </a:r>
           </a:p>
         </p:txBody>
@@ -4776,8 +4701,8 @@
         </p:nvSpPr>
         <p:spPr>
           <a:xfrm>
-            <a:off x="731520" y="5074920"/>
-            <a:ext cx="10698480" cy="1280160"/>
+            <a:off x="731520" y="5440680"/>
+            <a:ext cx="10698480" cy="822960"/>
           </a:xfrm>
           <a:prstGeom prst="roundRect">
             <a:avLst/>
@@ -4785,9 +4710,9 @@
           <a:solidFill>
             <a:srgbClr val="1E293B"/>
           </a:solidFill>
-          <a:ln w="12700">
+          <a:ln w="19050">
             <a:solidFill>
-              <a:srgbClr val="06B6D4"/>
+              <a:srgbClr val="3B82F6"/>
             </a:solidFill>
           </a:ln>
         </p:spPr>
@@ -4806,27 +4731,27 @@
           </a:fontRef>
         </p:style>
         <p:txBody>
-          <a:bodyPr rtlCol="0" anchor="ctr" wrap="square" lIns="274320" tIns="164592"/>
+          <a:bodyPr rtlCol="0" anchor="ctr" wrap="square" lIns="228600" rIns="228600" tIns="109728"/>
           <a:lstStyle/>
           <a:p>
             <a:pPr algn="ctr">
-              <a:defRPr sz="1100" b="1">
-                <a:solidFill>
-                  <a:srgbClr val="06B6D4"/>
-                </a:solidFill>
-                <a:latin typeface="Arial"/>
-              </a:defRPr>
-            </a:pPr>
-            <a:r>
-              <a:t>🛡️ COBERTURA DE PRUEBAS AUTOMATIZADAS:</a:t>
+              <a:defRPr sz="1150" b="1">
+                <a:solidFill>
+                  <a:srgbClr val="3B82F6"/>
+                </a:solidFill>
+                <a:latin typeface="Arial"/>
+              </a:defRPr>
+            </a:pPr>
+            <a:r>
+              <a:t>HERRAMIENTAS ADICIONALES</a:t>
             </a:r>
           </a:p>
           <a:p>
             <a:pPr>
               <a:spcBef>
-                <a:spcPts val="400"/>
+                <a:spcPts val="200"/>
               </a:spcBef>
-              <a:defRPr sz="1100">
+              <a:defRPr sz="1000">
                 <a:solidFill>
                   <a:srgbClr val="E2E8F0"/>
                 </a:solidFill>
@@ -4834,7 +4759,11 @@
               </a:defRPr>
             </a:pPr>
             <a:r>
-              <a:t>Pruebas unitarias en ViewModel (StateFlow), tests de integración de API REST con Retrofit, validación de schemas JSON en Edge Functions y simulación de escenarios de conectividad intermitente garantizando tolerancia a fallos.</a:t>
+              <a:t>Google Maps Intent • Deno Runtime • GitHub Actions • Vercel</a:t>
+            </a:r>
+            <a:br/>
+            <a:r>
+              <a:t>Integración continua, ruteo por GPS y despliegue automatizado.</a:t>
             </a:r>
           </a:p>
         </p:txBody>
@@ -4908,7 +4837,7 @@
         </p:nvSpPr>
         <p:spPr>
           <a:xfrm>
-            <a:off x="731520" y="411480"/>
+            <a:off x="731520" y="384048"/>
             <a:ext cx="3474720" cy="347472"/>
           </a:xfrm>
           <a:prstGeom prst="roundRect">
@@ -4948,7 +4877,7 @@
               </a:defRPr>
             </a:pPr>
             <a:r>
-              <a:t>11. EVOLUCIÓN Y ROADMAP</a:t>
+              <a:t>11. EVOLUCIÓN</a:t>
             </a:r>
           </a:p>
         </p:txBody>
@@ -4969,7 +4898,7 @@
         </p:blipFill>
         <p:spPr>
           <a:xfrm>
-            <a:off x="11064240" y="365760"/>
+            <a:off x="11064240" y="347472"/>
             <a:ext cx="594360" cy="594360"/>
           </a:xfrm>
           <a:prstGeom prst="rect">
@@ -4985,8 +4914,8 @@
         </p:nvSpPr>
         <p:spPr>
           <a:xfrm>
-            <a:off x="731520" y="777240"/>
-            <a:ext cx="10515600" cy="731520"/>
+            <a:off x="731520" y="749808"/>
+            <a:ext cx="10515600" cy="777240"/>
           </a:xfrm>
           <a:prstGeom prst="rect">
             <a:avLst/>
@@ -5000,7 +4929,7 @@
           <a:lstStyle/>
           <a:p>
             <a:pPr>
-              <a:defRPr sz="2600" b="1">
+              <a:defRPr sz="2500" b="1">
                 <a:solidFill>
                   <a:srgbClr val="FFFFFF"/>
                 </a:solidFill>
@@ -5008,13 +4937,13 @@
               </a:defRPr>
             </a:pPr>
             <a:r>
-              <a:t>De Proyecto Integrador a Plataforma Regional</a:t>
+              <a:t>Roadmap: “EcoMapa Continúa Evolucionando”</a:t>
             </a:r>
           </a:p>
           <a:p>
             <a:pPr>
               <a:spcBef>
-                <a:spcPts val="400"/>
+                <a:spcPts val="300"/>
               </a:spcBef>
               <a:defRPr sz="1300">
                 <a:solidFill>
@@ -5024,7 +4953,7 @@
               </a:defRPr>
             </a:pPr>
             <a:r>
-              <a:t>Hitos operativos alcanzados en la V2.1 y plan de expansión estratégica para la Fase 3</a:t>
+              <a:t>El proyecto fue desarrollado como una solución consolidada con proyección futura</a:t>
             </a:r>
           </a:p>
         </p:txBody>
@@ -5037,8 +4966,8 @@
         </p:nvSpPr>
         <p:spPr>
           <a:xfrm>
-            <a:off x="731520" y="1828800"/>
-            <a:ext cx="5120640" cy="4480560"/>
+            <a:off x="731520" y="1783080"/>
+            <a:ext cx="5120640" cy="4389120"/>
           </a:xfrm>
           <a:prstGeom prst="roundRect">
             <a:avLst/>
@@ -5079,13 +5008,13 @@
               </a:defRPr>
             </a:pPr>
             <a:r>
-              <a:t>✅ VERSIÓN 2.1 — CONSOLIDADA Y OPERATIVA</a:t>
+              <a:t>✅ CONSOLIDADO EN LA VERSIÓN 2.1</a:t>
             </a:r>
           </a:p>
           <a:p>
             <a:pPr>
               <a:spcBef>
-                <a:spcPts val="600"/>
+                <a:spcPts val="800"/>
               </a:spcBef>
               <a:defRPr sz="1100">
                 <a:solidFill>
@@ -5095,13 +5024,13 @@
               </a:defRPr>
             </a:pPr>
             <a:r>
-              <a:t>• Migración completa a IA Multimodal Google Gemini.</a:t>
+              <a:t>• Reconocimiento de residuos por imágenes con Google Gemini.</a:t>
             </a:r>
           </a:p>
           <a:p>
             <a:pPr>
               <a:spcBef>
-                <a:spcPts val="600"/>
+                <a:spcPts val="800"/>
               </a:spcBef>
               <a:defRPr sz="1100">
                 <a:solidFill>
@@ -5111,13 +5040,13 @@
               </a:defRPr>
             </a:pPr>
             <a:r>
-              <a:t>• Reconocimiento de cámara con flujo de navegación Maps.</a:t>
+              <a:t>• Navegación GPS Turn-by-Turn directa a Google Maps.</a:t>
             </a:r>
           </a:p>
           <a:p>
             <a:pPr>
               <a:spcBef>
-                <a:spcPts val="600"/>
+                <a:spcPts val="800"/>
               </a:spcBef>
               <a:defRPr sz="1100">
                 <a:solidFill>
@@ -5133,7 +5062,7 @@
           <a:p>
             <a:pPr>
               <a:spcBef>
-                <a:spcPts val="600"/>
+                <a:spcPts val="800"/>
               </a:spcBef>
               <a:defRPr sz="1100">
                 <a:solidFill>
@@ -5143,13 +5072,13 @@
               </a:defRPr>
             </a:pPr>
             <a:r>
-              <a:t>• Red real desplegada en Villa del Rosario y Matorrales.</a:t>
+              <a:t>• Puntos de reciclaje reales activos en Matorrales y Villa del Rosario.</a:t>
             </a:r>
           </a:p>
           <a:p>
             <a:pPr>
               <a:spcBef>
-                <a:spcPts val="600"/>
+                <a:spcPts val="800"/>
               </a:spcBef>
               <a:defRPr sz="1100">
                 <a:solidFill>
@@ -5159,13 +5088,13 @@
               </a:defRPr>
             </a:pPr>
             <a:r>
-              <a:t>• Pines con badges tipográficos de residuos en el mapa.</a:t>
+              <a:t>• Badges tipográficos dinámicos de residuos sobre el mapa.</a:t>
             </a:r>
           </a:p>
           <a:p>
             <a:pPr>
               <a:spcBef>
-                <a:spcPts val="600"/>
+                <a:spcPts val="800"/>
               </a:spcBef>
               <a:defRPr sz="1100">
                 <a:solidFill>
@@ -5175,39 +5104,7 @@
               </a:defRPr>
             </a:pPr>
             <a:r>
-              <a:t>• Rediseño de icono transparente y splash screen Android 12+.</a:t>
-            </a:r>
-          </a:p>
-          <a:p>
-            <a:pPr>
-              <a:spcBef>
-                <a:spcPts val="600"/>
-              </a:spcBef>
-              <a:defRPr sz="1100">
-                <a:solidFill>
-                  <a:srgbClr val="E2E8F0"/>
-                </a:solidFill>
-                <a:latin typeface="Arial"/>
-              </a:defRPr>
-            </a:pPr>
-            <a:r>
-              <a:t>• APK compilada e instalable (EcoMapa-v2.1-Demo.apk).</a:t>
-            </a:r>
-          </a:p>
-          <a:p>
-            <a:pPr>
-              <a:spcBef>
-                <a:spcPts val="600"/>
-              </a:spcBef>
-              <a:defRPr sz="1100">
-                <a:solidFill>
-                  <a:srgbClr val="E2E8F0"/>
-                </a:solidFill>
-                <a:latin typeface="Arial"/>
-              </a:defRPr>
-            </a:pPr>
-            <a:r>
-              <a:t>• Carpeta de documentación de 31 páginas según pautas PIN 2026.</a:t>
+              <a:t>• APK compilada e instalable para smartphones Android.</a:t>
             </a:r>
           </a:p>
         </p:txBody>
@@ -5220,8 +5117,8 @@
         </p:nvSpPr>
         <p:spPr>
           <a:xfrm>
-            <a:off x="6217920" y="1828800"/>
-            <a:ext cx="5212080" cy="4480560"/>
+            <a:off x="6217920" y="1783080"/>
+            <a:ext cx="5212080" cy="4389120"/>
           </a:xfrm>
           <a:prstGeom prst="roundRect">
             <a:avLst/>
@@ -5262,7 +5159,7 @@
               </a:defRPr>
             </a:pPr>
             <a:r>
-              <a:t>🚀 FASE 3 — ESCALAMIENTO E IOT REGIONAL</a:t>
+              <a:t>🚀 PRÓXIMOS PASOS Y EXPANSIÓN</a:t>
             </a:r>
           </a:p>
           <a:p>
@@ -5278,7 +5175,7 @@
               </a:defRPr>
             </a:pPr>
             <a:r>
-              <a:t>• Sensores ultrasónicos de llenado con LoRaWAN en contenedores.</a:t>
+              <a:t>• Estadísticas avanzadas e insights de generación de residuos por zona.</a:t>
             </a:r>
           </a:p>
           <a:p>
@@ -5294,7 +5191,7 @@
               </a:defRPr>
             </a:pPr>
             <a:r>
-              <a:t>• Ruteo dinámico predictivo para camiones recolectores.</a:t>
+              <a:t>• Sensores IoT ultrasónicos de llenado con LoRaWAN en contenedores.</a:t>
             </a:r>
           </a:p>
           <a:p>
@@ -5310,7 +5207,7 @@
               </a:defRPr>
             </a:pPr>
             <a:r>
-              <a:t>• Celdas de carga y pesaje automático en tolva de descarga.</a:t>
+              <a:t>• Ranking ecológico comunitario y torneos intercolegiales.</a:t>
             </a:r>
           </a:p>
           <a:p>
@@ -5326,7 +5223,7 @@
               </a:defRPr>
             </a:pPr>
             <a:r>
-              <a:t>• Expansión del despliegue a Luque, Calchín, Tránsito y Arroyito.</a:t>
+              <a:t>• APIs personalizadas para reportes de sustentabilidad corporativa ESG.</a:t>
             </a:r>
           </a:p>
           <a:p>
@@ -5342,23 +5239,7 @@
               </a:defRPr>
             </a:pPr>
             <a:r>
-              <a:t>• Integración con billeteras digitales locales para bonificación de tasas municipales.</a:t>
-            </a:r>
-          </a:p>
-          <a:p>
-            <a:pPr>
-              <a:spcBef>
-                <a:spcPts val="800"/>
-              </a:spcBef>
-              <a:defRPr sz="1100">
-                <a:solidFill>
-                  <a:srgbClr val="E2E8F0"/>
-                </a:solidFill>
-                <a:latin typeface="Arial"/>
-              </a:defRPr>
-            </a:pPr>
-            <a:r>
-              <a:t>• Portal de datos abiertos (Open Data) para investigación universitaria.</a:t>
+              <a:t>• Nuevos sistemas de canje de recompensas y billeteras digitales locales.</a:t>
             </a:r>
           </a:p>
         </p:txBody>
@@ -5495,7 +5376,7 @@
           <a:lstStyle/>
           <a:p>
             <a:pPr algn="ctr">
-              <a:defRPr sz="3200" b="1">
+              <a:defRPr sz="4000" b="1">
                 <a:solidFill>
                   <a:srgbClr val="FFFFFF"/>
                 </a:solidFill>
@@ -5503,7 +5384,7 @@
               </a:defRPr>
             </a:pPr>
             <a:r>
-              <a:t>Transformando el Cuidado Ambiental con Inteligencia y Cercanía</a:t>
+              <a:t>¡MUCHAS GRACIAS!</a:t>
             </a:r>
           </a:p>
           <a:p>
@@ -5511,7 +5392,7 @@
               <a:spcBef>
                 <a:spcPts val="800"/>
               </a:spcBef>
-              <a:defRPr sz="2200" b="1">
+              <a:defRPr sz="2000" b="1">
                 <a:solidFill>
                   <a:srgbClr val="34D399"/>
                 </a:solidFill>
@@ -5519,7 +5400,7 @@
               </a:defRPr>
             </a:pPr>
             <a:r>
-              <a:t>¡Muchas Gracias por su Atención!</a:t>
+              <a:t>Triple Impacto: Social • Ambiental • Tecnológico</a:t>
             </a:r>
           </a:p>
         </p:txBody>
@@ -5533,7 +5414,7 @@
         <p:spPr>
           <a:xfrm>
             <a:off x="1645920" y="4114800"/>
-            <a:ext cx="8869680" cy="2194560"/>
+            <a:ext cx="8869680" cy="2148840"/>
           </a:xfrm>
           <a:prstGeom prst="roundRect">
             <a:avLst/>
@@ -5582,7 +5463,7 @@
               <a:spcBef>
                 <a:spcPts val="300"/>
               </a:spcBef>
-              <a:defRPr sz="1200" b="1">
+              <a:defRPr sz="1250" b="1">
                 <a:solidFill>
                   <a:srgbClr val="FFFFFF"/>
                 </a:solidFill>
@@ -5590,7 +5471,7 @@
               </a:defRPr>
             </a:pPr>
             <a:r>
-              <a:t>Desarrolladores: Naomi Ailín Soria Jofré  —  Gerardo Jesús Romero</a:t>
+              <a:t>Romero Gerardo  y  Soria Naomi</a:t>
             </a:r>
           </a:p>
           <a:p>
@@ -5622,7 +5503,7 @@
               </a:defRPr>
             </a:pPr>
             <a:r>
-              <a:t>📦 APK Instalable: EcoMapa-v2.1-Demo.apk (21.8 MB)  •  🌐 GitHub: github.com/RomeroGerardo/EcoMapaLandinPage</a:t>
+              <a:t>🌐 Repositorio GitHub: github.com/RomeroGerardo/EcoMapaLandinPage</a:t>
             </a:r>
           </a:p>
         </p:txBody>
@@ -5696,7 +5577,7 @@
         </p:nvSpPr>
         <p:spPr>
           <a:xfrm>
-            <a:off x="731520" y="411480"/>
+            <a:off x="731520" y="384048"/>
             <a:ext cx="3474720" cy="347472"/>
           </a:xfrm>
           <a:prstGeom prst="roundRect">
@@ -5736,7 +5617,7 @@
               </a:defRPr>
             </a:pPr>
             <a:r>
-              <a:t>01. DIAGNÓSTICO DEL PROBLEMA</a:t>
+              <a:t>01. EL PROBLEMA</a:t>
             </a:r>
           </a:p>
         </p:txBody>
@@ -5757,7 +5638,7 @@
         </p:blipFill>
         <p:spPr>
           <a:xfrm>
-            <a:off x="11064240" y="365760"/>
+            <a:off x="11064240" y="347472"/>
             <a:ext cx="594360" cy="594360"/>
           </a:xfrm>
           <a:prstGeom prst="rect">
@@ -5773,8 +5654,8 @@
         </p:nvSpPr>
         <p:spPr>
           <a:xfrm>
-            <a:off x="731520" y="777240"/>
-            <a:ext cx="10515600" cy="731520"/>
+            <a:off x="731520" y="749808"/>
+            <a:ext cx="10515600" cy="777240"/>
           </a:xfrm>
           <a:prstGeom prst="rect">
             <a:avLst/>
@@ -5788,7 +5669,7 @@
           <a:lstStyle/>
           <a:p>
             <a:pPr>
-              <a:defRPr sz="2600" b="1">
+              <a:defRPr sz="2500" b="1">
                 <a:solidFill>
                   <a:srgbClr val="FFFFFF"/>
                 </a:solidFill>
@@ -5796,13 +5677,13 @@
               </a:defRPr>
             </a:pPr>
             <a:r>
-              <a:t>La Brecha Crítica en la Separación en Origen</a:t>
+              <a:t>La Barrera Ciudadana en la Separación en Origen</a:t>
             </a:r>
           </a:p>
           <a:p>
             <a:pPr>
               <a:spcBef>
-                <a:spcPts val="400"/>
+                <a:spcPts val="300"/>
               </a:spcBef>
               <a:defRPr sz="1300">
                 <a:solidFill>
@@ -5812,7 +5693,7 @@
               </a:defRPr>
             </a:pPr>
             <a:r>
-              <a:t>Por qué los programas tradicionales de reciclaje fracasan en las ciudades del interior</a:t>
+              <a:t>Por qué los programas tradicionales de reciclaje encuentran dificultades para escalar</a:t>
             </a:r>
           </a:p>
         </p:txBody>
@@ -5825,8 +5706,8 @@
         </p:nvSpPr>
         <p:spPr>
           <a:xfrm>
-            <a:off x="731520" y="1828800"/>
-            <a:ext cx="3383280" cy="3108960"/>
+            <a:off x="731520" y="1783080"/>
+            <a:ext cx="5120640" cy="3200400"/>
           </a:xfrm>
           <a:prstGeom prst="roundRect">
             <a:avLst/>
@@ -5855,11 +5736,11 @@
           </a:fontRef>
         </p:style>
         <p:txBody>
-          <a:bodyPr rtlCol="0" anchor="ctr" wrap="square" lIns="228600" rIns="228600" tIns="182880" bIns="182880"/>
+          <a:bodyPr rtlCol="0" anchor="ctr" wrap="square" lIns="274320" rIns="274320" tIns="228600"/>
           <a:lstStyle/>
           <a:p>
             <a:pPr algn="ctr">
-              <a:defRPr sz="3600" b="1">
+              <a:defRPr sz="1300" b="1">
                 <a:solidFill>
                   <a:srgbClr val="F43F5E"/>
                 </a:solidFill>
@@ -5867,39 +5748,55 @@
               </a:defRPr>
             </a:pPr>
             <a:r>
-              <a:t>54%</a:t>
+              <a:t>DESCONOCIMIENTO Y WISHCYCLING</a:t>
             </a:r>
           </a:p>
           <a:p>
             <a:pPr>
               <a:spcBef>
-                <a:spcPts val="400"/>
+                <a:spcPts val="800"/>
               </a:spcBef>
-              <a:defRPr sz="1300" b="1">
-                <a:solidFill>
-                  <a:srgbClr val="FFFFFF"/>
-                </a:solidFill>
-                <a:latin typeface="Arial"/>
-              </a:defRPr>
-            </a:pPr>
-            <a:r>
-              <a:t>Desconocimiento y Wishcycling</a:t>
+              <a:defRPr sz="1100">
+                <a:solidFill>
+                  <a:srgbClr val="E2E8F0"/>
+                </a:solidFill>
+                <a:latin typeface="Arial"/>
+              </a:defRPr>
+            </a:pPr>
+            <a:r>
+              <a:t>• Más del 50% de las personas admite no saber cómo clasificar correctamente sus residuos.</a:t>
             </a:r>
           </a:p>
           <a:p>
             <a:pPr>
               <a:spcBef>
-                <a:spcPts val="600"/>
+                <a:spcPts val="800"/>
               </a:spcBef>
               <a:defRPr sz="1100">
                 <a:solidFill>
-                  <a:srgbClr val="94A3B8"/>
-                </a:solidFill>
-                <a:latin typeface="Arial"/>
-              </a:defRPr>
-            </a:pPr>
-            <a:r>
-              <a:t>Más del 54% de los vecinos declara tener dudas sobre cómo clasificar residuos específicos (plásticos mezclados, tetrabriks, aerosoles). Esto produce 'Wishcycling': arrojar residuos incorrectos que contaminan lotes enteros de reciclables.</a:t>
+                  <a:srgbClr val="E2E8F0"/>
+                </a:solidFill>
+                <a:latin typeface="Arial"/>
+              </a:defRPr>
+            </a:pPr>
+            <a:r>
+              <a:t>• Esto produce el fenómeno denominado 'Wishcycling' (reciclaje ilusorio): desechar residuos creyendo erróneamente que son reciclables.</a:t>
+            </a:r>
+          </a:p>
+          <a:p>
+            <a:pPr>
+              <a:spcBef>
+                <a:spcPts val="800"/>
+              </a:spcBef>
+              <a:defRPr sz="1100">
+                <a:solidFill>
+                  <a:srgbClr val="E2E8F0"/>
+                </a:solidFill>
+                <a:latin typeface="Arial"/>
+              </a:defRPr>
+            </a:pPr>
+            <a:r>
+              <a:t>• Como consecuencia, se contaminan los lotes limpios en los puntos verdes, haciendo inviable su posterior tratamiento y venta.</a:t>
             </a:r>
           </a:p>
         </p:txBody>
@@ -5912,8 +5809,8 @@
         </p:nvSpPr>
         <p:spPr>
           <a:xfrm>
-            <a:off x="4389120" y="1828800"/>
-            <a:ext cx="3383280" cy="3108960"/>
+            <a:off x="6217920" y="1783080"/>
+            <a:ext cx="5212080" cy="3200400"/>
           </a:xfrm>
           <a:prstGeom prst="roundRect">
             <a:avLst/>
@@ -5942,11 +5839,11 @@
           </a:fontRef>
         </p:style>
         <p:txBody>
-          <a:bodyPr rtlCol="0" anchor="ctr" wrap="square" lIns="228600" rIns="228600" tIns="182880" bIns="182880"/>
+          <a:bodyPr rtlCol="0" anchor="ctr" wrap="square" lIns="274320" rIns="274320" tIns="228600"/>
           <a:lstStyle/>
           <a:p>
             <a:pPr algn="ctr">
-              <a:defRPr sz="3600" b="1">
+              <a:defRPr sz="1300" b="1">
                 <a:solidFill>
                   <a:srgbClr val="F59E0B"/>
                 </a:solidFill>
@@ -5954,39 +5851,55 @@
               </a:defRPr>
             </a:pPr>
             <a:r>
-              <a:t>&lt; 4%</a:t>
+              <a:t>¿SABÍAS QUE?</a:t>
             </a:r>
           </a:p>
           <a:p>
             <a:pPr>
               <a:spcBef>
-                <a:spcPts val="400"/>
+                <a:spcPts val="800"/>
               </a:spcBef>
-              <a:defRPr sz="1300" b="1">
-                <a:solidFill>
-                  <a:srgbClr val="FFFFFF"/>
-                </a:solidFill>
-                <a:latin typeface="Arial"/>
-              </a:defRPr>
-            </a:pPr>
-            <a:r>
-              <a:t>Tasa Real en la Región</a:t>
+              <a:defRPr sz="1100">
+                <a:solidFill>
+                  <a:srgbClr val="E2E8F0"/>
+                </a:solidFill>
+                <a:latin typeface="Arial"/>
+              </a:defRPr>
+            </a:pPr>
+            <a:r>
+              <a:t>• 9% — Solo el 9% del plástico generado se recicla exitosamente a nivel mundial.</a:t>
             </a:r>
           </a:p>
           <a:p>
             <a:pPr>
               <a:spcBef>
-                <a:spcPts val="600"/>
+                <a:spcPts val="800"/>
               </a:spcBef>
               <a:defRPr sz="1100">
                 <a:solidFill>
-                  <a:srgbClr val="94A3B8"/>
-                </a:solidFill>
-                <a:latin typeface="Arial"/>
-              </a:defRPr>
-            </a:pPr>
-            <a:r>
-              <a:t>En los municipios del departamento Río Segundo y el interior de Córdoba, la tasa efectiva de reciclaje no supera el 3.8% (frente al 9% promedio global). Más de 1.800 toneladas mensuales terminan en vertederos a cielo abierto.</a:t>
+                  <a:srgbClr val="E2E8F0"/>
+                </a:solidFill>
+                <a:latin typeface="Arial"/>
+              </a:defRPr>
+            </a:pPr>
+            <a:r>
+              <a:t>• &lt; 4% — En nuestra región y en el interior de Córdoba, la tasa efectiva de reciclaje apenas alcanza el 4%.</a:t>
+            </a:r>
+          </a:p>
+          <a:p>
+            <a:pPr>
+              <a:spcBef>
+                <a:spcPts val="800"/>
+              </a:spcBef>
+              <a:defRPr sz="1100">
+                <a:solidFill>
+                  <a:srgbClr val="E2E8F0"/>
+                </a:solidFill>
+                <a:latin typeface="Arial"/>
+              </a:defRPr>
+            </a:pPr>
+            <a:r>
+              <a:t>• 100% — El 100% de esta problemática puede mitigarse con información precisa, asistencia inmediata y geolocalización accesible.</a:t>
             </a:r>
           </a:p>
         </p:txBody>
@@ -5999,8 +5912,8 @@
         </p:nvSpPr>
         <p:spPr>
           <a:xfrm>
-            <a:off x="8046720" y="1828800"/>
-            <a:ext cx="3383280" cy="3108960"/>
+            <a:off x="731520" y="5166360"/>
+            <a:ext cx="10698480" cy="1188720"/>
           </a:xfrm>
           <a:prstGeom prst="roundRect">
             <a:avLst/>
@@ -6008,9 +5921,9 @@
           <a:solidFill>
             <a:srgbClr val="1E293B"/>
           </a:solidFill>
-          <a:ln w="19050">
+          <a:ln w="12700">
             <a:solidFill>
-              <a:srgbClr val="06B6D4"/>
+              <a:srgbClr val="334155"/>
             </a:solidFill>
           </a:ln>
         </p:spPr>
@@ -6029,106 +5942,19 @@
           </a:fontRef>
         </p:style>
         <p:txBody>
-          <a:bodyPr rtlCol="0" anchor="ctr" wrap="square" lIns="228600" rIns="228600" tIns="182880" bIns="182880"/>
-          <a:lstStyle/>
-          <a:p>
-            <a:pPr algn="ctr">
-              <a:defRPr sz="3600" b="1">
-                <a:solidFill>
-                  <a:srgbClr val="06B6D4"/>
-                </a:solidFill>
-                <a:latin typeface="Arial"/>
-              </a:defRPr>
-            </a:pPr>
-            <a:r>
-              <a:t>80%</a:t>
-            </a:r>
-          </a:p>
-          <a:p>
-            <a:pPr>
-              <a:spcBef>
-                <a:spcPts val="400"/>
-              </a:spcBef>
-              <a:defRPr sz="1300" b="1">
-                <a:solidFill>
-                  <a:srgbClr val="FFFFFF"/>
-                </a:solidFill>
-                <a:latin typeface="Arial"/>
-              </a:defRPr>
-            </a:pPr>
-            <a:r>
-              <a:t>Fuga de Residuos Voluminosos</a:t>
-            </a:r>
-          </a:p>
-          <a:p>
-            <a:pPr>
-              <a:spcBef>
-                <a:spcPts val="600"/>
-              </a:spcBef>
-              <a:defRPr sz="1100">
-                <a:solidFill>
-                  <a:srgbClr val="94A3B8"/>
-                </a:solidFill>
-                <a:latin typeface="Arial"/>
-              </a:defRPr>
-            </a:pPr>
-            <a:r>
-              <a:t>Colchones, muebles, escombros, chatarra y residuos electrónicos (RAEE) son descartados clandestinamente en baldíos y cunetas debido a la falta de un canal ágil y predecible de recolección municipal puerta a puerta.</a:t>
-            </a:r>
-          </a:p>
-        </p:txBody>
-      </p:sp>
-      <p:sp>
-        <p:nvSpPr>
-          <p:cNvPr id="9" name="Rounded Rectangle 8"/>
-          <p:cNvSpPr/>
-          <p:nvPr/>
-        </p:nvSpPr>
-        <p:spPr>
-          <a:xfrm>
-            <a:off x="731520" y="5166360"/>
-            <a:ext cx="10698480" cy="1188720"/>
-          </a:xfrm>
-          <a:prstGeom prst="roundRect">
-            <a:avLst/>
-          </a:prstGeom>
-          <a:solidFill>
-            <a:srgbClr val="1E293B"/>
-          </a:solidFill>
-          <a:ln w="12700">
-            <a:solidFill>
-              <a:srgbClr val="F43F5E"/>
-            </a:solidFill>
-          </a:ln>
-        </p:spPr>
-        <p:style>
-          <a:lnRef idx="1">
-            <a:schemeClr val="accent1"/>
-          </a:lnRef>
-          <a:fillRef idx="3">
-            <a:schemeClr val="accent1"/>
-          </a:fillRef>
-          <a:effectRef idx="2">
-            <a:schemeClr val="accent1"/>
-          </a:effectRef>
-          <a:fontRef idx="minor">
-            <a:schemeClr val="lt1"/>
-          </a:fontRef>
-        </p:style>
-        <p:txBody>
-          <a:bodyPr rtlCol="0" anchor="ctr" wrap="square" lIns="274320" rIns="274320" tIns="182880"/>
+          <a:bodyPr rtlCol="0" anchor="ctr" wrap="square" lIns="274320" tIns="164592"/>
           <a:lstStyle/>
           <a:p>
             <a:pPr algn="ctr">
               <a:defRPr sz="1100" b="1">
                 <a:solidFill>
-                  <a:srgbClr val="F43F5E"/>
-                </a:solidFill>
-                <a:latin typeface="Arial"/>
-              </a:defRPr>
-            </a:pPr>
-            <a:r>
-              <a:t>💡 CONCLUSIÓN DEL DIAGNÓSTICO:</a:t>
+                  <a:srgbClr val="34D399"/>
+                </a:solidFill>
+                <a:latin typeface="Arial"/>
+              </a:defRPr>
+            </a:pPr>
+            <a:r>
+              <a:t>🌱 LA OPORTUNIDAD QUE ABORDA ECOMAPA:</a:t>
             </a:r>
           </a:p>
           <a:p>
@@ -6144,7 +5970,7 @@
               </a:defRPr>
             </a:pPr>
             <a:r>
-              <a:t>La separación en origen no falla por falta de conciencia ecológica, sino por la fricción cognitiva en el instante del descarte y la ausencia de información espacial inmediata. EcoMapa elimina esa brecha transformando la duda en acción precisa en menos de 30 segundos.</a:t>
+              <a:t>Separar no es difícil por falta de voluntad, sino por la falta de información clara y puntos visibles. EcoMapa convierte una duda cotidiana en una acción concreta, geolocalizada y medible.</a:t>
             </a:r>
           </a:p>
         </p:txBody>
@@ -6218,14 +6044,14 @@
         </p:nvSpPr>
         <p:spPr>
           <a:xfrm>
-            <a:off x="731520" y="411480"/>
+            <a:off x="731520" y="384048"/>
             <a:ext cx="3474720" cy="347472"/>
           </a:xfrm>
           <a:prstGeom prst="roundRect">
             <a:avLst/>
           </a:prstGeom>
           <a:solidFill>
-            <a:srgbClr val="10B981"/>
+            <a:srgbClr val="06B6D4"/>
           </a:solidFill>
           <a:ln>
             <a:noFill/>
@@ -6258,7 +6084,7 @@
               </a:defRPr>
             </a:pPr>
             <a:r>
-              <a:t>02. PROPUESTA DE VALOR</a:t>
+              <a:t>02. AUDIENCIA</a:t>
             </a:r>
           </a:p>
         </p:txBody>
@@ -6279,7 +6105,7 @@
         </p:blipFill>
         <p:spPr>
           <a:xfrm>
-            <a:off x="11064240" y="365760"/>
+            <a:off x="11064240" y="347472"/>
             <a:ext cx="594360" cy="594360"/>
           </a:xfrm>
           <a:prstGeom prst="rect">
@@ -6295,8 +6121,8 @@
         </p:nvSpPr>
         <p:spPr>
           <a:xfrm>
-            <a:off x="731520" y="777240"/>
-            <a:ext cx="10515600" cy="731520"/>
+            <a:off x="731520" y="749808"/>
+            <a:ext cx="10515600" cy="777240"/>
           </a:xfrm>
           <a:prstGeom prst="rect">
             <a:avLst/>
@@ -6310,7 +6136,7 @@
           <a:lstStyle/>
           <a:p>
             <a:pPr>
-              <a:defRPr sz="2600" b="1">
+              <a:defRPr sz="2500" b="1">
                 <a:solidFill>
                   <a:srgbClr val="FFFFFF"/>
                 </a:solidFill>
@@ -6318,13 +6144,13 @@
               </a:defRPr>
             </a:pPr>
             <a:r>
-              <a:t>Ecosistema Integral de Triple Impacto</a:t>
+              <a:t>Usuario Objetivo y Sectores Beneficiados</a:t>
             </a:r>
           </a:p>
           <a:p>
             <a:pPr>
               <a:spcBef>
-                <a:spcPts val="400"/>
+                <a:spcPts val="300"/>
               </a:spcBef>
               <a:defRPr sz="1300">
                 <a:solidFill>
@@ -6334,7 +6160,7 @@
               </a:defRPr>
             </a:pPr>
             <a:r>
-              <a:t>Conectando al ciudadano, al municipio y a la industria en un único flujo de economía circular</a:t>
+              <a:t>EcoMapa está orientado a diferentes actores de la comunidad para mejorar la gestión ambiental</a:t>
             </a:r>
           </a:p>
         </p:txBody>
@@ -6347,8 +6173,8 @@
         </p:nvSpPr>
         <p:spPr>
           <a:xfrm>
-            <a:off x="731520" y="1828800"/>
-            <a:ext cx="3383280" cy="4480560"/>
+            <a:off x="731520" y="1783080"/>
+            <a:ext cx="2011680" cy="3383280"/>
           </a:xfrm>
           <a:prstGeom prst="roundRect">
             <a:avLst/>
@@ -6377,11 +6203,11 @@
           </a:fontRef>
         </p:style>
         <p:txBody>
-          <a:bodyPr rtlCol="0" anchor="ctr" wrap="square" lIns="228600" rIns="228600" tIns="228600"/>
+          <a:bodyPr rtlCol="0" anchor="ctr" wrap="square" lIns="164592" rIns="164592" tIns="201168"/>
           <a:lstStyle/>
           <a:p>
             <a:pPr algn="ctr">
-              <a:defRPr sz="1300" b="1">
+              <a:defRPr sz="1200" b="1">
                 <a:solidFill>
                   <a:srgbClr val="10B981"/>
                 </a:solidFill>
@@ -6389,23 +6215,7 @@
               </a:defRPr>
             </a:pPr>
             <a:r>
-              <a:t>APP MÓVIL CIUDADANA</a:t>
-            </a:r>
-          </a:p>
-          <a:p>
-            <a:pPr>
-              <a:spcBef>
-                <a:spcPts val="300"/>
-              </a:spcBef>
-              <a:defRPr sz="1050">
-                <a:solidFill>
-                  <a:srgbClr val="94A3B8"/>
-                </a:solidFill>
-                <a:latin typeface="Arial"/>
-              </a:defRPr>
-            </a:pPr>
-            <a:r>
-              <a:t>Android Jetpack Compose</a:t>
+              <a:t>CIUDADANOS</a:t>
             </a:r>
           </a:p>
           <a:p>
@@ -6413,7 +6223,7 @@
               <a:spcBef>
                 <a:spcPts val="800"/>
               </a:spcBef>
-              <a:defRPr sz="1100">
+              <a:defRPr sz="1050">
                 <a:solidFill>
                   <a:srgbClr val="E2E8F0"/>
                 </a:solidFill>
@@ -6421,71 +6231,7 @@
               </a:defRPr>
             </a:pPr>
             <a:r>
-              <a:t>• Escaneo de residuos por cámara con IA Gemini.</a:t>
-            </a:r>
-          </a:p>
-          <a:p>
-            <a:pPr>
-              <a:spcBef>
-                <a:spcPts val="800"/>
-              </a:spcBef>
-              <a:defRPr sz="1100">
-                <a:solidFill>
-                  <a:srgbClr val="E2E8F0"/>
-                </a:solidFill>
-                <a:latin typeface="Arial"/>
-              </a:defRPr>
-            </a:pPr>
-            <a:r>
-              <a:t>• Mapa interactivo con pines de alta visibilidad.</a:t>
-            </a:r>
-          </a:p>
-          <a:p>
-            <a:pPr>
-              <a:spcBef>
-                <a:spcPts val="800"/>
-              </a:spcBef>
-              <a:defRPr sz="1100">
-                <a:solidFill>
-                  <a:srgbClr val="E2E8F0"/>
-                </a:solidFill>
-                <a:latin typeface="Arial"/>
-              </a:defRPr>
-            </a:pPr>
-            <a:r>
-              <a:t>• Navegación turn-by-turn en Google Maps.</a:t>
-            </a:r>
-          </a:p>
-          <a:p>
-            <a:pPr>
-              <a:spcBef>
-                <a:spcPts val="800"/>
-              </a:spcBef>
-              <a:defRPr sz="1100">
-                <a:solidFill>
-                  <a:srgbClr val="E2E8F0"/>
-                </a:solidFill>
-                <a:latin typeface="Arial"/>
-              </a:defRPr>
-            </a:pPr>
-            <a:r>
-              <a:t>• Solicitud de retiros a domicilio de voluminosos.</a:t>
-            </a:r>
-          </a:p>
-          <a:p>
-            <a:pPr>
-              <a:spcBef>
-                <a:spcPts val="800"/>
-              </a:spcBef>
-              <a:defRPr sz="1100">
-                <a:solidFill>
-                  <a:srgbClr val="E2E8F0"/>
-                </a:solidFill>
-                <a:latin typeface="Arial"/>
-              </a:defRPr>
-            </a:pPr>
-            <a:r>
-              <a:t>• Sistema de Ecopuntos y recompensas tangibles.</a:t>
+              <a:t>Vecinos que buscan reciclar fácilmente desde su teléfono móvil, clasificar dudas y encontrar puntos verdes cercanos con recompensas tangibles.</a:t>
             </a:r>
           </a:p>
         </p:txBody>
@@ -6498,8 +6244,8 @@
         </p:nvSpPr>
         <p:spPr>
           <a:xfrm>
-            <a:off x="4389120" y="1828800"/>
-            <a:ext cx="3383280" cy="4480560"/>
+            <a:off x="2926080" y="1783080"/>
+            <a:ext cx="2011680" cy="3383280"/>
           </a:xfrm>
           <a:prstGeom prst="roundRect">
             <a:avLst/>
@@ -6528,11 +6274,11 @@
           </a:fontRef>
         </p:style>
         <p:txBody>
-          <a:bodyPr rtlCol="0" anchor="ctr" wrap="square" lIns="228600" rIns="228600" tIns="228600"/>
+          <a:bodyPr rtlCol="0" anchor="ctr" wrap="square" lIns="164592" rIns="164592" tIns="201168"/>
           <a:lstStyle/>
           <a:p>
             <a:pPr algn="ctr">
-              <a:defRPr sz="1300" b="1">
+              <a:defRPr sz="1200" b="1">
                 <a:solidFill>
                   <a:srgbClr val="06B6D4"/>
                 </a:solidFill>
@@ -6540,23 +6286,7 @@
               </a:defRPr>
             </a:pPr>
             <a:r>
-              <a:t>PORTAL MUNICIPAL B2G</a:t>
-            </a:r>
-          </a:p>
-          <a:p>
-            <a:pPr>
-              <a:spcBef>
-                <a:spcPts val="300"/>
-              </a:spcBef>
-              <a:defRPr sz="1050">
-                <a:solidFill>
-                  <a:srgbClr val="94A3B8"/>
-                </a:solidFill>
-                <a:latin typeface="Arial"/>
-              </a:defRPr>
-            </a:pPr>
-            <a:r>
-              <a:t>Gestión Integral y Cuadrillas</a:t>
+              <a:t>MUNICIPIOS</a:t>
             </a:r>
           </a:p>
           <a:p>
@@ -6564,7 +6294,7 @@
               <a:spcBef>
                 <a:spcPts val="800"/>
               </a:spcBef>
-              <a:defRPr sz="1100">
+              <a:defRPr sz="1050">
                 <a:solidFill>
                   <a:srgbClr val="E2E8F0"/>
                 </a:solidFill>
@@ -6572,7 +6302,62 @@
               </a:defRPr>
             </a:pPr>
             <a:r>
-              <a:t>• Administración y monitoreo de contenedores urbanos.</a:t>
+              <a:t>Gobiernos locales y comunas que necesitan optimizar la red de puntos limpios, monitorear la recolección y acceder a métricas de impacto ambiental.</a:t>
+            </a:r>
+          </a:p>
+        </p:txBody>
+      </p:sp>
+      <p:sp>
+        <p:nvSpPr>
+          <p:cNvPr id="8" name="Rounded Rectangle 7"/>
+          <p:cNvSpPr/>
+          <p:nvPr/>
+        </p:nvSpPr>
+        <p:spPr>
+          <a:xfrm>
+            <a:off x="5120640" y="1783080"/>
+            <a:ext cx="2011680" cy="3383280"/>
+          </a:xfrm>
+          <a:prstGeom prst="roundRect">
+            <a:avLst/>
+          </a:prstGeom>
+          <a:solidFill>
+            <a:srgbClr val="1E293B"/>
+          </a:solidFill>
+          <a:ln w="19050">
+            <a:solidFill>
+              <a:srgbClr val="F59E0B"/>
+            </a:solidFill>
+          </a:ln>
+        </p:spPr>
+        <p:style>
+          <a:lnRef idx="1">
+            <a:schemeClr val="accent1"/>
+          </a:lnRef>
+          <a:fillRef idx="3">
+            <a:schemeClr val="accent1"/>
+          </a:fillRef>
+          <a:effectRef idx="2">
+            <a:schemeClr val="accent1"/>
+          </a:effectRef>
+          <a:fontRef idx="minor">
+            <a:schemeClr val="lt1"/>
+          </a:fontRef>
+        </p:style>
+        <p:txBody>
+          <a:bodyPr rtlCol="0" anchor="ctr" wrap="square" lIns="164592" rIns="164592" tIns="201168"/>
+          <a:lstStyle/>
+          <a:p>
+            <a:pPr algn="ctr">
+              <a:defRPr sz="1200" b="1">
+                <a:solidFill>
+                  <a:srgbClr val="F59E0B"/>
+                </a:solidFill>
+                <a:latin typeface="Arial"/>
+              </a:defRPr>
+            </a:pPr>
+            <a:r>
+              <a:t>ESCUELAS E INSTITUCIONES</a:t>
             </a:r>
           </a:p>
           <a:p>
@@ -6580,7 +6365,7 @@
               <a:spcBef>
                 <a:spcPts val="800"/>
               </a:spcBef>
-              <a:defRPr sz="1100">
+              <a:defRPr sz="1050">
                 <a:solidFill>
                   <a:srgbClr val="E2E8F0"/>
                 </a:solidFill>
@@ -6588,69 +6373,21 @@
               </a:defRPr>
             </a:pPr>
             <a:r>
-              <a:t>• Tablero de asignación de retiros para cuadrillas.</a:t>
-            </a:r>
-          </a:p>
-          <a:p>
-            <a:pPr>
-              <a:spcBef>
-                <a:spcPts val="800"/>
-              </a:spcBef>
-              <a:defRPr sz="1100">
-                <a:solidFill>
-                  <a:srgbClr val="E2E8F0"/>
-                </a:solidFill>
-                <a:latin typeface="Arial"/>
-              </a:defRPr>
-            </a:pPr>
-            <a:r>
-              <a:t>• Ruteo logístico optimizado para camiones.</a:t>
-            </a:r>
-          </a:p>
-          <a:p>
-            <a:pPr>
-              <a:spcBef>
-                <a:spcPts val="800"/>
-              </a:spcBef>
-              <a:defRPr sz="1100">
-                <a:solidFill>
-                  <a:srgbClr val="E2E8F0"/>
-                </a:solidFill>
-                <a:latin typeface="Arial"/>
-              </a:defRPr>
-            </a:pPr>
-            <a:r>
-              <a:t>• Métricas GIRSU de volumen recolectado.</a:t>
-            </a:r>
-          </a:p>
-          <a:p>
-            <a:pPr>
-              <a:spcBef>
-                <a:spcPts val="800"/>
-              </a:spcBef>
-              <a:defRPr sz="1100">
-                <a:solidFill>
-                  <a:srgbClr val="E2E8F0"/>
-                </a:solidFill>
-                <a:latin typeface="Arial"/>
-              </a:defRPr>
-            </a:pPr>
-            <a:r>
-              <a:t>• Comunicación directa y notificaciones a vecinos.</a:t>
-            </a:r>
-          </a:p>
-        </p:txBody>
-      </p:sp>
-      <p:sp>
-        <p:nvSpPr>
-          <p:cNvPr id="8" name="Rounded Rectangle 7"/>
+              <a:t>Colegios e instituciones educativas que promueven talleres de educación ecológica interactiva mediante tecnología gamificada.</a:t>
+            </a:r>
+          </a:p>
+        </p:txBody>
+      </p:sp>
+      <p:sp>
+        <p:nvSpPr>
+          <p:cNvPr id="9" name="Rounded Rectangle 8"/>
           <p:cNvSpPr/>
           <p:nvPr/>
         </p:nvSpPr>
         <p:spPr>
           <a:xfrm>
-            <a:off x="8046720" y="1828800"/>
-            <a:ext cx="3383280" cy="4480560"/>
+            <a:off x="7315199" y="1783080"/>
+            <a:ext cx="2011680" cy="3383280"/>
           </a:xfrm>
           <a:prstGeom prst="roundRect">
             <a:avLst/>
@@ -6679,11 +6416,11 @@
           </a:fontRef>
         </p:style>
         <p:txBody>
-          <a:bodyPr rtlCol="0" anchor="ctr" wrap="square" lIns="228600" rIns="228600" tIns="228600"/>
+          <a:bodyPr rtlCol="0" anchor="ctr" wrap="square" lIns="164592" rIns="164592" tIns="201168"/>
           <a:lstStyle/>
           <a:p>
             <a:pPr algn="ctr">
-              <a:defRPr sz="1300" b="1">
+              <a:defRPr sz="1200" b="1">
                 <a:solidFill>
                   <a:srgbClr val="8B5CF6"/>
                 </a:solidFill>
@@ -6691,7 +6428,149 @@
               </a:defRPr>
             </a:pPr>
             <a:r>
-              <a:t>PORTAL B2B &amp; MÓDULO REP</a:t>
+              <a:t>ORGANIZACIONES ECOLÓGICAS</a:t>
+            </a:r>
+          </a:p>
+          <a:p>
+            <a:pPr>
+              <a:spcBef>
+                <a:spcPts val="800"/>
+              </a:spcBef>
+              <a:defRPr sz="1050">
+                <a:solidFill>
+                  <a:srgbClr val="E2E8F0"/>
+                </a:solidFill>
+                <a:latin typeface="Arial"/>
+              </a:defRPr>
+            </a:pPr>
+            <a:r>
+              <a:t>ONGs y cooperativas de recicladores urbanos que buscan visibilizar sus centros de acopio y coordinar retiros de materiales.</a:t>
+            </a:r>
+          </a:p>
+        </p:txBody>
+      </p:sp>
+      <p:sp>
+        <p:nvSpPr>
+          <p:cNvPr id="10" name="Rounded Rectangle 9"/>
+          <p:cNvSpPr/>
+          <p:nvPr/>
+        </p:nvSpPr>
+        <p:spPr>
+          <a:xfrm>
+            <a:off x="9509760" y="1783080"/>
+            <a:ext cx="2011680" cy="3383280"/>
+          </a:xfrm>
+          <a:prstGeom prst="roundRect">
+            <a:avLst/>
+          </a:prstGeom>
+          <a:solidFill>
+            <a:srgbClr val="1E293B"/>
+          </a:solidFill>
+          <a:ln w="19050">
+            <a:solidFill>
+              <a:srgbClr val="F43F5E"/>
+            </a:solidFill>
+          </a:ln>
+        </p:spPr>
+        <p:style>
+          <a:lnRef idx="1">
+            <a:schemeClr val="accent1"/>
+          </a:lnRef>
+          <a:fillRef idx="3">
+            <a:schemeClr val="accent1"/>
+          </a:fillRef>
+          <a:effectRef idx="2">
+            <a:schemeClr val="accent1"/>
+          </a:effectRef>
+          <a:fontRef idx="minor">
+            <a:schemeClr val="lt1"/>
+          </a:fontRef>
+        </p:style>
+        <p:txBody>
+          <a:bodyPr rtlCol="0" anchor="ctr" wrap="square" lIns="164592" rIns="164592" tIns="201168"/>
+          <a:lstStyle/>
+          <a:p>
+            <a:pPr algn="ctr">
+              <a:defRPr sz="1200" b="1">
+                <a:solidFill>
+                  <a:srgbClr val="F43F5E"/>
+                </a:solidFill>
+                <a:latin typeface="Arial"/>
+              </a:defRPr>
+            </a:pPr>
+            <a:r>
+              <a:t>EMPRESAS Y COMERCIOS</a:t>
+            </a:r>
+          </a:p>
+          <a:p>
+            <a:pPr>
+              <a:spcBef>
+                <a:spcPts val="800"/>
+              </a:spcBef>
+              <a:defRPr sz="1050">
+                <a:solidFill>
+                  <a:srgbClr val="E2E8F0"/>
+                </a:solidFill>
+                <a:latin typeface="Arial"/>
+              </a:defRPr>
+            </a:pPr>
+            <a:r>
+              <a:t>Negocios locales que patrocinan beneficios y fabricantes que cumplen la normativa de Responsabilidad Extendida del Productor (REP).</a:t>
+            </a:r>
+          </a:p>
+        </p:txBody>
+      </p:sp>
+      <p:sp>
+        <p:nvSpPr>
+          <p:cNvPr id="11" name="Rounded Rectangle 10"/>
+          <p:cNvSpPr/>
+          <p:nvPr/>
+        </p:nvSpPr>
+        <p:spPr>
+          <a:xfrm>
+            <a:off x="731520" y="5349240"/>
+            <a:ext cx="10698480" cy="1005840"/>
+          </a:xfrm>
+          <a:prstGeom prst="roundRect">
+            <a:avLst/>
+          </a:prstGeom>
+          <a:solidFill>
+            <a:srgbClr val="1E293B"/>
+          </a:solidFill>
+          <a:ln w="12700">
+            <a:solidFill>
+              <a:srgbClr val="06B6D4"/>
+            </a:solidFill>
+          </a:ln>
+        </p:spPr>
+        <p:style>
+          <a:lnRef idx="1">
+            <a:schemeClr val="accent1"/>
+          </a:lnRef>
+          <a:fillRef idx="3">
+            <a:schemeClr val="accent1"/>
+          </a:fillRef>
+          <a:effectRef idx="2">
+            <a:schemeClr val="accent1"/>
+          </a:effectRef>
+          <a:fontRef idx="minor">
+            <a:schemeClr val="lt1"/>
+          </a:fontRef>
+        </p:style>
+        <p:txBody>
+          <a:bodyPr rtlCol="0" anchor="ctr" wrap="square" lIns="274320" tIns="146304"/>
+          <a:lstStyle/>
+          <a:p>
+            <a:pPr algn="ctr">
+              <a:defRPr sz="1100" b="1">
+                <a:solidFill>
+                  <a:srgbClr val="06B6D4"/>
+                </a:solidFill>
+                <a:latin typeface="Arial"/>
+              </a:defRPr>
+            </a:pPr>
+            <a:r>
+              <a:t>🎯 PROPÓSITO CENTRAL:</a:t>
             </a:r>
           </a:p>
           <a:p>
@@ -6699,22 +6578,6 @@
               <a:spcBef>
                 <a:spcPts val="300"/>
               </a:spcBef>
-              <a:defRPr sz="1050">
-                <a:solidFill>
-                  <a:srgbClr val="94A3B8"/>
-                </a:solidFill>
-                <a:latin typeface="Arial"/>
-              </a:defRPr>
-            </a:pPr>
-            <a:r>
-              <a:t>Industria y Comercios Locales</a:t>
-            </a:r>
-          </a:p>
-          <a:p>
-            <a:pPr>
-              <a:spcBef>
-                <a:spcPts val="800"/>
-              </a:spcBef>
               <a:defRPr sz="1100">
                 <a:solidFill>
                   <a:srgbClr val="E2E8F0"/>
@@ -6723,71 +6586,7 @@
               </a:defRPr>
             </a:pPr>
             <a:r>
-              <a:t>• Directorio oficial de marcas bajo Ley REP.</a:t>
-            </a:r>
-          </a:p>
-          <a:p>
-            <a:pPr>
-              <a:spcBef>
-                <a:spcPts val="800"/>
-              </a:spcBef>
-              <a:defRPr sz="1100">
-                <a:solidFill>
-                  <a:srgbClr val="E2E8F0"/>
-                </a:solidFill>
-                <a:latin typeface="Arial"/>
-              </a:defRPr>
-            </a:pPr>
-            <a:r>
-              <a:t>• Mapeo de centros de reciclaje privados ($/kg).</a:t>
-            </a:r>
-          </a:p>
-          <a:p>
-            <a:pPr>
-              <a:spcBef>
-                <a:spcPts val="800"/>
-              </a:spcBef>
-              <a:defRPr sz="1100">
-                <a:solidFill>
-                  <a:srgbClr val="E2E8F0"/>
-                </a:solidFill>
-                <a:latin typeface="Arial"/>
-              </a:defRPr>
-            </a:pPr>
-            <a:r>
-              <a:t>• Canje de cupones de descuento patrocinados.</a:t>
-            </a:r>
-          </a:p>
-          <a:p>
-            <a:pPr>
-              <a:spcBef>
-                <a:spcPts val="800"/>
-              </a:spcBef>
-              <a:defRPr sz="1100">
-                <a:solidFill>
-                  <a:srgbClr val="E2E8F0"/>
-                </a:solidFill>
-                <a:latin typeface="Arial"/>
-              </a:defRPr>
-            </a:pPr>
-            <a:r>
-              <a:t>• Reportes de sustentabilidad corporativa ESG.</a:t>
-            </a:r>
-          </a:p>
-          <a:p>
-            <a:pPr>
-              <a:spcBef>
-                <a:spcPts val="800"/>
-              </a:spcBef>
-              <a:defRPr sz="1100">
-                <a:solidFill>
-                  <a:srgbClr val="E2E8F0"/>
-                </a:solidFill>
-                <a:latin typeface="Arial"/>
-              </a:defRPr>
-            </a:pPr>
-            <a:r>
-              <a:t>• Cumplimiento auditable de normativas ambientales.</a:t>
+              <a:t>Facilitar el reciclaje, erradicar la desinformación y promover la educación ambiental ciudadana de manera interactiva, colaborativa y transparente.</a:t>
             </a:r>
           </a:p>
         </p:txBody>
@@ -6861,14 +6660,14 @@
         </p:nvSpPr>
         <p:spPr>
           <a:xfrm>
-            <a:off x="731520" y="411480"/>
+            <a:off x="731520" y="384048"/>
             <a:ext cx="3474720" cy="347472"/>
           </a:xfrm>
           <a:prstGeom prst="roundRect">
             <a:avLst/>
           </a:prstGeom>
           <a:solidFill>
-            <a:srgbClr val="06B6D4"/>
+            <a:srgbClr val="10B981"/>
           </a:solidFill>
           <a:ln>
             <a:noFill/>
@@ -6901,7 +6700,7 @@
               </a:defRPr>
             </a:pPr>
             <a:r>
-              <a:t>03. INTELIGENCIA ARTIFICIAL</a:t>
+              <a:t>03. PROPUESTA</a:t>
             </a:r>
           </a:p>
         </p:txBody>
@@ -6922,7 +6721,7 @@
         </p:blipFill>
         <p:spPr>
           <a:xfrm>
-            <a:off x="11064240" y="365760"/>
+            <a:off x="11064240" y="347472"/>
             <a:ext cx="594360" cy="594360"/>
           </a:xfrm>
           <a:prstGeom prst="rect">
@@ -6938,8 +6737,8 @@
         </p:nvSpPr>
         <p:spPr>
           <a:xfrm>
-            <a:off x="731520" y="777240"/>
-            <a:ext cx="10515600" cy="731520"/>
+            <a:off x="731520" y="749808"/>
+            <a:ext cx="10515600" cy="777240"/>
           </a:xfrm>
           <a:prstGeom prst="rect">
             <a:avLst/>
@@ -6953,7 +6752,7 @@
           <a:lstStyle/>
           <a:p>
             <a:pPr>
-              <a:defRPr sz="2600" b="1">
+              <a:defRPr sz="2500" b="1">
                 <a:solidFill>
                   <a:srgbClr val="FFFFFF"/>
                 </a:solidFill>
@@ -6961,13 +6760,13 @@
               </a:defRPr>
             </a:pPr>
             <a:r>
-              <a:t>Google Gemini 1.5: Visión Artificial y Chat Multimodal</a:t>
+              <a:t>Nuestra Solución Integral</a:t>
             </a:r>
           </a:p>
           <a:p>
             <a:pPr>
               <a:spcBef>
-                <a:spcPts val="400"/>
+                <a:spcPts val="300"/>
               </a:spcBef>
               <a:defRPr sz="1300">
                 <a:solidFill>
@@ -6977,7 +6776,7 @@
               </a:defRPr>
             </a:pPr>
             <a:r>
-              <a:t>Procesamiento de imagen y lenguaje natural desplegado sobre Supabase Edge Functions</a:t>
+              <a:t>Una plataforma inteligente que combina Inteligencia Artificial, geolocalización y un modelo SaaS</a:t>
             </a:r>
           </a:p>
         </p:txBody>
@@ -6990,8 +6789,79 @@
         </p:nvSpPr>
         <p:spPr>
           <a:xfrm>
-            <a:off x="731520" y="1828800"/>
-            <a:ext cx="5120640" cy="4480560"/>
+            <a:off x="731520" y="1783080"/>
+            <a:ext cx="2560320" cy="3108960"/>
+          </a:xfrm>
+          <a:prstGeom prst="roundRect">
+            <a:avLst/>
+          </a:prstGeom>
+          <a:solidFill>
+            <a:srgbClr val="1E293B"/>
+          </a:solidFill>
+          <a:ln w="19050">
+            <a:solidFill>
+              <a:srgbClr val="10B981"/>
+            </a:solidFill>
+          </a:ln>
+        </p:spPr>
+        <p:style>
+          <a:lnRef idx="1">
+            <a:schemeClr val="accent1"/>
+          </a:lnRef>
+          <a:fillRef idx="3">
+            <a:schemeClr val="accent1"/>
+          </a:fillRef>
+          <a:effectRef idx="2">
+            <a:schemeClr val="accent1"/>
+          </a:effectRef>
+          <a:fontRef idx="minor">
+            <a:schemeClr val="lt1"/>
+          </a:fontRef>
+        </p:style>
+        <p:txBody>
+          <a:bodyPr rtlCol="0" anchor="ctr" wrap="square" lIns="182880" rIns="182880" tIns="201168"/>
+          <a:lstStyle/>
+          <a:p>
+            <a:pPr algn="ctr">
+              <a:defRPr sz="1250" b="1">
+                <a:solidFill>
+                  <a:srgbClr val="10B981"/>
+                </a:solidFill>
+                <a:latin typeface="Arial"/>
+              </a:defRPr>
+            </a:pPr>
+            <a:r>
+              <a:t>APP MÓVIL GRATUITA</a:t>
+            </a:r>
+          </a:p>
+          <a:p>
+            <a:pPr>
+              <a:spcBef>
+                <a:spcPts val="800"/>
+              </a:spcBef>
+              <a:defRPr sz="1100">
+                <a:solidFill>
+                  <a:srgbClr val="E2E8F0"/>
+                </a:solidFill>
+                <a:latin typeface="Arial"/>
+              </a:defRPr>
+            </a:pPr>
+            <a:r>
+              <a:t>Con Asistente IA multimodal para clasificar residuos mediante texto o cámara en tiempo real.</a:t>
+            </a:r>
+          </a:p>
+        </p:txBody>
+      </p:sp>
+      <p:sp>
+        <p:nvSpPr>
+          <p:cNvPr id="7" name="Rounded Rectangle 6"/>
+          <p:cNvSpPr/>
+          <p:nvPr/>
+        </p:nvSpPr>
+        <p:spPr>
+          <a:xfrm>
+            <a:off x="3429000" y="1783080"/>
+            <a:ext cx="2560320" cy="3108960"/>
           </a:xfrm>
           <a:prstGeom prst="roundRect">
             <a:avLst/>
@@ -7020,11 +6890,11 @@
           </a:fontRef>
         </p:style>
         <p:txBody>
-          <a:bodyPr rtlCol="0" anchor="ctr" wrap="square" lIns="274320" rIns="274320" tIns="228600"/>
+          <a:bodyPr rtlCol="0" anchor="ctr" wrap="square" lIns="182880" rIns="182880" tIns="201168"/>
           <a:lstStyle/>
           <a:p>
             <a:pPr algn="ctr">
-              <a:defRPr sz="1400" b="1">
+              <a:defRPr sz="1250" b="1">
                 <a:solidFill>
                   <a:srgbClr val="06B6D4"/>
                 </a:solidFill>
@@ -7032,7 +6902,7 @@
               </a:defRPr>
             </a:pPr>
             <a:r>
-              <a:t>📷 ESCÁNER POR CÁMARA (ScanScreen.kt)</a:t>
+              <a:t>MAPA INTERACTIVO</a:t>
             </a:r>
           </a:p>
           <a:p>
@@ -7048,7 +6918,62 @@
               </a:defRPr>
             </a:pPr>
             <a:r>
-              <a:t>Captura y Optimización: CameraX comprime la fotografía a JPEG (calidad 80) y la codifica en Base64 para una transmisión liviana.</a:t>
+              <a:t>Geolocalización de puntos ecológicos, contenedores oficiales y centros de recepción cercanos con guiado GPS.</a:t>
+            </a:r>
+          </a:p>
+        </p:txBody>
+      </p:sp>
+      <p:sp>
+        <p:nvSpPr>
+          <p:cNvPr id="8" name="Rounded Rectangle 7"/>
+          <p:cNvSpPr/>
+          <p:nvPr/>
+        </p:nvSpPr>
+        <p:spPr>
+          <a:xfrm>
+            <a:off x="6126480" y="1783080"/>
+            <a:ext cx="2560320" cy="3108960"/>
+          </a:xfrm>
+          <a:prstGeom prst="roundRect">
+            <a:avLst/>
+          </a:prstGeom>
+          <a:solidFill>
+            <a:srgbClr val="1E293B"/>
+          </a:solidFill>
+          <a:ln w="19050">
+            <a:solidFill>
+              <a:srgbClr val="F59E0B"/>
+            </a:solidFill>
+          </a:ln>
+        </p:spPr>
+        <p:style>
+          <a:lnRef idx="1">
+            <a:schemeClr val="accent1"/>
+          </a:lnRef>
+          <a:fillRef idx="3">
+            <a:schemeClr val="accent1"/>
+          </a:fillRef>
+          <a:effectRef idx="2">
+            <a:schemeClr val="accent1"/>
+          </a:effectRef>
+          <a:fontRef idx="minor">
+            <a:schemeClr val="lt1"/>
+          </a:fontRef>
+        </p:style>
+        <p:txBody>
+          <a:bodyPr rtlCol="0" anchor="ctr" wrap="square" lIns="182880" rIns="182880" tIns="201168"/>
+          <a:lstStyle/>
+          <a:p>
+            <a:pPr algn="ctr">
+              <a:defRPr sz="1250" b="1">
+                <a:solidFill>
+                  <a:srgbClr val="F59E0B"/>
+                </a:solidFill>
+                <a:latin typeface="Arial"/>
+              </a:defRPr>
+            </a:pPr>
+            <a:r>
+              <a:t>PLATAFORMA WEB SAAS</a:t>
             </a:r>
           </a:p>
           <a:p>
@@ -7064,7 +6989,62 @@
               </a:defRPr>
             </a:pPr>
             <a:r>
-              <a:t>Inferencia Gemini Vision: El modelo analiza material, transparencia, rigidez y contaminantes en menos de ~520 ms.</a:t>
+              <a:t>Paneles administrativos para que municipios y empresas gestionen contenedores, retiros y analítica GIRSU.</a:t>
+            </a:r>
+          </a:p>
+        </p:txBody>
+      </p:sp>
+      <p:sp>
+        <p:nvSpPr>
+          <p:cNvPr id="9" name="Rounded Rectangle 8"/>
+          <p:cNvSpPr/>
+          <p:nvPr/>
+        </p:nvSpPr>
+        <p:spPr>
+          <a:xfrm>
+            <a:off x="8823960" y="1783080"/>
+            <a:ext cx="2560320" cy="3108960"/>
+          </a:xfrm>
+          <a:prstGeom prst="roundRect">
+            <a:avLst/>
+          </a:prstGeom>
+          <a:solidFill>
+            <a:srgbClr val="1E293B"/>
+          </a:solidFill>
+          <a:ln w="19050">
+            <a:solidFill>
+              <a:srgbClr val="8B5CF6"/>
+            </a:solidFill>
+          </a:ln>
+        </p:spPr>
+        <p:style>
+          <a:lnRef idx="1">
+            <a:schemeClr val="accent1"/>
+          </a:lnRef>
+          <a:fillRef idx="3">
+            <a:schemeClr val="accent1"/>
+          </a:fillRef>
+          <a:effectRef idx="2">
+            <a:schemeClr val="accent1"/>
+          </a:effectRef>
+          <a:fontRef idx="minor">
+            <a:schemeClr val="lt1"/>
+          </a:fontRef>
+        </p:style>
+        <p:txBody>
+          <a:bodyPr rtlCol="0" anchor="ctr" wrap="square" lIns="182880" rIns="182880" tIns="201168"/>
+          <a:lstStyle/>
+          <a:p>
+            <a:pPr algn="ctr">
+              <a:defRPr sz="1250" b="1">
+                <a:solidFill>
+                  <a:srgbClr val="8B5CF6"/>
+                </a:solidFill>
+                <a:latin typeface="Arial"/>
+              </a:defRPr>
+            </a:pPr>
+            <a:r>
+              <a:t>SISTEMA DE ECOPUNTOS</a:t>
             </a:r>
           </a:p>
           <a:p>
@@ -7080,53 +7060,21 @@
               </a:defRPr>
             </a:pPr>
             <a:r>
-              <a:t>Determinación del Contenedor: Mapea automáticamente al color oficial (Amarillo, Azul, Verde, Rojo o RAEE Electrónico).</a:t>
-            </a:r>
-          </a:p>
-          <a:p>
-            <a:pPr>
-              <a:spcBef>
-                <a:spcPts val="800"/>
-              </a:spcBef>
-              <a:defRPr sz="1100">
-                <a:solidFill>
-                  <a:srgbClr val="E2E8F0"/>
-                </a:solidFill>
-                <a:latin typeface="Arial"/>
-              </a:defRPr>
-            </a:pPr>
-            <a:r>
-              <a:t>Vinculación Geoespacial: Consulta RPC 'get_nearby_points' y retorna el contenedor más próximo con foto real.</a:t>
-            </a:r>
-          </a:p>
-          <a:p>
-            <a:pPr>
-              <a:spcBef>
-                <a:spcPts val="800"/>
-              </a:spcBef>
-              <a:defRPr sz="1100">
-                <a:solidFill>
-                  <a:srgbClr val="E2E8F0"/>
-                </a:solidFill>
-                <a:latin typeface="Arial"/>
-              </a:defRPr>
-            </a:pPr>
-            <a:r>
-              <a:t>Botón 'Cómo llegar': Acceso directo a navegación GPS paso a paso en Google Maps con un solo toque.</a:t>
-            </a:r>
-          </a:p>
-        </p:txBody>
-      </p:sp>
-      <p:sp>
-        <p:nvSpPr>
-          <p:cNvPr id="7" name="Rounded Rectangle 6"/>
+              <a:t>Gamificación con insignias y cupones de descuento para motivar y fidelizar la conducta sustentable de los usuarios.</a:t>
+            </a:r>
+          </a:p>
+        </p:txBody>
+      </p:sp>
+      <p:sp>
+        <p:nvSpPr>
+          <p:cNvPr id="10" name="Rounded Rectangle 9"/>
           <p:cNvSpPr/>
           <p:nvPr/>
         </p:nvSpPr>
         <p:spPr>
           <a:xfrm>
-            <a:off x="6217920" y="1828800"/>
-            <a:ext cx="5212080" cy="4480560"/>
+            <a:off x="731520" y="5074920"/>
+            <a:ext cx="10698480" cy="1234440"/>
           </a:xfrm>
           <a:prstGeom prst="roundRect">
             <a:avLst/>
@@ -7134,7 +7082,7 @@
           <a:solidFill>
             <a:srgbClr val="1E293B"/>
           </a:solidFill>
-          <a:ln w="19050">
+          <a:ln w="12700">
             <a:solidFill>
               <a:srgbClr val="10B981"/>
             </a:solidFill>
@@ -7155,25 +7103,25 @@
           </a:fontRef>
         </p:style>
         <p:txBody>
-          <a:bodyPr rtlCol="0" anchor="ctr" wrap="square" lIns="274320" rIns="274320" tIns="228600"/>
+          <a:bodyPr rtlCol="0" anchor="ctr" wrap="square" lIns="365760" rIns="365760" tIns="182880"/>
           <a:lstStyle/>
           <a:p>
             <a:pPr algn="ctr">
               <a:defRPr sz="1400" b="1">
                 <a:solidFill>
-                  <a:srgbClr val="10B981"/>
-                </a:solidFill>
-                <a:latin typeface="Arial"/>
-              </a:defRPr>
-            </a:pPr>
-            <a:r>
-              <a:t>💬 ASISTENTE CONVERSACIONAL (ChatScreen.kt)</a:t>
+                  <a:srgbClr val="34D399"/>
+                </a:solidFill>
+                <a:latin typeface="Arial"/>
+              </a:defRPr>
+            </a:pPr>
+            <a:r>
+              <a:t>“Tecnología aplicada al cuidado ambiental.”</a:t>
             </a:r>
           </a:p>
           <a:p>
             <a:pPr>
               <a:spcBef>
-                <a:spcPts val="800"/>
+                <a:spcPts val="400"/>
               </a:spcBef>
               <a:defRPr sz="1100">
                 <a:solidFill>
@@ -7183,83 +7131,11 @@
               </a:defRPr>
             </a:pPr>
             <a:r>
-              <a:t>Lenguaje Natural Sin Comandos: El ciudadano consulta de manera libre (ej: '¿dónde tiro un televisor viejo quemado?').</a:t>
-            </a:r>
-          </a:p>
-          <a:p>
-            <a:pPr>
-              <a:spcBef>
-                <a:spcPts val="800"/>
-              </a:spcBef>
-              <a:defRPr sz="1100">
-                <a:solidFill>
-                  <a:srgbClr val="E2E8F0"/>
-                </a:solidFill>
-                <a:latin typeface="Arial"/>
-              </a:defRPr>
-            </a:pPr>
-            <a:r>
-              <a:t>Instrucciones de Acondicionamiento: Gemini enseña a vaciar, escurrir, aplastar y retirar tapas antes de depositar.</a:t>
-            </a:r>
-          </a:p>
-          <a:p>
-            <a:pPr>
-              <a:spcBef>
-                <a:spcPts val="800"/>
-              </a:spcBef>
-              <a:defRPr sz="1100">
-                <a:solidFill>
-                  <a:srgbClr val="E2E8F0"/>
-                </a:solidFill>
-                <a:latin typeface="Arial"/>
-              </a:defRPr>
-            </a:pPr>
-            <a:r>
-              <a:t>Detección de Residuos Voluminosos: Si detecta escombros, muebles o electrodomésticos grandes, activa el intent de 'SOLICITAR RETIRO MUNICIPAL' automáticamente.</a:t>
-            </a:r>
-          </a:p>
-          <a:p>
-            <a:pPr>
-              <a:spcBef>
-                <a:spcPts val="800"/>
-              </a:spcBef>
-              <a:defRPr sz="1100">
-                <a:solidFill>
-                  <a:srgbClr val="E2E8F0"/>
-                </a:solidFill>
-                <a:latin typeface="Arial"/>
-              </a:defRPr>
-            </a:pPr>
-            <a:r>
-              <a:t>Integración Serverless en Deno: Edge Function segura con clave de API de Gemini protegida en Supabase Vault.</a:t>
-            </a:r>
-          </a:p>
-        </p:txBody>
-      </p:sp>
-      <p:pic>
-        <p:nvPicPr>
-          <p:cNvPr id="8" name="Picture 7" descr="app_scan_result.png"/>
-          <p:cNvPicPr>
-            <a:picLocks noChangeAspect="1"/>
-          </p:cNvPicPr>
-          <p:nvPr/>
-        </p:nvPicPr>
-        <p:blipFill>
-          <a:blip r:embed="rId3"/>
-          <a:stretch>
-            <a:fillRect/>
-          </a:stretch>
-        </p:blipFill>
-        <p:spPr>
-          <a:xfrm>
-            <a:off x="9692640" y="3383280"/>
-            <a:ext cx="1554480" cy="3460408"/>
-          </a:xfrm>
-          <a:prstGeom prst="rect">
-            <a:avLst/>
-          </a:prstGeom>
-        </p:spPr>
-      </p:pic>
+              <a:t>EcoMapa no solo le dice al vecino si un residuo se recicla, sino cómo prepararlo y exactamente a qué contenedor llevarlo, acompañándolo paso a paso.</a:t>
+            </a:r>
+          </a:p>
+        </p:txBody>
+      </p:sp>
     </p:spTree>
   </p:cSld>
   <p:clrMapOvr>
@@ -7329,14 +7205,14 @@
         </p:nvSpPr>
         <p:spPr>
           <a:xfrm>
-            <a:off x="731520" y="411480"/>
+            <a:off x="731520" y="384048"/>
             <a:ext cx="3474720" cy="347472"/>
           </a:xfrm>
           <a:prstGeom prst="roundRect">
             <a:avLst/>
           </a:prstGeom>
           <a:solidFill>
-            <a:srgbClr val="F59E0B"/>
+            <a:srgbClr val="06B6D4"/>
           </a:solidFill>
           <a:ln>
             <a:noFill/>
@@ -7369,7 +7245,7 @@
               </a:defRPr>
             </a:pPr>
             <a:r>
-              <a:t>04. LOGÍSTICA URBANA Y GPS</a:t>
+              <a:t>04. FLUJO PRINCIPAL</a:t>
             </a:r>
           </a:p>
         </p:txBody>
@@ -7390,7 +7266,7 @@
         </p:blipFill>
         <p:spPr>
           <a:xfrm>
-            <a:off x="11064240" y="365760"/>
+            <a:off x="11064240" y="347472"/>
             <a:ext cx="594360" cy="594360"/>
           </a:xfrm>
           <a:prstGeom prst="rect">
@@ -7406,8 +7282,8 @@
         </p:nvSpPr>
         <p:spPr>
           <a:xfrm>
-            <a:off x="731520" y="777240"/>
-            <a:ext cx="10515600" cy="731520"/>
+            <a:off x="731520" y="749808"/>
+            <a:ext cx="10515600" cy="777240"/>
           </a:xfrm>
           <a:prstGeom prst="rect">
             <a:avLst/>
@@ -7421,7 +7297,7 @@
           <a:lstStyle/>
           <a:p>
             <a:pPr>
-              <a:defRPr sz="2600" b="1">
+              <a:defRPr sz="2500" b="1">
                 <a:solidFill>
                   <a:srgbClr val="FFFFFF"/>
                 </a:solidFill>
@@ -7429,13 +7305,13 @@
               </a:defRPr>
             </a:pPr>
             <a:r>
-              <a:t>De la Detección a la Disposición en Tiempo Real</a:t>
+              <a:t>El Recorrido del Ciudadano: De la Pregunta a la Acción</a:t>
             </a:r>
           </a:p>
           <a:p>
             <a:pPr>
               <a:spcBef>
-                <a:spcPts val="400"/>
+                <a:spcPts val="300"/>
               </a:spcBef>
               <a:defRPr sz="1300">
                 <a:solidFill>
@@ -7445,7 +7321,7 @@
               </a:defRPr>
             </a:pPr>
             <a:r>
-              <a:t>Búsqueda geoespacial precisa con PostGIS y navegación turn-by-turn en Google Maps</a:t>
+              <a:t>Cómo interactúa el vecino en su vida diaria frente a un residuo</a:t>
             </a:r>
           </a:p>
         </p:txBody>
@@ -7458,8 +7334,8 @@
         </p:nvSpPr>
         <p:spPr>
           <a:xfrm>
-            <a:off x="731520" y="1828800"/>
-            <a:ext cx="3383280" cy="2103120"/>
+            <a:off x="731520" y="1783080"/>
+            <a:ext cx="3383280" cy="3291840"/>
           </a:xfrm>
           <a:prstGeom prst="roundRect">
             <a:avLst/>
@@ -7488,11 +7364,11 @@
           </a:fontRef>
         </p:style>
         <p:txBody>
-          <a:bodyPr rtlCol="0" anchor="ctr" wrap="square" lIns="182880" rIns="182880" tIns="182880"/>
+          <a:bodyPr rtlCol="0" anchor="ctr" wrap="square" lIns="228600" rIns="228600" tIns="182880"/>
           <a:lstStyle/>
           <a:p>
             <a:pPr algn="ctr">
-              <a:defRPr sz="1150" b="1">
+              <a:defRPr sz="3600" b="1">
                 <a:solidFill>
                   <a:srgbClr val="10B981"/>
                 </a:solidFill>
@@ -7500,15 +7376,31 @@
               </a:defRPr>
             </a:pPr>
             <a:r>
-              <a:t>MOTOR ESPACIAL POSTGIS</a:t>
+              <a:t>01</a:t>
             </a:r>
           </a:p>
           <a:p>
             <a:pPr>
               <a:spcBef>
-                <a:spcPts val="500"/>
+                <a:spcPts val="400"/>
               </a:spcBef>
-              <a:defRPr sz="1050">
+              <a:defRPr sz="1300" b="1">
+                <a:solidFill>
+                  <a:srgbClr val="FFFFFF"/>
+                </a:solidFill>
+                <a:latin typeface="Arial"/>
+              </a:defRPr>
+            </a:pPr>
+            <a:r>
+              <a:t>CONSULTA NATURAL</a:t>
+            </a:r>
+          </a:p>
+          <a:p>
+            <a:pPr>
+              <a:spcBef>
+                <a:spcPts val="800"/>
+              </a:spcBef>
+              <a:defRPr sz="1100">
                 <a:solidFill>
                   <a:srgbClr val="E2E8F0"/>
                 </a:solidFill>
@@ -7516,7 +7408,7 @@
               </a:defRPr>
             </a:pPr>
             <a:r>
-              <a:t>Indexación GiST y función SQL 'get_nearby_points' con tipo GEOGRAPHY(Point, 4326). Calcula distancias euclidianas exactas en menos de 95 ms y filtra por tipo de residuo.</a:t>
+              <a:t>El ciudadano describe su residuo en el chat o toma una fotografía con la cámara de su teléfono (Ej: 'Tengo una pila usada' o '¿Dónde tiro una botella de lavandina?').</a:t>
             </a:r>
           </a:p>
         </p:txBody>
@@ -7529,8 +7421,95 @@
         </p:nvSpPr>
         <p:spPr>
           <a:xfrm>
-            <a:off x="4389120" y="1828800"/>
-            <a:ext cx="3383280" cy="2103120"/>
+            <a:off x="4389120" y="1783080"/>
+            <a:ext cx="3383280" cy="3291840"/>
+          </a:xfrm>
+          <a:prstGeom prst="roundRect">
+            <a:avLst/>
+          </a:prstGeom>
+          <a:solidFill>
+            <a:srgbClr val="1E293B"/>
+          </a:solidFill>
+          <a:ln w="19050">
+            <a:solidFill>
+              <a:srgbClr val="06B6D4"/>
+            </a:solidFill>
+          </a:ln>
+        </p:spPr>
+        <p:style>
+          <a:lnRef idx="1">
+            <a:schemeClr val="accent1"/>
+          </a:lnRef>
+          <a:fillRef idx="3">
+            <a:schemeClr val="accent1"/>
+          </a:fillRef>
+          <a:effectRef idx="2">
+            <a:schemeClr val="accent1"/>
+          </a:effectRef>
+          <a:fontRef idx="minor">
+            <a:schemeClr val="lt1"/>
+          </a:fontRef>
+        </p:style>
+        <p:txBody>
+          <a:bodyPr rtlCol="0" anchor="ctr" wrap="square" lIns="228600" rIns="228600" tIns="182880"/>
+          <a:lstStyle/>
+          <a:p>
+            <a:pPr algn="ctr">
+              <a:defRPr sz="3600" b="1">
+                <a:solidFill>
+                  <a:srgbClr val="06B6D4"/>
+                </a:solidFill>
+                <a:latin typeface="Arial"/>
+              </a:defRPr>
+            </a:pPr>
+            <a:r>
+              <a:t>02</a:t>
+            </a:r>
+          </a:p>
+          <a:p>
+            <a:pPr>
+              <a:spcBef>
+                <a:spcPts val="400"/>
+              </a:spcBef>
+              <a:defRPr sz="1300" b="1">
+                <a:solidFill>
+                  <a:srgbClr val="FFFFFF"/>
+                </a:solidFill>
+                <a:latin typeface="Arial"/>
+              </a:defRPr>
+            </a:pPr>
+            <a:r>
+              <a:t>CLASIFICACIÓN INTELIGENTE</a:t>
+            </a:r>
+          </a:p>
+          <a:p>
+            <a:pPr>
+              <a:spcBef>
+                <a:spcPts val="800"/>
+              </a:spcBef>
+              <a:defRPr sz="1100">
+                <a:solidFill>
+                  <a:srgbClr val="E2E8F0"/>
+                </a:solidFill>
+                <a:latin typeface="Arial"/>
+              </a:defRPr>
+            </a:pPr>
+            <a:r>
+              <a:t>La Inteligencia Artificial de Google Gemini procesa la consulta al instante, identifica el material, verifica su reciclabilidad y enseña cómo acondicionarlo.</a:t>
+            </a:r>
+          </a:p>
+        </p:txBody>
+      </p:sp>
+      <p:sp>
+        <p:nvSpPr>
+          <p:cNvPr id="8" name="Rounded Rectangle 7"/>
+          <p:cNvSpPr/>
+          <p:nvPr/>
+        </p:nvSpPr>
+        <p:spPr>
+          <a:xfrm>
+            <a:off x="8046720" y="1783080"/>
+            <a:ext cx="3383280" cy="3291840"/>
           </a:xfrm>
           <a:prstGeom prst="roundRect">
             <a:avLst/>
@@ -7559,11 +7538,11 @@
           </a:fontRef>
         </p:style>
         <p:txBody>
-          <a:bodyPr rtlCol="0" anchor="ctr" wrap="square" lIns="182880" rIns="182880" tIns="182880"/>
+          <a:bodyPr rtlCol="0" anchor="ctr" wrap="square" lIns="228600" rIns="228600" tIns="182880"/>
           <a:lstStyle/>
           <a:p>
             <a:pPr algn="ctr">
-              <a:defRPr sz="1150" b="1">
+              <a:defRPr sz="3600" b="1">
                 <a:solidFill>
                   <a:srgbClr val="F59E0B"/>
                 </a:solidFill>
@@ -7571,15 +7550,31 @@
               </a:defRPr>
             </a:pPr>
             <a:r>
-              <a:t>PINES CON ETIQUETAS DINÁMICAS</a:t>
+              <a:t>03</a:t>
             </a:r>
           </a:p>
           <a:p>
             <a:pPr>
               <a:spcBef>
-                <a:spcPts val="500"/>
+                <a:spcPts val="400"/>
               </a:spcBef>
-              <a:defRPr sz="1050">
+              <a:defRPr sz="1300" b="1">
+                <a:solidFill>
+                  <a:srgbClr val="FFFFFF"/>
+                </a:solidFill>
+                <a:latin typeface="Arial"/>
+              </a:defRPr>
+            </a:pPr>
+            <a:r>
+              <a:t>ACCIÓN Y RECOMPENSA</a:t>
+            </a:r>
+          </a:p>
+          <a:p>
+            <a:pPr>
+              <a:spcBef>
+                <a:spcPts val="800"/>
+              </a:spcBef>
+              <a:defRPr sz="1100">
                 <a:solidFill>
                   <a:srgbClr val="E2E8F0"/>
                 </a:solidFill>
@@ -7587,21 +7582,21 @@
               </a:defRPr>
             </a:pPr>
             <a:r>
-              <a:t>EcoMapView.kt renderiza badges tipográficos legibles sobre el mapa (PLÁSTICOS, VIDRIO, ELECTRÓNICOS, CARTÓN). El vecino identifica de un vistazo la función del contenedor.</a:t>
-            </a:r>
-          </a:p>
-        </p:txBody>
-      </p:sp>
-      <p:sp>
-        <p:nvSpPr>
-          <p:cNvPr id="8" name="Rounded Rectangle 7"/>
+              <a:t>El mapa geolocaliza el punto adecuado más cercano con navegación GPS en Google Maps. El usuario realiza la acción y suma Ecopuntos para canjear por beneficios.</a:t>
+            </a:r>
+          </a:p>
+        </p:txBody>
+      </p:sp>
+      <p:sp>
+        <p:nvSpPr>
+          <p:cNvPr id="9" name="Rounded Rectangle 8"/>
           <p:cNvSpPr/>
           <p:nvPr/>
         </p:nvSpPr>
         <p:spPr>
           <a:xfrm>
-            <a:off x="8046720" y="1828800"/>
-            <a:ext cx="3383280" cy="2103120"/>
+            <a:off x="731520" y="5257800"/>
+            <a:ext cx="10698480" cy="1051560"/>
           </a:xfrm>
           <a:prstGeom prst="roundRect">
             <a:avLst/>
@@ -7609,7 +7604,7 @@
           <a:solidFill>
             <a:srgbClr val="1E293B"/>
           </a:solidFill>
-          <a:ln w="19050">
+          <a:ln w="12700">
             <a:solidFill>
               <a:srgbClr val="06B6D4"/>
             </a:solidFill>
@@ -7630,11 +7625,11 @@
           </a:fontRef>
         </p:style>
         <p:txBody>
-          <a:bodyPr rtlCol="0" anchor="ctr" wrap="square" lIns="182880" rIns="182880" tIns="182880"/>
+          <a:bodyPr rtlCol="0" anchor="ctr" wrap="square" lIns="274320" tIns="164592"/>
           <a:lstStyle/>
           <a:p>
             <a:pPr algn="ctr">
-              <a:defRPr sz="1150" b="1">
+              <a:defRPr sz="1100" b="1">
                 <a:solidFill>
                   <a:srgbClr val="06B6D4"/>
                 </a:solidFill>
@@ -7642,15 +7637,15 @@
               </a:defRPr>
             </a:pPr>
             <a:r>
-              <a:t>NAVEGACIÓN TURN-BY-TURN</a:t>
+              <a:t>🎯 RESULTADO COMPROBADO:</a:t>
             </a:r>
           </a:p>
           <a:p>
             <a:pPr>
               <a:spcBef>
-                <a:spcPts val="500"/>
+                <a:spcPts val="300"/>
               </a:spcBef>
-              <a:defRPr sz="1050">
+              <a:defRPr sz="1100">
                 <a:solidFill>
                   <a:srgbClr val="E2E8F0"/>
                 </a:solidFill>
@@ -7658,318 +7653,7 @@
               </a:defRPr>
             </a:pPr>
             <a:r>
-              <a:t>Botón '🧭 Cómo llegar' que ejecuta un Android Intent nativo contra Google Maps (google.navigation:q=lat,lng). Guía por voz y giro a giro hasta la puerta del contenedor.</a:t>
-            </a:r>
-          </a:p>
-        </p:txBody>
-      </p:sp>
-      <p:sp>
-        <p:nvSpPr>
-          <p:cNvPr id="9" name="Rounded Rectangle 8"/>
-          <p:cNvSpPr/>
-          <p:nvPr/>
-        </p:nvSpPr>
-        <p:spPr>
-          <a:xfrm>
-            <a:off x="731520" y="4160520"/>
-            <a:ext cx="10698480" cy="2194560"/>
-          </a:xfrm>
-          <a:prstGeom prst="roundRect">
-            <a:avLst/>
-          </a:prstGeom>
-          <a:solidFill>
-            <a:srgbClr val="1E293B"/>
-          </a:solidFill>
-          <a:ln w="12700">
-            <a:solidFill>
-              <a:srgbClr val="334155"/>
-            </a:solidFill>
-          </a:ln>
-        </p:spPr>
-        <p:style>
-          <a:lnRef idx="1">
-            <a:schemeClr val="accent1"/>
-          </a:lnRef>
-          <a:fillRef idx="3">
-            <a:schemeClr val="accent1"/>
-          </a:fillRef>
-          <a:effectRef idx="2">
-            <a:schemeClr val="accent1"/>
-          </a:effectRef>
-          <a:fontRef idx="minor">
-            <a:schemeClr val="lt1"/>
-          </a:fontRef>
-        </p:style>
-        <p:txBody>
-          <a:bodyPr rtlCol="0" anchor="ctr" wrap="square" lIns="228600" tIns="109728"/>
-          <a:lstStyle/>
-          <a:p>
-            <a:pPr algn="ctr">
-              <a:defRPr sz="1100" b="1">
-                <a:solidFill>
-                  <a:srgbClr val="FFFFFF"/>
-                </a:solidFill>
-                <a:latin typeface="Arial"/>
-              </a:defRPr>
-            </a:pPr>
-            <a:r>
-              <a:t>📍 RED DE PUNTOS REALES ACTIVOS EN MATORRALES Y VILLA DEL ROSARIO, CÓRDOBA:</a:t>
-            </a:r>
-          </a:p>
-        </p:txBody>
-      </p:sp>
-      <p:pic>
-        <p:nvPicPr>
-          <p:cNvPr id="10" name="Picture 9" descr="contenedor_amarillo.jpg"/>
-          <p:cNvPicPr>
-            <a:picLocks noChangeAspect="1"/>
-          </p:cNvPicPr>
-          <p:nvPr/>
-        </p:nvPicPr>
-        <p:blipFill>
-          <a:blip r:embed="rId3"/>
-          <a:stretch>
-            <a:fillRect/>
-          </a:stretch>
-        </p:blipFill>
-        <p:spPr>
-          <a:xfrm>
-            <a:off x="868680" y="4526280"/>
-            <a:ext cx="2331720" cy="1280160"/>
-          </a:xfrm>
-          <a:prstGeom prst="rect">
-            <a:avLst/>
-          </a:prstGeom>
-        </p:spPr>
-      </p:pic>
-      <p:sp>
-        <p:nvSpPr>
-          <p:cNvPr id="11" name="TextBox 10"/>
-          <p:cNvSpPr txBox="1"/>
-          <p:nvPr/>
-        </p:nvSpPr>
-        <p:spPr>
-          <a:xfrm>
-            <a:off x="868680" y="5852160"/>
-            <a:ext cx="2331720" cy="457200"/>
-          </a:xfrm>
-          <a:prstGeom prst="rect">
-            <a:avLst/>
-          </a:prstGeom>
-          <a:noFill/>
-        </p:spPr>
-        <p:txBody>
-          <a:bodyPr wrap="square" tIns="0">
-            <a:spAutoFit/>
-          </a:bodyPr>
-          <a:lstStyle/>
-          <a:p>
-            <a:pPr algn="ctr">
-              <a:defRPr sz="950" b="1">
-                <a:solidFill>
-                  <a:srgbClr val="E2E8F0"/>
-                </a:solidFill>
-                <a:latin typeface="Arial"/>
-              </a:defRPr>
-            </a:pPr>
-            <a:r>
-              <a:t>Contenedor Amarillo</a:t>
-            </a:r>
-            <a:br/>
-            <a:r>
-              <a:t>Plásticos y PET</a:t>
-            </a:r>
-          </a:p>
-        </p:txBody>
-      </p:sp>
-      <p:pic>
-        <p:nvPicPr>
-          <p:cNvPr id="12" name="Picture 11" descr="contenedor_azul.jpg"/>
-          <p:cNvPicPr>
-            <a:picLocks noChangeAspect="1"/>
-          </p:cNvPicPr>
-          <p:nvPr/>
-        </p:nvPicPr>
-        <p:blipFill>
-          <a:blip r:embed="rId4"/>
-          <a:stretch>
-            <a:fillRect/>
-          </a:stretch>
-        </p:blipFill>
-        <p:spPr>
-          <a:xfrm>
-            <a:off x="3520440" y="4526280"/>
-            <a:ext cx="2331720" cy="1280160"/>
-          </a:xfrm>
-          <a:prstGeom prst="rect">
-            <a:avLst/>
-          </a:prstGeom>
-        </p:spPr>
-      </p:pic>
-      <p:sp>
-        <p:nvSpPr>
-          <p:cNvPr id="13" name="TextBox 12"/>
-          <p:cNvSpPr txBox="1"/>
-          <p:nvPr/>
-        </p:nvSpPr>
-        <p:spPr>
-          <a:xfrm>
-            <a:off x="3520440" y="5852160"/>
-            <a:ext cx="2331720" cy="457200"/>
-          </a:xfrm>
-          <a:prstGeom prst="rect">
-            <a:avLst/>
-          </a:prstGeom>
-          <a:noFill/>
-        </p:spPr>
-        <p:txBody>
-          <a:bodyPr wrap="square" tIns="0">
-            <a:spAutoFit/>
-          </a:bodyPr>
-          <a:lstStyle/>
-          <a:p>
-            <a:pPr algn="ctr">
-              <a:defRPr sz="950" b="1">
-                <a:solidFill>
-                  <a:srgbClr val="E2E8F0"/>
-                </a:solidFill>
-                <a:latin typeface="Arial"/>
-              </a:defRPr>
-            </a:pPr>
-            <a:r>
-              <a:t>Contenedor Azul</a:t>
-            </a:r>
-            <a:br/>
-            <a:r>
-              <a:t>Papel y Cartón</a:t>
-            </a:r>
-          </a:p>
-        </p:txBody>
-      </p:sp>
-      <p:pic>
-        <p:nvPicPr>
-          <p:cNvPr id="14" name="Picture 13" descr="contenedor_verde.jpg"/>
-          <p:cNvPicPr>
-            <a:picLocks noChangeAspect="1"/>
-          </p:cNvPicPr>
-          <p:nvPr/>
-        </p:nvPicPr>
-        <p:blipFill>
-          <a:blip r:embed="rId5"/>
-          <a:stretch>
-            <a:fillRect/>
-          </a:stretch>
-        </p:blipFill>
-        <p:spPr>
-          <a:xfrm>
-            <a:off x="6172200" y="4526280"/>
-            <a:ext cx="2331720" cy="1280160"/>
-          </a:xfrm>
-          <a:prstGeom prst="rect">
-            <a:avLst/>
-          </a:prstGeom>
-        </p:spPr>
-      </p:pic>
-      <p:sp>
-        <p:nvSpPr>
-          <p:cNvPr id="15" name="TextBox 14"/>
-          <p:cNvSpPr txBox="1"/>
-          <p:nvPr/>
-        </p:nvSpPr>
-        <p:spPr>
-          <a:xfrm>
-            <a:off x="6172200" y="5852160"/>
-            <a:ext cx="2331720" cy="457200"/>
-          </a:xfrm>
-          <a:prstGeom prst="rect">
-            <a:avLst/>
-          </a:prstGeom>
-          <a:noFill/>
-        </p:spPr>
-        <p:txBody>
-          <a:bodyPr wrap="square" tIns="0">
-            <a:spAutoFit/>
-          </a:bodyPr>
-          <a:lstStyle/>
-          <a:p>
-            <a:pPr algn="ctr">
-              <a:defRPr sz="950" b="1">
-                <a:solidFill>
-                  <a:srgbClr val="E2E8F0"/>
-                </a:solidFill>
-                <a:latin typeface="Arial"/>
-              </a:defRPr>
-            </a:pPr>
-            <a:r>
-              <a:t>Contenedor Verde</a:t>
-            </a:r>
-            <a:br/>
-            <a:r>
-              <a:t>Botellas de Vidrio</a:t>
-            </a:r>
-          </a:p>
-        </p:txBody>
-      </p:sp>
-      <p:pic>
-        <p:nvPicPr>
-          <p:cNvPr id="16" name="Picture 15" descr="contenedor_rojo.jpg"/>
-          <p:cNvPicPr>
-            <a:picLocks noChangeAspect="1"/>
-          </p:cNvPicPr>
-          <p:nvPr/>
-        </p:nvPicPr>
-        <p:blipFill>
-          <a:blip r:embed="rId6"/>
-          <a:stretch>
-            <a:fillRect/>
-          </a:stretch>
-        </p:blipFill>
-        <p:spPr>
-          <a:xfrm>
-            <a:off x="8823960" y="4526280"/>
-            <a:ext cx="2331720" cy="1280160"/>
-          </a:xfrm>
-          <a:prstGeom prst="rect">
-            <a:avLst/>
-          </a:prstGeom>
-        </p:spPr>
-      </p:pic>
-      <p:sp>
-        <p:nvSpPr>
-          <p:cNvPr id="17" name="TextBox 16"/>
-          <p:cNvSpPr txBox="1"/>
-          <p:nvPr/>
-        </p:nvSpPr>
-        <p:spPr>
-          <a:xfrm>
-            <a:off x="8823960" y="5852160"/>
-            <a:ext cx="2331720" cy="457200"/>
-          </a:xfrm>
-          <a:prstGeom prst="rect">
-            <a:avLst/>
-          </a:prstGeom>
-          <a:noFill/>
-        </p:spPr>
-        <p:txBody>
-          <a:bodyPr wrap="square" tIns="0">
-            <a:spAutoFit/>
-          </a:bodyPr>
-          <a:lstStyle/>
-          <a:p>
-            <a:pPr algn="ctr">
-              <a:defRPr sz="950" b="1">
-                <a:solidFill>
-                  <a:srgbClr val="E2E8F0"/>
-                </a:solidFill>
-                <a:latin typeface="Arial"/>
-              </a:defRPr>
-            </a:pPr>
-            <a:r>
-              <a:t>Contenedor Rojo</a:t>
-            </a:r>
-            <a:br/>
-            <a:r>
-              <a:t>Pilas y Peligrosos</a:t>
+              <a:t>Una decisión clara, un destino concreto y una acción sustentable que deja registro y trazabilidad tanto para el ciudadano como para el municipio.</a:t>
             </a:r>
           </a:p>
         </p:txBody>
@@ -8043,7 +7727,7 @@
         </p:nvSpPr>
         <p:spPr>
           <a:xfrm>
-            <a:off x="731520" y="411480"/>
+            <a:off x="731520" y="384048"/>
             <a:ext cx="3474720" cy="347472"/>
           </a:xfrm>
           <a:prstGeom prst="roundRect">
@@ -8083,7 +7767,7 @@
               </a:defRPr>
             </a:pPr>
             <a:r>
-              <a:t>05. EXPERIENCIA DE USUARIO (UX)</a:t>
+              <a:t>05. EXPERIENCIA VISUAL</a:t>
             </a:r>
           </a:p>
         </p:txBody>
@@ -8104,7 +7788,7 @@
         </p:blipFill>
         <p:spPr>
           <a:xfrm>
-            <a:off x="11064240" y="365760"/>
+            <a:off x="11064240" y="347472"/>
             <a:ext cx="594360" cy="594360"/>
           </a:xfrm>
           <a:prstGeom prst="rect">
@@ -8120,8 +7804,8 @@
         </p:nvSpPr>
         <p:spPr>
           <a:xfrm>
-            <a:off x="731520" y="777240"/>
-            <a:ext cx="10515600" cy="731520"/>
+            <a:off x="731520" y="749808"/>
+            <a:ext cx="10515600" cy="777240"/>
           </a:xfrm>
           <a:prstGeom prst="rect">
             <a:avLst/>
@@ -8135,7 +7819,7 @@
           <a:lstStyle/>
           <a:p>
             <a:pPr>
-              <a:defRPr sz="2600" b="1">
+              <a:defRPr sz="2500" b="1">
                 <a:solidFill>
                   <a:srgbClr val="FFFFFF"/>
                 </a:solidFill>
@@ -8143,13 +7827,13 @@
               </a:defRPr>
             </a:pPr>
             <a:r>
-              <a:t>El Viaje del Ciudadano en 5 Pasos Simples</a:t>
+              <a:t>Demo del Producto e Interfaces Principales</a:t>
             </a:r>
           </a:p>
           <a:p>
             <a:pPr>
               <a:spcBef>
-                <a:spcPts val="400"/>
+                <a:spcPts val="300"/>
               </a:spcBef>
               <a:defRPr sz="1300">
                 <a:solidFill>
@@ -8159,7 +7843,7 @@
               </a:defRPr>
             </a:pPr>
             <a:r>
-              <a:t>Cero fricción: desde el escaneo fotográfico hasta la recompensa en menos de 60 segundos</a:t>
+              <a:t>Herramientas ecológicas inteligentes integradas en una experiencia moderna y accesible</a:t>
             </a:r>
           </a:p>
         </p:txBody>
@@ -8172,8 +7856,8 @@
         </p:nvSpPr>
         <p:spPr>
           <a:xfrm>
-            <a:off x="731520" y="1920240"/>
-            <a:ext cx="2011680" cy="3200400"/>
+            <a:off x="731520" y="1783080"/>
+            <a:ext cx="5486400" cy="1051560"/>
           </a:xfrm>
           <a:prstGeom prst="roundRect">
             <a:avLst/>
@@ -8202,11 +7886,11 @@
           </a:fontRef>
         </p:style>
         <p:txBody>
-          <a:bodyPr rtlCol="0" anchor="ctr" wrap="square" lIns="164592" rIns="164592" tIns="182880"/>
+          <a:bodyPr rtlCol="0" anchor="ctr" wrap="square" lIns="182880" rIns="182880" tIns="109728"/>
           <a:lstStyle/>
           <a:p>
             <a:pPr algn="ctr">
-              <a:defRPr sz="3200" b="1">
+              <a:defRPr sz="1150" b="1">
                 <a:solidFill>
                   <a:srgbClr val="10B981"/>
                 </a:solidFill>
@@ -8214,39 +7898,23 @@
               </a:defRPr>
             </a:pPr>
             <a:r>
-              <a:t>01</a:t>
+              <a:t>CHAT Y CÁMARA IA</a:t>
             </a:r>
           </a:p>
           <a:p>
             <a:pPr>
               <a:spcBef>
-                <a:spcPts val="600"/>
+                <a:spcPts val="300"/>
               </a:spcBef>
-              <a:defRPr sz="1300" b="1">
-                <a:solidFill>
-                  <a:srgbClr val="FFFFFF"/>
-                </a:solidFill>
-                <a:latin typeface="Arial"/>
-              </a:defRPr>
-            </a:pPr>
-            <a:r>
-              <a:t>CAPTURA</a:t>
-            </a:r>
-          </a:p>
-          <a:p>
-            <a:pPr>
-              <a:spcBef>
-                <a:spcPts val="800"/>
-              </a:spcBef>
-              <a:defRPr sz="1100">
-                <a:solidFill>
-                  <a:srgbClr val="94A3B8"/>
-                </a:solidFill>
-                <a:latin typeface="Arial"/>
-              </a:defRPr>
-            </a:pPr>
-            <a:r>
-              <a:t>Apunta la cámara al residuo desde ScanScreen.kt.</a:t>
+              <a:defRPr sz="1000">
+                <a:solidFill>
+                  <a:srgbClr val="E2E8F0"/>
+                </a:solidFill>
+                <a:latin typeface="Arial"/>
+              </a:defRPr>
+            </a:pPr>
+            <a:r>
+              <a:t>Clasificación inteligente de residuos mediante lenguaje natural y escaneo visual por cámara.</a:t>
             </a:r>
           </a:p>
         </p:txBody>
@@ -8259,8 +7927,8 @@
         </p:nvSpPr>
         <p:spPr>
           <a:xfrm>
-            <a:off x="2926080" y="1920240"/>
-            <a:ext cx="2011680" cy="3200400"/>
+            <a:off x="731520" y="2926080"/>
+            <a:ext cx="5486400" cy="1051560"/>
           </a:xfrm>
           <a:prstGeom prst="roundRect">
             <a:avLst/>
@@ -8289,11 +7957,11 @@
           </a:fontRef>
         </p:style>
         <p:txBody>
-          <a:bodyPr rtlCol="0" anchor="ctr" wrap="square" lIns="164592" rIns="164592" tIns="182880"/>
+          <a:bodyPr rtlCol="0" anchor="ctr" wrap="square" lIns="182880" rIns="182880" tIns="109728"/>
           <a:lstStyle/>
           <a:p>
             <a:pPr algn="ctr">
-              <a:defRPr sz="3200" b="1">
+              <a:defRPr sz="1150" b="1">
                 <a:solidFill>
                   <a:srgbClr val="06B6D4"/>
                 </a:solidFill>
@@ -8301,39 +7969,23 @@
               </a:defRPr>
             </a:pPr>
             <a:r>
-              <a:t>02</a:t>
+              <a:t>MAPA INTERACTIVO</a:t>
             </a:r>
           </a:p>
           <a:p>
             <a:pPr>
               <a:spcBef>
-                <a:spcPts val="600"/>
+                <a:spcPts val="300"/>
               </a:spcBef>
-              <a:defRPr sz="1300" b="1">
-                <a:solidFill>
-                  <a:srgbClr val="FFFFFF"/>
-                </a:solidFill>
-                <a:latin typeface="Arial"/>
-              </a:defRPr>
-            </a:pPr>
-            <a:r>
-              <a:t>IA GEMINI</a:t>
-            </a:r>
-          </a:p>
-          <a:p>
-            <a:pPr>
-              <a:spcBef>
-                <a:spcPts val="800"/>
-              </a:spcBef>
-              <a:defRPr sz="1100">
-                <a:solidFill>
-                  <a:srgbClr val="94A3B8"/>
-                </a:solidFill>
-                <a:latin typeface="Arial"/>
-              </a:defRPr>
-            </a:pPr>
-            <a:r>
-              <a:t>Infiere el material y determina el contenedor correcto.</a:t>
+              <a:defRPr sz="1000">
+                <a:solidFill>
+                  <a:srgbClr val="E2E8F0"/>
+                </a:solidFill>
+                <a:latin typeface="Arial"/>
+              </a:defRPr>
+            </a:pPr>
+            <a:r>
+              <a:t>Ubicación de puntos ecológicos cercanos en tiempo real con badges y navegación en Google Maps.</a:t>
             </a:r>
           </a:p>
         </p:txBody>
@@ -8346,8 +7998,8 @@
         </p:nvSpPr>
         <p:spPr>
           <a:xfrm>
-            <a:off x="5120640" y="1920240"/>
-            <a:ext cx="2011680" cy="3200400"/>
+            <a:off x="731520" y="4069080"/>
+            <a:ext cx="5486400" cy="1051560"/>
           </a:xfrm>
           <a:prstGeom prst="roundRect">
             <a:avLst/>
@@ -8376,11 +8028,11 @@
           </a:fontRef>
         </p:style>
         <p:txBody>
-          <a:bodyPr rtlCol="0" anchor="ctr" wrap="square" lIns="164592" rIns="164592" tIns="182880"/>
+          <a:bodyPr rtlCol="0" anchor="ctr" wrap="square" lIns="182880" rIns="182880" tIns="109728"/>
           <a:lstStyle/>
           <a:p>
             <a:pPr algn="ctr">
-              <a:defRPr sz="3200" b="1">
+              <a:defRPr sz="1150" b="1">
                 <a:solidFill>
                   <a:srgbClr val="F59E0B"/>
                 </a:solidFill>
@@ -8388,39 +8040,23 @@
               </a:defRPr>
             </a:pPr>
             <a:r>
-              <a:t>03</a:t>
+              <a:t>SISTEMA DE GAMIFICACIÓN</a:t>
             </a:r>
           </a:p>
           <a:p>
             <a:pPr>
               <a:spcBef>
-                <a:spcPts val="600"/>
+                <a:spcPts val="300"/>
               </a:spcBef>
-              <a:defRPr sz="1300" b="1">
-                <a:solidFill>
-                  <a:srgbClr val="FFFFFF"/>
-                </a:solidFill>
-                <a:latin typeface="Arial"/>
-              </a:defRPr>
-            </a:pPr>
-            <a:r>
-              <a:t>UBICACIÓN</a:t>
-            </a:r>
-          </a:p>
-          <a:p>
-            <a:pPr>
-              <a:spcBef>
-                <a:spcPts val="800"/>
-              </a:spcBef>
-              <a:defRPr sz="1100">
-                <a:solidFill>
-                  <a:srgbClr val="94A3B8"/>
-                </a:solidFill>
-                <a:latin typeface="Arial"/>
-              </a:defRPr>
-            </a:pPr>
-            <a:r>
-              <a:t>Localiza el punto verde más cercano con foto real.</a:t>
+              <a:defRPr sz="1000">
+                <a:solidFill>
+                  <a:srgbClr val="E2E8F0"/>
+                </a:solidFill>
+                <a:latin typeface="Arial"/>
+              </a:defRPr>
+            </a:pPr>
+            <a:r>
+              <a:t>Recompensas e insignias para incentivar el reciclaje continuo y canje de cupones locales.</a:t>
             </a:r>
           </a:p>
         </p:txBody>
@@ -8433,95 +8069,8 @@
         </p:nvSpPr>
         <p:spPr>
           <a:xfrm>
-            <a:off x="7315199" y="1920240"/>
-            <a:ext cx="2011680" cy="3200400"/>
-          </a:xfrm>
-          <a:prstGeom prst="roundRect">
-            <a:avLst/>
-          </a:prstGeom>
-          <a:solidFill>
-            <a:srgbClr val="1E293B"/>
-          </a:solidFill>
-          <a:ln w="19050">
-            <a:solidFill>
-              <a:srgbClr val="3B82F6"/>
-            </a:solidFill>
-          </a:ln>
-        </p:spPr>
-        <p:style>
-          <a:lnRef idx="1">
-            <a:schemeClr val="accent1"/>
-          </a:lnRef>
-          <a:fillRef idx="3">
-            <a:schemeClr val="accent1"/>
-          </a:fillRef>
-          <a:effectRef idx="2">
-            <a:schemeClr val="accent1"/>
-          </a:effectRef>
-          <a:fontRef idx="minor">
-            <a:schemeClr val="lt1"/>
-          </a:fontRef>
-        </p:style>
-        <p:txBody>
-          <a:bodyPr rtlCol="0" anchor="ctr" wrap="square" lIns="164592" rIns="164592" tIns="182880"/>
-          <a:lstStyle/>
-          <a:p>
-            <a:pPr algn="ctr">
-              <a:defRPr sz="3200" b="1">
-                <a:solidFill>
-                  <a:srgbClr val="3B82F6"/>
-                </a:solidFill>
-                <a:latin typeface="Arial"/>
-              </a:defRPr>
-            </a:pPr>
-            <a:r>
-              <a:t>04</a:t>
-            </a:r>
-          </a:p>
-          <a:p>
-            <a:pPr>
-              <a:spcBef>
-                <a:spcPts val="600"/>
-              </a:spcBef>
-              <a:defRPr sz="1300" b="1">
-                <a:solidFill>
-                  <a:srgbClr val="FFFFFF"/>
-                </a:solidFill>
-                <a:latin typeface="Arial"/>
-              </a:defRPr>
-            </a:pPr>
-            <a:r>
-              <a:t>NAVEGACIÓN</a:t>
-            </a:r>
-          </a:p>
-          <a:p>
-            <a:pPr>
-              <a:spcBef>
-                <a:spcPts val="800"/>
-              </a:spcBef>
-              <a:defRPr sz="1100">
-                <a:solidFill>
-                  <a:srgbClr val="94A3B8"/>
-                </a:solidFill>
-                <a:latin typeface="Arial"/>
-              </a:defRPr>
-            </a:pPr>
-            <a:r>
-              <a:t>Un toque abre el GPS guiado en Google Maps.</a:t>
-            </a:r>
-          </a:p>
-        </p:txBody>
-      </p:sp>
-      <p:sp>
-        <p:nvSpPr>
-          <p:cNvPr id="10" name="Rounded Rectangle 9"/>
-          <p:cNvSpPr/>
-          <p:nvPr/>
-        </p:nvSpPr>
-        <p:spPr>
-          <a:xfrm>
-            <a:off x="9509760" y="1920240"/>
-            <a:ext cx="2011680" cy="3200400"/>
+            <a:off x="731520" y="5212080"/>
+            <a:ext cx="5486400" cy="1051560"/>
           </a:xfrm>
           <a:prstGeom prst="roundRect">
             <a:avLst/>
@@ -8550,11 +8099,11 @@
           </a:fontRef>
         </p:style>
         <p:txBody>
-          <a:bodyPr rtlCol="0" anchor="ctr" wrap="square" lIns="164592" rIns="164592" tIns="182880"/>
+          <a:bodyPr rtlCol="0" anchor="ctr" wrap="square" lIns="182880" rIns="182880" tIns="109728"/>
           <a:lstStyle/>
           <a:p>
             <a:pPr algn="ctr">
-              <a:defRPr sz="3200" b="1">
+              <a:defRPr sz="1150" b="1">
                 <a:solidFill>
                   <a:srgbClr val="8B5CF6"/>
                 </a:solidFill>
@@ -8562,94 +8111,7 @@
               </a:defRPr>
             </a:pPr>
             <a:r>
-              <a:t>05</a:t>
-            </a:r>
-          </a:p>
-          <a:p>
-            <a:pPr>
-              <a:spcBef>
-                <a:spcPts val="600"/>
-              </a:spcBef>
-              <a:defRPr sz="1300" b="1">
-                <a:solidFill>
-                  <a:srgbClr val="FFFFFF"/>
-                </a:solidFill>
-                <a:latin typeface="Arial"/>
-              </a:defRPr>
-            </a:pPr>
-            <a:r>
-              <a:t>ECOPUNTOS</a:t>
-            </a:r>
-          </a:p>
-          <a:p>
-            <a:pPr>
-              <a:spcBef>
-                <a:spcPts val="800"/>
-              </a:spcBef>
-              <a:defRPr sz="1100">
-                <a:solidFill>
-                  <a:srgbClr val="94A3B8"/>
-                </a:solidFill>
-                <a:latin typeface="Arial"/>
-              </a:defRPr>
-            </a:pPr>
-            <a:r>
-              <a:t>Registra el descarte y acredita puntos canjeables.</a:t>
-            </a:r>
-          </a:p>
-        </p:txBody>
-      </p:sp>
-      <p:sp>
-        <p:nvSpPr>
-          <p:cNvPr id="11" name="Rounded Rectangle 10"/>
-          <p:cNvSpPr/>
-          <p:nvPr/>
-        </p:nvSpPr>
-        <p:spPr>
-          <a:xfrm>
-            <a:off x="731520" y="5349240"/>
-            <a:ext cx="10698480" cy="1005840"/>
-          </a:xfrm>
-          <a:prstGeom prst="roundRect">
-            <a:avLst/>
-          </a:prstGeom>
-          <a:solidFill>
-            <a:srgbClr val="1E293B"/>
-          </a:solidFill>
-          <a:ln w="12700">
-            <a:solidFill>
-              <a:srgbClr val="10B981"/>
-            </a:solidFill>
-          </a:ln>
-        </p:spPr>
-        <p:style>
-          <a:lnRef idx="1">
-            <a:schemeClr val="accent1"/>
-          </a:lnRef>
-          <a:fillRef idx="3">
-            <a:schemeClr val="accent1"/>
-          </a:fillRef>
-          <a:effectRef idx="2">
-            <a:schemeClr val="accent1"/>
-          </a:effectRef>
-          <a:fontRef idx="minor">
-            <a:schemeClr val="lt1"/>
-          </a:fontRef>
-        </p:style>
-        <p:txBody>
-          <a:bodyPr rtlCol="0" anchor="ctr" wrap="square" lIns="274320" tIns="137160"/>
-          <a:lstStyle/>
-          <a:p>
-            <a:pPr algn="ctr">
-              <a:defRPr sz="1100" b="1">
-                <a:solidFill>
-                  <a:srgbClr val="10B981"/>
-                </a:solidFill>
-                <a:latin typeface="Arial"/>
-              </a:defRPr>
-            </a:pPr>
-            <a:r>
-              <a:t>🚀 RENDIMIENTO Y ACCESIBILIDAD:</a:t>
+              <a:t>PANEL ADMINISTRATIVO</a:t>
             </a:r>
           </a:p>
           <a:p>
@@ -8657,7 +8119,7 @@
               <a:spcBef>
                 <a:spcPts val="300"/>
               </a:spcBef>
-              <a:defRPr sz="1100">
+              <a:defRPr sz="1000">
                 <a:solidFill>
                   <a:srgbClr val="E2E8F0"/>
                 </a:solidFill>
@@ -8665,11 +8127,59 @@
               </a:defRPr>
             </a:pPr>
             <a:r>
-              <a:t>Desarrollada nativamente en Jetpack Compose con arquitectura MVVM y Clean Architecture. Consumo mínimo de batería, soporte offline para catálogo de materiales y peso de descarga menor a 22 MB.</a:t>
-            </a:r>
-          </a:p>
-        </p:txBody>
-      </p:sp>
+              <a:t>Gestión centralizada de puntos limpios, coordinación de retiros y analítica para municipios.</a:t>
+            </a:r>
+          </a:p>
+        </p:txBody>
+      </p:sp>
+      <p:pic>
+        <p:nvPicPr>
+          <p:cNvPr id="10" name="Picture 9" descr="app_scan_result.png"/>
+          <p:cNvPicPr>
+            <a:picLocks noChangeAspect="1"/>
+          </p:cNvPicPr>
+          <p:nvPr/>
+        </p:nvPicPr>
+        <p:blipFill>
+          <a:blip r:embed="rId3"/>
+          <a:stretch>
+            <a:fillRect/>
+          </a:stretch>
+        </p:blipFill>
+        <p:spPr>
+          <a:xfrm>
+            <a:off x="6583680" y="1783080"/>
+            <a:ext cx="2194560" cy="4480560"/>
+          </a:xfrm>
+          <a:prstGeom prst="rect">
+            <a:avLst/>
+          </a:prstGeom>
+        </p:spPr>
+      </p:pic>
+      <p:pic>
+        <p:nvPicPr>
+          <p:cNvPr id="11" name="Picture 10" descr="app_map_screen.png"/>
+          <p:cNvPicPr>
+            <a:picLocks noChangeAspect="1"/>
+          </p:cNvPicPr>
+          <p:nvPr/>
+        </p:nvPicPr>
+        <p:blipFill>
+          <a:blip r:embed="rId4"/>
+          <a:stretch>
+            <a:fillRect/>
+          </a:stretch>
+        </p:blipFill>
+        <p:spPr>
+          <a:xfrm>
+            <a:off x="8961120" y="1783080"/>
+            <a:ext cx="2468880" cy="4480560"/>
+          </a:xfrm>
+          <a:prstGeom prst="rect">
+            <a:avLst/>
+          </a:prstGeom>
+        </p:spPr>
+      </p:pic>
     </p:spTree>
   </p:cSld>
   <p:clrMapOvr>
@@ -8739,14 +8249,14 @@
         </p:nvSpPr>
         <p:spPr>
           <a:xfrm>
-            <a:off x="731520" y="411480"/>
+            <a:off x="731520" y="384048"/>
             <a:ext cx="3474720" cy="347472"/>
           </a:xfrm>
           <a:prstGeom prst="roundRect">
             <a:avLst/>
           </a:prstGeom>
           <a:solidFill>
-            <a:srgbClr val="8B5CF6"/>
+            <a:srgbClr val="F59E0B"/>
           </a:solidFill>
           <a:ln>
             <a:noFill/>
@@ -8779,7 +8289,7 @@
               </a:defRPr>
             </a:pPr>
             <a:r>
-              <a:t>06. SERVICIOS ESPECIALES</a:t>
+              <a:t>06. CAPACIDADES</a:t>
             </a:r>
           </a:p>
         </p:txBody>
@@ -8800,7 +8310,7 @@
         </p:blipFill>
         <p:spPr>
           <a:xfrm>
-            <a:off x="11064240" y="365760"/>
+            <a:off x="11064240" y="347472"/>
             <a:ext cx="594360" cy="594360"/>
           </a:xfrm>
           <a:prstGeom prst="rect">
@@ -8816,8 +8326,8 @@
         </p:nvSpPr>
         <p:spPr>
           <a:xfrm>
-            <a:off x="731520" y="777240"/>
-            <a:ext cx="10515600" cy="731520"/>
+            <a:off x="731520" y="749808"/>
+            <a:ext cx="10515600" cy="777240"/>
           </a:xfrm>
           <a:prstGeom prst="rect">
             <a:avLst/>
@@ -8831,7 +8341,7 @@
           <a:lstStyle/>
           <a:p>
             <a:pPr>
-              <a:defRPr sz="2600" b="1">
+              <a:defRPr sz="2500" b="1">
                 <a:solidFill>
                   <a:srgbClr val="FFFFFF"/>
                 </a:solidFill>
@@ -8839,7 +8349,78 @@
               </a:defRPr>
             </a:pPr>
             <a:r>
-              <a:t>Resolviendo Residuos Voluminosos y Normativa REP</a:t>
+              <a:t>Funcionalidades Principales de la Plataforma</a:t>
+            </a:r>
+          </a:p>
+          <a:p>
+            <a:pPr>
+              <a:spcBef>
+                <a:spcPts val="300"/>
+              </a:spcBef>
+              <a:defRPr sz="1300">
+                <a:solidFill>
+                  <a:srgbClr val="94A3B8"/>
+                </a:solidFill>
+                <a:latin typeface="Arial"/>
+              </a:defRPr>
+            </a:pPr>
+            <a:r>
+              <a:t>Las seis herramientas clave que articulan el ecosistema EcoMapa</a:t>
+            </a:r>
+          </a:p>
+        </p:txBody>
+      </p:sp>
+      <p:sp>
+        <p:nvSpPr>
+          <p:cNvPr id="6" name="Rounded Rectangle 5"/>
+          <p:cNvSpPr/>
+          <p:nvPr/>
+        </p:nvSpPr>
+        <p:spPr>
+          <a:xfrm>
+            <a:off x="731520" y="1783080"/>
+            <a:ext cx="5257800" cy="1371600"/>
+          </a:xfrm>
+          <a:prstGeom prst="roundRect">
+            <a:avLst/>
+          </a:prstGeom>
+          <a:solidFill>
+            <a:srgbClr val="1E293B"/>
+          </a:solidFill>
+          <a:ln w="19050">
+            <a:solidFill>
+              <a:srgbClr val="10B981"/>
+            </a:solidFill>
+          </a:ln>
+        </p:spPr>
+        <p:style>
+          <a:lnRef idx="1">
+            <a:schemeClr val="accent1"/>
+          </a:lnRef>
+          <a:fillRef idx="3">
+            <a:schemeClr val="accent1"/>
+          </a:fillRef>
+          <a:effectRef idx="2">
+            <a:schemeClr val="accent1"/>
+          </a:effectRef>
+          <a:fontRef idx="minor">
+            <a:schemeClr val="lt1"/>
+          </a:fontRef>
+        </p:style>
+        <p:txBody>
+          <a:bodyPr rtlCol="0" anchor="ctr" wrap="square" lIns="228600" rIns="228600" tIns="164592"/>
+          <a:lstStyle/>
+          <a:p>
+            <a:pPr algn="ctr">
+              <a:defRPr sz="1200" b="1">
+                <a:solidFill>
+                  <a:srgbClr val="10B981"/>
+                </a:solidFill>
+                <a:latin typeface="Arial"/>
+              </a:defRPr>
+            </a:pPr>
+            <a:r>
+              <a:t>1. ASISTENTE IA</a:t>
             </a:r>
           </a:p>
           <a:p>
@@ -8847,29 +8428,100 @@
               <a:spcBef>
                 <a:spcPts val="400"/>
               </a:spcBef>
-              <a:defRPr sz="1300">
-                <a:solidFill>
-                  <a:srgbClr val="94A3B8"/>
-                </a:solidFill>
-                <a:latin typeface="Arial"/>
-              </a:defRPr>
-            </a:pPr>
-            <a:r>
-              <a:t>Logística municipal de retiro puerta a puerta y vinculación con productores responsables</a:t>
-            </a:r>
-          </a:p>
-        </p:txBody>
-      </p:sp>
-      <p:sp>
-        <p:nvSpPr>
-          <p:cNvPr id="6" name="Rounded Rectangle 5"/>
+              <a:defRPr sz="1050">
+                <a:solidFill>
+                  <a:srgbClr val="E2E8F0"/>
+                </a:solidFill>
+                <a:latin typeface="Arial"/>
+              </a:defRPr>
+            </a:pPr>
+            <a:r>
+              <a:t>Clasifica residuos a partir de una consulta escrita o fotográfica y entrega una recomendación clara y comprensible.</a:t>
+            </a:r>
+          </a:p>
+        </p:txBody>
+      </p:sp>
+      <p:sp>
+        <p:nvSpPr>
+          <p:cNvPr id="7" name="Rounded Rectangle 6"/>
           <p:cNvSpPr/>
           <p:nvPr/>
         </p:nvSpPr>
         <p:spPr>
           <a:xfrm>
-            <a:off x="731520" y="1828800"/>
-            <a:ext cx="5120640" cy="4480560"/>
+            <a:off x="6172200" y="1783080"/>
+            <a:ext cx="5257800" cy="1371600"/>
+          </a:xfrm>
+          <a:prstGeom prst="roundRect">
+            <a:avLst/>
+          </a:prstGeom>
+          <a:solidFill>
+            <a:srgbClr val="1E293B"/>
+          </a:solidFill>
+          <a:ln w="19050">
+            <a:solidFill>
+              <a:srgbClr val="06B6D4"/>
+            </a:solidFill>
+          </a:ln>
+        </p:spPr>
+        <p:style>
+          <a:lnRef idx="1">
+            <a:schemeClr val="accent1"/>
+          </a:lnRef>
+          <a:fillRef idx="3">
+            <a:schemeClr val="accent1"/>
+          </a:fillRef>
+          <a:effectRef idx="2">
+            <a:schemeClr val="accent1"/>
+          </a:effectRef>
+          <a:fontRef idx="minor">
+            <a:schemeClr val="lt1"/>
+          </a:fontRef>
+        </p:style>
+        <p:txBody>
+          <a:bodyPr rtlCol="0" anchor="ctr" wrap="square" lIns="228600" rIns="228600" tIns="164592"/>
+          <a:lstStyle/>
+          <a:p>
+            <a:pPr algn="ctr">
+              <a:defRPr sz="1200" b="1">
+                <a:solidFill>
+                  <a:srgbClr val="06B6D4"/>
+                </a:solidFill>
+                <a:latin typeface="Arial"/>
+              </a:defRPr>
+            </a:pPr>
+            <a:r>
+              <a:t>2. MAPA INTERACTIVO</a:t>
+            </a:r>
+          </a:p>
+          <a:p>
+            <a:pPr>
+              <a:spcBef>
+                <a:spcPts val="400"/>
+              </a:spcBef>
+              <a:defRPr sz="1050">
+                <a:solidFill>
+                  <a:srgbClr val="E2E8F0"/>
+                </a:solidFill>
+                <a:latin typeface="Arial"/>
+              </a:defRPr>
+            </a:pPr>
+            <a:r>
+              <a:t>Muestra puntos verdes y centros de recepción con geolocalización, categoría de residuo y navegación guiada.</a:t>
+            </a:r>
+          </a:p>
+        </p:txBody>
+      </p:sp>
+      <p:sp>
+        <p:nvSpPr>
+          <p:cNvPr id="8" name="Rounded Rectangle 7"/>
+          <p:cNvSpPr/>
+          <p:nvPr/>
+        </p:nvSpPr>
+        <p:spPr>
+          <a:xfrm>
+            <a:off x="731520" y="3291839"/>
+            <a:ext cx="5257800" cy="1371600"/>
           </a:xfrm>
           <a:prstGeom prst="roundRect">
             <a:avLst/>
@@ -8898,11 +8550,11 @@
           </a:fontRef>
         </p:style>
         <p:txBody>
-          <a:bodyPr rtlCol="0" anchor="ctr" wrap="square" lIns="274320" rIns="274320" tIns="228600"/>
+          <a:bodyPr rtlCol="0" anchor="ctr" wrap="square" lIns="228600" rIns="228600" tIns="164592"/>
           <a:lstStyle/>
           <a:p>
             <a:pPr algn="ctr">
-              <a:defRPr sz="1400" b="1">
+              <a:defRPr sz="1200" b="1">
                 <a:solidFill>
                   <a:srgbClr val="F59E0B"/>
                 </a:solidFill>
@@ -8910,15 +8562,15 @@
               </a:defRPr>
             </a:pPr>
             <a:r>
-              <a:t>🚛 RETIROS A DOMICILIO (PickupScreen.kt)</a:t>
+              <a:t>3. ECOPUNTOS E INSIGNIAS</a:t>
             </a:r>
           </a:p>
           <a:p>
             <a:pPr>
               <a:spcBef>
-                <a:spcPts val="800"/>
+                <a:spcPts val="400"/>
               </a:spcBef>
-              <a:defRPr sz="1100">
+              <a:defRPr sz="1050">
                 <a:solidFill>
                   <a:srgbClr val="E2E8F0"/>
                 </a:solidFill>
@@ -8926,69 +8578,21 @@
               </a:defRPr>
             </a:pPr>
             <a:r>
-              <a:t>Residuos Complejos: Muebles en desuso, heladeras, restos de poda, escombros y chatarra pesada.</a:t>
-            </a:r>
-          </a:p>
-          <a:p>
-            <a:pPr>
-              <a:spcBef>
-                <a:spcPts val="800"/>
-              </a:spcBef>
-              <a:defRPr sz="1100">
-                <a:solidFill>
-                  <a:srgbClr val="E2E8F0"/>
-                </a:solidFill>
-                <a:latin typeface="Arial"/>
-              </a:defRPr>
-            </a:pPr>
-            <a:r>
-              <a:t>Selección de Turnos: El vecino elige franja horaria: Mañana (08:00 a 12:00) o Tarde (14:00 a 18:00).</a:t>
-            </a:r>
-          </a:p>
-          <a:p>
-            <a:pPr>
-              <a:spcBef>
-                <a:spcPts val="800"/>
-              </a:spcBef>
-              <a:defRPr sz="1100">
-                <a:solidFill>
-                  <a:srgbClr val="E2E8F0"/>
-                </a:solidFill>
-                <a:latin typeface="Arial"/>
-              </a:defRPr>
-            </a:pPr>
-            <a:r>
-              <a:t>Geolocalización Automática: Fija las coordenadas exactas de la vereda del domicilio para optimizar el recorrido.</a:t>
-            </a:r>
-          </a:p>
-          <a:p>
-            <a:pPr>
-              <a:spcBef>
-                <a:spcPts val="800"/>
-              </a:spcBef>
-              <a:defRPr sz="1100">
-                <a:solidFill>
-                  <a:srgbClr val="E2E8F0"/>
-                </a:solidFill>
-                <a:latin typeface="Arial"/>
-              </a:defRPr>
-            </a:pPr>
-            <a:r>
-              <a:t>Tablero para Cuadrillas: El municipio o cooperativa asigna camiones en /dashboard/pickups y actualiza el estado en tiempo real (Pendiente → En Camino → Completado).</a:t>
-            </a:r>
-          </a:p>
-        </p:txBody>
-      </p:sp>
-      <p:sp>
-        <p:nvSpPr>
-          <p:cNvPr id="7" name="Rounded Rectangle 6"/>
+              <a:t>Premia la participación ambiental y conserva el progreso del usuario directamente en el dispositivo móvil.</a:t>
+            </a:r>
+          </a:p>
+        </p:txBody>
+      </p:sp>
+      <p:sp>
+        <p:nvSpPr>
+          <p:cNvPr id="9" name="Rounded Rectangle 8"/>
           <p:cNvSpPr/>
           <p:nvPr/>
         </p:nvSpPr>
         <p:spPr>
           <a:xfrm>
-            <a:off x="6217920" y="1828800"/>
-            <a:ext cx="5212080" cy="4480560"/>
+            <a:off x="6172200" y="3291839"/>
+            <a:ext cx="5257800" cy="1371600"/>
           </a:xfrm>
           <a:prstGeom prst="roundRect">
             <a:avLst/>
@@ -9017,11 +8621,11 @@
           </a:fontRef>
         </p:style>
         <p:txBody>
-          <a:bodyPr rtlCol="0" anchor="ctr" wrap="square" lIns="274320" rIns="274320" tIns="228600"/>
+          <a:bodyPr rtlCol="0" anchor="ctr" wrap="square" lIns="228600" rIns="228600" tIns="164592"/>
           <a:lstStyle/>
           <a:p>
             <a:pPr algn="ctr">
-              <a:defRPr sz="1400" b="1">
+              <a:defRPr sz="1200" b="1">
                 <a:solidFill>
                   <a:srgbClr val="8B5CF6"/>
                 </a:solidFill>
@@ -9029,15 +8633,15 @@
               </a:defRPr>
             </a:pPr>
             <a:r>
-              <a:t>♻️ RESPONSABILIDAD EXTENDIDA (MÓDULO REP)</a:t>
+              <a:t>4. RETIROS A DOMICILIO</a:t>
             </a:r>
           </a:p>
           <a:p>
             <a:pPr>
               <a:spcBef>
-                <a:spcPts val="800"/>
+                <a:spcPts val="400"/>
               </a:spcBef>
-              <a:defRPr sz="1100">
+              <a:defRPr sz="1050">
                 <a:solidFill>
                   <a:srgbClr val="E2E8F0"/>
                 </a:solidFill>
@@ -9045,15 +8649,70 @@
               </a:defRPr>
             </a:pPr>
             <a:r>
-              <a:t>Vinculación con Fabricantes: Conecta al consumidor con marcas y programas de recupero regulados por ley.</a:t>
+              <a:t>Permite solicitar la recolección de muebles, escombros, chatarra y restos de poda con selección de turnos.</a:t>
+            </a:r>
+          </a:p>
+        </p:txBody>
+      </p:sp>
+      <p:sp>
+        <p:nvSpPr>
+          <p:cNvPr id="10" name="Rounded Rectangle 9"/>
+          <p:cNvSpPr/>
+          <p:nvPr/>
+        </p:nvSpPr>
+        <p:spPr>
+          <a:xfrm>
+            <a:off x="731520" y="4800600"/>
+            <a:ext cx="5257800" cy="1371600"/>
+          </a:xfrm>
+          <a:prstGeom prst="roundRect">
+            <a:avLst/>
+          </a:prstGeom>
+          <a:solidFill>
+            <a:srgbClr val="1E293B"/>
+          </a:solidFill>
+          <a:ln w="19050">
+            <a:solidFill>
+              <a:srgbClr val="3B82F6"/>
+            </a:solidFill>
+          </a:ln>
+        </p:spPr>
+        <p:style>
+          <a:lnRef idx="1">
+            <a:schemeClr val="accent1"/>
+          </a:lnRef>
+          <a:fillRef idx="3">
+            <a:schemeClr val="accent1"/>
+          </a:fillRef>
+          <a:effectRef idx="2">
+            <a:schemeClr val="accent1"/>
+          </a:effectRef>
+          <a:fontRef idx="minor">
+            <a:schemeClr val="lt1"/>
+          </a:fontRef>
+        </p:style>
+        <p:txBody>
+          <a:bodyPr rtlCol="0" anchor="ctr" wrap="square" lIns="228600" rIns="228600" tIns="164592"/>
+          <a:lstStyle/>
+          <a:p>
+            <a:pPr algn="ctr">
+              <a:defRPr sz="1200" b="1">
+                <a:solidFill>
+                  <a:srgbClr val="3B82F6"/>
+                </a:solidFill>
+                <a:latin typeface="Arial"/>
+              </a:defRPr>
+            </a:pPr>
+            <a:r>
+              <a:t>5. PANEL ADMINISTRATIVO</a:t>
             </a:r>
           </a:p>
           <a:p>
             <a:pPr>
               <a:spcBef>
-                <a:spcPts val="800"/>
+                <a:spcPts val="400"/>
               </a:spcBef>
-              <a:defRPr sz="1100">
+              <a:defRPr sz="1050">
                 <a:solidFill>
                   <a:srgbClr val="E2E8F0"/>
                 </a:solidFill>
@@ -9061,15 +8720,70 @@
               </a:defRPr>
             </a:pPr>
             <a:r>
-              <a:t>Residuos Críticos: Canales seguros para pilas, baterías de litio, neumáticos fuera de uso, agroquímicos y RAEE.</a:t>
+              <a:t>Municipios y empresas gestionan puntos, solicitudes de retiro, catálogo de recompensas y métricas.</a:t>
+            </a:r>
+          </a:p>
+        </p:txBody>
+      </p:sp>
+      <p:sp>
+        <p:nvSpPr>
+          <p:cNvPr id="11" name="Rounded Rectangle 10"/>
+          <p:cNvSpPr/>
+          <p:nvPr/>
+        </p:nvSpPr>
+        <p:spPr>
+          <a:xfrm>
+            <a:off x="6172200" y="4800600"/>
+            <a:ext cx="5257800" cy="1371600"/>
+          </a:xfrm>
+          <a:prstGeom prst="roundRect">
+            <a:avLst/>
+          </a:prstGeom>
+          <a:solidFill>
+            <a:srgbClr val="1E293B"/>
+          </a:solidFill>
+          <a:ln w="19050">
+            <a:solidFill>
+              <a:srgbClr val="F43F5E"/>
+            </a:solidFill>
+          </a:ln>
+        </p:spPr>
+        <p:style>
+          <a:lnRef idx="1">
+            <a:schemeClr val="accent1"/>
+          </a:lnRef>
+          <a:fillRef idx="3">
+            <a:schemeClr val="accent1"/>
+          </a:fillRef>
+          <a:effectRef idx="2">
+            <a:schemeClr val="accent1"/>
+          </a:effectRef>
+          <a:fontRef idx="minor">
+            <a:schemeClr val="lt1"/>
+          </a:fontRef>
+        </p:style>
+        <p:txBody>
+          <a:bodyPr rtlCol="0" anchor="ctr" wrap="square" lIns="228600" rIns="228600" tIns="164592"/>
+          <a:lstStyle/>
+          <a:p>
+            <a:pPr algn="ctr">
+              <a:defRPr sz="1200" b="1">
+                <a:solidFill>
+                  <a:srgbClr val="F43F5E"/>
+                </a:solidFill>
+                <a:latin typeface="Arial"/>
+              </a:defRPr>
+            </a:pPr>
+            <a:r>
+              <a:t>6. MÓDULO REP</a:t>
             </a:r>
           </a:p>
           <a:p>
             <a:pPr>
               <a:spcBef>
-                <a:spcPts val="800"/>
+                <a:spcPts val="400"/>
               </a:spcBef>
-              <a:defRPr sz="1100">
+              <a:defRPr sz="1050">
                 <a:solidFill>
                   <a:srgbClr val="E2E8F0"/>
                 </a:solidFill>
@@ -9077,23 +8791,7 @@
               </a:defRPr>
             </a:pPr>
             <a:r>
-              <a:t>Puntos Verdes Certificados: Georreferenciación de puntos especiales con operadores habilitados ambientalmente.</a:t>
-            </a:r>
-          </a:p>
-          <a:p>
-            <a:pPr>
-              <a:spcBef>
-                <a:spcPts val="800"/>
-              </a:spcBef>
-              <a:defRPr sz="1100">
-                <a:solidFill>
-                  <a:srgbClr val="E2E8F0"/>
-                </a:solidFill>
-                <a:latin typeface="Arial"/>
-              </a:defRPr>
-            </a:pPr>
-            <a:r>
-              <a:t>Trazabilidad y Certificación: Generación de certificados de disposición final sustentable para industrias y comercios.</a:t>
+              <a:t>Da visibilidad a marcas y programas oficiales de recuperación de residuos especiales (pilas, baterías, RAEEs).</a:t>
             </a:r>
           </a:p>
         </p:txBody>
@@ -9167,7 +8865,7 @@
         </p:nvSpPr>
         <p:spPr>
           <a:xfrm>
-            <a:off x="731520" y="411480"/>
+            <a:off x="731520" y="384048"/>
             <a:ext cx="3474720" cy="347472"/>
           </a:xfrm>
           <a:prstGeom prst="roundRect">
@@ -9207,7 +8905,7 @@
               </a:defRPr>
             </a:pPr>
             <a:r>
-              <a:t>07. ECONOMÍA CIRCULAR Y BENEFICIOS</a:t>
+              <a:t>07. OPORTUNIDAD</a:t>
             </a:r>
           </a:p>
         </p:txBody>
@@ -9228,7 +8926,7 @@
         </p:blipFill>
         <p:spPr>
           <a:xfrm>
-            <a:off x="11064240" y="365760"/>
+            <a:off x="11064240" y="347472"/>
             <a:ext cx="594360" cy="594360"/>
           </a:xfrm>
           <a:prstGeom prst="rect">
@@ -9244,8 +8942,8 @@
         </p:nvSpPr>
         <p:spPr>
           <a:xfrm>
-            <a:off x="731520" y="777240"/>
-            <a:ext cx="10515600" cy="731520"/>
+            <a:off x="731520" y="749808"/>
+            <a:ext cx="10515600" cy="777240"/>
           </a:xfrm>
           <a:prstGeom prst="rect">
             <a:avLst/>
@@ -9259,7 +8957,7 @@
           <a:lstStyle/>
           <a:p>
             <a:pPr>
-              <a:defRPr sz="2600" b="1">
+              <a:defRPr sz="2500" b="1">
                 <a:solidFill>
                   <a:srgbClr val="FFFFFF"/>
                 </a:solidFill>
@@ -9267,13 +8965,13 @@
               </a:defRPr>
             </a:pPr>
             <a:r>
-              <a:t>Ecopuntos: Fidelización y Gamificación B2B</a:t>
+              <a:t>Mercado y Oportunidades de Crecimiento</a:t>
             </a:r>
           </a:p>
           <a:p>
             <a:pPr>
               <a:spcBef>
-                <a:spcPts val="400"/>
+                <a:spcPts val="300"/>
               </a:spcBef>
               <a:defRPr sz="1300">
                 <a:solidFill>
@@ -9283,7 +8981,7 @@
               </a:defRPr>
             </a:pPr>
             <a:r>
-              <a:t>Incentivos tangibles que impulsan el comercio de proximidad y premian la conducta verde</a:t>
+              <a:t>El contexto favorable para la integración de tecnología y cuidado ambiental urbano</a:t>
             </a:r>
           </a:p>
         </p:txBody>
@@ -9296,8 +8994,8 @@
         </p:nvSpPr>
         <p:spPr>
           <a:xfrm>
-            <a:off x="731520" y="1828800"/>
-            <a:ext cx="3383280" cy="3017520"/>
+            <a:off x="731520" y="1783080"/>
+            <a:ext cx="2560320" cy="3108960"/>
           </a:xfrm>
           <a:prstGeom prst="roundRect">
             <a:avLst/>
@@ -9326,11 +9024,11 @@
           </a:fontRef>
         </p:style>
         <p:txBody>
-          <a:bodyPr rtlCol="0" anchor="ctr" wrap="square" lIns="228600" rIns="228600" tIns="228600"/>
+          <a:bodyPr rtlCol="0" anchor="ctr" wrap="square" lIns="182880" rIns="182880" tIns="201168"/>
           <a:lstStyle/>
           <a:p>
             <a:pPr algn="ctr">
-              <a:defRPr sz="1250" b="1">
+              <a:defRPr sz="1200" b="1">
                 <a:solidFill>
                   <a:srgbClr val="10B981"/>
                 </a:solidFill>
@@ -9338,15 +9036,15 @@
               </a:defRPr>
             </a:pPr>
             <a:r>
-              <a:t>BILLETERA DE ECOPUNTOS</a:t>
+              <a:t>CONCIENCIA ECOLÓGICA</a:t>
             </a:r>
           </a:p>
           <a:p>
             <a:pPr>
               <a:spcBef>
-                <a:spcPts val="600"/>
+                <a:spcPts val="800"/>
               </a:spcBef>
-              <a:defRPr sz="1100">
+              <a:defRPr sz="1050">
                 <a:solidFill>
                   <a:srgbClr val="E2E8F0"/>
                 </a:solidFill>
@@ -9354,7 +9052,7 @@
               </a:defRPr>
             </a:pPr>
             <a:r>
-              <a:t>Acreditación automática por cada acción de descarte verificada. Contador de racha de reciclaje semanal y medallas por hitos (Ej: 'Guardián del Plástico', 'Héroe del Vidrio').</a:t>
+              <a:t>Creciente interés de la ciudadanía en adoptar hábitos sustentables y reducir el impacto de sus residuos cotidianos.</a:t>
             </a:r>
           </a:p>
         </p:txBody>
@@ -9367,8 +9065,8 @@
         </p:nvSpPr>
         <p:spPr>
           <a:xfrm>
-            <a:off x="4389120" y="1828800"/>
-            <a:ext cx="3383280" cy="3017520"/>
+            <a:off x="3429000" y="1783080"/>
+            <a:ext cx="2560320" cy="3108960"/>
           </a:xfrm>
           <a:prstGeom prst="roundRect">
             <a:avLst/>
@@ -9397,11 +9095,11 @@
           </a:fontRef>
         </p:style>
         <p:txBody>
-          <a:bodyPr rtlCol="0" anchor="ctr" wrap="square" lIns="228600" rIns="228600" tIns="228600"/>
+          <a:bodyPr rtlCol="0" anchor="ctr" wrap="square" lIns="182880" rIns="182880" tIns="201168"/>
           <a:lstStyle/>
           <a:p>
             <a:pPr algn="ctr">
-              <a:defRPr sz="1250" b="1">
+              <a:defRPr sz="1200" b="1">
                 <a:solidFill>
                   <a:srgbClr val="06B6D4"/>
                 </a:solidFill>
@@ -9409,15 +9107,15 @@
               </a:defRPr>
             </a:pPr>
             <a:r>
-              <a:t>CUPONES DE COMERCIOS LOCALES</a:t>
+              <a:t>USO MASIVO DE SMARTPHONES</a:t>
             </a:r>
           </a:p>
           <a:p>
             <a:pPr>
               <a:spcBef>
-                <a:spcPts val="600"/>
+                <a:spcPts val="800"/>
               </a:spcBef>
-              <a:defRPr sz="1100">
+              <a:defRPr sz="1050">
                 <a:solidFill>
                   <a:srgbClr val="E2E8F0"/>
                 </a:solidFill>
@@ -9425,7 +9123,7 @@
               </a:defRPr>
             </a:pPr>
             <a:r>
-              <a:t>Catálogo interactivo en RewardsScreen.kt. Canje de códigos QR por descuentos en supermercados, cafeterías, ferreterías y farmacias de Villa del Rosario y Matorrales.</a:t>
+              <a:t>Penetración superior al 85% de dispositivos móviles en la población, permitiendo llegada directa al hogar.</a:t>
             </a:r>
           </a:p>
         </p:txBody>
@@ -9438,8 +9136,79 @@
         </p:nvSpPr>
         <p:spPr>
           <a:xfrm>
-            <a:off x="8046720" y="1828800"/>
-            <a:ext cx="3383280" cy="3017520"/>
+            <a:off x="6126480" y="1783080"/>
+            <a:ext cx="2560320" cy="3108960"/>
+          </a:xfrm>
+          <a:prstGeom prst="roundRect">
+            <a:avLst/>
+          </a:prstGeom>
+          <a:solidFill>
+            <a:srgbClr val="1E293B"/>
+          </a:solidFill>
+          <a:ln w="19050">
+            <a:solidFill>
+              <a:srgbClr val="F59E0B"/>
+            </a:solidFill>
+          </a:ln>
+        </p:spPr>
+        <p:style>
+          <a:lnRef idx="1">
+            <a:schemeClr val="accent1"/>
+          </a:lnRef>
+          <a:fillRef idx="3">
+            <a:schemeClr val="accent1"/>
+          </a:fillRef>
+          <a:effectRef idx="2">
+            <a:schemeClr val="accent1"/>
+          </a:effectRef>
+          <a:fontRef idx="minor">
+            <a:schemeClr val="lt1"/>
+          </a:fontRef>
+        </p:style>
+        <p:txBody>
+          <a:bodyPr rtlCol="0" anchor="ctr" wrap="square" lIns="182880" rIns="182880" tIns="201168"/>
+          <a:lstStyle/>
+          <a:p>
+            <a:pPr algn="ctr">
+              <a:defRPr sz="1200" b="1">
+                <a:solidFill>
+                  <a:srgbClr val="F59E0B"/>
+                </a:solidFill>
+                <a:latin typeface="Arial"/>
+              </a:defRPr>
+            </a:pPr>
+            <a:r>
+              <a:t>AUGE DE SOLUCIONES CON IA</a:t>
+            </a:r>
+          </a:p>
+          <a:p>
+            <a:pPr>
+              <a:spcBef>
+                <a:spcPts val="800"/>
+              </a:spcBef>
+              <a:defRPr sz="1050">
+                <a:solidFill>
+                  <a:srgbClr val="E2E8F0"/>
+                </a:solidFill>
+                <a:latin typeface="Arial"/>
+              </a:defRPr>
+            </a:pPr>
+            <a:r>
+              <a:t>Madurez de modelos multimodales como Google Gemini capaces de resolver consultas complejas al instante.</a:t>
+            </a:r>
+          </a:p>
+        </p:txBody>
+      </p:sp>
+      <p:sp>
+        <p:nvSpPr>
+          <p:cNvPr id="9" name="Rounded Rectangle 8"/>
+          <p:cNvSpPr/>
+          <p:nvPr/>
+        </p:nvSpPr>
+        <p:spPr>
+          <a:xfrm>
+            <a:off x="8823960" y="1783080"/>
+            <a:ext cx="2560320" cy="3108960"/>
           </a:xfrm>
           <a:prstGeom prst="roundRect">
             <a:avLst/>
@@ -9468,11 +9237,11 @@
           </a:fontRef>
         </p:style>
         <p:txBody>
-          <a:bodyPr rtlCol="0" anchor="ctr" wrap="square" lIns="228600" rIns="228600" tIns="228600"/>
+          <a:bodyPr rtlCol="0" anchor="ctr" wrap="square" lIns="182880" rIns="182880" tIns="201168"/>
           <a:lstStyle/>
           <a:p>
             <a:pPr algn="ctr">
-              <a:defRPr sz="1250" b="1">
+              <a:defRPr sz="1200" b="1">
                 <a:solidFill>
                   <a:srgbClr val="8B5CF6"/>
                 </a:solidFill>
@@ -9480,15 +9249,15 @@
               </a:defRPr>
             </a:pPr>
             <a:r>
-              <a:t>MÉTRICAS DE IMPACTO PERSONAL</a:t>
+              <a:t>SOSTENIBILIDAD Y CIUDADES INTELIGENTES</a:t>
             </a:r>
           </a:p>
           <a:p>
             <a:pPr>
               <a:spcBef>
-                <a:spcPts val="600"/>
+                <a:spcPts val="800"/>
               </a:spcBef>
-              <a:defRPr sz="1100">
+              <a:defRPr sz="1050">
                 <a:solidFill>
                   <a:srgbClr val="E2E8F0"/>
                 </a:solidFill>
@@ -9496,21 +9265,21 @@
               </a:defRPr>
             </a:pPr>
             <a:r>
-              <a:t>El ciudadano visualiza el resultado concreto de su esfuerzo: kg de residuos desviados de vertederos, kg de CO2 evitados y litros de agua potable conservados.</a:t>
-            </a:r>
-          </a:p>
-        </p:txBody>
-      </p:sp>
-      <p:sp>
-        <p:nvSpPr>
-          <p:cNvPr id="9" name="Rounded Rectangle 8"/>
+              <a:t>Municipios con presupuestos activos para modernización GIRSU y cumplimiento de metas ambientales.</a:t>
+            </a:r>
+          </a:p>
+        </p:txBody>
+      </p:sp>
+      <p:sp>
+        <p:nvSpPr>
+          <p:cNvPr id="10" name="Rounded Rectangle 9"/>
           <p:cNvSpPr/>
           <p:nvPr/>
         </p:nvSpPr>
         <p:spPr>
           <a:xfrm>
             <a:off x="731520" y="5074920"/>
-            <a:ext cx="10698480" cy="1280160"/>
+            <a:ext cx="10698480" cy="1234440"/>
           </a:xfrm>
           <a:prstGeom prst="roundRect">
             <a:avLst/>
@@ -9539,19 +9308,19 @@
           </a:fontRef>
         </p:style>
         <p:txBody>
-          <a:bodyPr rtlCol="0" anchor="ctr" wrap="square" lIns="274320" tIns="164592"/>
+          <a:bodyPr rtlCol="0" anchor="ctr" wrap="square" lIns="274320" tIns="182880"/>
           <a:lstStyle/>
           <a:p>
             <a:pPr algn="ctr">
-              <a:defRPr sz="1100" b="1">
-                <a:solidFill>
-                  <a:srgbClr val="10B981"/>
-                </a:solidFill>
-                <a:latin typeface="Arial"/>
-              </a:defRPr>
-            </a:pPr>
-            <a:r>
-              <a:t>🤝 VALOR PARA LOS COMERCIOS Y EMPRESAS PARTICIPANTES:</a:t>
+              <a:defRPr sz="1300" b="1">
+                <a:solidFill>
+                  <a:srgbClr val="34D399"/>
+                </a:solidFill>
+                <a:latin typeface="Arial"/>
+              </a:defRPr>
+            </a:pPr>
+            <a:r>
+              <a:t>“La tecnología puede transformar hábitos ambientales.”</a:t>
             </a:r>
           </a:p>
           <a:p>
@@ -9567,7 +9336,7 @@
               </a:defRPr>
             </a:pPr>
             <a:r>
-              <a:t>Los comercios publican promociones directamente en el panel web (/dashboard/rewards), atrayendo clientes comprometidos, posicionando su marca como socialmente responsable y dinamizando las ventas locales a costo cero de intermediación.</a:t>
+              <a:t>El crecimiento de las ciudades inteligentes y la necesidad urgente de soluciones sustentables generan una ventana estratégica inmejorable para EcoMapa en los municipios de la provincia.</a:t>
             </a:r>
           </a:p>
         </p:txBody>
@@ -9641,14 +9410,14 @@
         </p:nvSpPr>
         <p:spPr>
           <a:xfrm>
-            <a:off x="731520" y="411480"/>
+            <a:off x="731520" y="384048"/>
             <a:ext cx="3474720" cy="347472"/>
           </a:xfrm>
           <a:prstGeom prst="roundRect">
             <a:avLst/>
           </a:prstGeom>
           <a:solidFill>
-            <a:srgbClr val="3B82F6"/>
+            <a:srgbClr val="06B6D4"/>
           </a:solidFill>
           <a:ln>
             <a:noFill/>
@@ -9681,7 +9450,7 @@
               </a:defRPr>
             </a:pPr>
             <a:r>
-              <a:t>08. INGENIERÍA DE SOFTWARE</a:t>
+              <a:t>08. MODELO DE NEGOCIOS</a:t>
             </a:r>
           </a:p>
         </p:txBody>
@@ -9702,7 +9471,7 @@
         </p:blipFill>
         <p:spPr>
           <a:xfrm>
-            <a:off x="11064240" y="365760"/>
+            <a:off x="11064240" y="347472"/>
             <a:ext cx="594360" cy="594360"/>
           </a:xfrm>
           <a:prstGeom prst="rect">
@@ -9718,8 +9487,8 @@
         </p:nvSpPr>
         <p:spPr>
           <a:xfrm>
-            <a:off x="731520" y="777240"/>
-            <a:ext cx="10515600" cy="731520"/>
+            <a:off x="731520" y="749808"/>
+            <a:ext cx="10515600" cy="777240"/>
           </a:xfrm>
           <a:prstGeom prst="rect">
             <a:avLst/>
@@ -9733,7 +9502,7 @@
           <a:lstStyle/>
           <a:p>
             <a:pPr>
-              <a:defRPr sz="2600" b="1">
+              <a:defRPr sz="2500" b="1">
                 <a:solidFill>
                   <a:srgbClr val="FFFFFF"/>
                 </a:solidFill>
@@ -9741,13 +9510,13 @@
               </a:defRPr>
             </a:pPr>
             <a:r>
-              <a:t>Arquitectura Cloud Serverless, Reactiva y Escalable</a:t>
+              <a:t>Modelo de Negocios: B2B y B2G SaaS</a:t>
             </a:r>
           </a:p>
           <a:p>
             <a:pPr>
               <a:spcBef>
-                <a:spcPts val="400"/>
+                <a:spcPts val="300"/>
               </a:spcBef>
               <a:defRPr sz="1300">
                 <a:solidFill>
@@ -9757,35 +9526,82 @@
               </a:defRPr>
             </a:pPr>
             <a:r>
-              <a:t>Diseño desacoplado basado en Microservicios, Edge Computing y Event-Driven Architecture</a:t>
-            </a:r>
-          </a:p>
-        </p:txBody>
-      </p:sp>
-      <p:pic>
-        <p:nvPicPr>
-          <p:cNvPr id="6" name="Picture 5" descr="04_arquitectura.png"/>
-          <p:cNvPicPr>
-            <a:picLocks noChangeAspect="1"/>
-          </p:cNvPicPr>
-          <p:nvPr/>
-        </p:nvPicPr>
-        <p:blipFill>
-          <a:blip r:embed="rId3"/>
-          <a:stretch>
-            <a:fillRect/>
-          </a:stretch>
-        </p:blipFill>
-        <p:spPr>
-          <a:xfrm>
-            <a:off x="731520" y="1828800"/>
-            <a:ext cx="6217920" cy="4480560"/>
-          </a:xfrm>
-          <a:prstGeom prst="rect">
-            <a:avLst/>
-          </a:prstGeom>
-        </p:spPr>
-      </p:pic>
+              <a:t>Generando triple impacto ambiental, social y comercial al mismo tiempo</a:t>
+            </a:r>
+          </a:p>
+        </p:txBody>
+      </p:sp>
+      <p:sp>
+        <p:nvSpPr>
+          <p:cNvPr id="6" name="Rounded Rectangle 5"/>
+          <p:cNvSpPr/>
+          <p:nvPr/>
+        </p:nvSpPr>
+        <p:spPr>
+          <a:xfrm>
+            <a:off x="731520" y="1783080"/>
+            <a:ext cx="2560320" cy="3108960"/>
+          </a:xfrm>
+          <a:prstGeom prst="roundRect">
+            <a:avLst/>
+          </a:prstGeom>
+          <a:solidFill>
+            <a:srgbClr val="1E293B"/>
+          </a:solidFill>
+          <a:ln w="19050">
+            <a:solidFill>
+              <a:srgbClr val="06B6D4"/>
+            </a:solidFill>
+          </a:ln>
+        </p:spPr>
+        <p:style>
+          <a:lnRef idx="1">
+            <a:schemeClr val="accent1"/>
+          </a:lnRef>
+          <a:fillRef idx="3">
+            <a:schemeClr val="accent1"/>
+          </a:fillRef>
+          <a:effectRef idx="2">
+            <a:schemeClr val="accent1"/>
+          </a:effectRef>
+          <a:fontRef idx="minor">
+            <a:schemeClr val="lt1"/>
+          </a:fontRef>
+        </p:style>
+        <p:txBody>
+          <a:bodyPr rtlCol="0" anchor="ctr" wrap="square" lIns="182880" rIns="182880" tIns="201168"/>
+          <a:lstStyle/>
+          <a:p>
+            <a:pPr algn="ctr">
+              <a:defRPr sz="1200" b="1">
+                <a:solidFill>
+                  <a:srgbClr val="06B6D4"/>
+                </a:solidFill>
+                <a:latin typeface="Arial"/>
+              </a:defRPr>
+            </a:pPr>
+            <a:r>
+              <a:t>B2G: MUNICIPIOS</a:t>
+            </a:r>
+          </a:p>
+          <a:p>
+            <a:pPr>
+              <a:spcBef>
+                <a:spcPts val="800"/>
+              </a:spcBef>
+              <a:defRPr sz="1050">
+                <a:solidFill>
+                  <a:srgbClr val="E2E8F0"/>
+                </a:solidFill>
+                <a:latin typeface="Arial"/>
+              </a:defRPr>
+            </a:pPr>
+            <a:r>
+              <a:t>Suscripciones mensuales a gobiernos locales para administrar sus puntos limpios, monitorear cuadrillas y certificar estadísticas GIRSU.</a:t>
+            </a:r>
+          </a:p>
+        </p:txBody>
+      </p:sp>
       <p:sp>
         <p:nvSpPr>
           <p:cNvPr id="7" name="Rounded Rectangle 6"/>
@@ -9794,8 +9610,79 @@
         </p:nvSpPr>
         <p:spPr>
           <a:xfrm>
-            <a:off x="7132320" y="1828800"/>
-            <a:ext cx="4297680" cy="1051560"/>
+            <a:off x="3429000" y="1783080"/>
+            <a:ext cx="2560320" cy="3108960"/>
+          </a:xfrm>
+          <a:prstGeom prst="roundRect">
+            <a:avLst/>
+          </a:prstGeom>
+          <a:solidFill>
+            <a:srgbClr val="1E293B"/>
+          </a:solidFill>
+          <a:ln w="19050">
+            <a:solidFill>
+              <a:srgbClr val="8B5CF6"/>
+            </a:solidFill>
+          </a:ln>
+        </p:spPr>
+        <p:style>
+          <a:lnRef idx="1">
+            <a:schemeClr val="accent1"/>
+          </a:lnRef>
+          <a:fillRef idx="3">
+            <a:schemeClr val="accent1"/>
+          </a:fillRef>
+          <a:effectRef idx="2">
+            <a:schemeClr val="accent1"/>
+          </a:effectRef>
+          <a:fontRef idx="minor">
+            <a:schemeClr val="lt1"/>
+          </a:fontRef>
+        </p:style>
+        <p:txBody>
+          <a:bodyPr rtlCol="0" anchor="ctr" wrap="square" lIns="182880" rIns="182880" tIns="201168"/>
+          <a:lstStyle/>
+          <a:p>
+            <a:pPr algn="ctr">
+              <a:defRPr sz="1200" b="1">
+                <a:solidFill>
+                  <a:srgbClr val="8B5CF6"/>
+                </a:solidFill>
+                <a:latin typeface="Arial"/>
+              </a:defRPr>
+            </a:pPr>
+            <a:r>
+              <a:t>B2B: EMPRESAS Y FARMACIAS</a:t>
+            </a:r>
+          </a:p>
+          <a:p>
+            <a:pPr>
+              <a:spcBef>
+                <a:spcPts val="800"/>
+              </a:spcBef>
+              <a:defRPr sz="1050">
+                <a:solidFill>
+                  <a:srgbClr val="E2E8F0"/>
+                </a:solidFill>
+                <a:latin typeface="Arial"/>
+              </a:defRPr>
+            </a:pPr>
+            <a:r>
+              <a:t>Suscripciones a comercios privados para figurar como Eco-Puntos oficiales y publicar cupones de descuento patrocinados.</a:t>
+            </a:r>
+          </a:p>
+        </p:txBody>
+      </p:sp>
+      <p:sp>
+        <p:nvSpPr>
+          <p:cNvPr id="8" name="Rounded Rectangle 7"/>
+          <p:cNvSpPr/>
+          <p:nvPr/>
+        </p:nvSpPr>
+        <p:spPr>
+          <a:xfrm>
+            <a:off x="6126480" y="1783080"/>
+            <a:ext cx="2560320" cy="3108960"/>
           </a:xfrm>
           <a:prstGeom prst="roundRect">
             <a:avLst/>
@@ -9824,11 +9711,11 @@
           </a:fontRef>
         </p:style>
         <p:txBody>
-          <a:bodyPr rtlCol="0" anchor="ctr" wrap="square" lIns="182880" rIns="182880" tIns="109728"/>
+          <a:bodyPr rtlCol="0" anchor="ctr" wrap="square" lIns="182880" rIns="182880" tIns="201168"/>
           <a:lstStyle/>
           <a:p>
             <a:pPr algn="ctr">
-              <a:defRPr sz="1100" b="1">
+              <a:defRPr sz="1200" b="1">
                 <a:solidFill>
                   <a:srgbClr val="10B981"/>
                 </a:solidFill>
@@ -9836,15 +9723,15 @@
               </a:defRPr>
             </a:pPr>
             <a:r>
-              <a:t>MOBILE CLIENT (ANDROID)</a:t>
+              <a:t>APP MÓVIL 100% GRATUITA</a:t>
             </a:r>
           </a:p>
           <a:p>
             <a:pPr>
               <a:spcBef>
-                <a:spcPts val="300"/>
+                <a:spcPts val="800"/>
               </a:spcBef>
-              <a:defRPr sz="1000">
+              <a:defRPr sz="1050">
                 <a:solidFill>
                   <a:srgbClr val="E2E8F0"/>
                 </a:solidFill>
@@ -9852,78 +9739,7 @@
               </a:defRPr>
             </a:pPr>
             <a:r>
-              <a:t>Kotlin 1.9+ • Jetpack Compose • Material 3 • CameraX • Retrofit 2 • Room Local Database.</a:t>
-            </a:r>
-          </a:p>
-        </p:txBody>
-      </p:sp>
-      <p:sp>
-        <p:nvSpPr>
-          <p:cNvPr id="8" name="Rounded Rectangle 7"/>
-          <p:cNvSpPr/>
-          <p:nvPr/>
-        </p:nvSpPr>
-        <p:spPr>
-          <a:xfrm>
-            <a:off x="7132320" y="2971800"/>
-            <a:ext cx="4297680" cy="1051560"/>
-          </a:xfrm>
-          <a:prstGeom prst="roundRect">
-            <a:avLst/>
-          </a:prstGeom>
-          <a:solidFill>
-            <a:srgbClr val="1E293B"/>
-          </a:solidFill>
-          <a:ln w="19050">
-            <a:solidFill>
-              <a:srgbClr val="06B6D4"/>
-            </a:solidFill>
-          </a:ln>
-        </p:spPr>
-        <p:style>
-          <a:lnRef idx="1">
-            <a:schemeClr val="accent1"/>
-          </a:lnRef>
-          <a:fillRef idx="3">
-            <a:schemeClr val="accent1"/>
-          </a:fillRef>
-          <a:effectRef idx="2">
-            <a:schemeClr val="accent1"/>
-          </a:effectRef>
-          <a:fontRef idx="minor">
-            <a:schemeClr val="lt1"/>
-          </a:fontRef>
-        </p:style>
-        <p:txBody>
-          <a:bodyPr rtlCol="0" anchor="ctr" wrap="square" lIns="182880" rIns="182880" tIns="109728"/>
-          <a:lstStyle/>
-          <a:p>
-            <a:pPr algn="ctr">
-              <a:defRPr sz="1100" b="1">
-                <a:solidFill>
-                  <a:srgbClr val="06B6D4"/>
-                </a:solidFill>
-                <a:latin typeface="Arial"/>
-              </a:defRPr>
-            </a:pPr>
-            <a:r>
-              <a:t>CLOUD SERVERLESS &amp; DB</a:t>
-            </a:r>
-          </a:p>
-          <a:p>
-            <a:pPr>
-              <a:spcBef>
-                <a:spcPts val="300"/>
-              </a:spcBef>
-              <a:defRPr sz="1000">
-                <a:solidFill>
-                  <a:srgbClr val="E2E8F0"/>
-                </a:solidFill>
-                <a:latin typeface="Arial"/>
-              </a:defRPr>
-            </a:pPr>
-            <a:r>
-              <a:t>Supabase Platform • PostgreSQL 15 • PostGIS 3.3 • Row Level Security (RLS) • Storage Buckets.</a:t>
+              <a:t>Acceso totalmente libre para el vecino, sin muros de pago ni publicidad molesta, fomentando la máxima adopción ciudadana.</a:t>
             </a:r>
           </a:p>
         </p:txBody>
@@ -9936,8 +9752,8 @@
         </p:nvSpPr>
         <p:spPr>
           <a:xfrm>
-            <a:off x="7132320" y="4114800"/>
-            <a:ext cx="4297680" cy="1051560"/>
+            <a:off x="8823960" y="1783080"/>
+            <a:ext cx="2560320" cy="3108960"/>
           </a:xfrm>
           <a:prstGeom prst="roundRect">
             <a:avLst/>
@@ -9966,11 +9782,11 @@
           </a:fontRef>
         </p:style>
         <p:txBody>
-          <a:bodyPr rtlCol="0" anchor="ctr" wrap="square" lIns="182880" rIns="182880" tIns="109728"/>
+          <a:bodyPr rtlCol="0" anchor="ctr" wrap="square" lIns="182880" rIns="182880" tIns="201168"/>
           <a:lstStyle/>
           <a:p>
             <a:pPr algn="ctr">
-              <a:defRPr sz="1100" b="1">
+              <a:defRPr sz="1200" b="1">
                 <a:solidFill>
                   <a:srgbClr val="F59E0B"/>
                 </a:solidFill>
@@ -9978,15 +9794,15 @@
               </a:defRPr>
             </a:pPr>
             <a:r>
-              <a:t>EDGE AI INFERENCE</a:t>
+              <a:t>TIERS DE SERVICIO SAAS</a:t>
             </a:r>
           </a:p>
           <a:p>
             <a:pPr>
               <a:spcBef>
-                <a:spcPts val="300"/>
+                <a:spcPts val="800"/>
               </a:spcBef>
-              <a:defRPr sz="1000">
+              <a:defRPr sz="1050">
                 <a:solidFill>
                   <a:srgbClr val="E2E8F0"/>
                 </a:solidFill>
@@ -9994,7 +9810,7 @@
               </a:defRPr>
             </a:pPr>
             <a:r>
-              <a:t>Supabase Edge Functions (Deno / TS) • Google Gemini 1.5 Flash Vision API • Prompt Engineering seguro.</a:t>
+              <a:t>Planes escalables (Basic • Pro • Enterprise) adaptados a la cantidad de habitantes y volumen de puntos limpios.</a:t>
             </a:r>
           </a:p>
         </p:txBody>
@@ -10007,8 +9823,8 @@
         </p:nvSpPr>
         <p:spPr>
           <a:xfrm>
-            <a:off x="7132320" y="5257800"/>
-            <a:ext cx="4297680" cy="1051560"/>
+            <a:off x="731520" y="5074920"/>
+            <a:ext cx="10698480" cy="1234440"/>
           </a:xfrm>
           <a:prstGeom prst="roundRect">
             <a:avLst/>
@@ -10016,9 +9832,9 @@
           <a:solidFill>
             <a:srgbClr val="1E293B"/>
           </a:solidFill>
-          <a:ln w="19050">
+          <a:ln w="12700">
             <a:solidFill>
-              <a:srgbClr val="8B5CF6"/>
+              <a:srgbClr val="06B6D4"/>
             </a:solidFill>
           </a:ln>
         </p:spPr>
@@ -10037,27 +9853,27 @@
           </a:fontRef>
         </p:style>
         <p:txBody>
-          <a:bodyPr rtlCol="0" anchor="ctr" wrap="square" lIns="182880" rIns="182880" tIns="109728"/>
+          <a:bodyPr rtlCol="0" anchor="ctr" wrap="square" lIns="274320" tIns="182880"/>
           <a:lstStyle/>
           <a:p>
             <a:pPr algn="ctr">
-              <a:defRPr sz="1100" b="1">
-                <a:solidFill>
-                  <a:srgbClr val="8B5CF6"/>
-                </a:solidFill>
-                <a:latin typeface="Arial"/>
-              </a:defRPr>
-            </a:pPr>
-            <a:r>
-              <a:t>WEB PLATFORMS (B2G / B2B)</a:t>
+              <a:defRPr sz="1300" b="1">
+                <a:solidFill>
+                  <a:srgbClr val="06B6D4"/>
+                </a:solidFill>
+                <a:latin typeface="Arial"/>
+              </a:defRPr>
+            </a:pPr>
+            <a:r>
+              <a:t>“EcoMapa genera impacto ambiental y valor comercial al mismo tiempo.”</a:t>
             </a:r>
           </a:p>
           <a:p>
             <a:pPr>
               <a:spcBef>
-                <a:spcPts val="300"/>
+                <a:spcPts val="400"/>
               </a:spcBef>
-              <a:defRPr sz="1000">
+              <a:defRPr sz="1100">
                 <a:solidFill>
                   <a:srgbClr val="E2E8F0"/>
                 </a:solidFill>
@@ -10065,7 +9881,7 @@
               </a:defRPr>
             </a:pPr>
             <a:r>
-              <a:t>React 19 • TypeScript • Vite • Tailwind CSS • Leaflet Maps • Lucide Icons • Vercel Hosting.</a:t>
+              <a:t>Un modelo autosustentable donde los municipios ahorran costos de logística y las empresas posicionan su marca verde mientras la comunidad recicla mejor.</a:t>
             </a:r>
           </a:p>
         </p:txBody>

--- a/Presentación - EcoMapa.pptx
+++ b/Presentación - EcoMapa.pptx
@@ -3115,7 +3115,7 @@
             <a:avLst/>
           </a:prstGeom>
           <a:solidFill>
-            <a:srgbClr val="0F172A"/>
+            <a:srgbClr val="FFFFFF"/>
           </a:solidFill>
           <a:ln>
             <a:noFill/>
@@ -3151,19 +3151,17 @@
         </p:nvSpPr>
         <p:spPr>
           <a:xfrm>
-            <a:off x="731520" y="502920"/>
-            <a:ext cx="5852160" cy="384048"/>
+            <a:off x="685800" y="548640"/>
+            <a:ext cx="4114800" cy="347472"/>
           </a:xfrm>
           <a:prstGeom prst="roundRect">
             <a:avLst/>
           </a:prstGeom>
           <a:solidFill>
-            <a:srgbClr val="1E293B"/>
+            <a:srgbClr val="DDF4E9"/>
           </a:solidFill>
-          <a:ln w="12700">
-            <a:solidFill>
-              <a:srgbClr val="06B6D4"/>
-            </a:solidFill>
+          <a:ln>
+            <a:noFill/>
           </a:ln>
         </p:spPr>
         <p:style>
@@ -3187,13 +3185,13 @@
             <a:pPr algn="ctr">
               <a:defRPr sz="1000" b="1">
                 <a:solidFill>
-                  <a:srgbClr val="06B6D4"/>
-                </a:solidFill>
-                <a:latin typeface="Arial"/>
-              </a:defRPr>
-            </a:pPr>
-            <a:r>
-              <a:t>CIVICLOOP TECHNOLOGIES S.A.  •  PROYECTO INTEGRADOR (PIN 2026)</a:t>
+                  <a:srgbClr val="0B6B4D"/>
+                </a:solidFill>
+                <a:latin typeface="Arial"/>
+              </a:defRPr>
+            </a:pPr>
+            <a:r>
+              <a:t>PRESENTACIÓN DEL PROYECTO  •  CICLO 2026</a:t>
             </a:r>
           </a:p>
         </p:txBody>
@@ -3214,8 +3212,8 @@
         </p:blipFill>
         <p:spPr>
           <a:xfrm>
-            <a:off x="731520" y="1188720"/>
-            <a:ext cx="1645920" cy="1645920"/>
+            <a:off x="685800" y="1188720"/>
+            <a:ext cx="1463040" cy="1463040"/>
           </a:xfrm>
           <a:prstGeom prst="rect">
             <a:avLst/>
@@ -3238,8 +3236,8 @@
         </p:blipFill>
         <p:spPr>
           <a:xfrm>
-            <a:off x="2651760" y="1188720"/>
-            <a:ext cx="1645920" cy="1645920"/>
+            <a:off x="2377440" y="1188720"/>
+            <a:ext cx="1463040" cy="1463040"/>
           </a:xfrm>
           <a:prstGeom prst="rect">
             <a:avLst/>
@@ -3254,8 +3252,8 @@
         </p:nvSpPr>
         <p:spPr>
           <a:xfrm>
-            <a:off x="731520" y="2971800"/>
-            <a:ext cx="10698480" cy="1691640"/>
+            <a:off x="685800" y="2834640"/>
+            <a:ext cx="10789920" cy="2011680"/>
           </a:xfrm>
           <a:prstGeom prst="rect">
             <a:avLst/>
@@ -3263,21 +3261,37 @@
           <a:noFill/>
         </p:spPr>
         <p:txBody>
-          <a:bodyPr wrap="square">
+          <a:bodyPr wrap="square" lIns="0">
             <a:spAutoFit/>
           </a:bodyPr>
           <a:lstStyle/>
           <a:p>
             <a:pPr>
-              <a:defRPr sz="4600" b="1">
-                <a:solidFill>
-                  <a:srgbClr val="FFFFFF"/>
-                </a:solidFill>
-                <a:latin typeface="Arial"/>
-              </a:defRPr>
-            </a:pPr>
-            <a:r>
-              <a:t>ECOMAPA V2.1</a:t>
+              <a:defRPr sz="4400" b="1">
+                <a:solidFill>
+                  <a:srgbClr val="17352B"/>
+                </a:solidFill>
+                <a:latin typeface="Arial"/>
+              </a:defRPr>
+            </a:pPr>
+            <a:r>
+              <a:t>EcoMapa V2.1</a:t>
+            </a:r>
+          </a:p>
+          <a:p>
+            <a:pPr>
+              <a:spcBef>
+                <a:spcPts val="600"/>
+              </a:spcBef>
+              <a:defRPr sz="2000" b="1">
+                <a:solidFill>
+                  <a:srgbClr val="0B6B4D"/>
+                </a:solidFill>
+                <a:latin typeface="Arial"/>
+              </a:defRPr>
+            </a:pPr>
+            <a:r>
+              <a:t>Asistente Inteligente de Reciclaje con Geolocalización e Inteligencia Artificial</a:t>
             </a:r>
           </a:p>
           <a:p>
@@ -3285,31 +3299,15 @@
               <a:spcBef>
                 <a:spcPts val="800"/>
               </a:spcBef>
-              <a:defRPr sz="1800" b="1">
-                <a:solidFill>
-                  <a:srgbClr val="34D399"/>
-                </a:solidFill>
-                <a:latin typeface="Arial"/>
-              </a:defRPr>
-            </a:pPr>
-            <a:r>
-              <a:t>Asistente Inteligente de Reciclaje con Geolocalización e Inteligencia Artificial</a:t>
-            </a:r>
-          </a:p>
-          <a:p>
-            <a:pPr>
-              <a:spcBef>
-                <a:spcPts val="400"/>
-              </a:spcBef>
-              <a:defRPr sz="1300">
-                <a:solidFill>
-                  <a:srgbClr val="94A3B8"/>
-                </a:solidFill>
-                <a:latin typeface="Arial"/>
-              </a:defRPr>
-            </a:pPr>
-            <a:r>
-              <a:t>Tecnología aplicada al cuidado ambiental, economía circular y gestión urbana</a:t>
+              <a:defRPr sz="1400">
+                <a:solidFill>
+                  <a:srgbClr val="5C6B65"/>
+                </a:solidFill>
+                <a:latin typeface="Arial"/>
+              </a:defRPr>
+            </a:pPr>
+            <a:r>
+              <a:t>App móvil  •  IA Multimodal  •  Mapa georreferenciado  •  Gamificación  •  Retiros a domicilio</a:t>
             </a:r>
           </a:p>
         </p:txBody>
@@ -3322,18 +3320,18 @@
         </p:nvSpPr>
         <p:spPr>
           <a:xfrm>
-            <a:off x="731520" y="4892040"/>
-            <a:ext cx="3383280" cy="1417320"/>
+            <a:off x="685800" y="4983480"/>
+            <a:ext cx="3429000" cy="1325880"/>
           </a:xfrm>
           <a:prstGeom prst="roundRect">
             <a:avLst/>
           </a:prstGeom>
           <a:solidFill>
-            <a:srgbClr val="1E293B"/>
+            <a:srgbClr val="F8FAF8"/>
           </a:solidFill>
-          <a:ln w="19050">
+          <a:ln w="12700">
             <a:solidFill>
-              <a:srgbClr val="10B981"/>
+              <a:srgbClr val="CFE2D8"/>
             </a:solidFill>
           </a:ln>
         </p:spPr>
@@ -3358,7 +3356,7 @@
             <a:pPr algn="ctr">
               <a:defRPr sz="950" b="1">
                 <a:solidFill>
-                  <a:srgbClr val="10B981"/>
+                  <a:srgbClr val="F2A65A"/>
                 </a:solidFill>
                 <a:latin typeface="Arial"/>
               </a:defRPr>
@@ -3374,7 +3372,7 @@
               </a:spcBef>
               <a:defRPr sz="1100" b="1">
                 <a:solidFill>
-                  <a:srgbClr val="FFFFFF"/>
+                  <a:srgbClr val="17352B"/>
                 </a:solidFill>
                 <a:latin typeface="Arial"/>
               </a:defRPr>
@@ -3394,7 +3392,7 @@
               </a:spcBef>
               <a:defRPr sz="950">
                 <a:solidFill>
-                  <a:srgbClr val="94A3B8"/>
+                  <a:srgbClr val="5C6B65"/>
                 </a:solidFill>
                 <a:latin typeface="Arial"/>
               </a:defRPr>
@@ -3413,18 +3411,18 @@
         </p:nvSpPr>
         <p:spPr>
           <a:xfrm>
-            <a:off x="4389120" y="4892040"/>
-            <a:ext cx="3383280" cy="1417320"/>
+            <a:off x="4389120" y="4983480"/>
+            <a:ext cx="3429000" cy="1325880"/>
           </a:xfrm>
           <a:prstGeom prst="roundRect">
             <a:avLst/>
           </a:prstGeom>
           <a:solidFill>
-            <a:srgbClr val="1E293B"/>
+            <a:srgbClr val="F8FAF8"/>
           </a:solidFill>
-          <a:ln w="19050">
+          <a:ln w="12700">
             <a:solidFill>
-              <a:srgbClr val="06B6D4"/>
+              <a:srgbClr val="CFE2D8"/>
             </a:solidFill>
           </a:ln>
         </p:spPr>
@@ -3449,7 +3447,7 @@
             <a:pPr algn="ctr">
               <a:defRPr sz="950" b="1">
                 <a:solidFill>
-                  <a:srgbClr val="06B6D4"/>
+                  <a:srgbClr val="0B6B4D"/>
                 </a:solidFill>
                 <a:latin typeface="Arial"/>
               </a:defRPr>
@@ -3465,7 +3463,7 @@
               </a:spcBef>
               <a:defRPr sz="1100" b="1">
                 <a:solidFill>
-                  <a:srgbClr val="FFFFFF"/>
+                  <a:srgbClr val="17352B"/>
                 </a:solidFill>
                 <a:latin typeface="Arial"/>
               </a:defRPr>
@@ -3485,7 +3483,7 @@
               </a:spcBef>
               <a:defRPr sz="950">
                 <a:solidFill>
-                  <a:srgbClr val="94A3B8"/>
+                  <a:srgbClr val="5C6B65"/>
                 </a:solidFill>
                 <a:latin typeface="Arial"/>
               </a:defRPr>
@@ -3504,18 +3502,18 @@
         </p:nvSpPr>
         <p:spPr>
           <a:xfrm>
-            <a:off x="8046720" y="4892040"/>
-            <a:ext cx="3383280" cy="1417320"/>
+            <a:off x="8092440" y="4983480"/>
+            <a:ext cx="3429000" cy="1325880"/>
           </a:xfrm>
           <a:prstGeom prst="roundRect">
             <a:avLst/>
           </a:prstGeom>
           <a:solidFill>
-            <a:srgbClr val="1E293B"/>
+            <a:srgbClr val="F8FAF8"/>
           </a:solidFill>
-          <a:ln w="19050">
+          <a:ln w="12700">
             <a:solidFill>
-              <a:srgbClr val="8B5CF6"/>
+              <a:srgbClr val="CFE2D8"/>
             </a:solidFill>
           </a:ln>
         </p:spPr>
@@ -3540,13 +3538,13 @@
             <a:pPr algn="ctr">
               <a:defRPr sz="950" b="1">
                 <a:solidFill>
-                  <a:srgbClr val="8B5CF6"/>
-                </a:solidFill>
-                <a:latin typeface="Arial"/>
-              </a:defRPr>
-            </a:pPr>
-            <a:r>
-              <a:t>CICLO LECTIVO Y SEDE</a:t>
+                  <a:srgbClr val="5F8DD3"/>
+                </a:solidFill>
+                <a:latin typeface="Arial"/>
+              </a:defRPr>
+            </a:pPr>
+            <a:r>
+              <a:t>CARRERA Y SEDE</a:t>
             </a:r>
           </a:p>
           <a:p>
@@ -3556,13 +3554,13 @@
               </a:spcBef>
               <a:defRPr sz="1100" b="1">
                 <a:solidFill>
-                  <a:srgbClr val="FFFFFF"/>
-                </a:solidFill>
-                <a:latin typeface="Arial"/>
-              </a:defRPr>
-            </a:pPr>
-            <a:r>
-              <a:t>Práctica Profesionalizante I y II</a:t>
+                  <a:srgbClr val="17352B"/>
+                </a:solidFill>
+                <a:latin typeface="Arial"/>
+              </a:defRPr>
+            </a:pPr>
+            <a:r>
+              <a:t>Tecnicatura Superior en Desarrollo de Software</a:t>
             </a:r>
             <a:br/>
             <a:r>
@@ -3576,7 +3574,7 @@
               </a:spcBef>
               <a:defRPr sz="950">
                 <a:solidFill>
-                  <a:srgbClr val="94A3B8"/>
+                  <a:srgbClr val="5C6B65"/>
                 </a:solidFill>
                 <a:latin typeface="Arial"/>
               </a:defRPr>
@@ -3620,7 +3618,7 @@
             <a:avLst/>
           </a:prstGeom>
           <a:solidFill>
-            <a:srgbClr val="0F172A"/>
+            <a:srgbClr val="FFFFFF"/>
           </a:solidFill>
           <a:ln>
             <a:noFill/>
@@ -3650,20 +3648,128 @@
       </p:sp>
       <p:sp>
         <p:nvSpPr>
-          <p:cNvPr id="3" name="Rounded Rectangle 2"/>
+          <p:cNvPr id="3" name="TextBox 2"/>
+          <p:cNvSpPr txBox="1"/>
+          <p:nvPr/>
+        </p:nvSpPr>
+        <p:spPr>
+          <a:xfrm>
+            <a:off x="685800" y="411480"/>
+            <a:ext cx="5029200" cy="320040"/>
+          </a:xfrm>
+          <a:prstGeom prst="rect">
+            <a:avLst/>
+          </a:prstGeom>
+          <a:noFill/>
+        </p:spPr>
+        <p:txBody>
+          <a:bodyPr wrap="square" lIns="0" tIns="0">
+            <a:spAutoFit/>
+          </a:bodyPr>
+          <a:lstStyle/>
+          <a:p>
+            <a:pPr>
+              <a:defRPr sz="1100" b="1">
+                <a:solidFill>
+                  <a:srgbClr val="0B6B4D"/>
+                </a:solidFill>
+                <a:latin typeface="Arial"/>
+              </a:defRPr>
+            </a:pPr>
+            <a:r>
+              <a:t>09 • DIFERENCIACIÓN</a:t>
+            </a:r>
+          </a:p>
+        </p:txBody>
+      </p:sp>
+      <p:sp>
+        <p:nvSpPr>
+          <p:cNvPr id="4" name="TextBox 3"/>
+          <p:cNvSpPr txBox="1"/>
+          <p:nvPr/>
+        </p:nvSpPr>
+        <p:spPr>
+          <a:xfrm>
+            <a:off x="10789920" y="411480"/>
+            <a:ext cx="731520" cy="320040"/>
+          </a:xfrm>
+          <a:prstGeom prst="rect">
+            <a:avLst/>
+          </a:prstGeom>
+          <a:noFill/>
+        </p:spPr>
+        <p:txBody>
+          <a:bodyPr wrap="none" rIns="0" tIns="0">
+            <a:spAutoFit/>
+          </a:bodyPr>
+          <a:lstStyle/>
+          <a:p>
+            <a:pPr algn="r">
+              <a:defRPr sz="1100" b="1">
+                <a:solidFill>
+                  <a:srgbClr val="5C6B65"/>
+                </a:solidFill>
+                <a:latin typeface="Arial"/>
+              </a:defRPr>
+            </a:pPr>
+            <a:r>
+              <a:t>10</a:t>
+            </a:r>
+          </a:p>
+        </p:txBody>
+      </p:sp>
+      <p:sp>
+        <p:nvSpPr>
+          <p:cNvPr id="5" name="TextBox 4"/>
+          <p:cNvSpPr txBox="1"/>
+          <p:nvPr/>
+        </p:nvSpPr>
+        <p:spPr>
+          <a:xfrm>
+            <a:off x="685800" y="685800"/>
+            <a:ext cx="10789920" cy="685800"/>
+          </a:xfrm>
+          <a:prstGeom prst="rect">
+            <a:avLst/>
+          </a:prstGeom>
+          <a:noFill/>
+        </p:spPr>
+        <p:txBody>
+          <a:bodyPr wrap="square" lIns="0" tIns="0">
+            <a:spAutoFit/>
+          </a:bodyPr>
+          <a:lstStyle/>
+          <a:p>
+            <a:pPr>
+              <a:defRPr sz="2500" b="1">
+                <a:solidFill>
+                  <a:srgbClr val="17352B"/>
+                </a:solidFill>
+                <a:latin typeface="Arial"/>
+              </a:defRPr>
+            </a:pPr>
+            <a:r>
+              <a:t>Competencia y Diferenciación</a:t>
+            </a:r>
+          </a:p>
+        </p:txBody>
+      </p:sp>
+      <p:sp>
+        <p:nvSpPr>
+          <p:cNvPr id="6" name="Rectangle 5"/>
           <p:cNvSpPr/>
           <p:nvPr/>
         </p:nvSpPr>
         <p:spPr>
           <a:xfrm>
-            <a:off x="731520" y="384048"/>
-            <a:ext cx="3474720" cy="347472"/>
-          </a:xfrm>
-          <a:prstGeom prst="roundRect">
+            <a:off x="685800" y="1417320"/>
+            <a:ext cx="10817352" cy="13716"/>
+          </a:xfrm>
+          <a:prstGeom prst="rect">
             <a:avLst/>
           </a:prstGeom>
           <a:solidFill>
-            <a:srgbClr val="8B5CF6"/>
+            <a:srgbClr val="CFE2D8"/>
           </a:solidFill>
           <a:ln>
             <a:noFill/>
@@ -3687,23 +3793,49 @@
           <a:bodyPr rtlCol="0" anchor="ctr"/>
           <a:lstStyle/>
           <a:p>
-            <a:pPr algn="ctr">
-              <a:defRPr sz="950" b="1">
-                <a:solidFill>
-                  <a:srgbClr val="FFFFFF"/>
-                </a:solidFill>
-                <a:latin typeface="Arial"/>
-              </a:defRPr>
-            </a:pPr>
-            <a:r>
-              <a:t>09. DIFERENCIACIÓN</a:t>
+            <a:pPr algn="ctr"/>
+          </a:p>
+        </p:txBody>
+      </p:sp>
+      <p:sp>
+        <p:nvSpPr>
+          <p:cNvPr id="7" name="TextBox 6"/>
+          <p:cNvSpPr txBox="1"/>
+          <p:nvPr/>
+        </p:nvSpPr>
+        <p:spPr>
+          <a:xfrm>
+            <a:off x="685800" y="6446520"/>
+            <a:ext cx="5486400" cy="274320"/>
+          </a:xfrm>
+          <a:prstGeom prst="rect">
+            <a:avLst/>
+          </a:prstGeom>
+          <a:noFill/>
+        </p:spPr>
+        <p:txBody>
+          <a:bodyPr wrap="none" lIns="0" bIns="0">
+            <a:spAutoFit/>
+          </a:bodyPr>
+          <a:lstStyle/>
+          <a:p>
+            <a:pPr>
+              <a:defRPr sz="950">
+                <a:solidFill>
+                  <a:srgbClr val="5C6B65"/>
+                </a:solidFill>
+                <a:latin typeface="Arial"/>
+              </a:defRPr>
+            </a:pPr>
+            <a:r>
+              <a:t>EcoMapa  •  CivicLoop Technologies S.A.</a:t>
             </a:r>
           </a:p>
         </p:txBody>
       </p:sp>
       <p:pic>
         <p:nvPicPr>
-          <p:cNvPr id="4" name="Picture 3" descr="civicloop_logo_rounded.png"/>
+          <p:cNvPr id="8" name="Picture 7" descr="civicloop_logo_rounded.png"/>
           <p:cNvPicPr>
             <a:picLocks noChangeAspect="1"/>
           </p:cNvPicPr>
@@ -3717,8 +3849,8 @@
         </p:blipFill>
         <p:spPr>
           <a:xfrm>
-            <a:off x="11064240" y="347472"/>
-            <a:ext cx="594360" cy="594360"/>
+            <a:off x="11064240" y="6309360"/>
+            <a:ext cx="438912" cy="438912"/>
           </a:xfrm>
           <a:prstGeom prst="rect">
             <a:avLst/>
@@ -3727,14 +3859,14 @@
       </p:pic>
       <p:sp>
         <p:nvSpPr>
-          <p:cNvPr id="5" name="TextBox 4"/>
+          <p:cNvPr id="9" name="TextBox 8"/>
           <p:cNvSpPr txBox="1"/>
           <p:nvPr/>
         </p:nvSpPr>
         <p:spPr>
           <a:xfrm>
-            <a:off x="731520" y="749808"/>
-            <a:ext cx="10515600" cy="777240"/>
+            <a:off x="685800" y="1645920"/>
+            <a:ext cx="10789920" cy="548640"/>
           </a:xfrm>
           <a:prstGeom prst="rect">
             <a:avLst/>
@@ -3742,61 +3874,45 @@
           <a:noFill/>
         </p:spPr>
         <p:txBody>
-          <a:bodyPr wrap="square">
+          <a:bodyPr wrap="square" lIns="0">
             <a:spAutoFit/>
           </a:bodyPr>
           <a:lstStyle/>
           <a:p>
             <a:pPr>
-              <a:defRPr sz="2500" b="1">
-                <a:solidFill>
-                  <a:srgbClr val="FFFFFF"/>
-                </a:solidFill>
-                <a:latin typeface="Arial"/>
-              </a:defRPr>
-            </a:pPr>
-            <a:r>
-              <a:t>Competencia y Ventaja Competitiva</a:t>
-            </a:r>
-          </a:p>
-          <a:p>
-            <a:pPr>
-              <a:spcBef>
-                <a:spcPts val="300"/>
-              </a:spcBef>
-              <a:defRPr sz="1300">
-                <a:solidFill>
-                  <a:srgbClr val="94A3B8"/>
-                </a:solidFill>
-                <a:latin typeface="Arial"/>
-              </a:defRPr>
-            </a:pPr>
-            <a:r>
-              <a:t>Por qué EcoMapa supera a las iniciativas tradicionales de mapas estáticos</a:t>
-            </a:r>
-          </a:p>
-        </p:txBody>
-      </p:sp>
-      <p:sp>
-        <p:nvSpPr>
-          <p:cNvPr id="6" name="Rounded Rectangle 5"/>
+              <a:defRPr sz="1500" b="1">
+                <a:solidFill>
+                  <a:srgbClr val="17352B"/>
+                </a:solidFill>
+                <a:latin typeface="Arial"/>
+              </a:defRPr>
+            </a:pPr>
+            <a:r>
+              <a:t>EcoMapa integra múltiples herramientas en una sola plataforma inteligente enfocada en reciclaje y sostenibilidad:</a:t>
+            </a:r>
+          </a:p>
+        </p:txBody>
+      </p:sp>
+      <p:sp>
+        <p:nvSpPr>
+          <p:cNvPr id="10" name="Rounded Rectangle 9"/>
           <p:cNvSpPr/>
           <p:nvPr/>
         </p:nvSpPr>
         <p:spPr>
           <a:xfrm>
-            <a:off x="731520" y="1783080"/>
-            <a:ext cx="5257800" cy="1371600"/>
+            <a:off x="685800" y="2423160"/>
+            <a:ext cx="5257800" cy="868680"/>
           </a:xfrm>
           <a:prstGeom prst="roundRect">
             <a:avLst/>
           </a:prstGeom>
           <a:solidFill>
-            <a:srgbClr val="1E293B"/>
+            <a:srgbClr val="F8FAF8"/>
           </a:solidFill>
-          <a:ln w="19050">
+          <a:ln w="12700">
             <a:solidFill>
-              <a:srgbClr val="10B981"/>
+              <a:srgbClr val="CFE2D8"/>
             </a:solidFill>
           </a:ln>
         </p:spPr>
@@ -3815,59 +3931,59 @@
           </a:fontRef>
         </p:style>
         <p:txBody>
-          <a:bodyPr rtlCol="0" anchor="ctr" wrap="square" lIns="228600" rIns="228600" tIns="164592"/>
+          <a:bodyPr rtlCol="0" anchor="ctr" wrap="square" lIns="228600" rIns="228600" tIns="109728"/>
           <a:lstStyle/>
           <a:p>
             <a:pPr algn="ctr">
               <a:defRPr sz="1200" b="1">
                 <a:solidFill>
-                  <a:srgbClr val="10B981"/>
-                </a:solidFill>
-                <a:latin typeface="Arial"/>
-              </a:defRPr>
-            </a:pPr>
-            <a:r>
-              <a:t>IA MULTIMODAL INTEGRADA</a:t>
+                  <a:srgbClr val="0B6B4D"/>
+                </a:solidFill>
+                <a:latin typeface="Arial"/>
+              </a:defRPr>
+            </a:pPr>
+            <a:r>
+              <a:t>•  Inteligencia Artificial integrada</a:t>
             </a:r>
           </a:p>
           <a:p>
             <a:pPr>
               <a:spcBef>
-                <a:spcPts val="400"/>
+                <a:spcPts val="200"/>
               </a:spcBef>
-              <a:defRPr sz="1050">
-                <a:solidFill>
-                  <a:srgbClr val="E2E8F0"/>
-                </a:solidFill>
-                <a:latin typeface="Arial"/>
-              </a:defRPr>
-            </a:pPr>
-            <a:r>
-              <a:t>No requiere buscar en largos listados PDF: basta una foto o pregunta en lenguaje natural con Google Gemini.</a:t>
-            </a:r>
-          </a:p>
-        </p:txBody>
-      </p:sp>
-      <p:sp>
-        <p:nvSpPr>
-          <p:cNvPr id="7" name="Rounded Rectangle 6"/>
+              <a:defRPr sz="1000">
+                <a:solidFill>
+                  <a:srgbClr val="5C6B65"/>
+                </a:solidFill>
+                <a:latin typeface="Arial"/>
+              </a:defRPr>
+            </a:pPr>
+            <a:r>
+              <a:t>Clasificación instantánea sin necesidad de consultar tablas o manuales impresos.</a:t>
+            </a:r>
+          </a:p>
+        </p:txBody>
+      </p:sp>
+      <p:sp>
+        <p:nvSpPr>
+          <p:cNvPr id="11" name="Rounded Rectangle 10"/>
           <p:cNvSpPr/>
           <p:nvPr/>
         </p:nvSpPr>
         <p:spPr>
           <a:xfrm>
-            <a:off x="6172200" y="1783080"/>
-            <a:ext cx="5257800" cy="1371600"/>
+            <a:off x="6126480" y="2423160"/>
+            <a:ext cx="5257800" cy="868680"/>
           </a:xfrm>
           <a:prstGeom prst="roundRect">
             <a:avLst/>
           </a:prstGeom>
           <a:solidFill>
-            <a:srgbClr val="1E293B"/>
+            <a:srgbClr val="F8FAF8"/>
           </a:solidFill>
-          <a:ln w="19050">
+          <a:ln w="12700">
             <a:solidFill>
-              <a:srgbClr val="06B6D4"/>
+              <a:srgbClr val="CFE2D8"/>
             </a:solidFill>
           </a:ln>
         </p:spPr>
@@ -3886,59 +4002,59 @@
           </a:fontRef>
         </p:style>
         <p:txBody>
-          <a:bodyPr rtlCol="0" anchor="ctr" wrap="square" lIns="228600" rIns="228600" tIns="164592"/>
+          <a:bodyPr rtlCol="0" anchor="ctr" wrap="square" lIns="228600" rIns="228600" tIns="109728"/>
           <a:lstStyle/>
           <a:p>
             <a:pPr algn="ctr">
               <a:defRPr sz="1200" b="1">
                 <a:solidFill>
-                  <a:srgbClr val="06B6D4"/>
-                </a:solidFill>
-                <a:latin typeface="Arial"/>
-              </a:defRPr>
-            </a:pPr>
-            <a:r>
-              <a:t>GEOLOCALIZACIÓN Y GPS NATIVO</a:t>
+                  <a:srgbClr val="0B6B4D"/>
+                </a:solidFill>
+                <a:latin typeface="Arial"/>
+              </a:defRPr>
+            </a:pPr>
+            <a:r>
+              <a:t>•  Geolocalización en tiempo real</a:t>
             </a:r>
           </a:p>
           <a:p>
             <a:pPr>
               <a:spcBef>
-                <a:spcPts val="400"/>
+                <a:spcPts val="200"/>
               </a:spcBef>
-              <a:defRPr sz="1050">
-                <a:solidFill>
-                  <a:srgbClr val="E2E8F0"/>
-                </a:solidFill>
-                <a:latin typeface="Arial"/>
-              </a:defRPr>
-            </a:pPr>
-            <a:r>
-              <a:t>Cálculo euclidiano PostGIS y botón de navegación turn-by-turn en Google Maps con guiado por voz.</a:t>
-            </a:r>
-          </a:p>
-        </p:txBody>
-      </p:sp>
-      <p:sp>
-        <p:nvSpPr>
-          <p:cNvPr id="8" name="Rounded Rectangle 7"/>
+              <a:defRPr sz="1000">
+                <a:solidFill>
+                  <a:srgbClr val="5C6B65"/>
+                </a:solidFill>
+                <a:latin typeface="Arial"/>
+              </a:defRPr>
+            </a:pPr>
+            <a:r>
+              <a:t>Identificación precisa del punto más cercano con navegación guiada turn-by-turn.</a:t>
+            </a:r>
+          </a:p>
+        </p:txBody>
+      </p:sp>
+      <p:sp>
+        <p:nvSpPr>
+          <p:cNvPr id="12" name="Rounded Rectangle 11"/>
           <p:cNvSpPr/>
           <p:nvPr/>
         </p:nvSpPr>
         <p:spPr>
           <a:xfrm>
-            <a:off x="731520" y="3291839"/>
-            <a:ext cx="5257800" cy="1371600"/>
+            <a:off x="685800" y="3383280"/>
+            <a:ext cx="5257800" cy="868680"/>
           </a:xfrm>
           <a:prstGeom prst="roundRect">
             <a:avLst/>
           </a:prstGeom>
           <a:solidFill>
-            <a:srgbClr val="1E293B"/>
+            <a:srgbClr val="F8FAF8"/>
           </a:solidFill>
-          <a:ln w="19050">
+          <a:ln w="12700">
             <a:solidFill>
-              <a:srgbClr val="F59E0B"/>
+              <a:srgbClr val="CFE2D8"/>
             </a:solidFill>
           </a:ln>
         </p:spPr>
@@ -3957,59 +4073,59 @@
           </a:fontRef>
         </p:style>
         <p:txBody>
-          <a:bodyPr rtlCol="0" anchor="ctr" wrap="square" lIns="228600" rIns="228600" tIns="164592"/>
+          <a:bodyPr rtlCol="0" anchor="ctr" wrap="square" lIns="228600" rIns="228600" tIns="109728"/>
           <a:lstStyle/>
           <a:p>
             <a:pPr algn="ctr">
               <a:defRPr sz="1200" b="1">
                 <a:solidFill>
-                  <a:srgbClr val="F59E0B"/>
-                </a:solidFill>
-                <a:latin typeface="Arial"/>
-              </a:defRPr>
-            </a:pPr>
-            <a:r>
-              <a:t>SISTEMA DE GAMIFICACIÓN</a:t>
+                  <a:srgbClr val="0B6B4D"/>
+                </a:solidFill>
+                <a:latin typeface="Arial"/>
+              </a:defRPr>
+            </a:pPr>
+            <a:r>
+              <a:t>•  Sistema de gamificación</a:t>
             </a:r>
           </a:p>
           <a:p>
             <a:pPr>
               <a:spcBef>
-                <a:spcPts val="400"/>
+                <a:spcPts val="200"/>
               </a:spcBef>
-              <a:defRPr sz="1050">
-                <a:solidFill>
-                  <a:srgbClr val="E2E8F0"/>
-                </a:solidFill>
-                <a:latin typeface="Arial"/>
-              </a:defRPr>
-            </a:pPr>
-            <a:r>
-              <a:t>Incentivos tangibles en comercios locales que sostienen el compromiso del usuario en el tiempo.</a:t>
-            </a:r>
-          </a:p>
-        </p:txBody>
-      </p:sp>
-      <p:sp>
-        <p:nvSpPr>
-          <p:cNvPr id="9" name="Rounded Rectangle 8"/>
+              <a:defRPr sz="1000">
+                <a:solidFill>
+                  <a:srgbClr val="5C6B65"/>
+                </a:solidFill>
+                <a:latin typeface="Arial"/>
+              </a:defRPr>
+            </a:pPr>
+            <a:r>
+              <a:t>Recompensas tangibles y cupones de comercios locales para mantener la motivación.</a:t>
+            </a:r>
+          </a:p>
+        </p:txBody>
+      </p:sp>
+      <p:sp>
+        <p:nvSpPr>
+          <p:cNvPr id="13" name="Rounded Rectangle 12"/>
           <p:cNvSpPr/>
           <p:nvPr/>
         </p:nvSpPr>
         <p:spPr>
           <a:xfrm>
-            <a:off x="6172200" y="3291839"/>
-            <a:ext cx="5257800" cy="1371600"/>
+            <a:off x="6126480" y="3383280"/>
+            <a:ext cx="5257800" cy="868680"/>
           </a:xfrm>
           <a:prstGeom prst="roundRect">
             <a:avLst/>
           </a:prstGeom>
           <a:solidFill>
-            <a:srgbClr val="1E293B"/>
+            <a:srgbClr val="F8FAF8"/>
           </a:solidFill>
-          <a:ln w="19050">
+          <a:ln w="12700">
             <a:solidFill>
-              <a:srgbClr val="8B5CF6"/>
+              <a:srgbClr val="CFE2D8"/>
             </a:solidFill>
           </a:ln>
         </p:spPr>
@@ -4028,59 +4144,59 @@
           </a:fontRef>
         </p:style>
         <p:txBody>
-          <a:bodyPr rtlCol="0" anchor="ctr" wrap="square" lIns="228600" rIns="228600" tIns="164592"/>
+          <a:bodyPr rtlCol="0" anchor="ctr" wrap="square" lIns="228600" rIns="228600" tIns="109728"/>
           <a:lstStyle/>
           <a:p>
             <a:pPr algn="ctr">
               <a:defRPr sz="1200" b="1">
                 <a:solidFill>
-                  <a:srgbClr val="8B5CF6"/>
-                </a:solidFill>
-                <a:latin typeface="Arial"/>
-              </a:defRPr>
-            </a:pPr>
-            <a:r>
-              <a:t>PANEL ADMINISTRATIVO MUNICIPAL</a:t>
+                  <a:srgbClr val="0B6B4D"/>
+                </a:solidFill>
+                <a:latin typeface="Arial"/>
+              </a:defRPr>
+            </a:pPr>
+            <a:r>
+              <a:t>•  Panel administrativo municipal</a:t>
             </a:r>
           </a:p>
           <a:p>
             <a:pPr>
               <a:spcBef>
-                <a:spcPts val="400"/>
+                <a:spcPts val="200"/>
               </a:spcBef>
-              <a:defRPr sz="1050">
-                <a:solidFill>
-                  <a:srgbClr val="E2E8F0"/>
-                </a:solidFill>
-                <a:latin typeface="Arial"/>
-              </a:defRPr>
-            </a:pPr>
-            <a:r>
-              <a:t>Herramientas de gestión y coordinación de cuadrillas para retiros voluminosos en tiempo real.</a:t>
-            </a:r>
-          </a:p>
-        </p:txBody>
-      </p:sp>
-      <p:sp>
-        <p:nvSpPr>
-          <p:cNvPr id="10" name="Rounded Rectangle 9"/>
+              <a:defRPr sz="1000">
+                <a:solidFill>
+                  <a:srgbClr val="5C6B65"/>
+                </a:solidFill>
+                <a:latin typeface="Arial"/>
+              </a:defRPr>
+            </a:pPr>
+            <a:r>
+              <a:t>Herramientas de gestión y coordinación de cuadrillas para retiros voluminosos.</a:t>
+            </a:r>
+          </a:p>
+        </p:txBody>
+      </p:sp>
+      <p:sp>
+        <p:nvSpPr>
+          <p:cNvPr id="14" name="Rounded Rectangle 13"/>
           <p:cNvSpPr/>
           <p:nvPr/>
         </p:nvSpPr>
         <p:spPr>
           <a:xfrm>
-            <a:off x="731520" y="4800600"/>
-            <a:ext cx="5257800" cy="1371600"/>
+            <a:off x="685800" y="4343400"/>
+            <a:ext cx="5257800" cy="868680"/>
           </a:xfrm>
           <a:prstGeom prst="roundRect">
             <a:avLst/>
           </a:prstGeom>
           <a:solidFill>
-            <a:srgbClr val="1E293B"/>
+            <a:srgbClr val="F8FAF8"/>
           </a:solidFill>
-          <a:ln w="19050">
+          <a:ln w="12700">
             <a:solidFill>
-              <a:srgbClr val="3B82F6"/>
+              <a:srgbClr val="CFE2D8"/>
             </a:solidFill>
           </a:ln>
         </p:spPr>
@@ -4099,59 +4215,59 @@
           </a:fontRef>
         </p:style>
         <p:txBody>
-          <a:bodyPr rtlCol="0" anchor="ctr" wrap="square" lIns="228600" rIns="228600" tIns="164592"/>
+          <a:bodyPr rtlCol="0" anchor="ctr" wrap="square" lIns="228600" rIns="228600" tIns="109728"/>
           <a:lstStyle/>
           <a:p>
             <a:pPr algn="ctr">
               <a:defRPr sz="1200" b="1">
                 <a:solidFill>
-                  <a:srgbClr val="3B82F6"/>
-                </a:solidFill>
-                <a:latin typeface="Arial"/>
-              </a:defRPr>
-            </a:pPr>
-            <a:r>
-              <a:t>EDUCACIÓN AMBIENTAL INTERACTIVA</a:t>
+                  <a:srgbClr val="0B6B4D"/>
+                </a:solidFill>
+                <a:latin typeface="Arial"/>
+              </a:defRPr>
+            </a:pPr>
+            <a:r>
+              <a:t>•  Educación ecológica interactiva</a:t>
             </a:r>
           </a:p>
           <a:p>
             <a:pPr>
               <a:spcBef>
-                <a:spcPts val="400"/>
+                <a:spcPts val="200"/>
               </a:spcBef>
-              <a:defRPr sz="1050">
-                <a:solidFill>
-                  <a:srgbClr val="E2E8F0"/>
-                </a:solidFill>
-                <a:latin typeface="Arial"/>
-              </a:defRPr>
-            </a:pPr>
-            <a:r>
-              <a:t>Consejos de acondicionamiento de materiales en el momento exacto del descarte.</a:t>
-            </a:r>
-          </a:p>
-        </p:txBody>
-      </p:sp>
-      <p:sp>
-        <p:nvSpPr>
-          <p:cNvPr id="11" name="Rounded Rectangle 10"/>
+              <a:defRPr sz="1000">
+                <a:solidFill>
+                  <a:srgbClr val="5C6B65"/>
+                </a:solidFill>
+                <a:latin typeface="Arial"/>
+              </a:defRPr>
+            </a:pPr>
+            <a:r>
+              <a:t>Recomendaciones comprensibles de acondicionamiento del residuo en el momento exacto.</a:t>
+            </a:r>
+          </a:p>
+        </p:txBody>
+      </p:sp>
+      <p:sp>
+        <p:nvSpPr>
+          <p:cNvPr id="15" name="Rounded Rectangle 14"/>
           <p:cNvSpPr/>
           <p:nvPr/>
         </p:nvSpPr>
         <p:spPr>
           <a:xfrm>
-            <a:off x="6172200" y="4800600"/>
-            <a:ext cx="5257800" cy="1371600"/>
+            <a:off x="6126480" y="4343400"/>
+            <a:ext cx="5257800" cy="868680"/>
           </a:xfrm>
           <a:prstGeom prst="roundRect">
             <a:avLst/>
           </a:prstGeom>
           <a:solidFill>
-            <a:srgbClr val="1E293B"/>
+            <a:srgbClr val="F8FAF8"/>
           </a:solidFill>
-          <a:ln w="19050">
+          <a:ln w="12700">
             <a:solidFill>
-              <a:srgbClr val="F43F5E"/>
+              <a:srgbClr val="CFE2D8"/>
             </a:solidFill>
           </a:ln>
         </p:spPr>
@@ -4170,35 +4286,104 @@
           </a:fontRef>
         </p:style>
         <p:txBody>
-          <a:bodyPr rtlCol="0" anchor="ctr" wrap="square" lIns="228600" rIns="228600" tIns="164592"/>
+          <a:bodyPr rtlCol="0" anchor="ctr" wrap="square" lIns="228600" rIns="228600" tIns="109728"/>
           <a:lstStyle/>
           <a:p>
             <a:pPr algn="ctr">
               <a:defRPr sz="1200" b="1">
                 <a:solidFill>
-                  <a:srgbClr val="F43F5E"/>
-                </a:solidFill>
-                <a:latin typeface="Arial"/>
-              </a:defRPr>
-            </a:pPr>
-            <a:r>
-              <a:t>ARQUITECTURA MULTI-TENANT</a:t>
+                  <a:srgbClr val="0B6B4D"/>
+                </a:solidFill>
+                <a:latin typeface="Arial"/>
+              </a:defRPr>
+            </a:pPr>
+            <a:r>
+              <a:t>•  Arquitectura Multi-Tenant</a:t>
             </a:r>
           </a:p>
           <a:p>
             <a:pPr>
               <a:spcBef>
-                <a:spcPts val="400"/>
+                <a:spcPts val="200"/>
               </a:spcBef>
-              <a:defRPr sz="1050">
-                <a:solidFill>
-                  <a:srgbClr val="E2E8F0"/>
-                </a:solidFill>
-                <a:latin typeface="Arial"/>
-              </a:defRPr>
-            </a:pPr>
-            <a:r>
-              <a:t>Aislamiento de datos para servir a múltiples comunas y ciudades sobre una única plataforma.</a:t>
+              <a:defRPr sz="1000">
+                <a:solidFill>
+                  <a:srgbClr val="5C6B65"/>
+                </a:solidFill>
+                <a:latin typeface="Arial"/>
+              </a:defRPr>
+            </a:pPr>
+            <a:r>
+              <a:t>Escalable para múltiples comunas y municipios bajo un mismo entorno centralizado.</a:t>
+            </a:r>
+          </a:p>
+        </p:txBody>
+      </p:sp>
+      <p:sp>
+        <p:nvSpPr>
+          <p:cNvPr id="16" name="Rounded Rectangle 15"/>
+          <p:cNvSpPr/>
+          <p:nvPr/>
+        </p:nvSpPr>
+        <p:spPr>
+          <a:xfrm>
+            <a:off x="685800" y="5532120"/>
+            <a:ext cx="10817352" cy="777240"/>
+          </a:xfrm>
+          <a:prstGeom prst="roundRect">
+            <a:avLst/>
+          </a:prstGeom>
+          <a:solidFill>
+            <a:srgbClr val="DDF4E9"/>
+          </a:solidFill>
+          <a:ln>
+            <a:noFill/>
+          </a:ln>
+        </p:spPr>
+        <p:style>
+          <a:lnRef idx="1">
+            <a:schemeClr val="accent1"/>
+          </a:lnRef>
+          <a:fillRef idx="3">
+            <a:schemeClr val="accent1"/>
+          </a:fillRef>
+          <a:effectRef idx="2">
+            <a:schemeClr val="accent1"/>
+          </a:effectRef>
+          <a:fontRef idx="minor">
+            <a:schemeClr val="lt1"/>
+          </a:fontRef>
+        </p:style>
+        <p:txBody>
+          <a:bodyPr rtlCol="0" anchor="ctr" wrap="square" lIns="274320" tIns="109728"/>
+          <a:lstStyle/>
+          <a:p>
+            <a:pPr algn="ctr">
+              <a:defRPr sz="1250" b="1">
+                <a:solidFill>
+                  <a:srgbClr val="0B6B4D"/>
+                </a:solidFill>
+                <a:latin typeface="Arial"/>
+              </a:defRPr>
+            </a:pPr>
+            <a:r>
+              <a:t>“Nuestra propuesta combina innovación tecnológica con impacto ambiental directo.”</a:t>
+            </a:r>
+          </a:p>
+          <a:p>
+            <a:pPr>
+              <a:spcBef>
+                <a:spcPts val="200"/>
+              </a:spcBef>
+              <a:defRPr sz="1100">
+                <a:solidFill>
+                  <a:srgbClr val="17352B"/>
+                </a:solidFill>
+                <a:latin typeface="Arial"/>
+              </a:defRPr>
+            </a:pPr>
+            <a:r>
+              <a:t>Superando los límites de los mapas estáticos convencionales mediante asistencia activa y trazabilidad.</a:t>
             </a:r>
           </a:p>
         </p:txBody>
@@ -4236,7 +4421,7 @@
             <a:avLst/>
           </a:prstGeom>
           <a:solidFill>
-            <a:srgbClr val="0F172A"/>
+            <a:srgbClr val="FFFFFF"/>
           </a:solidFill>
           <a:ln>
             <a:noFill/>
@@ -4266,20 +4451,128 @@
       </p:sp>
       <p:sp>
         <p:nvSpPr>
-          <p:cNvPr id="3" name="Rounded Rectangle 2"/>
+          <p:cNvPr id="3" name="TextBox 2"/>
+          <p:cNvSpPr txBox="1"/>
+          <p:nvPr/>
+        </p:nvSpPr>
+        <p:spPr>
+          <a:xfrm>
+            <a:off x="685800" y="411480"/>
+            <a:ext cx="5029200" cy="320040"/>
+          </a:xfrm>
+          <a:prstGeom prst="rect">
+            <a:avLst/>
+          </a:prstGeom>
+          <a:noFill/>
+        </p:spPr>
+        <p:txBody>
+          <a:bodyPr wrap="square" lIns="0" tIns="0">
+            <a:spAutoFit/>
+          </a:bodyPr>
+          <a:lstStyle/>
+          <a:p>
+            <a:pPr>
+              <a:defRPr sz="1100" b="1">
+                <a:solidFill>
+                  <a:srgbClr val="0B6B4D"/>
+                </a:solidFill>
+                <a:latin typeface="Arial"/>
+              </a:defRPr>
+            </a:pPr>
+            <a:r>
+              <a:t>10 • TECNOLOGÍAS</a:t>
+            </a:r>
+          </a:p>
+        </p:txBody>
+      </p:sp>
+      <p:sp>
+        <p:nvSpPr>
+          <p:cNvPr id="4" name="TextBox 3"/>
+          <p:cNvSpPr txBox="1"/>
+          <p:nvPr/>
+        </p:nvSpPr>
+        <p:spPr>
+          <a:xfrm>
+            <a:off x="10789920" y="411480"/>
+            <a:ext cx="731520" cy="320040"/>
+          </a:xfrm>
+          <a:prstGeom prst="rect">
+            <a:avLst/>
+          </a:prstGeom>
+          <a:noFill/>
+        </p:spPr>
+        <p:txBody>
+          <a:bodyPr wrap="none" rIns="0" tIns="0">
+            <a:spAutoFit/>
+          </a:bodyPr>
+          <a:lstStyle/>
+          <a:p>
+            <a:pPr algn="r">
+              <a:defRPr sz="1100" b="1">
+                <a:solidFill>
+                  <a:srgbClr val="5C6B65"/>
+                </a:solidFill>
+                <a:latin typeface="Arial"/>
+              </a:defRPr>
+            </a:pPr>
+            <a:r>
+              <a:t>11</a:t>
+            </a:r>
+          </a:p>
+        </p:txBody>
+      </p:sp>
+      <p:sp>
+        <p:nvSpPr>
+          <p:cNvPr id="5" name="TextBox 4"/>
+          <p:cNvSpPr txBox="1"/>
+          <p:nvPr/>
+        </p:nvSpPr>
+        <p:spPr>
+          <a:xfrm>
+            <a:off x="685800" y="685800"/>
+            <a:ext cx="10789920" cy="685800"/>
+          </a:xfrm>
+          <a:prstGeom prst="rect">
+            <a:avLst/>
+          </a:prstGeom>
+          <a:noFill/>
+        </p:spPr>
+        <p:txBody>
+          <a:bodyPr wrap="square" lIns="0" tIns="0">
+            <a:spAutoFit/>
+          </a:bodyPr>
+          <a:lstStyle/>
+          <a:p>
+            <a:pPr>
+              <a:defRPr sz="2500" b="1">
+                <a:solidFill>
+                  <a:srgbClr val="17352B"/>
+                </a:solidFill>
+                <a:latin typeface="Arial"/>
+              </a:defRPr>
+            </a:pPr>
+            <a:r>
+              <a:t>Tecnologías Utilizadas</a:t>
+            </a:r>
+          </a:p>
+        </p:txBody>
+      </p:sp>
+      <p:sp>
+        <p:nvSpPr>
+          <p:cNvPr id="6" name="Rectangle 5"/>
           <p:cNvSpPr/>
           <p:nvPr/>
         </p:nvSpPr>
         <p:spPr>
           <a:xfrm>
-            <a:off x="731520" y="384048"/>
-            <a:ext cx="3474720" cy="347472"/>
-          </a:xfrm>
-          <a:prstGeom prst="roundRect">
+            <a:off x="685800" y="1417320"/>
+            <a:ext cx="10817352" cy="13716"/>
+          </a:xfrm>
+          <a:prstGeom prst="rect">
             <a:avLst/>
           </a:prstGeom>
           <a:solidFill>
-            <a:srgbClr val="3B82F6"/>
+            <a:srgbClr val="CFE2D8"/>
           </a:solidFill>
           <a:ln>
             <a:noFill/>
@@ -4303,23 +4596,49 @@
           <a:bodyPr rtlCol="0" anchor="ctr"/>
           <a:lstStyle/>
           <a:p>
-            <a:pPr algn="ctr">
-              <a:defRPr sz="950" b="1">
-                <a:solidFill>
-                  <a:srgbClr val="FFFFFF"/>
-                </a:solidFill>
-                <a:latin typeface="Arial"/>
-              </a:defRPr>
-            </a:pPr>
-            <a:r>
-              <a:t>10. STACK TECNOLÓGICO</a:t>
+            <a:pPr algn="ctr"/>
+          </a:p>
+        </p:txBody>
+      </p:sp>
+      <p:sp>
+        <p:nvSpPr>
+          <p:cNvPr id="7" name="TextBox 6"/>
+          <p:cNvSpPr txBox="1"/>
+          <p:nvPr/>
+        </p:nvSpPr>
+        <p:spPr>
+          <a:xfrm>
+            <a:off x="685800" y="6446520"/>
+            <a:ext cx="5486400" cy="274320"/>
+          </a:xfrm>
+          <a:prstGeom prst="rect">
+            <a:avLst/>
+          </a:prstGeom>
+          <a:noFill/>
+        </p:spPr>
+        <p:txBody>
+          <a:bodyPr wrap="none" lIns="0" bIns="0">
+            <a:spAutoFit/>
+          </a:bodyPr>
+          <a:lstStyle/>
+          <a:p>
+            <a:pPr>
+              <a:defRPr sz="950">
+                <a:solidFill>
+                  <a:srgbClr val="5C6B65"/>
+                </a:solidFill>
+                <a:latin typeface="Arial"/>
+              </a:defRPr>
+            </a:pPr>
+            <a:r>
+              <a:t>EcoMapa  •  CivicLoop Technologies S.A.</a:t>
             </a:r>
           </a:p>
         </p:txBody>
       </p:sp>
       <p:pic>
         <p:nvPicPr>
-          <p:cNvPr id="4" name="Picture 3" descr="civicloop_logo_rounded.png"/>
+          <p:cNvPr id="8" name="Picture 7" descr="civicloop_logo_rounded.png"/>
           <p:cNvPicPr>
             <a:picLocks noChangeAspect="1"/>
           </p:cNvPicPr>
@@ -4333,8 +4652,8 @@
         </p:blipFill>
         <p:spPr>
           <a:xfrm>
-            <a:off x="11064240" y="347472"/>
-            <a:ext cx="594360" cy="594360"/>
+            <a:off x="11064240" y="6309360"/>
+            <a:ext cx="438912" cy="438912"/>
           </a:xfrm>
           <a:prstGeom prst="rect">
             <a:avLst/>
@@ -4343,14 +4662,14 @@
       </p:pic>
       <p:sp>
         <p:nvSpPr>
-          <p:cNvPr id="5" name="TextBox 4"/>
+          <p:cNvPr id="9" name="TextBox 8"/>
           <p:cNvSpPr txBox="1"/>
           <p:nvPr/>
         </p:nvSpPr>
         <p:spPr>
           <a:xfrm>
-            <a:off x="731520" y="749808"/>
-            <a:ext cx="10515600" cy="777240"/>
+            <a:off x="685800" y="1645920"/>
+            <a:ext cx="10789920" cy="548640"/>
           </a:xfrm>
           <a:prstGeom prst="rect">
             <a:avLst/>
@@ -4358,61 +4677,45 @@
           <a:noFill/>
         </p:spPr>
         <p:txBody>
-          <a:bodyPr wrap="square">
+          <a:bodyPr wrap="square" lIns="0">
             <a:spAutoFit/>
           </a:bodyPr>
           <a:lstStyle/>
           <a:p>
             <a:pPr>
-              <a:defRPr sz="2500" b="1">
-                <a:solidFill>
-                  <a:srgbClr val="FFFFFF"/>
-                </a:solidFill>
-                <a:latin typeface="Arial"/>
-              </a:defRPr>
-            </a:pPr>
-            <a:r>
-              <a:t>Tecnologías Utilizadas en el Desarrollo</a:t>
-            </a:r>
-          </a:p>
-          <a:p>
-            <a:pPr>
-              <a:spcBef>
-                <a:spcPts val="300"/>
-              </a:spcBef>
-              <a:defRPr sz="1300">
-                <a:solidFill>
-                  <a:srgbClr val="94A3B8"/>
-                </a:solidFill>
-                <a:latin typeface="Arial"/>
-              </a:defRPr>
-            </a:pPr>
-            <a:r>
-              <a:t>Una arquitectura moderna diseñada para ofrecer rapidez, escalabilidad y robustez</a:t>
-            </a:r>
-          </a:p>
-        </p:txBody>
-      </p:sp>
-      <p:sp>
-        <p:nvSpPr>
-          <p:cNvPr id="6" name="Rounded Rectangle 5"/>
+              <a:defRPr sz="1500" b="1">
+                <a:solidFill>
+                  <a:srgbClr val="17352B"/>
+                </a:solidFill>
+                <a:latin typeface="Arial"/>
+              </a:defRPr>
+            </a:pPr>
+            <a:r>
+              <a:t>La arquitectura fue diseñada para ofrecer rapidez, escalabilidad y una experiencia moderna:</a:t>
+            </a:r>
+          </a:p>
+        </p:txBody>
+      </p:sp>
+      <p:sp>
+        <p:nvSpPr>
+          <p:cNvPr id="10" name="Rounded Rectangle 9"/>
           <p:cNvSpPr/>
           <p:nvPr/>
         </p:nvSpPr>
         <p:spPr>
           <a:xfrm>
-            <a:off x="731520" y="1783080"/>
-            <a:ext cx="10698480" cy="822960"/>
+            <a:off x="685800" y="2423160"/>
+            <a:ext cx="10817352" cy="658368"/>
           </a:xfrm>
           <a:prstGeom prst="roundRect">
             <a:avLst/>
           </a:prstGeom>
           <a:solidFill>
-            <a:srgbClr val="1E293B"/>
+            <a:srgbClr val="F8FAF8"/>
           </a:solidFill>
-          <a:ln w="19050">
+          <a:ln w="12700">
             <a:solidFill>
-              <a:srgbClr val="10B981"/>
+              <a:srgbClr val="CFE2D8"/>
             </a:solidFill>
           </a:ln>
         </p:spPr>
@@ -4431,19 +4734,28 @@
           </a:fontRef>
         </p:style>
         <p:txBody>
-          <a:bodyPr rtlCol="0" anchor="ctr" wrap="square" lIns="228600" rIns="228600" tIns="109728"/>
+          <a:bodyPr rtlCol="0" anchor="ctr" wrap="square" lIns="228600" rIns="228600" tIns="73152"/>
           <a:lstStyle/>
           <a:p>
             <a:pPr algn="ctr">
               <a:defRPr sz="1150" b="1">
                 <a:solidFill>
-                  <a:srgbClr val="10B981"/>
-                </a:solidFill>
-                <a:latin typeface="Arial"/>
-              </a:defRPr>
-            </a:pPr>
-            <a:r>
-              <a:t>APP MÓVIL</a:t>
+                  <a:srgbClr val="0B6B4D"/>
+                </a:solidFill>
+                <a:latin typeface="Arial"/>
+              </a:defRPr>
+            </a:pPr>
+            <a:r>
+              <a:t>App Móvil: </a:t>
+            </a:r>
+            <a:r>
+              <a:rPr sz="1150" b="1">
+                <a:solidFill>
+                  <a:srgbClr val="17352B"/>
+                </a:solidFill>
+                <a:latin typeface="Arial"/>
+              </a:rPr>
+              <a:t>Kotlin • Jetpack Compose • Room • Retrofit • CameraX</a:t>
             </a:r>
           </a:p>
           <a:p>
@@ -4451,43 +4763,39 @@
               <a:spcBef>
                 <a:spcPts val="200"/>
               </a:spcBef>
-              <a:defRPr sz="1000">
-                <a:solidFill>
-                  <a:srgbClr val="E2E8F0"/>
-                </a:solidFill>
-                <a:latin typeface="Arial"/>
-              </a:defRPr>
-            </a:pPr>
-            <a:r>
-              <a:t>Kotlin • Jetpack Compose • Room • Retrofit • CameraX</a:t>
-            </a:r>
-            <a:br/>
-            <a:r>
-              <a:t>Diseño reactivo moderno, arquitectura MVVM y soporte offline de datos.</a:t>
-            </a:r>
-          </a:p>
-        </p:txBody>
-      </p:sp>
-      <p:sp>
-        <p:nvSpPr>
-          <p:cNvPr id="7" name="Rounded Rectangle 6"/>
+              <a:defRPr sz="950">
+                <a:solidFill>
+                  <a:srgbClr val="5C6B65"/>
+                </a:solidFill>
+                <a:latin typeface="Arial"/>
+              </a:defRPr>
+            </a:pPr>
+            <a:r>
+              <a:t>Desarrollo nativo Android con arquitectura Clean y persistencia local.</a:t>
+            </a:r>
+          </a:p>
+        </p:txBody>
+      </p:sp>
+      <p:sp>
+        <p:nvSpPr>
+          <p:cNvPr id="11" name="Rounded Rectangle 10"/>
           <p:cNvSpPr/>
           <p:nvPr/>
         </p:nvSpPr>
         <p:spPr>
           <a:xfrm>
-            <a:off x="731520" y="2697480"/>
-            <a:ext cx="10698480" cy="822960"/>
+            <a:off x="685800" y="3154680"/>
+            <a:ext cx="10817352" cy="658368"/>
           </a:xfrm>
           <a:prstGeom prst="roundRect">
             <a:avLst/>
           </a:prstGeom>
           <a:solidFill>
-            <a:srgbClr val="1E293B"/>
+            <a:srgbClr val="F8FAF8"/>
           </a:solidFill>
-          <a:ln w="19050">
+          <a:ln w="12700">
             <a:solidFill>
-              <a:srgbClr val="06B6D4"/>
+              <a:srgbClr val="CFE2D8"/>
             </a:solidFill>
           </a:ln>
         </p:spPr>
@@ -4506,19 +4814,28 @@
           </a:fontRef>
         </p:style>
         <p:txBody>
-          <a:bodyPr rtlCol="0" anchor="ctr" wrap="square" lIns="228600" rIns="228600" tIns="109728"/>
+          <a:bodyPr rtlCol="0" anchor="ctr" wrap="square" lIns="228600" rIns="228600" tIns="73152"/>
           <a:lstStyle/>
           <a:p>
             <a:pPr algn="ctr">
               <a:defRPr sz="1150" b="1">
                 <a:solidFill>
-                  <a:srgbClr val="06B6D4"/>
-                </a:solidFill>
-                <a:latin typeface="Arial"/>
-              </a:defRPr>
-            </a:pPr>
-            <a:r>
-              <a:t>PLATAFORMA WEB</a:t>
+                  <a:srgbClr val="0B6B4D"/>
+                </a:solidFill>
+                <a:latin typeface="Arial"/>
+              </a:defRPr>
+            </a:pPr>
+            <a:r>
+              <a:t>Plataforma Web: </a:t>
+            </a:r>
+            <a:r>
+              <a:rPr sz="1150" b="1">
+                <a:solidFill>
+                  <a:srgbClr val="17352B"/>
+                </a:solidFill>
+                <a:latin typeface="Arial"/>
+              </a:rPr>
+              <a:t>React 19 • TypeScript • Vite • Tailwind CSS • Shadcn UI</a:t>
             </a:r>
           </a:p>
           <a:p>
@@ -4526,43 +4843,39 @@
               <a:spcBef>
                 <a:spcPts val="200"/>
               </a:spcBef>
-              <a:defRPr sz="1000">
-                <a:solidFill>
-                  <a:srgbClr val="E2E8F0"/>
-                </a:solidFill>
-                <a:latin typeface="Arial"/>
-              </a:defRPr>
-            </a:pPr>
-            <a:r>
-              <a:t>React 19 • TypeScript • Vite • Tailwind CSS • Leaflet</a:t>
-            </a:r>
-            <a:br/>
-            <a:r>
-              <a:t>Paneles ultra-rápidos, mapas interactivos y control de accesos por roles.</a:t>
-            </a:r>
-          </a:p>
-        </p:txBody>
-      </p:sp>
-      <p:sp>
-        <p:nvSpPr>
-          <p:cNvPr id="8" name="Rounded Rectangle 7"/>
+              <a:defRPr sz="950">
+                <a:solidFill>
+                  <a:srgbClr val="5C6B65"/>
+                </a:solidFill>
+                <a:latin typeface="Arial"/>
+              </a:defRPr>
+            </a:pPr>
+            <a:r>
+              <a:t>Paneles administrativos rápidos, accesibles y con diseño responsive.</a:t>
+            </a:r>
+          </a:p>
+        </p:txBody>
+      </p:sp>
+      <p:sp>
+        <p:nvSpPr>
+          <p:cNvPr id="12" name="Rounded Rectangle 11"/>
           <p:cNvSpPr/>
           <p:nvPr/>
         </p:nvSpPr>
         <p:spPr>
           <a:xfrm>
-            <a:off x="731520" y="3611880"/>
-            <a:ext cx="10698480" cy="822960"/>
+            <a:off x="685800" y="3886200"/>
+            <a:ext cx="10817352" cy="658368"/>
           </a:xfrm>
           <a:prstGeom prst="roundRect">
             <a:avLst/>
           </a:prstGeom>
           <a:solidFill>
-            <a:srgbClr val="1E293B"/>
+            <a:srgbClr val="F8FAF8"/>
           </a:solidFill>
-          <a:ln w="19050">
+          <a:ln w="12700">
             <a:solidFill>
-              <a:srgbClr val="F59E0B"/>
+              <a:srgbClr val="CFE2D8"/>
             </a:solidFill>
           </a:ln>
         </p:spPr>
@@ -4581,19 +4894,28 @@
           </a:fontRef>
         </p:style>
         <p:txBody>
-          <a:bodyPr rtlCol="0" anchor="ctr" wrap="square" lIns="228600" rIns="228600" tIns="109728"/>
+          <a:bodyPr rtlCol="0" anchor="ctr" wrap="square" lIns="228600" rIns="228600" tIns="73152"/>
           <a:lstStyle/>
           <a:p>
             <a:pPr algn="ctr">
               <a:defRPr sz="1150" b="1">
                 <a:solidFill>
-                  <a:srgbClr val="F59E0B"/>
-                </a:solidFill>
-                <a:latin typeface="Arial"/>
-              </a:defRPr>
-            </a:pPr>
-            <a:r>
-              <a:t>BACKEND Y BASE DE DATOS</a:t>
+                  <a:srgbClr val="0B6B4D"/>
+                </a:solidFill>
+                <a:latin typeface="Arial"/>
+              </a:defRPr>
+            </a:pPr>
+            <a:r>
+              <a:t>Backend y Base de Datos: </a:t>
+            </a:r>
+            <a:r>
+              <a:rPr sz="1150" b="1">
+                <a:solidFill>
+                  <a:srgbClr val="17352B"/>
+                </a:solidFill>
+                <a:latin typeface="Arial"/>
+              </a:rPr>
+              <a:t>Supabase • PostgreSQL 15 • PostGIS • Row Level Security (RLS)</a:t>
             </a:r>
           </a:p>
           <a:p>
@@ -4601,43 +4923,39 @@
               <a:spcBef>
                 <a:spcPts val="200"/>
               </a:spcBef>
-              <a:defRPr sz="1000">
-                <a:solidFill>
-                  <a:srgbClr val="E2E8F0"/>
-                </a:solidFill>
-                <a:latin typeface="Arial"/>
-              </a:defRPr>
-            </a:pPr>
-            <a:r>
-              <a:t>Supabase Platform • PostgreSQL 15 • PostGIS • RLS</a:t>
-            </a:r>
-            <a:br/>
-            <a:r>
-              <a:t>Seguridad a nivel de fila, funciones espaciales y almacenamiento en la nube.</a:t>
-            </a:r>
-          </a:p>
-        </p:txBody>
-      </p:sp>
-      <p:sp>
-        <p:nvSpPr>
-          <p:cNvPr id="9" name="Rounded Rectangle 8"/>
+              <a:defRPr sz="950">
+                <a:solidFill>
+                  <a:srgbClr val="5C6B65"/>
+                </a:solidFill>
+                <a:latin typeface="Arial"/>
+              </a:defRPr>
+            </a:pPr>
+            <a:r>
+              <a:t>Gestión de datos espaciales, autenticación y seguridad a nivel de fila.</a:t>
+            </a:r>
+          </a:p>
+        </p:txBody>
+      </p:sp>
+      <p:sp>
+        <p:nvSpPr>
+          <p:cNvPr id="13" name="Rounded Rectangle 12"/>
           <p:cNvSpPr/>
           <p:nvPr/>
         </p:nvSpPr>
         <p:spPr>
           <a:xfrm>
-            <a:off x="731520" y="4526280"/>
-            <a:ext cx="10698480" cy="822960"/>
+            <a:off x="685800" y="4617720"/>
+            <a:ext cx="10817352" cy="658368"/>
           </a:xfrm>
           <a:prstGeom prst="roundRect">
             <a:avLst/>
           </a:prstGeom>
           <a:solidFill>
-            <a:srgbClr val="1E293B"/>
+            <a:srgbClr val="F8FAF8"/>
           </a:solidFill>
-          <a:ln w="19050">
+          <a:ln w="12700">
             <a:solidFill>
-              <a:srgbClr val="8B5CF6"/>
+              <a:srgbClr val="CFE2D8"/>
             </a:solidFill>
           </a:ln>
         </p:spPr>
@@ -4656,19 +4974,28 @@
           </a:fontRef>
         </p:style>
         <p:txBody>
-          <a:bodyPr rtlCol="0" anchor="ctr" wrap="square" lIns="228600" rIns="228600" tIns="109728"/>
+          <a:bodyPr rtlCol="0" anchor="ctr" wrap="square" lIns="228600" rIns="228600" tIns="73152"/>
           <a:lstStyle/>
           <a:p>
             <a:pPr algn="ctr">
               <a:defRPr sz="1150" b="1">
                 <a:solidFill>
-                  <a:srgbClr val="8B5CF6"/>
-                </a:solidFill>
-                <a:latin typeface="Arial"/>
-              </a:defRPr>
-            </a:pPr>
-            <a:r>
-              <a:t>INTELIGENCIA ARTIFICIAL</a:t>
+                  <a:srgbClr val="0B6B4D"/>
+                </a:solidFill>
+                <a:latin typeface="Arial"/>
+              </a:defRPr>
+            </a:pPr>
+            <a:r>
+              <a:t>Inteligencia Artificial: </a:t>
+            </a:r>
+            <a:r>
+              <a:rPr sz="1150" b="1">
+                <a:solidFill>
+                  <a:srgbClr val="17352B"/>
+                </a:solidFill>
+                <a:latin typeface="Arial"/>
+              </a:rPr>
+              <a:t>Google Gemini 1.5 Flash (Visión y Lenguaje Natural)</a:t>
             </a:r>
           </a:p>
           <a:p>
@@ -4676,43 +5003,39 @@
               <a:spcBef>
                 <a:spcPts val="200"/>
               </a:spcBef>
-              <a:defRPr sz="1000">
-                <a:solidFill>
-                  <a:srgbClr val="E2E8F0"/>
-                </a:solidFill>
-                <a:latin typeface="Arial"/>
-              </a:defRPr>
-            </a:pPr>
-            <a:r>
-              <a:t>Google Gemini 1.5 Flash (Visión y Lenguaje Natural)</a:t>
-            </a:r>
-            <a:br/>
-            <a:r>
-              <a:t>Inferencia multimodal en tiempo real vía Edge Functions en Deno.</a:t>
-            </a:r>
-          </a:p>
-        </p:txBody>
-      </p:sp>
-      <p:sp>
-        <p:nvSpPr>
-          <p:cNvPr id="10" name="Rounded Rectangle 9"/>
+              <a:defRPr sz="950">
+                <a:solidFill>
+                  <a:srgbClr val="5C6B65"/>
+                </a:solidFill>
+                <a:latin typeface="Arial"/>
+              </a:defRPr>
+            </a:pPr>
+            <a:r>
+              <a:t>Inferencia multimodal rápida para clasificación de fotos y consultas de chat.</a:t>
+            </a:r>
+          </a:p>
+        </p:txBody>
+      </p:sp>
+      <p:sp>
+        <p:nvSpPr>
+          <p:cNvPr id="14" name="Rounded Rectangle 13"/>
           <p:cNvSpPr/>
           <p:nvPr/>
         </p:nvSpPr>
         <p:spPr>
           <a:xfrm>
-            <a:off x="731520" y="5440680"/>
-            <a:ext cx="10698480" cy="822960"/>
+            <a:off x="685800" y="5349240"/>
+            <a:ext cx="10817352" cy="658368"/>
           </a:xfrm>
           <a:prstGeom prst="roundRect">
             <a:avLst/>
           </a:prstGeom>
           <a:solidFill>
-            <a:srgbClr val="1E293B"/>
+            <a:srgbClr val="F8FAF8"/>
           </a:solidFill>
-          <a:ln w="19050">
+          <a:ln w="12700">
             <a:solidFill>
-              <a:srgbClr val="3B82F6"/>
+              <a:srgbClr val="CFE2D8"/>
             </a:solidFill>
           </a:ln>
         </p:spPr>
@@ -4731,19 +5054,28 @@
           </a:fontRef>
         </p:style>
         <p:txBody>
-          <a:bodyPr rtlCol="0" anchor="ctr" wrap="square" lIns="228600" rIns="228600" tIns="109728"/>
+          <a:bodyPr rtlCol="0" anchor="ctr" wrap="square" lIns="228600" rIns="228600" tIns="73152"/>
           <a:lstStyle/>
           <a:p>
             <a:pPr algn="ctr">
               <a:defRPr sz="1150" b="1">
                 <a:solidFill>
-                  <a:srgbClr val="3B82F6"/>
-                </a:solidFill>
-                <a:latin typeface="Arial"/>
-              </a:defRPr>
-            </a:pPr>
-            <a:r>
-              <a:t>HERRAMIENTAS ADICIONALES</a:t>
+                  <a:srgbClr val="0B6B4D"/>
+                </a:solidFill>
+                <a:latin typeface="Arial"/>
+              </a:defRPr>
+            </a:pPr>
+            <a:r>
+              <a:t>Herramientas adicionales: </a:t>
+            </a:r>
+            <a:r>
+              <a:rPr sz="1150" b="1">
+                <a:solidFill>
+                  <a:srgbClr val="17352B"/>
+                </a:solidFill>
+                <a:latin typeface="Arial"/>
+              </a:rPr>
+              <a:t>React-Leaflet • Google Maps Turn-by-Turn • Edge Functions en Deno</a:t>
             </a:r>
           </a:p>
           <a:p>
@@ -4751,19 +5083,68 @@
               <a:spcBef>
                 <a:spcPts val="200"/>
               </a:spcBef>
-              <a:defRPr sz="1000">
-                <a:solidFill>
-                  <a:srgbClr val="E2E8F0"/>
-                </a:solidFill>
-                <a:latin typeface="Arial"/>
-              </a:defRPr>
-            </a:pPr>
-            <a:r>
-              <a:t>Google Maps Intent • Deno Runtime • GitHub Actions • Vercel</a:t>
-            </a:r>
-            <a:br/>
-            <a:r>
-              <a:t>Integración continua, ruteo por GPS y despliegue automatizado.</a:t>
+              <a:defRPr sz="950">
+                <a:solidFill>
+                  <a:srgbClr val="5C6B65"/>
+                </a:solidFill>
+                <a:latin typeface="Arial"/>
+              </a:defRPr>
+            </a:pPr>
+            <a:r>
+              <a:t>Mapas interactivos, ruteo asistido por voz y funciones serverless livianas.</a:t>
+            </a:r>
+          </a:p>
+        </p:txBody>
+      </p:sp>
+      <p:sp>
+        <p:nvSpPr>
+          <p:cNvPr id="15" name="Rounded Rectangle 14"/>
+          <p:cNvSpPr/>
+          <p:nvPr/>
+        </p:nvSpPr>
+        <p:spPr>
+          <a:xfrm>
+            <a:off x="685800" y="6217920"/>
+            <a:ext cx="10817352" cy="320040"/>
+          </a:xfrm>
+          <a:prstGeom prst="roundRect">
+            <a:avLst/>
+          </a:prstGeom>
+          <a:solidFill>
+            <a:srgbClr val="DDF4E9"/>
+          </a:solidFill>
+          <a:ln>
+            <a:noFill/>
+          </a:ln>
+        </p:spPr>
+        <p:style>
+          <a:lnRef idx="1">
+            <a:schemeClr val="accent1"/>
+          </a:lnRef>
+          <a:fillRef idx="3">
+            <a:schemeClr val="accent1"/>
+          </a:fillRef>
+          <a:effectRef idx="2">
+            <a:schemeClr val="accent1"/>
+          </a:effectRef>
+          <a:fontRef idx="minor">
+            <a:schemeClr val="lt1"/>
+          </a:fontRef>
+        </p:style>
+        <p:txBody>
+          <a:bodyPr rtlCol="0" anchor="ctr" lIns="274320"/>
+          <a:lstStyle/>
+          <a:p>
+            <a:pPr algn="ctr">
+              <a:defRPr sz="1000" b="1">
+                <a:solidFill>
+                  <a:srgbClr val="0B6B4D"/>
+                </a:solidFill>
+                <a:latin typeface="Arial"/>
+              </a:defRPr>
+            </a:pPr>
+            <a:r>
+              <a:t>⚡ Stack 100% moderno garantizando alta disponibilidad y bajo consumo de recursos en la nube.</a:t>
             </a:r>
           </a:p>
         </p:txBody>
@@ -4801,7 +5182,7 @@
             <a:avLst/>
           </a:prstGeom>
           <a:solidFill>
-            <a:srgbClr val="0F172A"/>
+            <a:srgbClr val="FFFFFF"/>
           </a:solidFill>
           <a:ln>
             <a:noFill/>
@@ -4831,20 +5212,128 @@
       </p:sp>
       <p:sp>
         <p:nvSpPr>
-          <p:cNvPr id="3" name="Rounded Rectangle 2"/>
+          <p:cNvPr id="3" name="TextBox 2"/>
+          <p:cNvSpPr txBox="1"/>
+          <p:nvPr/>
+        </p:nvSpPr>
+        <p:spPr>
+          <a:xfrm>
+            <a:off x="685800" y="411480"/>
+            <a:ext cx="5029200" cy="320040"/>
+          </a:xfrm>
+          <a:prstGeom prst="rect">
+            <a:avLst/>
+          </a:prstGeom>
+          <a:noFill/>
+        </p:spPr>
+        <p:txBody>
+          <a:bodyPr wrap="square" lIns="0" tIns="0">
+            <a:spAutoFit/>
+          </a:bodyPr>
+          <a:lstStyle/>
+          <a:p>
+            <a:pPr>
+              <a:defRPr sz="1100" b="1">
+                <a:solidFill>
+                  <a:srgbClr val="0B6B4D"/>
+                </a:solidFill>
+                <a:latin typeface="Arial"/>
+              </a:defRPr>
+            </a:pPr>
+            <a:r>
+              <a:t>11 • ROADMAP</a:t>
+            </a:r>
+          </a:p>
+        </p:txBody>
+      </p:sp>
+      <p:sp>
+        <p:nvSpPr>
+          <p:cNvPr id="4" name="TextBox 3"/>
+          <p:cNvSpPr txBox="1"/>
+          <p:nvPr/>
+        </p:nvSpPr>
+        <p:spPr>
+          <a:xfrm>
+            <a:off x="10789920" y="411480"/>
+            <a:ext cx="731520" cy="320040"/>
+          </a:xfrm>
+          <a:prstGeom prst="rect">
+            <a:avLst/>
+          </a:prstGeom>
+          <a:noFill/>
+        </p:spPr>
+        <p:txBody>
+          <a:bodyPr wrap="none" rIns="0" tIns="0">
+            <a:spAutoFit/>
+          </a:bodyPr>
+          <a:lstStyle/>
+          <a:p>
+            <a:pPr algn="r">
+              <a:defRPr sz="1100" b="1">
+                <a:solidFill>
+                  <a:srgbClr val="5C6B65"/>
+                </a:solidFill>
+                <a:latin typeface="Arial"/>
+              </a:defRPr>
+            </a:pPr>
+            <a:r>
+              <a:t>12</a:t>
+            </a:r>
+          </a:p>
+        </p:txBody>
+      </p:sp>
+      <p:sp>
+        <p:nvSpPr>
+          <p:cNvPr id="5" name="TextBox 4"/>
+          <p:cNvSpPr txBox="1"/>
+          <p:nvPr/>
+        </p:nvSpPr>
+        <p:spPr>
+          <a:xfrm>
+            <a:off x="685800" y="685800"/>
+            <a:ext cx="10789920" cy="685800"/>
+          </a:xfrm>
+          <a:prstGeom prst="rect">
+            <a:avLst/>
+          </a:prstGeom>
+          <a:noFill/>
+        </p:spPr>
+        <p:txBody>
+          <a:bodyPr wrap="square" lIns="0" tIns="0">
+            <a:spAutoFit/>
+          </a:bodyPr>
+          <a:lstStyle/>
+          <a:p>
+            <a:pPr>
+              <a:defRPr sz="2500" b="1">
+                <a:solidFill>
+                  <a:srgbClr val="17352B"/>
+                </a:solidFill>
+                <a:latin typeface="Arial"/>
+              </a:defRPr>
+            </a:pPr>
+            <a:r>
+              <a:t>Roadmap</a:t>
+            </a:r>
+          </a:p>
+        </p:txBody>
+      </p:sp>
+      <p:sp>
+        <p:nvSpPr>
+          <p:cNvPr id="6" name="Rectangle 5"/>
           <p:cNvSpPr/>
           <p:nvPr/>
         </p:nvSpPr>
         <p:spPr>
           <a:xfrm>
-            <a:off x="731520" y="384048"/>
-            <a:ext cx="3474720" cy="347472"/>
-          </a:xfrm>
-          <a:prstGeom prst="roundRect">
+            <a:off x="685800" y="1417320"/>
+            <a:ext cx="10817352" cy="13716"/>
+          </a:xfrm>
+          <a:prstGeom prst="rect">
             <a:avLst/>
           </a:prstGeom>
           <a:solidFill>
-            <a:srgbClr val="F59E0B"/>
+            <a:srgbClr val="CFE2D8"/>
           </a:solidFill>
           <a:ln>
             <a:noFill/>
@@ -4868,23 +5357,49 @@
           <a:bodyPr rtlCol="0" anchor="ctr"/>
           <a:lstStyle/>
           <a:p>
-            <a:pPr algn="ctr">
-              <a:defRPr sz="950" b="1">
-                <a:solidFill>
-                  <a:srgbClr val="FFFFFF"/>
-                </a:solidFill>
-                <a:latin typeface="Arial"/>
-              </a:defRPr>
-            </a:pPr>
-            <a:r>
-              <a:t>11. EVOLUCIÓN</a:t>
+            <a:pPr algn="ctr"/>
+          </a:p>
+        </p:txBody>
+      </p:sp>
+      <p:sp>
+        <p:nvSpPr>
+          <p:cNvPr id="7" name="TextBox 6"/>
+          <p:cNvSpPr txBox="1"/>
+          <p:nvPr/>
+        </p:nvSpPr>
+        <p:spPr>
+          <a:xfrm>
+            <a:off x="685800" y="6446520"/>
+            <a:ext cx="5486400" cy="274320"/>
+          </a:xfrm>
+          <a:prstGeom prst="rect">
+            <a:avLst/>
+          </a:prstGeom>
+          <a:noFill/>
+        </p:spPr>
+        <p:txBody>
+          <a:bodyPr wrap="none" lIns="0" bIns="0">
+            <a:spAutoFit/>
+          </a:bodyPr>
+          <a:lstStyle/>
+          <a:p>
+            <a:pPr>
+              <a:defRPr sz="950">
+                <a:solidFill>
+                  <a:srgbClr val="5C6B65"/>
+                </a:solidFill>
+                <a:latin typeface="Arial"/>
+              </a:defRPr>
+            </a:pPr>
+            <a:r>
+              <a:t>EcoMapa  •  CivicLoop Technologies S.A.</a:t>
             </a:r>
           </a:p>
         </p:txBody>
       </p:sp>
       <p:pic>
         <p:nvPicPr>
-          <p:cNvPr id="4" name="Picture 3" descr="civicloop_logo_rounded.png"/>
+          <p:cNvPr id="8" name="Picture 7" descr="civicloop_logo_rounded.png"/>
           <p:cNvPicPr>
             <a:picLocks noChangeAspect="1"/>
           </p:cNvPicPr>
@@ -4898,8 +5413,8 @@
         </p:blipFill>
         <p:spPr>
           <a:xfrm>
-            <a:off x="11064240" y="347472"/>
-            <a:ext cx="594360" cy="594360"/>
+            <a:off x="11064240" y="6309360"/>
+            <a:ext cx="438912" cy="438912"/>
           </a:xfrm>
           <a:prstGeom prst="rect">
             <a:avLst/>
@@ -4908,14 +5423,14 @@
       </p:pic>
       <p:sp>
         <p:nvSpPr>
-          <p:cNvPr id="5" name="TextBox 4"/>
+          <p:cNvPr id="9" name="TextBox 8"/>
           <p:cNvSpPr txBox="1"/>
           <p:nvPr/>
         </p:nvSpPr>
         <p:spPr>
           <a:xfrm>
-            <a:off x="731520" y="749808"/>
-            <a:ext cx="10515600" cy="777240"/>
+            <a:off x="685800" y="1645920"/>
+            <a:ext cx="10789920" cy="548640"/>
           </a:xfrm>
           <a:prstGeom prst="rect">
             <a:avLst/>
@@ -4923,61 +5438,45 @@
           <a:noFill/>
         </p:spPr>
         <p:txBody>
-          <a:bodyPr wrap="square">
+          <a:bodyPr wrap="square" lIns="0">
             <a:spAutoFit/>
           </a:bodyPr>
           <a:lstStyle/>
           <a:p>
             <a:pPr>
-              <a:defRPr sz="2500" b="1">
-                <a:solidFill>
-                  <a:srgbClr val="FFFFFF"/>
-                </a:solidFill>
-                <a:latin typeface="Arial"/>
-              </a:defRPr>
-            </a:pPr>
-            <a:r>
-              <a:t>Roadmap: “EcoMapa Continúa Evolucionando”</a:t>
-            </a:r>
-          </a:p>
-          <a:p>
-            <a:pPr>
-              <a:spcBef>
-                <a:spcPts val="300"/>
-              </a:spcBef>
-              <a:defRPr sz="1300">
-                <a:solidFill>
-                  <a:srgbClr val="94A3B8"/>
-                </a:solidFill>
-                <a:latin typeface="Arial"/>
-              </a:defRPr>
-            </a:pPr>
-            <a:r>
-              <a:t>El proyecto fue desarrollado como una solución consolidada con proyección futura</a:t>
-            </a:r>
-          </a:p>
-        </p:txBody>
-      </p:sp>
-      <p:sp>
-        <p:nvSpPr>
-          <p:cNvPr id="6" name="Rounded Rectangle 5"/>
+              <a:defRPr sz="1500" b="1">
+                <a:solidFill>
+                  <a:srgbClr val="17352B"/>
+                </a:solidFill>
+                <a:latin typeface="Arial"/>
+              </a:defRPr>
+            </a:pPr>
+            <a:r>
+              <a:t>“EcoMapa continúa evolucionando.” El proyecto fue desarrollado como una solución funcional con proyección de expansión futura:</a:t>
+            </a:r>
+          </a:p>
+        </p:txBody>
+      </p:sp>
+      <p:sp>
+        <p:nvSpPr>
+          <p:cNvPr id="10" name="Rounded Rectangle 9"/>
           <p:cNvSpPr/>
           <p:nvPr/>
         </p:nvSpPr>
         <p:spPr>
           <a:xfrm>
-            <a:off x="731520" y="1783080"/>
-            <a:ext cx="5120640" cy="4389120"/>
+            <a:off x="685800" y="2423160"/>
+            <a:ext cx="5257800" cy="3931920"/>
           </a:xfrm>
           <a:prstGeom prst="roundRect">
             <a:avLst/>
           </a:prstGeom>
           <a:solidFill>
-            <a:srgbClr val="1E293B"/>
+            <a:srgbClr val="F8FAF8"/>
           </a:solidFill>
-          <a:ln w="19050">
+          <a:ln w="12700">
             <a:solidFill>
-              <a:srgbClr val="10B981"/>
+              <a:srgbClr val="CFE2D8"/>
             </a:solidFill>
           </a:ln>
         </p:spPr>
@@ -5000,15 +5499,15 @@
           <a:lstStyle/>
           <a:p>
             <a:pPr algn="ctr">
-              <a:defRPr sz="1300" b="1">
-                <a:solidFill>
-                  <a:srgbClr val="10B981"/>
-                </a:solidFill>
-                <a:latin typeface="Arial"/>
-              </a:defRPr>
-            </a:pPr>
-            <a:r>
-              <a:t>✅ CONSOLIDADO EN LA VERSIÓN 2.1</a:t>
+              <a:defRPr sz="1400" b="1">
+                <a:solidFill>
+                  <a:srgbClr val="0B6B4D"/>
+                </a:solidFill>
+                <a:latin typeface="Arial"/>
+              </a:defRPr>
+            </a:pPr>
+            <a:r>
+              <a:t>Consolidado en la Versión 2.1</a:t>
             </a:r>
           </a:p>
           <a:p>
@@ -5018,13 +5517,13 @@
               </a:spcBef>
               <a:defRPr sz="1100">
                 <a:solidFill>
-                  <a:srgbClr val="E2E8F0"/>
-                </a:solidFill>
-                <a:latin typeface="Arial"/>
-              </a:defRPr>
-            </a:pPr>
-            <a:r>
-              <a:t>• Reconocimiento de residuos por imágenes con Google Gemini.</a:t>
+                  <a:srgbClr val="17352B"/>
+                </a:solidFill>
+                <a:latin typeface="Arial"/>
+              </a:defRPr>
+            </a:pPr>
+            <a:r>
+              <a:t>• Reconocimiento de residuos mediante imágenes con Google Gemini.</a:t>
             </a:r>
           </a:p>
           <a:p>
@@ -5034,13 +5533,13 @@
               </a:spcBef>
               <a:defRPr sz="1100">
                 <a:solidFill>
-                  <a:srgbClr val="E2E8F0"/>
-                </a:solidFill>
-                <a:latin typeface="Arial"/>
-              </a:defRPr>
-            </a:pPr>
-            <a:r>
-              <a:t>• Navegación GPS Turn-by-Turn directa a Google Maps.</a:t>
+                  <a:srgbClr val="17352B"/>
+                </a:solidFill>
+                <a:latin typeface="Arial"/>
+              </a:defRPr>
+            </a:pPr>
+            <a:r>
+              <a:t>• Navegación GPS Turn-by-Turn directa en Google Maps.</a:t>
             </a:r>
           </a:p>
           <a:p>
@@ -5050,13 +5549,13 @@
               </a:spcBef>
               <a:defRPr sz="1100">
                 <a:solidFill>
-                  <a:srgbClr val="E2E8F0"/>
-                </a:solidFill>
-                <a:latin typeface="Arial"/>
-              </a:defRPr>
-            </a:pPr>
-            <a:r>
-              <a:t>• Módulo de solicitud de retiros domiciliarios de voluminosos.</a:t>
+                  <a:srgbClr val="17352B"/>
+                </a:solidFill>
+                <a:latin typeface="Arial"/>
+              </a:defRPr>
+            </a:pPr>
+            <a:r>
+              <a:t>• Sistema de solicitud de retiros domiciliarios de residuos voluminosos.</a:t>
             </a:r>
           </a:p>
           <a:p>
@@ -5066,13 +5565,13 @@
               </a:spcBef>
               <a:defRPr sz="1100">
                 <a:solidFill>
-                  <a:srgbClr val="E2E8F0"/>
-                </a:solidFill>
-                <a:latin typeface="Arial"/>
-              </a:defRPr>
-            </a:pPr>
-            <a:r>
-              <a:t>• Puntos de reciclaje reales activos en Matorrales y Villa del Rosario.</a:t>
+                  <a:srgbClr val="17352B"/>
+                </a:solidFill>
+                <a:latin typeface="Arial"/>
+              </a:defRPr>
+            </a:pPr>
+            <a:r>
+              <a:t>• Puntos limpios reales activos en Matorrales y Villa del Rosario.</a:t>
             </a:r>
           </a:p>
           <a:p>
@@ -5082,13 +5581,13 @@
               </a:spcBef>
               <a:defRPr sz="1100">
                 <a:solidFill>
-                  <a:srgbClr val="E2E8F0"/>
-                </a:solidFill>
-                <a:latin typeface="Arial"/>
-              </a:defRPr>
-            </a:pPr>
-            <a:r>
-              <a:t>• Badges tipográficos dinámicos de residuos sobre el mapa.</a:t>
+                  <a:srgbClr val="17352B"/>
+                </a:solidFill>
+                <a:latin typeface="Arial"/>
+              </a:defRPr>
+            </a:pPr>
+            <a:r>
+              <a:t>• Badges tipográficos de materiales sobre los marcadores del mapa.</a:t>
             </a:r>
           </a:p>
           <a:p>
@@ -5098,37 +5597,37 @@
               </a:spcBef>
               <a:defRPr sz="1100">
                 <a:solidFill>
-                  <a:srgbClr val="E2E8F0"/>
-                </a:solidFill>
-                <a:latin typeface="Arial"/>
-              </a:defRPr>
-            </a:pPr>
-            <a:r>
-              <a:t>• APK compilada e instalable para smartphones Android.</a:t>
-            </a:r>
-          </a:p>
-        </p:txBody>
-      </p:sp>
-      <p:sp>
-        <p:nvSpPr>
-          <p:cNvPr id="7" name="Rounded Rectangle 6"/>
+                  <a:srgbClr val="17352B"/>
+                </a:solidFill>
+                <a:latin typeface="Arial"/>
+              </a:defRPr>
+            </a:pPr>
+            <a:r>
+              <a:t>• APK compilada e instalable para dispositivos Android (21.8 MB).</a:t>
+            </a:r>
+          </a:p>
+        </p:txBody>
+      </p:sp>
+      <p:sp>
+        <p:nvSpPr>
+          <p:cNvPr id="11" name="Rounded Rectangle 10"/>
           <p:cNvSpPr/>
           <p:nvPr/>
         </p:nvSpPr>
         <p:spPr>
           <a:xfrm>
-            <a:off x="6217920" y="1783080"/>
-            <a:ext cx="5212080" cy="4389120"/>
+            <a:off x="6217920" y="2423160"/>
+            <a:ext cx="5285232" cy="3931920"/>
           </a:xfrm>
           <a:prstGeom prst="roundRect">
             <a:avLst/>
           </a:prstGeom>
           <a:solidFill>
-            <a:srgbClr val="1E293B"/>
+            <a:srgbClr val="EAF5EE"/>
           </a:solidFill>
-          <a:ln w="19050">
+          <a:ln w="12700">
             <a:solidFill>
-              <a:srgbClr val="F59E0B"/>
+              <a:srgbClr val="CFE2D8"/>
             </a:solidFill>
           </a:ln>
         </p:spPr>
@@ -5151,15 +5650,15 @@
           <a:lstStyle/>
           <a:p>
             <a:pPr algn="ctr">
-              <a:defRPr sz="1300" b="1">
-                <a:solidFill>
-                  <a:srgbClr val="F59E0B"/>
-                </a:solidFill>
-                <a:latin typeface="Arial"/>
-              </a:defRPr>
-            </a:pPr>
-            <a:r>
-              <a:t>🚀 PRÓXIMOS PASOS Y EXPANSIÓN</a:t>
+              <a:defRPr sz="1400" b="1">
+                <a:solidFill>
+                  <a:srgbClr val="0B6B4D"/>
+                </a:solidFill>
+                <a:latin typeface="Arial"/>
+              </a:defRPr>
+            </a:pPr>
+            <a:r>
+              <a:t>Ideas futuras y expansión</a:t>
             </a:r>
           </a:p>
           <a:p>
@@ -5169,13 +5668,13 @@
               </a:spcBef>
               <a:defRPr sz="1100">
                 <a:solidFill>
-                  <a:srgbClr val="E2E8F0"/>
-                </a:solidFill>
-                <a:latin typeface="Arial"/>
-              </a:defRPr>
-            </a:pPr>
-            <a:r>
-              <a:t>• Estadísticas avanzadas e insights de generación de residuos por zona.</a:t>
+                  <a:srgbClr val="17352B"/>
+                </a:solidFill>
+                <a:latin typeface="Arial"/>
+              </a:defRPr>
+            </a:pPr>
+            <a:r>
+              <a:t>• Estadísticas e insights avanzados de generación de residuos por zona.</a:t>
             </a:r>
           </a:p>
           <a:p>
@@ -5185,13 +5684,13 @@
               </a:spcBef>
               <a:defRPr sz="1100">
                 <a:solidFill>
-                  <a:srgbClr val="E2E8F0"/>
-                </a:solidFill>
-                <a:latin typeface="Arial"/>
-              </a:defRPr>
-            </a:pPr>
-            <a:r>
-              <a:t>• Sensores IoT ultrasónicos de llenado con LoRaWAN en contenedores.</a:t>
+                  <a:srgbClr val="17352B"/>
+                </a:solidFill>
+                <a:latin typeface="Arial"/>
+              </a:defRPr>
+            </a:pPr>
+            <a:r>
+              <a:t>• Ranking ecológico comunitario y torneos intercolegiales.</a:t>
             </a:r>
           </a:p>
           <a:p>
@@ -5201,13 +5700,13 @@
               </a:spcBef>
               <a:defRPr sz="1100">
                 <a:solidFill>
-                  <a:srgbClr val="E2E8F0"/>
-                </a:solidFill>
-                <a:latin typeface="Arial"/>
-              </a:defRPr>
-            </a:pPr>
-            <a:r>
-              <a:t>• Ranking ecológico comunitario y torneos intercolegiales.</a:t>
+                  <a:srgbClr val="17352B"/>
+                </a:solidFill>
+                <a:latin typeface="Arial"/>
+              </a:defRPr>
+            </a:pPr>
+            <a:r>
+              <a:t>• Sensores IoT ultrasónicos de nivel de llenado en contenedores urbanos.</a:t>
             </a:r>
           </a:p>
           <a:p>
@@ -5217,7 +5716,7 @@
               </a:spcBef>
               <a:defRPr sz="1100">
                 <a:solidFill>
-                  <a:srgbClr val="E2E8F0"/>
+                  <a:srgbClr val="17352B"/>
                 </a:solidFill>
                 <a:latin typeface="Arial"/>
               </a:defRPr>
@@ -5233,13 +5732,13 @@
               </a:spcBef>
               <a:defRPr sz="1100">
                 <a:solidFill>
-                  <a:srgbClr val="E2E8F0"/>
-                </a:solidFill>
-                <a:latin typeface="Arial"/>
-              </a:defRPr>
-            </a:pPr>
-            <a:r>
-              <a:t>• Nuevos sistemas de canje de recompensas y billeteras digitales locales.</a:t>
+                  <a:srgbClr val="17352B"/>
+                </a:solidFill>
+                <a:latin typeface="Arial"/>
+              </a:defRPr>
+            </a:pPr>
+            <a:r>
+              <a:t>• Nuevos sistemas de canje de recompensas y bonificación de tasas municipales.</a:t>
             </a:r>
           </a:p>
         </p:txBody>
@@ -5277,7 +5776,7 @@
             <a:avLst/>
           </a:prstGeom>
           <a:solidFill>
-            <a:srgbClr val="0F172A"/>
+            <a:srgbClr val="0B6B4D"/>
           </a:solidFill>
           <a:ln>
             <a:noFill/>
@@ -5321,8 +5820,8 @@
         </p:blipFill>
         <p:spPr>
           <a:xfrm>
-            <a:off x="4389120" y="640080"/>
-            <a:ext cx="1463040" cy="1463040"/>
+            <a:off x="4480560" y="640080"/>
+            <a:ext cx="1371600" cy="1371600"/>
           </a:xfrm>
           <a:prstGeom prst="rect">
             <a:avLst/>
@@ -5346,7 +5845,7 @@
         <p:spPr>
           <a:xfrm>
             <a:off x="6309360" y="640080"/>
-            <a:ext cx="1463040" cy="1463040"/>
+            <a:ext cx="1371600" cy="1371600"/>
           </a:xfrm>
           <a:prstGeom prst="rect">
             <a:avLst/>
@@ -5361,8 +5860,8 @@
         </p:nvSpPr>
         <p:spPr>
           <a:xfrm>
-            <a:off x="731520" y="2286000"/>
-            <a:ext cx="10698480" cy="1645920"/>
+            <a:off x="685800" y="2194560"/>
+            <a:ext cx="10817352" cy="1828800"/>
           </a:xfrm>
           <a:prstGeom prst="rect">
             <a:avLst/>
@@ -5376,7 +5875,7 @@
           <a:lstStyle/>
           <a:p>
             <a:pPr algn="ctr">
-              <a:defRPr sz="4000" b="1">
+              <a:defRPr sz="4400" b="1">
                 <a:solidFill>
                   <a:srgbClr val="FFFFFF"/>
                 </a:solidFill>
@@ -5392,15 +5891,15 @@
               <a:spcBef>
                 <a:spcPts val="800"/>
               </a:spcBef>
-              <a:defRPr sz="2000" b="1">
-                <a:solidFill>
-                  <a:srgbClr val="34D399"/>
-                </a:solidFill>
-                <a:latin typeface="Arial"/>
-              </a:defRPr>
-            </a:pPr>
-            <a:r>
-              <a:t>Triple Impacto: Social • Ambiental • Tecnológico</a:t>
+              <a:defRPr sz="1800">
+                <a:solidFill>
+                  <a:srgbClr val="DDF4E9"/>
+                </a:solidFill>
+                <a:latin typeface="Arial"/>
+              </a:defRPr>
+            </a:pPr>
+            <a:r>
+              <a:t>“La tecnología puede hacer que reciclar bien sea una decisión más fácil.”</a:t>
             </a:r>
           </a:p>
         </p:txBody>
@@ -5413,19 +5912,17 @@
         </p:nvSpPr>
         <p:spPr>
           <a:xfrm>
-            <a:off x="1645920" y="4114800"/>
-            <a:ext cx="8869680" cy="2148840"/>
+            <a:off x="1645920" y="4206240"/>
+            <a:ext cx="8897112" cy="2011680"/>
           </a:xfrm>
           <a:prstGeom prst="roundRect">
             <a:avLst/>
           </a:prstGeom>
           <a:solidFill>
-            <a:srgbClr val="1E293B"/>
+            <a:srgbClr val="FFFFFF"/>
           </a:solidFill>
-          <a:ln w="19050">
-            <a:solidFill>
-              <a:srgbClr val="10B981"/>
-            </a:solidFill>
+          <a:ln>
+            <a:noFill/>
           </a:ln>
         </p:spPr>
         <p:style>
@@ -5443,13 +5940,13 @@
           </a:fontRef>
         </p:style>
         <p:txBody>
-          <a:bodyPr rtlCol="0" anchor="ctr" wrap="square" lIns="365760" rIns="365760" tIns="182880"/>
+          <a:bodyPr rtlCol="0" anchor="ctr" wrap="square" lIns="365760" rIns="365760" tIns="201168"/>
           <a:lstStyle/>
           <a:p>
             <a:pPr algn="ctr">
               <a:defRPr sz="1400" b="1">
                 <a:solidFill>
-                  <a:srgbClr val="06B6D4"/>
+                  <a:srgbClr val="0B6B4D"/>
                 </a:solidFill>
                 <a:latin typeface="Arial"/>
               </a:defRPr>
@@ -5461,11 +5958,11 @@
           <a:p>
             <a:pPr algn="ctr">
               <a:spcBef>
-                <a:spcPts val="300"/>
+                <a:spcPts val="400"/>
               </a:spcBef>
               <a:defRPr sz="1250" b="1">
                 <a:solidFill>
-                  <a:srgbClr val="FFFFFF"/>
+                  <a:srgbClr val="17352B"/>
                 </a:solidFill>
                 <a:latin typeface="Arial"/>
               </a:defRPr>
@@ -5481,7 +5978,7 @@
               </a:spcBef>
               <a:defRPr sz="1100">
                 <a:solidFill>
-                  <a:srgbClr val="94A3B8"/>
+                  <a:srgbClr val="5C6B65"/>
                 </a:solidFill>
                 <a:latin typeface="Arial"/>
               </a:defRPr>
@@ -5495,15 +5992,15 @@
               <a:spcBef>
                 <a:spcPts val="600"/>
               </a:spcBef>
-              <a:defRPr sz="1100" b="1">
-                <a:solidFill>
-                  <a:srgbClr val="34D399"/>
-                </a:solidFill>
-                <a:latin typeface="Arial"/>
-              </a:defRPr>
-            </a:pPr>
-            <a:r>
-              <a:t>🌐 Repositorio GitHub: github.com/RomeroGerardo/EcoMapaLandinPage</a:t>
+              <a:defRPr sz="1050" b="1">
+                <a:solidFill>
+                  <a:srgbClr val="0B6B4D"/>
+                </a:solidFill>
+                <a:latin typeface="Arial"/>
+              </a:defRPr>
+            </a:pPr>
+            <a:r>
+              <a:t>Triple Impacto: Social  •  Ambiental  •  Tecnológico  |  github.com/RomeroGerardo/EcoMapaLandinPage</a:t>
             </a:r>
           </a:p>
         </p:txBody>
@@ -5541,7 +6038,7 @@
             <a:avLst/>
           </a:prstGeom>
           <a:solidFill>
-            <a:srgbClr val="0F172A"/>
+            <a:srgbClr val="FFFFFF"/>
           </a:solidFill>
           <a:ln>
             <a:noFill/>
@@ -5571,20 +6068,128 @@
       </p:sp>
       <p:sp>
         <p:nvSpPr>
-          <p:cNvPr id="3" name="Rounded Rectangle 2"/>
+          <p:cNvPr id="3" name="TextBox 2"/>
+          <p:cNvSpPr txBox="1"/>
+          <p:nvPr/>
+        </p:nvSpPr>
+        <p:spPr>
+          <a:xfrm>
+            <a:off x="685800" y="411480"/>
+            <a:ext cx="5029200" cy="320040"/>
+          </a:xfrm>
+          <a:prstGeom prst="rect">
+            <a:avLst/>
+          </a:prstGeom>
+          <a:noFill/>
+        </p:spPr>
+        <p:txBody>
+          <a:bodyPr wrap="square" lIns="0" tIns="0">
+            <a:spAutoFit/>
+          </a:bodyPr>
+          <a:lstStyle/>
+          <a:p>
+            <a:pPr>
+              <a:defRPr sz="1100" b="1">
+                <a:solidFill>
+                  <a:srgbClr val="0B6B4D"/>
+                </a:solidFill>
+                <a:latin typeface="Arial"/>
+              </a:defRPr>
+            </a:pPr>
+            <a:r>
+              <a:t>01 • CONTEXTO</a:t>
+            </a:r>
+          </a:p>
+        </p:txBody>
+      </p:sp>
+      <p:sp>
+        <p:nvSpPr>
+          <p:cNvPr id="4" name="TextBox 3"/>
+          <p:cNvSpPr txBox="1"/>
+          <p:nvPr/>
+        </p:nvSpPr>
+        <p:spPr>
+          <a:xfrm>
+            <a:off x="10789920" y="411480"/>
+            <a:ext cx="731520" cy="320040"/>
+          </a:xfrm>
+          <a:prstGeom prst="rect">
+            <a:avLst/>
+          </a:prstGeom>
+          <a:noFill/>
+        </p:spPr>
+        <p:txBody>
+          <a:bodyPr wrap="none" rIns="0" tIns="0">
+            <a:spAutoFit/>
+          </a:bodyPr>
+          <a:lstStyle/>
+          <a:p>
+            <a:pPr algn="r">
+              <a:defRPr sz="1100" b="1">
+                <a:solidFill>
+                  <a:srgbClr val="5C6B65"/>
+                </a:solidFill>
+                <a:latin typeface="Arial"/>
+              </a:defRPr>
+            </a:pPr>
+            <a:r>
+              <a:t>02</a:t>
+            </a:r>
+          </a:p>
+        </p:txBody>
+      </p:sp>
+      <p:sp>
+        <p:nvSpPr>
+          <p:cNvPr id="5" name="TextBox 4"/>
+          <p:cNvSpPr txBox="1"/>
+          <p:nvPr/>
+        </p:nvSpPr>
+        <p:spPr>
+          <a:xfrm>
+            <a:off x="685800" y="685800"/>
+            <a:ext cx="10789920" cy="685800"/>
+          </a:xfrm>
+          <a:prstGeom prst="rect">
+            <a:avLst/>
+          </a:prstGeom>
+          <a:noFill/>
+        </p:spPr>
+        <p:txBody>
+          <a:bodyPr wrap="square" lIns="0" tIns="0">
+            <a:spAutoFit/>
+          </a:bodyPr>
+          <a:lstStyle/>
+          <a:p>
+            <a:pPr>
+              <a:defRPr sz="2500" b="1">
+                <a:solidFill>
+                  <a:srgbClr val="17352B"/>
+                </a:solidFill>
+                <a:latin typeface="Arial"/>
+              </a:defRPr>
+            </a:pPr>
+            <a:r>
+              <a:t>El problema que aborda EcoMapa</a:t>
+            </a:r>
+          </a:p>
+        </p:txBody>
+      </p:sp>
+      <p:sp>
+        <p:nvSpPr>
+          <p:cNvPr id="6" name="Rectangle 5"/>
           <p:cNvSpPr/>
           <p:nvPr/>
         </p:nvSpPr>
         <p:spPr>
           <a:xfrm>
-            <a:off x="731520" y="384048"/>
-            <a:ext cx="3474720" cy="347472"/>
-          </a:xfrm>
-          <a:prstGeom prst="roundRect">
+            <a:off x="685800" y="1417320"/>
+            <a:ext cx="10817352" cy="13716"/>
+          </a:xfrm>
+          <a:prstGeom prst="rect">
             <a:avLst/>
           </a:prstGeom>
           <a:solidFill>
-            <a:srgbClr val="F43F5E"/>
+            <a:srgbClr val="CFE2D8"/>
           </a:solidFill>
           <a:ln>
             <a:noFill/>
@@ -5608,23 +6213,49 @@
           <a:bodyPr rtlCol="0" anchor="ctr"/>
           <a:lstStyle/>
           <a:p>
-            <a:pPr algn="ctr">
-              <a:defRPr sz="950" b="1">
-                <a:solidFill>
-                  <a:srgbClr val="FFFFFF"/>
-                </a:solidFill>
-                <a:latin typeface="Arial"/>
-              </a:defRPr>
-            </a:pPr>
-            <a:r>
-              <a:t>01. EL PROBLEMA</a:t>
+            <a:pPr algn="ctr"/>
+          </a:p>
+        </p:txBody>
+      </p:sp>
+      <p:sp>
+        <p:nvSpPr>
+          <p:cNvPr id="7" name="TextBox 6"/>
+          <p:cNvSpPr txBox="1"/>
+          <p:nvPr/>
+        </p:nvSpPr>
+        <p:spPr>
+          <a:xfrm>
+            <a:off x="685800" y="6446520"/>
+            <a:ext cx="5486400" cy="274320"/>
+          </a:xfrm>
+          <a:prstGeom prst="rect">
+            <a:avLst/>
+          </a:prstGeom>
+          <a:noFill/>
+        </p:spPr>
+        <p:txBody>
+          <a:bodyPr wrap="none" lIns="0" bIns="0">
+            <a:spAutoFit/>
+          </a:bodyPr>
+          <a:lstStyle/>
+          <a:p>
+            <a:pPr>
+              <a:defRPr sz="950">
+                <a:solidFill>
+                  <a:srgbClr val="5C6B65"/>
+                </a:solidFill>
+                <a:latin typeface="Arial"/>
+              </a:defRPr>
+            </a:pPr>
+            <a:r>
+              <a:t>EcoMapa  •  CivicLoop Technologies S.A.</a:t>
             </a:r>
           </a:p>
         </p:txBody>
       </p:sp>
       <p:pic>
         <p:nvPicPr>
-          <p:cNvPr id="4" name="Picture 3" descr="civicloop_logo_rounded.png"/>
+          <p:cNvPr id="8" name="Picture 7" descr="civicloop_logo_rounded.png"/>
           <p:cNvPicPr>
             <a:picLocks noChangeAspect="1"/>
           </p:cNvPicPr>
@@ -5638,8 +6269,8 @@
         </p:blipFill>
         <p:spPr>
           <a:xfrm>
-            <a:off x="11064240" y="347472"/>
-            <a:ext cx="594360" cy="594360"/>
+            <a:off x="11064240" y="6309360"/>
+            <a:ext cx="438912" cy="438912"/>
           </a:xfrm>
           <a:prstGeom prst="rect">
             <a:avLst/>
@@ -5648,14 +6279,14 @@
       </p:pic>
       <p:sp>
         <p:nvSpPr>
-          <p:cNvPr id="5" name="TextBox 4"/>
+          <p:cNvPr id="9" name="TextBox 8"/>
           <p:cNvSpPr txBox="1"/>
           <p:nvPr/>
         </p:nvSpPr>
         <p:spPr>
           <a:xfrm>
-            <a:off x="731520" y="749808"/>
-            <a:ext cx="10515600" cy="777240"/>
+            <a:off x="685800" y="1645920"/>
+            <a:ext cx="10789920" cy="548640"/>
           </a:xfrm>
           <a:prstGeom prst="rect">
             <a:avLst/>
@@ -5663,62 +6294,44 @@
           <a:noFill/>
         </p:spPr>
         <p:txBody>
-          <a:bodyPr wrap="square">
+          <a:bodyPr wrap="square" lIns="0">
             <a:spAutoFit/>
           </a:bodyPr>
           <a:lstStyle/>
           <a:p>
             <a:pPr>
-              <a:defRPr sz="2500" b="1">
-                <a:solidFill>
-                  <a:srgbClr val="FFFFFF"/>
-                </a:solidFill>
-                <a:latin typeface="Arial"/>
-              </a:defRPr>
-            </a:pPr>
-            <a:r>
-              <a:t>La Barrera Ciudadana en la Separación en Origen</a:t>
-            </a:r>
-          </a:p>
-          <a:p>
-            <a:pPr>
-              <a:spcBef>
-                <a:spcPts val="300"/>
-              </a:spcBef>
-              <a:defRPr sz="1300">
-                <a:solidFill>
-                  <a:srgbClr val="94A3B8"/>
-                </a:solidFill>
-                <a:latin typeface="Arial"/>
-              </a:defRPr>
-            </a:pPr>
-            <a:r>
-              <a:t>Por qué los programas tradicionales de reciclaje encuentran dificultades para escalar</a:t>
-            </a:r>
-          </a:p>
-        </p:txBody>
-      </p:sp>
-      <p:sp>
-        <p:nvSpPr>
-          <p:cNvPr id="6" name="Rounded Rectangle 5"/>
+              <a:defRPr sz="1600" b="1">
+                <a:solidFill>
+                  <a:srgbClr val="17352B"/>
+                </a:solidFill>
+                <a:latin typeface="Arial"/>
+              </a:defRPr>
+            </a:pPr>
+            <a:r>
+              <a:t>Separar residuos no siempre es difícil por falta de voluntad. Muchas veces faltan información clara, puntos visibles y coordinación.</a:t>
+            </a:r>
+          </a:p>
+        </p:txBody>
+      </p:sp>
+      <p:sp>
+        <p:nvSpPr>
+          <p:cNvPr id="10" name="Oval 9"/>
           <p:cNvSpPr/>
           <p:nvPr/>
         </p:nvSpPr>
         <p:spPr>
           <a:xfrm>
-            <a:off x="731520" y="1783080"/>
-            <a:ext cx="5120640" cy="3200400"/>
-          </a:xfrm>
-          <a:prstGeom prst="roundRect">
+            <a:off x="777240" y="2496312"/>
+            <a:ext cx="109728" cy="109728"/>
+          </a:xfrm>
+          <a:prstGeom prst="ellipse">
             <a:avLst/>
           </a:prstGeom>
           <a:solidFill>
-            <a:srgbClr val="1E293B"/>
+            <a:srgbClr val="F2A65A"/>
           </a:solidFill>
-          <a:ln w="19050">
-            <a:solidFill>
-              <a:srgbClr val="F43F5E"/>
-            </a:solidFill>
+          <a:ln>
+            <a:noFill/>
           </a:ln>
         </p:spPr>
         <p:style>
@@ -5736,92 +6349,84 @@
           </a:fontRef>
         </p:style>
         <p:txBody>
-          <a:bodyPr rtlCol="0" anchor="ctr" wrap="square" lIns="274320" rIns="274320" tIns="228600"/>
-          <a:lstStyle/>
-          <a:p>
-            <a:pPr algn="ctr">
+          <a:bodyPr rtlCol="0" anchor="ctr"/>
+          <a:lstStyle/>
+          <a:p>
+            <a:pPr algn="ctr"/>
+          </a:p>
+        </p:txBody>
+      </p:sp>
+      <p:sp>
+        <p:nvSpPr>
+          <p:cNvPr id="11" name="TextBox 10"/>
+          <p:cNvSpPr txBox="1"/>
+          <p:nvPr/>
+        </p:nvSpPr>
+        <p:spPr>
+          <a:xfrm>
+            <a:off x="1051560" y="2423160"/>
+            <a:ext cx="5303520" cy="1097280"/>
+          </a:xfrm>
+          <a:prstGeom prst="rect">
+            <a:avLst/>
+          </a:prstGeom>
+          <a:noFill/>
+        </p:spPr>
+        <p:txBody>
+          <a:bodyPr wrap="square" lIns="0" tIns="0">
+            <a:spAutoFit/>
+          </a:bodyPr>
+          <a:lstStyle/>
+          <a:p>
+            <a:pPr>
               <a:defRPr sz="1300" b="1">
                 <a:solidFill>
-                  <a:srgbClr val="F43F5E"/>
-                </a:solidFill>
-                <a:latin typeface="Arial"/>
-              </a:defRPr>
-            </a:pPr>
-            <a:r>
-              <a:t>DESCONOCIMIENTO Y WISHCYCLING</a:t>
+                  <a:srgbClr val="17352B"/>
+                </a:solidFill>
+                <a:latin typeface="Arial"/>
+              </a:defRPr>
+            </a:pPr>
+            <a:r>
+              <a:t>Clasificación confusa</a:t>
             </a:r>
           </a:p>
           <a:p>
             <a:pPr>
               <a:spcBef>
-                <a:spcPts val="800"/>
+                <a:spcPts val="300"/>
               </a:spcBef>
               <a:defRPr sz="1100">
                 <a:solidFill>
-                  <a:srgbClr val="E2E8F0"/>
-                </a:solidFill>
-                <a:latin typeface="Arial"/>
-              </a:defRPr>
-            </a:pPr>
-            <a:r>
-              <a:t>• Más del 50% de las personas admite no saber cómo clasificar correctamente sus residuos.</a:t>
-            </a:r>
-          </a:p>
-          <a:p>
-            <a:pPr>
-              <a:spcBef>
-                <a:spcPts val="800"/>
-              </a:spcBef>
-              <a:defRPr sz="1100">
-                <a:solidFill>
-                  <a:srgbClr val="E2E8F0"/>
-                </a:solidFill>
-                <a:latin typeface="Arial"/>
-              </a:defRPr>
-            </a:pPr>
-            <a:r>
-              <a:t>• Esto produce el fenómeno denominado 'Wishcycling' (reciclaje ilusorio): desechar residuos creyendo erróneamente que son reciclables.</a:t>
-            </a:r>
-          </a:p>
-          <a:p>
-            <a:pPr>
-              <a:spcBef>
-                <a:spcPts val="800"/>
-              </a:spcBef>
-              <a:defRPr sz="1100">
-                <a:solidFill>
-                  <a:srgbClr val="E2E8F0"/>
-                </a:solidFill>
-                <a:latin typeface="Arial"/>
-              </a:defRPr>
-            </a:pPr>
-            <a:r>
-              <a:t>• Como consecuencia, se contaminan los lotes limpios en los puntos verdes, haciendo inviable su posterior tratamiento y venta.</a:t>
-            </a:r>
-          </a:p>
-        </p:txBody>
-      </p:sp>
-      <p:sp>
-        <p:nvSpPr>
-          <p:cNvPr id="7" name="Rounded Rectangle 6"/>
+                  <a:srgbClr val="5C6B65"/>
+                </a:solidFill>
+                <a:latin typeface="Arial"/>
+              </a:defRPr>
+            </a:pPr>
+            <a:r>
+              <a:t>Pilas, medicamentos, electrónicos y voluminosos requieren un tratamiento distinto. Más del 50% de las personas desconoce el destino correcto y comete 'Wishcycling', contaminando los contenedores.</a:t>
+            </a:r>
+          </a:p>
+        </p:txBody>
+      </p:sp>
+      <p:sp>
+        <p:nvSpPr>
+          <p:cNvPr id="12" name="Oval 11"/>
           <p:cNvSpPr/>
           <p:nvPr/>
         </p:nvSpPr>
         <p:spPr>
           <a:xfrm>
-            <a:off x="6217920" y="1783080"/>
-            <a:ext cx="5212080" cy="3200400"/>
-          </a:xfrm>
-          <a:prstGeom prst="roundRect">
+            <a:off x="777240" y="3730752"/>
+            <a:ext cx="109728" cy="109728"/>
+          </a:xfrm>
+          <a:prstGeom prst="ellipse">
             <a:avLst/>
           </a:prstGeom>
           <a:solidFill>
-            <a:srgbClr val="1E293B"/>
+            <a:srgbClr val="0B6B4D"/>
           </a:solidFill>
-          <a:ln w="19050">
-            <a:solidFill>
-              <a:srgbClr val="F59E0B"/>
-            </a:solidFill>
+          <a:ln>
+            <a:noFill/>
           </a:ln>
         </p:spPr>
         <p:style>
@@ -5839,92 +6444,84 @@
           </a:fontRef>
         </p:style>
         <p:txBody>
-          <a:bodyPr rtlCol="0" anchor="ctr" wrap="square" lIns="274320" rIns="274320" tIns="228600"/>
-          <a:lstStyle/>
-          <a:p>
-            <a:pPr algn="ctr">
+          <a:bodyPr rtlCol="0" anchor="ctr"/>
+          <a:lstStyle/>
+          <a:p>
+            <a:pPr algn="ctr"/>
+          </a:p>
+        </p:txBody>
+      </p:sp>
+      <p:sp>
+        <p:nvSpPr>
+          <p:cNvPr id="13" name="TextBox 12"/>
+          <p:cNvSpPr txBox="1"/>
+          <p:nvPr/>
+        </p:nvSpPr>
+        <p:spPr>
+          <a:xfrm>
+            <a:off x="1051560" y="3657600"/>
+            <a:ext cx="5303520" cy="1097280"/>
+          </a:xfrm>
+          <a:prstGeom prst="rect">
+            <a:avLst/>
+          </a:prstGeom>
+          <a:noFill/>
+        </p:spPr>
+        <p:txBody>
+          <a:bodyPr wrap="square" lIns="0" tIns="0">
+            <a:spAutoFit/>
+          </a:bodyPr>
+          <a:lstStyle/>
+          <a:p>
+            <a:pPr>
               <a:defRPr sz="1300" b="1">
                 <a:solidFill>
-                  <a:srgbClr val="F59E0B"/>
-                </a:solidFill>
-                <a:latin typeface="Arial"/>
-              </a:defRPr>
-            </a:pPr>
-            <a:r>
-              <a:t>¿SABÍAS QUE?</a:t>
+                  <a:srgbClr val="17352B"/>
+                </a:solidFill>
+                <a:latin typeface="Arial"/>
+              </a:defRPr>
+            </a:pPr>
+            <a:r>
+              <a:t>Puntos difíciles de encontrar</a:t>
             </a:r>
           </a:p>
           <a:p>
             <a:pPr>
               <a:spcBef>
-                <a:spcPts val="800"/>
+                <a:spcPts val="300"/>
               </a:spcBef>
               <a:defRPr sz="1100">
                 <a:solidFill>
-                  <a:srgbClr val="E2E8F0"/>
-                </a:solidFill>
-                <a:latin typeface="Arial"/>
-              </a:defRPr>
-            </a:pPr>
-            <a:r>
-              <a:t>• 9% — Solo el 9% del plástico generado se recicla exitosamente a nivel mundial.</a:t>
-            </a:r>
-          </a:p>
-          <a:p>
-            <a:pPr>
-              <a:spcBef>
-                <a:spcPts val="800"/>
-              </a:spcBef>
-              <a:defRPr sz="1100">
-                <a:solidFill>
-                  <a:srgbClr val="E2E8F0"/>
-                </a:solidFill>
-                <a:latin typeface="Arial"/>
-              </a:defRPr>
-            </a:pPr>
-            <a:r>
-              <a:t>• &lt; 4% — En nuestra región y en el interior de Córdoba, la tasa efectiva de reciclaje apenas alcanza el 4%.</a:t>
-            </a:r>
-          </a:p>
-          <a:p>
-            <a:pPr>
-              <a:spcBef>
-                <a:spcPts val="800"/>
-              </a:spcBef>
-              <a:defRPr sz="1100">
-                <a:solidFill>
-                  <a:srgbClr val="E2E8F0"/>
-                </a:solidFill>
-                <a:latin typeface="Arial"/>
-              </a:defRPr>
-            </a:pPr>
-            <a:r>
-              <a:t>• 100% — El 100% de esta problemática puede mitigarse con información precisa, asistencia inmediata y geolocalización accesible.</a:t>
-            </a:r>
-          </a:p>
-        </p:txBody>
-      </p:sp>
-      <p:sp>
-        <p:nvSpPr>
-          <p:cNvPr id="8" name="Rounded Rectangle 7"/>
+                  <a:srgbClr val="5C6B65"/>
+                </a:solidFill>
+                <a:latin typeface="Arial"/>
+              </a:defRPr>
+            </a:pPr>
+            <a:r>
+              <a:t>La persona necesita saber dónde llevar cada material y qué opción queda más cerca. Solo el 9% del plástico se recicla globalmente y en nuestra región apenas se alcanza el 4%.</a:t>
+            </a:r>
+          </a:p>
+        </p:txBody>
+      </p:sp>
+      <p:sp>
+        <p:nvSpPr>
+          <p:cNvPr id="14" name="Oval 13"/>
           <p:cNvSpPr/>
           <p:nvPr/>
         </p:nvSpPr>
         <p:spPr>
           <a:xfrm>
-            <a:off x="731520" y="5166360"/>
-            <a:ext cx="10698480" cy="1188720"/>
-          </a:xfrm>
-          <a:prstGeom prst="roundRect">
+            <a:off x="777240" y="4965192"/>
+            <a:ext cx="109728" cy="109728"/>
+          </a:xfrm>
+          <a:prstGeom prst="ellipse">
             <a:avLst/>
           </a:prstGeom>
           <a:solidFill>
-            <a:srgbClr val="1E293B"/>
+            <a:srgbClr val="0B6B4D"/>
           </a:solidFill>
-          <a:ln w="12700">
-            <a:solidFill>
-              <a:srgbClr val="334155"/>
-            </a:solidFill>
+          <a:ln>
+            <a:noFill/>
           </a:ln>
         </p:spPr>
         <p:style>
@@ -5942,35 +6539,146 @@
           </a:fontRef>
         </p:style>
         <p:txBody>
-          <a:bodyPr rtlCol="0" anchor="ctr" wrap="square" lIns="274320" tIns="164592"/>
+          <a:bodyPr rtlCol="0" anchor="ctr"/>
+          <a:lstStyle/>
+          <a:p>
+            <a:pPr algn="ctr"/>
+          </a:p>
+        </p:txBody>
+      </p:sp>
+      <p:sp>
+        <p:nvSpPr>
+          <p:cNvPr id="15" name="TextBox 14"/>
+          <p:cNvSpPr txBox="1"/>
+          <p:nvPr/>
+        </p:nvSpPr>
+        <p:spPr>
+          <a:xfrm>
+            <a:off x="1051560" y="4892040"/>
+            <a:ext cx="5303520" cy="1097280"/>
+          </a:xfrm>
+          <a:prstGeom prst="rect">
+            <a:avLst/>
+          </a:prstGeom>
+          <a:noFill/>
+        </p:spPr>
+        <p:txBody>
+          <a:bodyPr wrap="square" lIns="0" tIns="0">
+            <a:spAutoFit/>
+          </a:bodyPr>
+          <a:lstStyle/>
+          <a:p>
+            <a:pPr>
+              <a:defRPr sz="1300" b="1">
+                <a:solidFill>
+                  <a:srgbClr val="17352B"/>
+                </a:solidFill>
+                <a:latin typeface="Arial"/>
+              </a:defRPr>
+            </a:pPr>
+            <a:r>
+              <a:t>Gestión fragmentada</a:t>
+            </a:r>
+          </a:p>
+          <a:p>
+            <a:pPr>
+              <a:spcBef>
+                <a:spcPts val="300"/>
+              </a:spcBef>
+              <a:defRPr sz="1100">
+                <a:solidFill>
+                  <a:srgbClr val="5C6B65"/>
+                </a:solidFill>
+                <a:latin typeface="Arial"/>
+              </a:defRPr>
+            </a:pPr>
+            <a:r>
+              <a:t>Municipios, cooperativas y empresas necesitan datos concretos para coordinar acciones, optimizar recorridos de recolección y medir resultados ambientales.</a:t>
+            </a:r>
+          </a:p>
+        </p:txBody>
+      </p:sp>
+      <p:sp>
+        <p:nvSpPr>
+          <p:cNvPr id="16" name="Rounded Rectangle 15"/>
+          <p:cNvSpPr/>
+          <p:nvPr/>
+        </p:nvSpPr>
+        <p:spPr>
+          <a:xfrm>
+            <a:off x="6766560" y="2423160"/>
+            <a:ext cx="4709160" cy="3566160"/>
+          </a:xfrm>
+          <a:prstGeom prst="roundRect">
+            <a:avLst/>
+          </a:prstGeom>
+          <a:solidFill>
+            <a:srgbClr val="DDF4E9"/>
+          </a:solidFill>
+          <a:ln>
+            <a:noFill/>
+          </a:ln>
+        </p:spPr>
+        <p:style>
+          <a:lnRef idx="1">
+            <a:schemeClr val="accent1"/>
+          </a:lnRef>
+          <a:fillRef idx="3">
+            <a:schemeClr val="accent1"/>
+          </a:fillRef>
+          <a:effectRef idx="2">
+            <a:schemeClr val="accent1"/>
+          </a:effectRef>
+          <a:fontRef idx="minor">
+            <a:schemeClr val="lt1"/>
+          </a:fontRef>
+        </p:style>
+        <p:txBody>
+          <a:bodyPr rtlCol="0" anchor="ctr" wrap="square" lIns="365760" rIns="365760" tIns="365760"/>
           <a:lstStyle/>
           <a:p>
             <a:pPr algn="ctr">
-              <a:defRPr sz="1100" b="1">
-                <a:solidFill>
-                  <a:srgbClr val="34D399"/>
-                </a:solidFill>
-                <a:latin typeface="Arial"/>
-              </a:defRPr>
-            </a:pPr>
-            <a:r>
-              <a:t>🌱 LA OPORTUNIDAD QUE ABORDA ECOMAPA:</a:t>
+              <a:defRPr sz="1400" b="1">
+                <a:solidFill>
+                  <a:srgbClr val="0B6B4D"/>
+                </a:solidFill>
+                <a:latin typeface="Arial"/>
+              </a:defRPr>
+            </a:pPr>
+            <a:r>
+              <a:t>Oportunidad</a:t>
             </a:r>
           </a:p>
           <a:p>
             <a:pPr>
               <a:spcBef>
-                <a:spcPts val="400"/>
+                <a:spcPts val="800"/>
               </a:spcBef>
-              <a:defRPr sz="1150">
-                <a:solidFill>
-                  <a:srgbClr val="E2E8F0"/>
-                </a:solidFill>
-                <a:latin typeface="Arial"/>
-              </a:defRPr>
-            </a:pPr>
-            <a:r>
-              <a:t>Separar no es difícil por falta de voluntad, sino por la falta de información clara y puntos visibles. EcoMapa convierte una duda cotidiana en una acción concreta, geolocalizada y medible.</a:t>
+              <a:defRPr sz="1800" b="1">
+                <a:solidFill>
+                  <a:srgbClr val="17352B"/>
+                </a:solidFill>
+                <a:latin typeface="Arial"/>
+              </a:defRPr>
+            </a:pPr>
+            <a:r>
+              <a:t>Convertir una duda cotidiana en una acción concreta, geolocalizada y trazable.</a:t>
+            </a:r>
+          </a:p>
+          <a:p>
+            <a:pPr>
+              <a:spcBef>
+                <a:spcPts val="1400"/>
+              </a:spcBef>
+              <a:defRPr sz="1200">
+                <a:solidFill>
+                  <a:srgbClr val="17352B"/>
+                </a:solidFill>
+                <a:latin typeface="Arial"/>
+              </a:defRPr>
+            </a:pPr>
+            <a:r>
+              <a:t>EcoMapa elimina la fricción entre la duda del ciudadano y el punto de recepción, facilitando el descarte correcto en segundos.</a:t>
             </a:r>
           </a:p>
         </p:txBody>
@@ -6008,7 +6716,7 @@
             <a:avLst/>
           </a:prstGeom>
           <a:solidFill>
-            <a:srgbClr val="0F172A"/>
+            <a:srgbClr val="FFFFFF"/>
           </a:solidFill>
           <a:ln>
             <a:noFill/>
@@ -6038,20 +6746,128 @@
       </p:sp>
       <p:sp>
         <p:nvSpPr>
-          <p:cNvPr id="3" name="Rounded Rectangle 2"/>
+          <p:cNvPr id="3" name="TextBox 2"/>
+          <p:cNvSpPr txBox="1"/>
+          <p:nvPr/>
+        </p:nvSpPr>
+        <p:spPr>
+          <a:xfrm>
+            <a:off x="685800" y="411480"/>
+            <a:ext cx="5029200" cy="320040"/>
+          </a:xfrm>
+          <a:prstGeom prst="rect">
+            <a:avLst/>
+          </a:prstGeom>
+          <a:noFill/>
+        </p:spPr>
+        <p:txBody>
+          <a:bodyPr wrap="square" lIns="0" tIns="0">
+            <a:spAutoFit/>
+          </a:bodyPr>
+          <a:lstStyle/>
+          <a:p>
+            <a:pPr>
+              <a:defRPr sz="1100" b="1">
+                <a:solidFill>
+                  <a:srgbClr val="0B6B4D"/>
+                </a:solidFill>
+                <a:latin typeface="Arial"/>
+              </a:defRPr>
+            </a:pPr>
+            <a:r>
+              <a:t>02 • AUDIENCIA</a:t>
+            </a:r>
+          </a:p>
+        </p:txBody>
+      </p:sp>
+      <p:sp>
+        <p:nvSpPr>
+          <p:cNvPr id="4" name="TextBox 3"/>
+          <p:cNvSpPr txBox="1"/>
+          <p:nvPr/>
+        </p:nvSpPr>
+        <p:spPr>
+          <a:xfrm>
+            <a:off x="10789920" y="411480"/>
+            <a:ext cx="731520" cy="320040"/>
+          </a:xfrm>
+          <a:prstGeom prst="rect">
+            <a:avLst/>
+          </a:prstGeom>
+          <a:noFill/>
+        </p:spPr>
+        <p:txBody>
+          <a:bodyPr wrap="none" rIns="0" tIns="0">
+            <a:spAutoFit/>
+          </a:bodyPr>
+          <a:lstStyle/>
+          <a:p>
+            <a:pPr algn="r">
+              <a:defRPr sz="1100" b="1">
+                <a:solidFill>
+                  <a:srgbClr val="5C6B65"/>
+                </a:solidFill>
+                <a:latin typeface="Arial"/>
+              </a:defRPr>
+            </a:pPr>
+            <a:r>
+              <a:t>03</a:t>
+            </a:r>
+          </a:p>
+        </p:txBody>
+      </p:sp>
+      <p:sp>
+        <p:nvSpPr>
+          <p:cNvPr id="5" name="TextBox 4"/>
+          <p:cNvSpPr txBox="1"/>
+          <p:nvPr/>
+        </p:nvSpPr>
+        <p:spPr>
+          <a:xfrm>
+            <a:off x="685800" y="685800"/>
+            <a:ext cx="10789920" cy="685800"/>
+          </a:xfrm>
+          <a:prstGeom prst="rect">
+            <a:avLst/>
+          </a:prstGeom>
+          <a:noFill/>
+        </p:spPr>
+        <p:txBody>
+          <a:bodyPr wrap="square" lIns="0" tIns="0">
+            <a:spAutoFit/>
+          </a:bodyPr>
+          <a:lstStyle/>
+          <a:p>
+            <a:pPr>
+              <a:defRPr sz="2500" b="1">
+                <a:solidFill>
+                  <a:srgbClr val="17352B"/>
+                </a:solidFill>
+                <a:latin typeface="Arial"/>
+              </a:defRPr>
+            </a:pPr>
+            <a:r>
+              <a:t>Usuario Objetivo</a:t>
+            </a:r>
+          </a:p>
+        </p:txBody>
+      </p:sp>
+      <p:sp>
+        <p:nvSpPr>
+          <p:cNvPr id="6" name="Rectangle 5"/>
           <p:cNvSpPr/>
           <p:nvPr/>
         </p:nvSpPr>
         <p:spPr>
           <a:xfrm>
-            <a:off x="731520" y="384048"/>
-            <a:ext cx="3474720" cy="347472"/>
-          </a:xfrm>
-          <a:prstGeom prst="roundRect">
+            <a:off x="685800" y="1417320"/>
+            <a:ext cx="10817352" cy="13716"/>
+          </a:xfrm>
+          <a:prstGeom prst="rect">
             <a:avLst/>
           </a:prstGeom>
           <a:solidFill>
-            <a:srgbClr val="06B6D4"/>
+            <a:srgbClr val="CFE2D8"/>
           </a:solidFill>
           <a:ln>
             <a:noFill/>
@@ -6075,23 +6891,49 @@
           <a:bodyPr rtlCol="0" anchor="ctr"/>
           <a:lstStyle/>
           <a:p>
-            <a:pPr algn="ctr">
-              <a:defRPr sz="950" b="1">
-                <a:solidFill>
-                  <a:srgbClr val="FFFFFF"/>
-                </a:solidFill>
-                <a:latin typeface="Arial"/>
-              </a:defRPr>
-            </a:pPr>
-            <a:r>
-              <a:t>02. AUDIENCIA</a:t>
+            <a:pPr algn="ctr"/>
+          </a:p>
+        </p:txBody>
+      </p:sp>
+      <p:sp>
+        <p:nvSpPr>
+          <p:cNvPr id="7" name="TextBox 6"/>
+          <p:cNvSpPr txBox="1"/>
+          <p:nvPr/>
+        </p:nvSpPr>
+        <p:spPr>
+          <a:xfrm>
+            <a:off x="685800" y="6446520"/>
+            <a:ext cx="5486400" cy="274320"/>
+          </a:xfrm>
+          <a:prstGeom prst="rect">
+            <a:avLst/>
+          </a:prstGeom>
+          <a:noFill/>
+        </p:spPr>
+        <p:txBody>
+          <a:bodyPr wrap="none" lIns="0" bIns="0">
+            <a:spAutoFit/>
+          </a:bodyPr>
+          <a:lstStyle/>
+          <a:p>
+            <a:pPr>
+              <a:defRPr sz="950">
+                <a:solidFill>
+                  <a:srgbClr val="5C6B65"/>
+                </a:solidFill>
+                <a:latin typeface="Arial"/>
+              </a:defRPr>
+            </a:pPr>
+            <a:r>
+              <a:t>EcoMapa  •  CivicLoop Technologies S.A.</a:t>
             </a:r>
           </a:p>
         </p:txBody>
       </p:sp>
       <p:pic>
         <p:nvPicPr>
-          <p:cNvPr id="4" name="Picture 3" descr="civicloop_logo_rounded.png"/>
+          <p:cNvPr id="8" name="Picture 7" descr="civicloop_logo_rounded.png"/>
           <p:cNvPicPr>
             <a:picLocks noChangeAspect="1"/>
           </p:cNvPicPr>
@@ -6105,8 +6947,8 @@
         </p:blipFill>
         <p:spPr>
           <a:xfrm>
-            <a:off x="11064240" y="347472"/>
-            <a:ext cx="594360" cy="594360"/>
+            <a:off x="11064240" y="6309360"/>
+            <a:ext cx="438912" cy="438912"/>
           </a:xfrm>
           <a:prstGeom prst="rect">
             <a:avLst/>
@@ -6115,14 +6957,14 @@
       </p:pic>
       <p:sp>
         <p:nvSpPr>
-          <p:cNvPr id="5" name="TextBox 4"/>
+          <p:cNvPr id="9" name="TextBox 8"/>
           <p:cNvSpPr txBox="1"/>
           <p:nvPr/>
         </p:nvSpPr>
         <p:spPr>
           <a:xfrm>
-            <a:off x="731520" y="749808"/>
-            <a:ext cx="10515600" cy="777240"/>
+            <a:off x="685800" y="1645920"/>
+            <a:ext cx="10789920" cy="548640"/>
           </a:xfrm>
           <a:prstGeom prst="rect">
             <a:avLst/>
@@ -6130,61 +6972,45 @@
           <a:noFill/>
         </p:spPr>
         <p:txBody>
-          <a:bodyPr wrap="square">
+          <a:bodyPr wrap="square" lIns="0">
             <a:spAutoFit/>
           </a:bodyPr>
           <a:lstStyle/>
           <a:p>
             <a:pPr>
-              <a:defRPr sz="2500" b="1">
-                <a:solidFill>
-                  <a:srgbClr val="FFFFFF"/>
-                </a:solidFill>
-                <a:latin typeface="Arial"/>
-              </a:defRPr>
-            </a:pPr>
-            <a:r>
-              <a:t>Usuario Objetivo y Sectores Beneficiados</a:t>
-            </a:r>
-          </a:p>
-          <a:p>
-            <a:pPr>
-              <a:spcBef>
-                <a:spcPts val="300"/>
-              </a:spcBef>
-              <a:defRPr sz="1300">
-                <a:solidFill>
-                  <a:srgbClr val="94A3B8"/>
-                </a:solidFill>
-                <a:latin typeface="Arial"/>
-              </a:defRPr>
-            </a:pPr>
-            <a:r>
-              <a:t>EcoMapa está orientado a diferentes actores de la comunidad para mejorar la gestión ambiental</a:t>
-            </a:r>
-          </a:p>
-        </p:txBody>
-      </p:sp>
-      <p:sp>
-        <p:nvSpPr>
-          <p:cNvPr id="6" name="Rounded Rectangle 5"/>
+              <a:defRPr sz="1500" b="1">
+                <a:solidFill>
+                  <a:srgbClr val="17352B"/>
+                </a:solidFill>
+                <a:latin typeface="Arial"/>
+              </a:defRPr>
+            </a:pPr>
+            <a:r>
+              <a:t>EcoMapa está orientado a diferentes sectores de la comunidad que buscan mejorar la gestión ambiental mediante tecnología e innovación:</a:t>
+            </a:r>
+          </a:p>
+        </p:txBody>
+      </p:sp>
+      <p:sp>
+        <p:nvSpPr>
+          <p:cNvPr id="10" name="Rounded Rectangle 9"/>
           <p:cNvSpPr/>
           <p:nvPr/>
         </p:nvSpPr>
         <p:spPr>
           <a:xfrm>
-            <a:off x="731520" y="1783080"/>
-            <a:ext cx="2011680" cy="3383280"/>
+            <a:off x="685800" y="2423160"/>
+            <a:ext cx="5257800" cy="1508760"/>
           </a:xfrm>
           <a:prstGeom prst="roundRect">
             <a:avLst/>
           </a:prstGeom>
           <a:solidFill>
-            <a:srgbClr val="1E293B"/>
+            <a:srgbClr val="F8FAF8"/>
           </a:solidFill>
-          <a:ln w="19050">
+          <a:ln w="12700">
             <a:solidFill>
-              <a:srgbClr val="10B981"/>
+              <a:srgbClr val="CFE2D8"/>
             </a:solidFill>
           </a:ln>
         </p:spPr>
@@ -6203,59 +7029,59 @@
           </a:fontRef>
         </p:style>
         <p:txBody>
-          <a:bodyPr rtlCol="0" anchor="ctr" wrap="square" lIns="164592" rIns="164592" tIns="201168"/>
+          <a:bodyPr rtlCol="0" anchor="ctr" wrap="square" lIns="274320" rIns="274320" tIns="182880"/>
           <a:lstStyle/>
           <a:p>
             <a:pPr algn="ctr">
-              <a:defRPr sz="1200" b="1">
-                <a:solidFill>
-                  <a:srgbClr val="10B981"/>
-                </a:solidFill>
-                <a:latin typeface="Arial"/>
-              </a:defRPr>
-            </a:pPr>
-            <a:r>
-              <a:t>CIUDADANOS</a:t>
+              <a:defRPr sz="1350" b="1">
+                <a:solidFill>
+                  <a:srgbClr val="0B6B4D"/>
+                </a:solidFill>
+                <a:latin typeface="Arial"/>
+              </a:defRPr>
+            </a:pPr>
+            <a:r>
+              <a:t>•  Ciudadanos</a:t>
             </a:r>
           </a:p>
           <a:p>
             <a:pPr>
               <a:spcBef>
-                <a:spcPts val="800"/>
+                <a:spcPts val="400"/>
               </a:spcBef>
-              <a:defRPr sz="1050">
-                <a:solidFill>
-                  <a:srgbClr val="E2E8F0"/>
-                </a:solidFill>
-                <a:latin typeface="Arial"/>
-              </a:defRPr>
-            </a:pPr>
-            <a:r>
-              <a:t>Vecinos que buscan reciclar fácilmente desde su teléfono móvil, clasificar dudas y encontrar puntos verdes cercanos con recompensas tangibles.</a:t>
-            </a:r>
-          </a:p>
-        </p:txBody>
-      </p:sp>
-      <p:sp>
-        <p:nvSpPr>
-          <p:cNvPr id="7" name="Rounded Rectangle 6"/>
+              <a:defRPr sz="1100">
+                <a:solidFill>
+                  <a:srgbClr val="5C6B65"/>
+                </a:solidFill>
+                <a:latin typeface="Arial"/>
+              </a:defRPr>
+            </a:pPr>
+            <a:r>
+              <a:t>Personas que buscan reciclar fácilmente desde su smartphone, resolver dudas sobre materiales al instante y encontrar el punto más cercano con beneficios tangibles.</a:t>
+            </a:r>
+          </a:p>
+        </p:txBody>
+      </p:sp>
+      <p:sp>
+        <p:nvSpPr>
+          <p:cNvPr id="11" name="Rounded Rectangle 10"/>
           <p:cNvSpPr/>
           <p:nvPr/>
         </p:nvSpPr>
         <p:spPr>
           <a:xfrm>
-            <a:off x="2926080" y="1783080"/>
-            <a:ext cx="2011680" cy="3383280"/>
+            <a:off x="6126480" y="2423160"/>
+            <a:ext cx="5257800" cy="1508760"/>
           </a:xfrm>
           <a:prstGeom prst="roundRect">
             <a:avLst/>
           </a:prstGeom>
           <a:solidFill>
-            <a:srgbClr val="1E293B"/>
+            <a:srgbClr val="F8FAF8"/>
           </a:solidFill>
-          <a:ln w="19050">
+          <a:ln w="12700">
             <a:solidFill>
-              <a:srgbClr val="06B6D4"/>
+              <a:srgbClr val="CFE2D8"/>
             </a:solidFill>
           </a:ln>
         </p:spPr>
@@ -6274,59 +7100,59 @@
           </a:fontRef>
         </p:style>
         <p:txBody>
-          <a:bodyPr rtlCol="0" anchor="ctr" wrap="square" lIns="164592" rIns="164592" tIns="201168"/>
+          <a:bodyPr rtlCol="0" anchor="ctr" wrap="square" lIns="274320" rIns="274320" tIns="182880"/>
           <a:lstStyle/>
           <a:p>
             <a:pPr algn="ctr">
-              <a:defRPr sz="1200" b="1">
-                <a:solidFill>
-                  <a:srgbClr val="06B6D4"/>
-                </a:solidFill>
-                <a:latin typeface="Arial"/>
-              </a:defRPr>
-            </a:pPr>
-            <a:r>
-              <a:t>MUNICIPIOS</a:t>
+              <a:defRPr sz="1350" b="1">
+                <a:solidFill>
+                  <a:srgbClr val="0B6B4D"/>
+                </a:solidFill>
+                <a:latin typeface="Arial"/>
+              </a:defRPr>
+            </a:pPr>
+            <a:r>
+              <a:t>•  Municipios y Comunas</a:t>
             </a:r>
           </a:p>
           <a:p>
             <a:pPr>
               <a:spcBef>
-                <a:spcPts val="800"/>
+                <a:spcPts val="400"/>
               </a:spcBef>
-              <a:defRPr sz="1050">
-                <a:solidFill>
-                  <a:srgbClr val="E2E8F0"/>
-                </a:solidFill>
-                <a:latin typeface="Arial"/>
-              </a:defRPr>
-            </a:pPr>
-            <a:r>
-              <a:t>Gobiernos locales y comunas que necesitan optimizar la red de puntos limpios, monitorear la recolección y acceder a métricas de impacto ambiental.</a:t>
-            </a:r>
-          </a:p>
-        </p:txBody>
-      </p:sp>
-      <p:sp>
-        <p:nvSpPr>
-          <p:cNvPr id="8" name="Rounded Rectangle 7"/>
+              <a:defRPr sz="1100">
+                <a:solidFill>
+                  <a:srgbClr val="5C6B65"/>
+                </a:solidFill>
+                <a:latin typeface="Arial"/>
+              </a:defRPr>
+            </a:pPr>
+            <a:r>
+              <a:t>Gobiernos locales que necesitan optimizar la red pública de puntos limpios, coordinar retiros de voluminosos y acceder a métricas de impacto.</a:t>
+            </a:r>
+          </a:p>
+        </p:txBody>
+      </p:sp>
+      <p:sp>
+        <p:nvSpPr>
+          <p:cNvPr id="12" name="Rounded Rectangle 11"/>
           <p:cNvSpPr/>
           <p:nvPr/>
         </p:nvSpPr>
         <p:spPr>
           <a:xfrm>
-            <a:off x="5120640" y="1783080"/>
-            <a:ext cx="2011680" cy="3383280"/>
+            <a:off x="685800" y="4114800"/>
+            <a:ext cx="5257800" cy="1508760"/>
           </a:xfrm>
           <a:prstGeom prst="roundRect">
             <a:avLst/>
           </a:prstGeom>
           <a:solidFill>
-            <a:srgbClr val="1E293B"/>
+            <a:srgbClr val="F8FAF8"/>
           </a:solidFill>
-          <a:ln w="19050">
+          <a:ln w="12700">
             <a:solidFill>
-              <a:srgbClr val="F59E0B"/>
+              <a:srgbClr val="CFE2D8"/>
             </a:solidFill>
           </a:ln>
         </p:spPr>
@@ -6345,59 +7171,59 @@
           </a:fontRef>
         </p:style>
         <p:txBody>
-          <a:bodyPr rtlCol="0" anchor="ctr" wrap="square" lIns="164592" rIns="164592" tIns="201168"/>
+          <a:bodyPr rtlCol="0" anchor="ctr" wrap="square" lIns="274320" rIns="274320" tIns="182880"/>
           <a:lstStyle/>
           <a:p>
             <a:pPr algn="ctr">
-              <a:defRPr sz="1200" b="1">
-                <a:solidFill>
-                  <a:srgbClr val="F59E0B"/>
-                </a:solidFill>
-                <a:latin typeface="Arial"/>
-              </a:defRPr>
-            </a:pPr>
-            <a:r>
-              <a:t>ESCUELAS E INSTITUCIONES</a:t>
+              <a:defRPr sz="1350" b="1">
+                <a:solidFill>
+                  <a:srgbClr val="0B6B4D"/>
+                </a:solidFill>
+                <a:latin typeface="Arial"/>
+              </a:defRPr>
+            </a:pPr>
+            <a:r>
+              <a:t>•  Escuelas e Instituciones</a:t>
             </a:r>
           </a:p>
           <a:p>
             <a:pPr>
               <a:spcBef>
-                <a:spcPts val="800"/>
+                <a:spcPts val="400"/>
               </a:spcBef>
-              <a:defRPr sz="1050">
-                <a:solidFill>
-                  <a:srgbClr val="E2E8F0"/>
-                </a:solidFill>
-                <a:latin typeface="Arial"/>
-              </a:defRPr>
-            </a:pPr>
-            <a:r>
-              <a:t>Colegios e instituciones educativas que promueven talleres de educación ecológica interactiva mediante tecnología gamificada.</a:t>
-            </a:r>
-          </a:p>
-        </p:txBody>
-      </p:sp>
-      <p:sp>
-        <p:nvSpPr>
-          <p:cNvPr id="9" name="Rounded Rectangle 8"/>
+              <a:defRPr sz="1100">
+                <a:solidFill>
+                  <a:srgbClr val="5C6B65"/>
+                </a:solidFill>
+                <a:latin typeface="Arial"/>
+              </a:defRPr>
+            </a:pPr>
+            <a:r>
+              <a:t>Comunidades educativas que promueven programas de separación en origen, talleres ecológicos y torneos ambientales gamificados.</a:t>
+            </a:r>
+          </a:p>
+        </p:txBody>
+      </p:sp>
+      <p:sp>
+        <p:nvSpPr>
+          <p:cNvPr id="13" name="Rounded Rectangle 12"/>
           <p:cNvSpPr/>
           <p:nvPr/>
         </p:nvSpPr>
         <p:spPr>
           <a:xfrm>
-            <a:off x="7315199" y="1783080"/>
-            <a:ext cx="2011680" cy="3383280"/>
+            <a:off x="6126480" y="4114800"/>
+            <a:ext cx="5257800" cy="1508760"/>
           </a:xfrm>
           <a:prstGeom prst="roundRect">
             <a:avLst/>
           </a:prstGeom>
           <a:solidFill>
-            <a:srgbClr val="1E293B"/>
+            <a:srgbClr val="F8FAF8"/>
           </a:solidFill>
-          <a:ln w="19050">
+          <a:ln w="12700">
             <a:solidFill>
-              <a:srgbClr val="8B5CF6"/>
+              <a:srgbClr val="CFE2D8"/>
             </a:solidFill>
           </a:ln>
         </p:spPr>
@@ -6416,60 +7242,58 @@
           </a:fontRef>
         </p:style>
         <p:txBody>
-          <a:bodyPr rtlCol="0" anchor="ctr" wrap="square" lIns="164592" rIns="164592" tIns="201168"/>
+          <a:bodyPr rtlCol="0" anchor="ctr" wrap="square" lIns="274320" rIns="274320" tIns="182880"/>
           <a:lstStyle/>
           <a:p>
             <a:pPr algn="ctr">
-              <a:defRPr sz="1200" b="1">
-                <a:solidFill>
-                  <a:srgbClr val="8B5CF6"/>
-                </a:solidFill>
-                <a:latin typeface="Arial"/>
-              </a:defRPr>
-            </a:pPr>
-            <a:r>
-              <a:t>ORGANIZACIONES ECOLÓGICAS</a:t>
+              <a:defRPr sz="1350" b="1">
+                <a:solidFill>
+                  <a:srgbClr val="0B6B4D"/>
+                </a:solidFill>
+                <a:latin typeface="Arial"/>
+              </a:defRPr>
+            </a:pPr>
+            <a:r>
+              <a:t>•  Organizaciones y Empresas</a:t>
             </a:r>
           </a:p>
           <a:p>
             <a:pPr>
               <a:spcBef>
-                <a:spcPts val="800"/>
+                <a:spcPts val="400"/>
               </a:spcBef>
-              <a:defRPr sz="1050">
-                <a:solidFill>
-                  <a:srgbClr val="E2E8F0"/>
-                </a:solidFill>
-                <a:latin typeface="Arial"/>
-              </a:defRPr>
-            </a:pPr>
-            <a:r>
-              <a:t>ONGs y cooperativas de recicladores urbanos que buscan visibilizar sus centros de acopio y coordinar retiros de materiales.</a:t>
-            </a:r>
-          </a:p>
-        </p:txBody>
-      </p:sp>
-      <p:sp>
-        <p:nvSpPr>
-          <p:cNvPr id="10" name="Rounded Rectangle 9"/>
+              <a:defRPr sz="1100">
+                <a:solidFill>
+                  <a:srgbClr val="5C6B65"/>
+                </a:solidFill>
+                <a:latin typeface="Arial"/>
+              </a:defRPr>
+            </a:pPr>
+            <a:r>
+              <a:t>Centros de reciclaje, comercios locales que publican cupones de descuento y fabricantes adheridos a programas de Responsabilidad Extendida (REP).</a:t>
+            </a:r>
+          </a:p>
+        </p:txBody>
+      </p:sp>
+      <p:sp>
+        <p:nvSpPr>
+          <p:cNvPr id="14" name="Rounded Rectangle 13"/>
           <p:cNvSpPr/>
           <p:nvPr/>
         </p:nvSpPr>
         <p:spPr>
           <a:xfrm>
-            <a:off x="9509760" y="1783080"/>
-            <a:ext cx="2011680" cy="3383280"/>
+            <a:off x="685800" y="5806440"/>
+            <a:ext cx="10817352" cy="594360"/>
           </a:xfrm>
           <a:prstGeom prst="roundRect">
             <a:avLst/>
           </a:prstGeom>
           <a:solidFill>
-            <a:srgbClr val="1E293B"/>
+            <a:srgbClr val="DDF4E9"/>
           </a:solidFill>
-          <a:ln w="19050">
-            <a:solidFill>
-              <a:srgbClr val="F43F5E"/>
-            </a:solidFill>
+          <a:ln>
+            <a:noFill/>
           </a:ln>
         </p:spPr>
         <p:style>
@@ -6487,106 +7311,19 @@
           </a:fontRef>
         </p:style>
         <p:txBody>
-          <a:bodyPr rtlCol="0" anchor="ctr" wrap="square" lIns="164592" rIns="164592" tIns="201168"/>
+          <a:bodyPr rtlCol="0" anchor="ctr" lIns="274320"/>
           <a:lstStyle/>
           <a:p>
             <a:pPr algn="ctr">
-              <a:defRPr sz="1200" b="1">
-                <a:solidFill>
-                  <a:srgbClr val="F43F5E"/>
-                </a:solidFill>
-                <a:latin typeface="Arial"/>
-              </a:defRPr>
-            </a:pPr>
-            <a:r>
-              <a:t>EMPRESAS Y COMERCIOS</a:t>
-            </a:r>
-          </a:p>
-          <a:p>
-            <a:pPr>
-              <a:spcBef>
-                <a:spcPts val="800"/>
-              </a:spcBef>
-              <a:defRPr sz="1050">
-                <a:solidFill>
-                  <a:srgbClr val="E2E8F0"/>
-                </a:solidFill>
-                <a:latin typeface="Arial"/>
-              </a:defRPr>
-            </a:pPr>
-            <a:r>
-              <a:t>Negocios locales que patrocinan beneficios y fabricantes que cumplen la normativa de Responsabilidad Extendida del Productor (REP).</a:t>
-            </a:r>
-          </a:p>
-        </p:txBody>
-      </p:sp>
-      <p:sp>
-        <p:nvSpPr>
-          <p:cNvPr id="11" name="Rounded Rectangle 10"/>
-          <p:cNvSpPr/>
-          <p:nvPr/>
-        </p:nvSpPr>
-        <p:spPr>
-          <a:xfrm>
-            <a:off x="731520" y="5349240"/>
-            <a:ext cx="10698480" cy="1005840"/>
-          </a:xfrm>
-          <a:prstGeom prst="roundRect">
-            <a:avLst/>
-          </a:prstGeom>
-          <a:solidFill>
-            <a:srgbClr val="1E293B"/>
-          </a:solidFill>
-          <a:ln w="12700">
-            <a:solidFill>
-              <a:srgbClr val="06B6D4"/>
-            </a:solidFill>
-          </a:ln>
-        </p:spPr>
-        <p:style>
-          <a:lnRef idx="1">
-            <a:schemeClr val="accent1"/>
-          </a:lnRef>
-          <a:fillRef idx="3">
-            <a:schemeClr val="accent1"/>
-          </a:fillRef>
-          <a:effectRef idx="2">
-            <a:schemeClr val="accent1"/>
-          </a:effectRef>
-          <a:fontRef idx="minor">
-            <a:schemeClr val="lt1"/>
-          </a:fontRef>
-        </p:style>
-        <p:txBody>
-          <a:bodyPr rtlCol="0" anchor="ctr" wrap="square" lIns="274320" tIns="146304"/>
-          <a:lstStyle/>
-          <a:p>
-            <a:pPr algn="ctr">
-              <a:defRPr sz="1100" b="1">
-                <a:solidFill>
-                  <a:srgbClr val="06B6D4"/>
-                </a:solidFill>
-                <a:latin typeface="Arial"/>
-              </a:defRPr>
-            </a:pPr>
-            <a:r>
-              <a:t>🎯 PROPÓSITO CENTRAL:</a:t>
-            </a:r>
-          </a:p>
-          <a:p>
-            <a:pPr>
-              <a:spcBef>
-                <a:spcPts val="300"/>
-              </a:spcBef>
-              <a:defRPr sz="1100">
-                <a:solidFill>
-                  <a:srgbClr val="E2E8F0"/>
-                </a:solidFill>
-                <a:latin typeface="Arial"/>
-              </a:defRPr>
-            </a:pPr>
-            <a:r>
-              <a:t>Facilitar el reciclaje, erradicar la desinformación y promover la educación ambiental ciudadana de manera interactiva, colaborativa y transparente.</a:t>
+              <a:defRPr sz="1150" b="1">
+                <a:solidFill>
+                  <a:srgbClr val="0B6B4D"/>
+                </a:solidFill>
+                <a:latin typeface="Arial"/>
+              </a:defRPr>
+            </a:pPr>
+            <a:r>
+              <a:t>🎯 Objetivo: Facilitar el reciclaje y promover la educación ambiental de manera interactiva y accesible.</a:t>
             </a:r>
           </a:p>
         </p:txBody>
@@ -6624,7 +7361,7 @@
             <a:avLst/>
           </a:prstGeom>
           <a:solidFill>
-            <a:srgbClr val="0F172A"/>
+            <a:srgbClr val="FFFFFF"/>
           </a:solidFill>
           <a:ln>
             <a:noFill/>
@@ -6654,20 +7391,128 @@
       </p:sp>
       <p:sp>
         <p:nvSpPr>
-          <p:cNvPr id="3" name="Rounded Rectangle 2"/>
+          <p:cNvPr id="3" name="TextBox 2"/>
+          <p:cNvSpPr txBox="1"/>
+          <p:nvPr/>
+        </p:nvSpPr>
+        <p:spPr>
+          <a:xfrm>
+            <a:off x="685800" y="411480"/>
+            <a:ext cx="5029200" cy="320040"/>
+          </a:xfrm>
+          <a:prstGeom prst="rect">
+            <a:avLst/>
+          </a:prstGeom>
+          <a:noFill/>
+        </p:spPr>
+        <p:txBody>
+          <a:bodyPr wrap="square" lIns="0" tIns="0">
+            <a:spAutoFit/>
+          </a:bodyPr>
+          <a:lstStyle/>
+          <a:p>
+            <a:pPr>
+              <a:defRPr sz="1100" b="1">
+                <a:solidFill>
+                  <a:srgbClr val="0B6B4D"/>
+                </a:solidFill>
+                <a:latin typeface="Arial"/>
+              </a:defRPr>
+            </a:pPr>
+            <a:r>
+              <a:t>03 • PROPUESTA</a:t>
+            </a:r>
+          </a:p>
+        </p:txBody>
+      </p:sp>
+      <p:sp>
+        <p:nvSpPr>
+          <p:cNvPr id="4" name="TextBox 3"/>
+          <p:cNvSpPr txBox="1"/>
+          <p:nvPr/>
+        </p:nvSpPr>
+        <p:spPr>
+          <a:xfrm>
+            <a:off x="10789920" y="411480"/>
+            <a:ext cx="731520" cy="320040"/>
+          </a:xfrm>
+          <a:prstGeom prst="rect">
+            <a:avLst/>
+          </a:prstGeom>
+          <a:noFill/>
+        </p:spPr>
+        <p:txBody>
+          <a:bodyPr wrap="none" rIns="0" tIns="0">
+            <a:spAutoFit/>
+          </a:bodyPr>
+          <a:lstStyle/>
+          <a:p>
+            <a:pPr algn="r">
+              <a:defRPr sz="1100" b="1">
+                <a:solidFill>
+                  <a:srgbClr val="5C6B65"/>
+                </a:solidFill>
+                <a:latin typeface="Arial"/>
+              </a:defRPr>
+            </a:pPr>
+            <a:r>
+              <a:t>04</a:t>
+            </a:r>
+          </a:p>
+        </p:txBody>
+      </p:sp>
+      <p:sp>
+        <p:nvSpPr>
+          <p:cNvPr id="5" name="TextBox 4"/>
+          <p:cNvSpPr txBox="1"/>
+          <p:nvPr/>
+        </p:nvSpPr>
+        <p:spPr>
+          <a:xfrm>
+            <a:off x="685800" y="685800"/>
+            <a:ext cx="10789920" cy="685800"/>
+          </a:xfrm>
+          <a:prstGeom prst="rect">
+            <a:avLst/>
+          </a:prstGeom>
+          <a:noFill/>
+        </p:spPr>
+        <p:txBody>
+          <a:bodyPr wrap="square" lIns="0" tIns="0">
+            <a:spAutoFit/>
+          </a:bodyPr>
+          <a:lstStyle/>
+          <a:p>
+            <a:pPr>
+              <a:defRPr sz="2500" b="1">
+                <a:solidFill>
+                  <a:srgbClr val="17352B"/>
+                </a:solidFill>
+                <a:latin typeface="Arial"/>
+              </a:defRPr>
+            </a:pPr>
+            <a:r>
+              <a:t>Nuestra Solución</a:t>
+            </a:r>
+          </a:p>
+        </p:txBody>
+      </p:sp>
+      <p:sp>
+        <p:nvSpPr>
+          <p:cNvPr id="6" name="Rectangle 5"/>
           <p:cNvSpPr/>
           <p:nvPr/>
         </p:nvSpPr>
         <p:spPr>
           <a:xfrm>
-            <a:off x="731520" y="384048"/>
-            <a:ext cx="3474720" cy="347472"/>
-          </a:xfrm>
-          <a:prstGeom prst="roundRect">
+            <a:off x="685800" y="1417320"/>
+            <a:ext cx="10817352" cy="13716"/>
+          </a:xfrm>
+          <a:prstGeom prst="rect">
             <a:avLst/>
           </a:prstGeom>
           <a:solidFill>
-            <a:srgbClr val="10B981"/>
+            <a:srgbClr val="CFE2D8"/>
           </a:solidFill>
           <a:ln>
             <a:noFill/>
@@ -6691,23 +7536,49 @@
           <a:bodyPr rtlCol="0" anchor="ctr"/>
           <a:lstStyle/>
           <a:p>
-            <a:pPr algn="ctr">
-              <a:defRPr sz="950" b="1">
-                <a:solidFill>
-                  <a:srgbClr val="FFFFFF"/>
-                </a:solidFill>
-                <a:latin typeface="Arial"/>
-              </a:defRPr>
-            </a:pPr>
-            <a:r>
-              <a:t>03. PROPUESTA</a:t>
+            <a:pPr algn="ctr"/>
+          </a:p>
+        </p:txBody>
+      </p:sp>
+      <p:sp>
+        <p:nvSpPr>
+          <p:cNvPr id="7" name="TextBox 6"/>
+          <p:cNvSpPr txBox="1"/>
+          <p:nvPr/>
+        </p:nvSpPr>
+        <p:spPr>
+          <a:xfrm>
+            <a:off x="685800" y="6446520"/>
+            <a:ext cx="5486400" cy="274320"/>
+          </a:xfrm>
+          <a:prstGeom prst="rect">
+            <a:avLst/>
+          </a:prstGeom>
+          <a:noFill/>
+        </p:spPr>
+        <p:txBody>
+          <a:bodyPr wrap="none" lIns="0" bIns="0">
+            <a:spAutoFit/>
+          </a:bodyPr>
+          <a:lstStyle/>
+          <a:p>
+            <a:pPr>
+              <a:defRPr sz="950">
+                <a:solidFill>
+                  <a:srgbClr val="5C6B65"/>
+                </a:solidFill>
+                <a:latin typeface="Arial"/>
+              </a:defRPr>
+            </a:pPr>
+            <a:r>
+              <a:t>EcoMapa  •  CivicLoop Technologies S.A.</a:t>
             </a:r>
           </a:p>
         </p:txBody>
       </p:sp>
       <p:pic>
         <p:nvPicPr>
-          <p:cNvPr id="4" name="Picture 3" descr="civicloop_logo_rounded.png"/>
+          <p:cNvPr id="8" name="Picture 7" descr="civicloop_logo_rounded.png"/>
           <p:cNvPicPr>
             <a:picLocks noChangeAspect="1"/>
           </p:cNvPicPr>
@@ -6721,8 +7592,8 @@
         </p:blipFill>
         <p:spPr>
           <a:xfrm>
-            <a:off x="11064240" y="347472"/>
-            <a:ext cx="594360" cy="594360"/>
+            <a:off x="11064240" y="6309360"/>
+            <a:ext cx="438912" cy="438912"/>
           </a:xfrm>
           <a:prstGeom prst="rect">
             <a:avLst/>
@@ -6731,14 +7602,14 @@
       </p:pic>
       <p:sp>
         <p:nvSpPr>
-          <p:cNvPr id="5" name="TextBox 4"/>
+          <p:cNvPr id="9" name="TextBox 8"/>
           <p:cNvSpPr txBox="1"/>
           <p:nvPr/>
         </p:nvSpPr>
         <p:spPr>
           <a:xfrm>
-            <a:off x="731520" y="749808"/>
-            <a:ext cx="10515600" cy="777240"/>
+            <a:off x="685800" y="1645920"/>
+            <a:ext cx="10789920" cy="548640"/>
           </a:xfrm>
           <a:prstGeom prst="rect">
             <a:avLst/>
@@ -6746,61 +7617,45 @@
           <a:noFill/>
         </p:spPr>
         <p:txBody>
-          <a:bodyPr wrap="square">
+          <a:bodyPr wrap="square" lIns="0">
             <a:spAutoFit/>
           </a:bodyPr>
           <a:lstStyle/>
           <a:p>
             <a:pPr>
-              <a:defRPr sz="2500" b="1">
-                <a:solidFill>
-                  <a:srgbClr val="FFFFFF"/>
-                </a:solidFill>
-                <a:latin typeface="Arial"/>
-              </a:defRPr>
-            </a:pPr>
-            <a:r>
-              <a:t>Nuestra Solución Integral</a:t>
-            </a:r>
-          </a:p>
-          <a:p>
-            <a:pPr>
-              <a:spcBef>
-                <a:spcPts val="300"/>
-              </a:spcBef>
-              <a:defRPr sz="1300">
-                <a:solidFill>
-                  <a:srgbClr val="94A3B8"/>
-                </a:solidFill>
-                <a:latin typeface="Arial"/>
-              </a:defRPr>
-            </a:pPr>
-            <a:r>
-              <a:t>Una plataforma inteligente que combina Inteligencia Artificial, geolocalización y un modelo SaaS</a:t>
-            </a:r>
-          </a:p>
-        </p:txBody>
-      </p:sp>
-      <p:sp>
-        <p:nvSpPr>
-          <p:cNvPr id="6" name="Rounded Rectangle 5"/>
+              <a:defRPr sz="1500" b="1">
+                <a:solidFill>
+                  <a:srgbClr val="17352B"/>
+                </a:solidFill>
+                <a:latin typeface="Arial"/>
+              </a:defRPr>
+            </a:pPr>
+            <a:r>
+              <a:t>EcoMapa es una plataforma inteligente que combina inteligencia artificial, geolocalización y un modelo SaaS B2B para facilitar el reciclaje de manera simple, rápida e interactiva.</a:t>
+            </a:r>
+          </a:p>
+        </p:txBody>
+      </p:sp>
+      <p:sp>
+        <p:nvSpPr>
+          <p:cNvPr id="10" name="Rounded Rectangle 9"/>
           <p:cNvSpPr/>
           <p:nvPr/>
         </p:nvSpPr>
         <p:spPr>
           <a:xfrm>
-            <a:off x="731520" y="1783080"/>
-            <a:ext cx="2560320" cy="3108960"/>
+            <a:off x="685800" y="2423160"/>
+            <a:ext cx="2606040" cy="2926080"/>
           </a:xfrm>
           <a:prstGeom prst="roundRect">
             <a:avLst/>
           </a:prstGeom>
           <a:solidFill>
-            <a:srgbClr val="1E293B"/>
+            <a:srgbClr val="F8FAF8"/>
           </a:solidFill>
-          <a:ln w="19050">
+          <a:ln w="12700">
             <a:solidFill>
-              <a:srgbClr val="10B981"/>
+              <a:srgbClr val="CFE2D8"/>
             </a:solidFill>
           </a:ln>
         </p:spPr>
@@ -6822,57 +7677,45 @@
           <a:bodyPr rtlCol="0" anchor="ctr" wrap="square" lIns="182880" rIns="182880" tIns="201168"/>
           <a:lstStyle/>
           <a:p>
-            <a:pPr algn="ctr">
-              <a:defRPr sz="1250" b="1">
-                <a:solidFill>
-                  <a:srgbClr val="10B981"/>
-                </a:solidFill>
-                <a:latin typeface="Arial"/>
-              </a:defRPr>
-            </a:pPr>
-            <a:r>
-              <a:t>APP MÓVIL GRATUITA</a:t>
-            </a:r>
+            <a:pPr algn="ctr"/>
           </a:p>
           <a:p>
             <a:pPr>
               <a:spcBef>
-                <a:spcPts val="800"/>
+                <a:spcPts val="3600"/>
               </a:spcBef>
               <a:defRPr sz="1100">
                 <a:solidFill>
-                  <a:srgbClr val="E2E8F0"/>
-                </a:solidFill>
-                <a:latin typeface="Arial"/>
-              </a:defRPr>
-            </a:pPr>
-            <a:r>
-              <a:t>Con Asistente IA multimodal para clasificar residuos mediante texto o cámara en tiempo real.</a:t>
-            </a:r>
-          </a:p>
-        </p:txBody>
-      </p:sp>
-      <p:sp>
-        <p:nvSpPr>
-          <p:cNvPr id="7" name="Rounded Rectangle 6"/>
+                  <a:srgbClr val="5C6B65"/>
+                </a:solidFill>
+                <a:latin typeface="Arial"/>
+              </a:defRPr>
+            </a:pPr>
+            <a:r>
+              <a:t>Con Asistente IA multimodal para clasificar residuos mediante texto o cámara al instante.</a:t>
+            </a:r>
+          </a:p>
+        </p:txBody>
+      </p:sp>
+      <p:sp>
+        <p:nvSpPr>
+          <p:cNvPr id="11" name="Oval 10"/>
           <p:cNvSpPr/>
           <p:nvPr/>
         </p:nvSpPr>
         <p:spPr>
           <a:xfrm>
-            <a:off x="3429000" y="1783080"/>
-            <a:ext cx="2560320" cy="3108960"/>
-          </a:xfrm>
-          <a:prstGeom prst="roundRect">
+            <a:off x="868680" y="2651760"/>
+            <a:ext cx="109728" cy="109728"/>
+          </a:xfrm>
+          <a:prstGeom prst="ellipse">
             <a:avLst/>
           </a:prstGeom>
           <a:solidFill>
-            <a:srgbClr val="1E293B"/>
+            <a:srgbClr val="F2A65A"/>
           </a:solidFill>
-          <a:ln w="19050">
-            <a:solidFill>
-              <a:srgbClr val="06B6D4"/>
-            </a:solidFill>
+          <a:ln>
+            <a:noFill/>
           </a:ln>
         </p:spPr>
         <p:style>
@@ -6890,59 +7733,69 @@
           </a:fontRef>
         </p:style>
         <p:txBody>
-          <a:bodyPr rtlCol="0" anchor="ctr" wrap="square" lIns="182880" rIns="182880" tIns="201168"/>
-          <a:lstStyle/>
-          <a:p>
-            <a:pPr algn="ctr">
-              <a:defRPr sz="1250" b="1">
-                <a:solidFill>
-                  <a:srgbClr val="06B6D4"/>
-                </a:solidFill>
-                <a:latin typeface="Arial"/>
-              </a:defRPr>
-            </a:pPr>
-            <a:r>
-              <a:t>MAPA INTERACTIVO</a:t>
-            </a:r>
-          </a:p>
-          <a:p>
-            <a:pPr>
-              <a:spcBef>
-                <a:spcPts val="800"/>
-              </a:spcBef>
-              <a:defRPr sz="1100">
-                <a:solidFill>
-                  <a:srgbClr val="E2E8F0"/>
-                </a:solidFill>
-                <a:latin typeface="Arial"/>
-              </a:defRPr>
-            </a:pPr>
-            <a:r>
-              <a:t>Geolocalización de puntos ecológicos, contenedores oficiales y centros de recepción cercanos con guiado GPS.</a:t>
-            </a:r>
-          </a:p>
-        </p:txBody>
-      </p:sp>
-      <p:sp>
-        <p:nvSpPr>
-          <p:cNvPr id="8" name="Rounded Rectangle 7"/>
+          <a:bodyPr rtlCol="0" anchor="ctr"/>
+          <a:lstStyle/>
+          <a:p>
+            <a:pPr algn="ctr"/>
+          </a:p>
+        </p:txBody>
+      </p:sp>
+      <p:sp>
+        <p:nvSpPr>
+          <p:cNvPr id="12" name="TextBox 11"/>
+          <p:cNvSpPr txBox="1"/>
+          <p:nvPr/>
+        </p:nvSpPr>
+        <p:spPr>
+          <a:xfrm>
+            <a:off x="1051560" y="2542032"/>
+            <a:ext cx="2103120" cy="365760"/>
+          </a:xfrm>
+          <a:prstGeom prst="rect">
+            <a:avLst/>
+          </a:prstGeom>
+          <a:noFill/>
+        </p:spPr>
+        <p:txBody>
+          <a:bodyPr wrap="none" lIns="0" tIns="0">
+            <a:spAutoFit/>
+          </a:bodyPr>
+          <a:lstStyle/>
+          <a:p>
+            <a:pPr>
+              <a:defRPr sz="1200" b="1">
+                <a:solidFill>
+                  <a:srgbClr val="17352B"/>
+                </a:solidFill>
+                <a:latin typeface="Arial"/>
+              </a:defRPr>
+            </a:pPr>
+            <a:r>
+              <a:t>App móvil gratuita</a:t>
+            </a:r>
+          </a:p>
+        </p:txBody>
+      </p:sp>
+      <p:sp>
+        <p:nvSpPr>
+          <p:cNvPr id="13" name="Rounded Rectangle 12"/>
           <p:cNvSpPr/>
           <p:nvPr/>
         </p:nvSpPr>
         <p:spPr>
           <a:xfrm>
-            <a:off x="6126480" y="1783080"/>
-            <a:ext cx="2560320" cy="3108960"/>
+            <a:off x="3429000" y="2423160"/>
+            <a:ext cx="2606040" cy="2926080"/>
           </a:xfrm>
           <a:prstGeom prst="roundRect">
             <a:avLst/>
           </a:prstGeom>
           <a:solidFill>
-            <a:srgbClr val="1E293B"/>
+            <a:srgbClr val="F8FAF8"/>
           </a:solidFill>
-          <a:ln w="19050">
+          <a:ln w="12700">
             <a:solidFill>
-              <a:srgbClr val="F59E0B"/>
+              <a:srgbClr val="CFE2D8"/>
             </a:solidFill>
           </a:ln>
         </p:spPr>
@@ -6964,57 +7817,45 @@
           <a:bodyPr rtlCol="0" anchor="ctr" wrap="square" lIns="182880" rIns="182880" tIns="201168"/>
           <a:lstStyle/>
           <a:p>
-            <a:pPr algn="ctr">
-              <a:defRPr sz="1250" b="1">
-                <a:solidFill>
-                  <a:srgbClr val="F59E0B"/>
-                </a:solidFill>
-                <a:latin typeface="Arial"/>
-              </a:defRPr>
-            </a:pPr>
-            <a:r>
-              <a:t>PLATAFORMA WEB SAAS</a:t>
-            </a:r>
+            <a:pPr algn="ctr"/>
           </a:p>
           <a:p>
             <a:pPr>
               <a:spcBef>
-                <a:spcPts val="800"/>
+                <a:spcPts val="3600"/>
               </a:spcBef>
               <a:defRPr sz="1100">
                 <a:solidFill>
-                  <a:srgbClr val="E2E8F0"/>
-                </a:solidFill>
-                <a:latin typeface="Arial"/>
-              </a:defRPr>
-            </a:pPr>
-            <a:r>
-              <a:t>Paneles administrativos para que municipios y empresas gestionen contenedores, retiros y analítica GIRSU.</a:t>
-            </a:r>
-          </a:p>
-        </p:txBody>
-      </p:sp>
-      <p:sp>
-        <p:nvSpPr>
-          <p:cNvPr id="9" name="Rounded Rectangle 8"/>
+                  <a:srgbClr val="5C6B65"/>
+                </a:solidFill>
+                <a:latin typeface="Arial"/>
+              </a:defRPr>
+            </a:pPr>
+            <a:r>
+              <a:t>Geolocalización de puntos ecológicos cercanos en tiempo real con navegación guiada por GPS.</a:t>
+            </a:r>
+          </a:p>
+        </p:txBody>
+      </p:sp>
+      <p:sp>
+        <p:nvSpPr>
+          <p:cNvPr id="14" name="Oval 13"/>
           <p:cNvSpPr/>
           <p:nvPr/>
         </p:nvSpPr>
         <p:spPr>
           <a:xfrm>
-            <a:off x="8823960" y="1783080"/>
-            <a:ext cx="2560320" cy="3108960"/>
-          </a:xfrm>
-          <a:prstGeom prst="roundRect">
+            <a:off x="3611880" y="2651760"/>
+            <a:ext cx="109728" cy="109728"/>
+          </a:xfrm>
+          <a:prstGeom prst="ellipse">
             <a:avLst/>
           </a:prstGeom>
           <a:solidFill>
-            <a:srgbClr val="1E293B"/>
+            <a:srgbClr val="0B6B4D"/>
           </a:solidFill>
-          <a:ln w="19050">
-            <a:solidFill>
-              <a:srgbClr val="8B5CF6"/>
-            </a:solidFill>
+          <a:ln>
+            <a:noFill/>
           </a:ln>
         </p:spPr>
         <p:style>
@@ -7032,59 +7873,69 @@
           </a:fontRef>
         </p:style>
         <p:txBody>
-          <a:bodyPr rtlCol="0" anchor="ctr" wrap="square" lIns="182880" rIns="182880" tIns="201168"/>
-          <a:lstStyle/>
-          <a:p>
-            <a:pPr algn="ctr">
-              <a:defRPr sz="1250" b="1">
-                <a:solidFill>
-                  <a:srgbClr val="8B5CF6"/>
-                </a:solidFill>
-                <a:latin typeface="Arial"/>
-              </a:defRPr>
-            </a:pPr>
-            <a:r>
-              <a:t>SISTEMA DE ECOPUNTOS</a:t>
-            </a:r>
-          </a:p>
-          <a:p>
-            <a:pPr>
-              <a:spcBef>
-                <a:spcPts val="800"/>
-              </a:spcBef>
-              <a:defRPr sz="1100">
-                <a:solidFill>
-                  <a:srgbClr val="E2E8F0"/>
-                </a:solidFill>
-                <a:latin typeface="Arial"/>
-              </a:defRPr>
-            </a:pPr>
-            <a:r>
-              <a:t>Gamificación con insignias y cupones de descuento para motivar y fidelizar la conducta sustentable de los usuarios.</a:t>
-            </a:r>
-          </a:p>
-        </p:txBody>
-      </p:sp>
-      <p:sp>
-        <p:nvSpPr>
-          <p:cNvPr id="10" name="Rounded Rectangle 9"/>
+          <a:bodyPr rtlCol="0" anchor="ctr"/>
+          <a:lstStyle/>
+          <a:p>
+            <a:pPr algn="ctr"/>
+          </a:p>
+        </p:txBody>
+      </p:sp>
+      <p:sp>
+        <p:nvSpPr>
+          <p:cNvPr id="15" name="TextBox 14"/>
+          <p:cNvSpPr txBox="1"/>
+          <p:nvPr/>
+        </p:nvSpPr>
+        <p:spPr>
+          <a:xfrm>
+            <a:off x="3794760" y="2542032"/>
+            <a:ext cx="2103120" cy="365760"/>
+          </a:xfrm>
+          <a:prstGeom prst="rect">
+            <a:avLst/>
+          </a:prstGeom>
+          <a:noFill/>
+        </p:spPr>
+        <p:txBody>
+          <a:bodyPr wrap="none" lIns="0" tIns="0">
+            <a:spAutoFit/>
+          </a:bodyPr>
+          <a:lstStyle/>
+          <a:p>
+            <a:pPr>
+              <a:defRPr sz="1200" b="1">
+                <a:solidFill>
+                  <a:srgbClr val="17352B"/>
+                </a:solidFill>
+                <a:latin typeface="Arial"/>
+              </a:defRPr>
+            </a:pPr>
+            <a:r>
+              <a:t>Mapa interactivo</a:t>
+            </a:r>
+          </a:p>
+        </p:txBody>
+      </p:sp>
+      <p:sp>
+        <p:nvSpPr>
+          <p:cNvPr id="16" name="Rounded Rectangle 15"/>
           <p:cNvSpPr/>
           <p:nvPr/>
         </p:nvSpPr>
         <p:spPr>
           <a:xfrm>
-            <a:off x="731520" y="5074920"/>
-            <a:ext cx="10698480" cy="1234440"/>
+            <a:off x="6172200" y="2423160"/>
+            <a:ext cx="2606040" cy="2926080"/>
           </a:xfrm>
           <a:prstGeom prst="roundRect">
             <a:avLst/>
           </a:prstGeom>
           <a:solidFill>
-            <a:srgbClr val="1E293B"/>
+            <a:srgbClr val="F8FAF8"/>
           </a:solidFill>
           <a:ln w="12700">
             <a:solidFill>
-              <a:srgbClr val="10B981"/>
+              <a:srgbClr val="CFE2D8"/>
             </a:solidFill>
           </a:ln>
         </p:spPr>
@@ -7103,35 +7954,313 @@
           </a:fontRef>
         </p:style>
         <p:txBody>
-          <a:bodyPr rtlCol="0" anchor="ctr" wrap="square" lIns="365760" rIns="365760" tIns="182880"/>
-          <a:lstStyle/>
-          <a:p>
-            <a:pPr algn="ctr">
-              <a:defRPr sz="1400" b="1">
-                <a:solidFill>
-                  <a:srgbClr val="34D399"/>
-                </a:solidFill>
-                <a:latin typeface="Arial"/>
-              </a:defRPr>
-            </a:pPr>
-            <a:r>
-              <a:t>“Tecnología aplicada al cuidado ambiental.”</a:t>
-            </a:r>
+          <a:bodyPr rtlCol="0" anchor="ctr" wrap="square" lIns="182880" rIns="182880" tIns="201168"/>
+          <a:lstStyle/>
+          <a:p>
+            <a:pPr algn="ctr"/>
           </a:p>
           <a:p>
             <a:pPr>
               <a:spcBef>
-                <a:spcPts val="400"/>
+                <a:spcPts val="3600"/>
               </a:spcBef>
               <a:defRPr sz="1100">
                 <a:solidFill>
-                  <a:srgbClr val="E2E8F0"/>
-                </a:solidFill>
-                <a:latin typeface="Arial"/>
-              </a:defRPr>
-            </a:pPr>
-            <a:r>
-              <a:t>EcoMapa no solo le dice al vecino si un residuo se recicla, sino cómo prepararlo y exactamente a qué contenedor llevarlo, acompañándolo paso a paso.</a:t>
+                  <a:srgbClr val="5C6B65"/>
+                </a:solidFill>
+                <a:latin typeface="Arial"/>
+              </a:defRPr>
+            </a:pPr>
+            <a:r>
+              <a:t>Paneles administrativos para que municipios y empresas gestionen contenedores, retiros y métricas.</a:t>
+            </a:r>
+          </a:p>
+        </p:txBody>
+      </p:sp>
+      <p:sp>
+        <p:nvSpPr>
+          <p:cNvPr id="17" name="Oval 16"/>
+          <p:cNvSpPr/>
+          <p:nvPr/>
+        </p:nvSpPr>
+        <p:spPr>
+          <a:xfrm>
+            <a:off x="6355080" y="2651760"/>
+            <a:ext cx="109728" cy="109728"/>
+          </a:xfrm>
+          <a:prstGeom prst="ellipse">
+            <a:avLst/>
+          </a:prstGeom>
+          <a:solidFill>
+            <a:srgbClr val="0B6B4D"/>
+          </a:solidFill>
+          <a:ln>
+            <a:noFill/>
+          </a:ln>
+        </p:spPr>
+        <p:style>
+          <a:lnRef idx="1">
+            <a:schemeClr val="accent1"/>
+          </a:lnRef>
+          <a:fillRef idx="3">
+            <a:schemeClr val="accent1"/>
+          </a:fillRef>
+          <a:effectRef idx="2">
+            <a:schemeClr val="accent1"/>
+          </a:effectRef>
+          <a:fontRef idx="minor">
+            <a:schemeClr val="lt1"/>
+          </a:fontRef>
+        </p:style>
+        <p:txBody>
+          <a:bodyPr rtlCol="0" anchor="ctr"/>
+          <a:lstStyle/>
+          <a:p>
+            <a:pPr algn="ctr"/>
+          </a:p>
+        </p:txBody>
+      </p:sp>
+      <p:sp>
+        <p:nvSpPr>
+          <p:cNvPr id="18" name="TextBox 17"/>
+          <p:cNvSpPr txBox="1"/>
+          <p:nvPr/>
+        </p:nvSpPr>
+        <p:spPr>
+          <a:xfrm>
+            <a:off x="6537960" y="2542032"/>
+            <a:ext cx="2103120" cy="365760"/>
+          </a:xfrm>
+          <a:prstGeom prst="rect">
+            <a:avLst/>
+          </a:prstGeom>
+          <a:noFill/>
+        </p:spPr>
+        <p:txBody>
+          <a:bodyPr wrap="none" lIns="0" tIns="0">
+            <a:spAutoFit/>
+          </a:bodyPr>
+          <a:lstStyle/>
+          <a:p>
+            <a:pPr>
+              <a:defRPr sz="1200" b="1">
+                <a:solidFill>
+                  <a:srgbClr val="17352B"/>
+                </a:solidFill>
+                <a:latin typeface="Arial"/>
+              </a:defRPr>
+            </a:pPr>
+            <a:r>
+              <a:t>Plataforma web SaaS</a:t>
+            </a:r>
+          </a:p>
+        </p:txBody>
+      </p:sp>
+      <p:sp>
+        <p:nvSpPr>
+          <p:cNvPr id="19" name="Rounded Rectangle 18"/>
+          <p:cNvSpPr/>
+          <p:nvPr/>
+        </p:nvSpPr>
+        <p:spPr>
+          <a:xfrm>
+            <a:off x="8915400" y="2423160"/>
+            <a:ext cx="2606040" cy="2926080"/>
+          </a:xfrm>
+          <a:prstGeom prst="roundRect">
+            <a:avLst/>
+          </a:prstGeom>
+          <a:solidFill>
+            <a:srgbClr val="F8FAF8"/>
+          </a:solidFill>
+          <a:ln w="12700">
+            <a:solidFill>
+              <a:srgbClr val="CFE2D8"/>
+            </a:solidFill>
+          </a:ln>
+        </p:spPr>
+        <p:style>
+          <a:lnRef idx="1">
+            <a:schemeClr val="accent1"/>
+          </a:lnRef>
+          <a:fillRef idx="3">
+            <a:schemeClr val="accent1"/>
+          </a:fillRef>
+          <a:effectRef idx="2">
+            <a:schemeClr val="accent1"/>
+          </a:effectRef>
+          <a:fontRef idx="minor">
+            <a:schemeClr val="lt1"/>
+          </a:fontRef>
+        </p:style>
+        <p:txBody>
+          <a:bodyPr rtlCol="0" anchor="ctr" wrap="square" lIns="182880" rIns="182880" tIns="201168"/>
+          <a:lstStyle/>
+          <a:p>
+            <a:pPr algn="ctr"/>
+          </a:p>
+          <a:p>
+            <a:pPr>
+              <a:spcBef>
+                <a:spcPts val="3600"/>
+              </a:spcBef>
+              <a:defRPr sz="1100">
+                <a:solidFill>
+                  <a:srgbClr val="5C6B65"/>
+                </a:solidFill>
+                <a:latin typeface="Arial"/>
+              </a:defRPr>
+            </a:pPr>
+            <a:r>
+              <a:t>Sistema de gamificación con recompensas tangibles para fidelizar y premiar la participación ciudadana.</a:t>
+            </a:r>
+          </a:p>
+        </p:txBody>
+      </p:sp>
+      <p:sp>
+        <p:nvSpPr>
+          <p:cNvPr id="20" name="Oval 19"/>
+          <p:cNvSpPr/>
+          <p:nvPr/>
+        </p:nvSpPr>
+        <p:spPr>
+          <a:xfrm>
+            <a:off x="9098280" y="2651760"/>
+            <a:ext cx="109728" cy="109728"/>
+          </a:xfrm>
+          <a:prstGeom prst="ellipse">
+            <a:avLst/>
+          </a:prstGeom>
+          <a:solidFill>
+            <a:srgbClr val="5F8DD3"/>
+          </a:solidFill>
+          <a:ln>
+            <a:noFill/>
+          </a:ln>
+        </p:spPr>
+        <p:style>
+          <a:lnRef idx="1">
+            <a:schemeClr val="accent1"/>
+          </a:lnRef>
+          <a:fillRef idx="3">
+            <a:schemeClr val="accent1"/>
+          </a:fillRef>
+          <a:effectRef idx="2">
+            <a:schemeClr val="accent1"/>
+          </a:effectRef>
+          <a:fontRef idx="minor">
+            <a:schemeClr val="lt1"/>
+          </a:fontRef>
+        </p:style>
+        <p:txBody>
+          <a:bodyPr rtlCol="0" anchor="ctr"/>
+          <a:lstStyle/>
+          <a:p>
+            <a:pPr algn="ctr"/>
+          </a:p>
+        </p:txBody>
+      </p:sp>
+      <p:sp>
+        <p:nvSpPr>
+          <p:cNvPr id="21" name="TextBox 20"/>
+          <p:cNvSpPr txBox="1"/>
+          <p:nvPr/>
+        </p:nvSpPr>
+        <p:spPr>
+          <a:xfrm>
+            <a:off x="9281160" y="2542032"/>
+            <a:ext cx="2103120" cy="365760"/>
+          </a:xfrm>
+          <a:prstGeom prst="rect">
+            <a:avLst/>
+          </a:prstGeom>
+          <a:noFill/>
+        </p:spPr>
+        <p:txBody>
+          <a:bodyPr wrap="none" lIns="0" tIns="0">
+            <a:spAutoFit/>
+          </a:bodyPr>
+          <a:lstStyle/>
+          <a:p>
+            <a:pPr>
+              <a:defRPr sz="1200" b="1">
+                <a:solidFill>
+                  <a:srgbClr val="17352B"/>
+                </a:solidFill>
+                <a:latin typeface="Arial"/>
+              </a:defRPr>
+            </a:pPr>
+            <a:r>
+              <a:t>Ecopuntos e insignias</a:t>
+            </a:r>
+          </a:p>
+        </p:txBody>
+      </p:sp>
+      <p:sp>
+        <p:nvSpPr>
+          <p:cNvPr id="22" name="Rounded Rectangle 21"/>
+          <p:cNvSpPr/>
+          <p:nvPr/>
+        </p:nvSpPr>
+        <p:spPr>
+          <a:xfrm>
+            <a:off x="685800" y="5532120"/>
+            <a:ext cx="10817352" cy="777240"/>
+          </a:xfrm>
+          <a:prstGeom prst="roundRect">
+            <a:avLst/>
+          </a:prstGeom>
+          <a:solidFill>
+            <a:srgbClr val="DDF4E9"/>
+          </a:solidFill>
+          <a:ln>
+            <a:noFill/>
+          </a:ln>
+        </p:spPr>
+        <p:style>
+          <a:lnRef idx="1">
+            <a:schemeClr val="accent1"/>
+          </a:lnRef>
+          <a:fillRef idx="3">
+            <a:schemeClr val="accent1"/>
+          </a:fillRef>
+          <a:effectRef idx="2">
+            <a:schemeClr val="accent1"/>
+          </a:effectRef>
+          <a:fontRef idx="minor">
+            <a:schemeClr val="lt1"/>
+          </a:fontRef>
+        </p:style>
+        <p:txBody>
+          <a:bodyPr rtlCol="0" anchor="ctr" wrap="square" lIns="274320" tIns="109728"/>
+          <a:lstStyle/>
+          <a:p>
+            <a:pPr algn="ctr">
+              <a:defRPr sz="1250" b="1">
+                <a:solidFill>
+                  <a:srgbClr val="0B6B4D"/>
+                </a:solidFill>
+                <a:latin typeface="Arial"/>
+              </a:defRPr>
+            </a:pPr>
+            <a:r>
+              <a:t>“Tecnología aplicada al cuidado ambiental.”</a:t>
+            </a:r>
+          </a:p>
+          <a:p>
+            <a:pPr>
+              <a:spcBef>
+                <a:spcPts val="200"/>
+              </a:spcBef>
+              <a:defRPr sz="1100">
+                <a:solidFill>
+                  <a:srgbClr val="17352B"/>
+                </a:solidFill>
+                <a:latin typeface="Arial"/>
+              </a:defRPr>
+            </a:pPr>
+            <a:r>
+              <a:t>Una herramienta que reduce la fricción en el momento del descarte y conecta al ciudadano con el punto correcto.</a:t>
             </a:r>
           </a:p>
         </p:txBody>
@@ -7169,7 +8298,7 @@
             <a:avLst/>
           </a:prstGeom>
           <a:solidFill>
-            <a:srgbClr val="0F172A"/>
+            <a:srgbClr val="FFFFFF"/>
           </a:solidFill>
           <a:ln>
             <a:noFill/>
@@ -7199,20 +8328,128 @@
       </p:sp>
       <p:sp>
         <p:nvSpPr>
-          <p:cNvPr id="3" name="Rounded Rectangle 2"/>
+          <p:cNvPr id="3" name="TextBox 2"/>
+          <p:cNvSpPr txBox="1"/>
+          <p:nvPr/>
+        </p:nvSpPr>
+        <p:spPr>
+          <a:xfrm>
+            <a:off x="685800" y="411480"/>
+            <a:ext cx="5029200" cy="320040"/>
+          </a:xfrm>
+          <a:prstGeom prst="rect">
+            <a:avLst/>
+          </a:prstGeom>
+          <a:noFill/>
+        </p:spPr>
+        <p:txBody>
+          <a:bodyPr wrap="square" lIns="0" tIns="0">
+            <a:spAutoFit/>
+          </a:bodyPr>
+          <a:lstStyle/>
+          <a:p>
+            <a:pPr>
+              <a:defRPr sz="1100" b="1">
+                <a:solidFill>
+                  <a:srgbClr val="0B6B4D"/>
+                </a:solidFill>
+                <a:latin typeface="Arial"/>
+              </a:defRPr>
+            </a:pPr>
+            <a:r>
+              <a:t>04 • FLUJO PRINCIPAL</a:t>
+            </a:r>
+          </a:p>
+        </p:txBody>
+      </p:sp>
+      <p:sp>
+        <p:nvSpPr>
+          <p:cNvPr id="4" name="TextBox 3"/>
+          <p:cNvSpPr txBox="1"/>
+          <p:nvPr/>
+        </p:nvSpPr>
+        <p:spPr>
+          <a:xfrm>
+            <a:off x="10789920" y="411480"/>
+            <a:ext cx="731520" cy="320040"/>
+          </a:xfrm>
+          <a:prstGeom prst="rect">
+            <a:avLst/>
+          </a:prstGeom>
+          <a:noFill/>
+        </p:spPr>
+        <p:txBody>
+          <a:bodyPr wrap="none" rIns="0" tIns="0">
+            <a:spAutoFit/>
+          </a:bodyPr>
+          <a:lstStyle/>
+          <a:p>
+            <a:pPr algn="r">
+              <a:defRPr sz="1100" b="1">
+                <a:solidFill>
+                  <a:srgbClr val="5C6B65"/>
+                </a:solidFill>
+                <a:latin typeface="Arial"/>
+              </a:defRPr>
+            </a:pPr>
+            <a:r>
+              <a:t>05</a:t>
+            </a:r>
+          </a:p>
+        </p:txBody>
+      </p:sp>
+      <p:sp>
+        <p:nvSpPr>
+          <p:cNvPr id="5" name="TextBox 4"/>
+          <p:cNvSpPr txBox="1"/>
+          <p:nvPr/>
+        </p:nvSpPr>
+        <p:spPr>
+          <a:xfrm>
+            <a:off x="685800" y="685800"/>
+            <a:ext cx="10789920" cy="685800"/>
+          </a:xfrm>
+          <a:prstGeom prst="rect">
+            <a:avLst/>
+          </a:prstGeom>
+          <a:noFill/>
+        </p:spPr>
+        <p:txBody>
+          <a:bodyPr wrap="square" lIns="0" tIns="0">
+            <a:spAutoFit/>
+          </a:bodyPr>
+          <a:lstStyle/>
+          <a:p>
+            <a:pPr>
+              <a:defRPr sz="2500" b="1">
+                <a:solidFill>
+                  <a:srgbClr val="17352B"/>
+                </a:solidFill>
+                <a:latin typeface="Arial"/>
+              </a:defRPr>
+            </a:pPr>
+            <a:r>
+              <a:t>El recorrido del ciudadano</a:t>
+            </a:r>
+          </a:p>
+        </p:txBody>
+      </p:sp>
+      <p:sp>
+        <p:nvSpPr>
+          <p:cNvPr id="6" name="Rectangle 5"/>
           <p:cNvSpPr/>
           <p:nvPr/>
         </p:nvSpPr>
         <p:spPr>
           <a:xfrm>
-            <a:off x="731520" y="384048"/>
-            <a:ext cx="3474720" cy="347472"/>
-          </a:xfrm>
-          <a:prstGeom prst="roundRect">
+            <a:off x="685800" y="1417320"/>
+            <a:ext cx="10817352" cy="13716"/>
+          </a:xfrm>
+          <a:prstGeom prst="rect">
             <a:avLst/>
           </a:prstGeom>
           <a:solidFill>
-            <a:srgbClr val="06B6D4"/>
+            <a:srgbClr val="CFE2D8"/>
           </a:solidFill>
           <a:ln>
             <a:noFill/>
@@ -7236,23 +8473,49 @@
           <a:bodyPr rtlCol="0" anchor="ctr"/>
           <a:lstStyle/>
           <a:p>
-            <a:pPr algn="ctr">
-              <a:defRPr sz="950" b="1">
-                <a:solidFill>
-                  <a:srgbClr val="FFFFFF"/>
-                </a:solidFill>
-                <a:latin typeface="Arial"/>
-              </a:defRPr>
-            </a:pPr>
-            <a:r>
-              <a:t>04. FLUJO PRINCIPAL</a:t>
+            <a:pPr algn="ctr"/>
+          </a:p>
+        </p:txBody>
+      </p:sp>
+      <p:sp>
+        <p:nvSpPr>
+          <p:cNvPr id="7" name="TextBox 6"/>
+          <p:cNvSpPr txBox="1"/>
+          <p:nvPr/>
+        </p:nvSpPr>
+        <p:spPr>
+          <a:xfrm>
+            <a:off x="685800" y="6446520"/>
+            <a:ext cx="5486400" cy="274320"/>
+          </a:xfrm>
+          <a:prstGeom prst="rect">
+            <a:avLst/>
+          </a:prstGeom>
+          <a:noFill/>
+        </p:spPr>
+        <p:txBody>
+          <a:bodyPr wrap="none" lIns="0" bIns="0">
+            <a:spAutoFit/>
+          </a:bodyPr>
+          <a:lstStyle/>
+          <a:p>
+            <a:pPr>
+              <a:defRPr sz="950">
+                <a:solidFill>
+                  <a:srgbClr val="5C6B65"/>
+                </a:solidFill>
+                <a:latin typeface="Arial"/>
+              </a:defRPr>
+            </a:pPr>
+            <a:r>
+              <a:t>EcoMapa  •  CivicLoop Technologies S.A.</a:t>
             </a:r>
           </a:p>
         </p:txBody>
       </p:sp>
       <p:pic>
         <p:nvPicPr>
-          <p:cNvPr id="4" name="Picture 3" descr="civicloop_logo_rounded.png"/>
+          <p:cNvPr id="8" name="Picture 7" descr="civicloop_logo_rounded.png"/>
           <p:cNvPicPr>
             <a:picLocks noChangeAspect="1"/>
           </p:cNvPicPr>
@@ -7266,8 +8529,8 @@
         </p:blipFill>
         <p:spPr>
           <a:xfrm>
-            <a:off x="11064240" y="347472"/>
-            <a:ext cx="594360" cy="594360"/>
+            <a:off x="11064240" y="6309360"/>
+            <a:ext cx="438912" cy="438912"/>
           </a:xfrm>
           <a:prstGeom prst="rect">
             <a:avLst/>
@@ -7276,14 +8539,14 @@
       </p:pic>
       <p:sp>
         <p:nvSpPr>
-          <p:cNvPr id="5" name="TextBox 4"/>
+          <p:cNvPr id="9" name="TextBox 8"/>
           <p:cNvSpPr txBox="1"/>
           <p:nvPr/>
         </p:nvSpPr>
         <p:spPr>
           <a:xfrm>
-            <a:off x="731520" y="749808"/>
-            <a:ext cx="10515600" cy="777240"/>
+            <a:off x="685800" y="1645920"/>
+            <a:ext cx="10789920" cy="548640"/>
           </a:xfrm>
           <a:prstGeom prst="rect">
             <a:avLst/>
@@ -7291,61 +8554,45 @@
           <a:noFill/>
         </p:spPr>
         <p:txBody>
-          <a:bodyPr wrap="square">
+          <a:bodyPr wrap="square" lIns="0">
             <a:spAutoFit/>
           </a:bodyPr>
           <a:lstStyle/>
           <a:p>
             <a:pPr>
-              <a:defRPr sz="2500" b="1">
-                <a:solidFill>
-                  <a:srgbClr val="FFFFFF"/>
-                </a:solidFill>
-                <a:latin typeface="Arial"/>
-              </a:defRPr>
-            </a:pPr>
-            <a:r>
-              <a:t>El Recorrido del Ciudadano: De la Pregunta a la Acción</a:t>
-            </a:r>
-          </a:p>
-          <a:p>
-            <a:pPr>
-              <a:spcBef>
-                <a:spcPts val="300"/>
-              </a:spcBef>
-              <a:defRPr sz="1300">
-                <a:solidFill>
-                  <a:srgbClr val="94A3B8"/>
-                </a:solidFill>
-                <a:latin typeface="Arial"/>
-              </a:defRPr>
-            </a:pPr>
-            <a:r>
-              <a:t>Cómo interactúa el vecino en su vida diaria frente a un residuo</a:t>
-            </a:r>
-          </a:p>
-        </p:txBody>
-      </p:sp>
-      <p:sp>
-        <p:nvSpPr>
-          <p:cNvPr id="6" name="Rounded Rectangle 5"/>
+              <a:defRPr sz="1600" b="1">
+                <a:solidFill>
+                  <a:srgbClr val="17352B"/>
+                </a:solidFill>
+                <a:latin typeface="Arial"/>
+              </a:defRPr>
+            </a:pPr>
+            <a:r>
+              <a:t>EcoMapa une tres momentos de la decisión de reciclar:</a:t>
+            </a:r>
+          </a:p>
+        </p:txBody>
+      </p:sp>
+      <p:sp>
+        <p:nvSpPr>
+          <p:cNvPr id="10" name="Rounded Rectangle 9"/>
           <p:cNvSpPr/>
           <p:nvPr/>
         </p:nvSpPr>
         <p:spPr>
           <a:xfrm>
-            <a:off x="731520" y="1783080"/>
-            <a:ext cx="3383280" cy="3291840"/>
+            <a:off x="685800" y="2377440"/>
+            <a:ext cx="3429000" cy="3108960"/>
           </a:xfrm>
           <a:prstGeom prst="roundRect">
             <a:avLst/>
           </a:prstGeom>
           <a:solidFill>
-            <a:srgbClr val="1E293B"/>
+            <a:srgbClr val="F8FAF8"/>
           </a:solidFill>
-          <a:ln w="19050">
+          <a:ln w="12700">
             <a:solidFill>
-              <a:srgbClr val="10B981"/>
+              <a:srgbClr val="CFE2D8"/>
             </a:solidFill>
           </a:ln>
         </p:spPr>
@@ -7364,13 +8611,13 @@
           </a:fontRef>
         </p:style>
         <p:txBody>
-          <a:bodyPr rtlCol="0" anchor="ctr" wrap="square" lIns="228600" rIns="228600" tIns="182880"/>
+          <a:bodyPr rtlCol="0" anchor="ctr" wrap="square" lIns="228600" rIns="228600" tIns="228600"/>
           <a:lstStyle/>
           <a:p>
             <a:pPr algn="ctr">
-              <a:defRPr sz="3600" b="1">
-                <a:solidFill>
-                  <a:srgbClr val="10B981"/>
+              <a:defRPr sz="2800" b="1">
+                <a:solidFill>
+                  <a:srgbClr val="F2A65A"/>
                 </a:solidFill>
                 <a:latin typeface="Arial"/>
               </a:defRPr>
@@ -7382,17 +8629,17 @@
           <a:p>
             <a:pPr>
               <a:spcBef>
-                <a:spcPts val="400"/>
+                <a:spcPts val="600"/>
               </a:spcBef>
-              <a:defRPr sz="1300" b="1">
-                <a:solidFill>
-                  <a:srgbClr val="FFFFFF"/>
-                </a:solidFill>
-                <a:latin typeface="Arial"/>
-              </a:defRPr>
-            </a:pPr>
-            <a:r>
-              <a:t>CONSULTA NATURAL</a:t>
+              <a:defRPr sz="1400" b="1">
+                <a:solidFill>
+                  <a:srgbClr val="17352B"/>
+                </a:solidFill>
+                <a:latin typeface="Arial"/>
+              </a:defRPr>
+            </a:pPr>
+            <a:r>
+              <a:t>Consulta Natural</a:t>
             </a:r>
           </a:p>
           <a:p>
@@ -7400,39 +8647,39 @@
               <a:spcBef>
                 <a:spcPts val="800"/>
               </a:spcBef>
-              <a:defRPr sz="1100">
-                <a:solidFill>
-                  <a:srgbClr val="E2E8F0"/>
-                </a:solidFill>
-                <a:latin typeface="Arial"/>
-              </a:defRPr>
-            </a:pPr>
-            <a:r>
-              <a:t>El ciudadano describe su residuo en el chat o toma una fotografía con la cámara de su teléfono (Ej: 'Tengo una pila usada' o '¿Dónde tiro una botella de lavandina?').</a:t>
-            </a:r>
-          </a:p>
-        </p:txBody>
-      </p:sp>
-      <p:sp>
-        <p:nvSpPr>
-          <p:cNvPr id="7" name="Rounded Rectangle 6"/>
+              <a:defRPr sz="1150">
+                <a:solidFill>
+                  <a:srgbClr val="5C6B65"/>
+                </a:solidFill>
+                <a:latin typeface="Arial"/>
+              </a:defRPr>
+            </a:pPr>
+            <a:r>
+              <a:t>El ciudadano describe su residuo en el chat o toma una foto con la cámara (Ej: 'Tengo una pila usada' o '¿Cómo reciclo este envase?').</a:t>
+            </a:r>
+          </a:p>
+        </p:txBody>
+      </p:sp>
+      <p:sp>
+        <p:nvSpPr>
+          <p:cNvPr id="11" name="Rounded Rectangle 10"/>
           <p:cNvSpPr/>
           <p:nvPr/>
         </p:nvSpPr>
         <p:spPr>
           <a:xfrm>
-            <a:off x="4389120" y="1783080"/>
-            <a:ext cx="3383280" cy="3291840"/>
+            <a:off x="4389120" y="2377440"/>
+            <a:ext cx="3429000" cy="3108960"/>
           </a:xfrm>
           <a:prstGeom prst="roundRect">
             <a:avLst/>
           </a:prstGeom>
           <a:solidFill>
-            <a:srgbClr val="1E293B"/>
+            <a:srgbClr val="F8FAF8"/>
           </a:solidFill>
-          <a:ln w="19050">
+          <a:ln w="12700">
             <a:solidFill>
-              <a:srgbClr val="06B6D4"/>
+              <a:srgbClr val="CFE2D8"/>
             </a:solidFill>
           </a:ln>
         </p:spPr>
@@ -7451,13 +8698,13 @@
           </a:fontRef>
         </p:style>
         <p:txBody>
-          <a:bodyPr rtlCol="0" anchor="ctr" wrap="square" lIns="228600" rIns="228600" tIns="182880"/>
+          <a:bodyPr rtlCol="0" anchor="ctr" wrap="square" lIns="228600" rIns="228600" tIns="228600"/>
           <a:lstStyle/>
           <a:p>
             <a:pPr algn="ctr">
-              <a:defRPr sz="3600" b="1">
-                <a:solidFill>
-                  <a:srgbClr val="06B6D4"/>
+              <a:defRPr sz="2800" b="1">
+                <a:solidFill>
+                  <a:srgbClr val="0B6B4D"/>
                 </a:solidFill>
                 <a:latin typeface="Arial"/>
               </a:defRPr>
@@ -7469,17 +8716,17 @@
           <a:p>
             <a:pPr>
               <a:spcBef>
-                <a:spcPts val="400"/>
+                <a:spcPts val="600"/>
               </a:spcBef>
-              <a:defRPr sz="1300" b="1">
-                <a:solidFill>
-                  <a:srgbClr val="FFFFFF"/>
-                </a:solidFill>
-                <a:latin typeface="Arial"/>
-              </a:defRPr>
-            </a:pPr>
-            <a:r>
-              <a:t>CLASIFICACIÓN INTELIGENTE</a:t>
+              <a:defRPr sz="1400" b="1">
+                <a:solidFill>
+                  <a:srgbClr val="17352B"/>
+                </a:solidFill>
+                <a:latin typeface="Arial"/>
+              </a:defRPr>
+            </a:pPr>
+            <a:r>
+              <a:t>Clasificación Inteligente</a:t>
             </a:r>
           </a:p>
           <a:p>
@@ -7487,39 +8734,39 @@
               <a:spcBef>
                 <a:spcPts val="800"/>
               </a:spcBef>
-              <a:defRPr sz="1100">
-                <a:solidFill>
-                  <a:srgbClr val="E2E8F0"/>
-                </a:solidFill>
-                <a:latin typeface="Arial"/>
-              </a:defRPr>
-            </a:pPr>
-            <a:r>
-              <a:t>La Inteligencia Artificial de Google Gemini procesa la consulta al instante, identifica el material, verifica su reciclabilidad y enseña cómo acondicionarlo.</a:t>
-            </a:r>
-          </a:p>
-        </p:txBody>
-      </p:sp>
-      <p:sp>
-        <p:nvSpPr>
-          <p:cNvPr id="8" name="Rounded Rectangle 7"/>
+              <a:defRPr sz="1150">
+                <a:solidFill>
+                  <a:srgbClr val="5C6B65"/>
+                </a:solidFill>
+                <a:latin typeface="Arial"/>
+              </a:defRPr>
+            </a:pPr>
+            <a:r>
+              <a:t>La Inteligencia Artificial (Google Gemini) procesa la consulta al instante, identifica el material y orienta sobre cómo prepararlo (vaciar, secar, quitar tapa).</a:t>
+            </a:r>
+          </a:p>
+        </p:txBody>
+      </p:sp>
+      <p:sp>
+        <p:nvSpPr>
+          <p:cNvPr id="12" name="Rounded Rectangle 11"/>
           <p:cNvSpPr/>
           <p:nvPr/>
         </p:nvSpPr>
         <p:spPr>
           <a:xfrm>
-            <a:off x="8046720" y="1783080"/>
-            <a:ext cx="3383280" cy="3291840"/>
+            <a:off x="8092440" y="2377440"/>
+            <a:ext cx="3429000" cy="3108960"/>
           </a:xfrm>
           <a:prstGeom prst="roundRect">
             <a:avLst/>
           </a:prstGeom>
           <a:solidFill>
-            <a:srgbClr val="1E293B"/>
+            <a:srgbClr val="F8FAF8"/>
           </a:solidFill>
-          <a:ln w="19050">
+          <a:ln w="12700">
             <a:solidFill>
-              <a:srgbClr val="F59E0B"/>
+              <a:srgbClr val="CFE2D8"/>
             </a:solidFill>
           </a:ln>
         </p:spPr>
@@ -7538,13 +8785,13 @@
           </a:fontRef>
         </p:style>
         <p:txBody>
-          <a:bodyPr rtlCol="0" anchor="ctr" wrap="square" lIns="228600" rIns="228600" tIns="182880"/>
+          <a:bodyPr rtlCol="0" anchor="ctr" wrap="square" lIns="228600" rIns="228600" tIns="228600"/>
           <a:lstStyle/>
           <a:p>
             <a:pPr algn="ctr">
-              <a:defRPr sz="3600" b="1">
-                <a:solidFill>
-                  <a:srgbClr val="F59E0B"/>
+              <a:defRPr sz="2800" b="1">
+                <a:solidFill>
+                  <a:srgbClr val="0B6B4D"/>
                 </a:solidFill>
                 <a:latin typeface="Arial"/>
               </a:defRPr>
@@ -7556,17 +8803,17 @@
           <a:p>
             <a:pPr>
               <a:spcBef>
-                <a:spcPts val="400"/>
+                <a:spcPts val="600"/>
               </a:spcBef>
-              <a:defRPr sz="1300" b="1">
-                <a:solidFill>
-                  <a:srgbClr val="FFFFFF"/>
-                </a:solidFill>
-                <a:latin typeface="Arial"/>
-              </a:defRPr>
-            </a:pPr>
-            <a:r>
-              <a:t>ACCIÓN Y RECOMPENSA</a:t>
+              <a:defRPr sz="1400" b="1">
+                <a:solidFill>
+                  <a:srgbClr val="17352B"/>
+                </a:solidFill>
+                <a:latin typeface="Arial"/>
+              </a:defRPr>
+            </a:pPr>
+            <a:r>
+              <a:t>Acción y Recompensa</a:t>
             </a:r>
           </a:p>
           <a:p>
@@ -7574,40 +8821,38 @@
               <a:spcBef>
                 <a:spcPts val="800"/>
               </a:spcBef>
-              <a:defRPr sz="1100">
-                <a:solidFill>
-                  <a:srgbClr val="E2E8F0"/>
-                </a:solidFill>
-                <a:latin typeface="Arial"/>
-              </a:defRPr>
-            </a:pPr>
-            <a:r>
-              <a:t>El mapa geolocaliza el punto adecuado más cercano con navegación GPS en Google Maps. El usuario realiza la acción y suma Ecopuntos para canjear por beneficios.</a:t>
-            </a:r>
-          </a:p>
-        </p:txBody>
-      </p:sp>
-      <p:sp>
-        <p:nvSpPr>
-          <p:cNvPr id="9" name="Rounded Rectangle 8"/>
+              <a:defRPr sz="1150">
+                <a:solidFill>
+                  <a:srgbClr val="5C6B65"/>
+                </a:solidFill>
+                <a:latin typeface="Arial"/>
+              </a:defRPr>
+            </a:pPr>
+            <a:r>
+              <a:t>El mapa geolocaliza el punto adecuado con navegación GPS paso a paso en Google Maps, y el usuario suma Ecopuntos por su acción ambiental.</a:t>
+            </a:r>
+          </a:p>
+        </p:txBody>
+      </p:sp>
+      <p:sp>
+        <p:nvSpPr>
+          <p:cNvPr id="13" name="Rounded Rectangle 12"/>
           <p:cNvSpPr/>
           <p:nvPr/>
         </p:nvSpPr>
         <p:spPr>
           <a:xfrm>
-            <a:off x="731520" y="5257800"/>
-            <a:ext cx="10698480" cy="1051560"/>
+            <a:off x="685800" y="5715000"/>
+            <a:ext cx="10817352" cy="594360"/>
           </a:xfrm>
           <a:prstGeom prst="roundRect">
             <a:avLst/>
           </a:prstGeom>
           <a:solidFill>
-            <a:srgbClr val="1E293B"/>
+            <a:srgbClr val="DDF4E9"/>
           </a:solidFill>
-          <a:ln w="12700">
-            <a:solidFill>
-              <a:srgbClr val="06B6D4"/>
-            </a:solidFill>
+          <a:ln>
+            <a:noFill/>
           </a:ln>
         </p:spPr>
         <p:style>
@@ -7625,35 +8870,19 @@
           </a:fontRef>
         </p:style>
         <p:txBody>
-          <a:bodyPr rtlCol="0" anchor="ctr" wrap="square" lIns="274320" tIns="164592"/>
+          <a:bodyPr rtlCol="0" anchor="ctr" lIns="274320"/>
           <a:lstStyle/>
           <a:p>
             <a:pPr algn="ctr">
-              <a:defRPr sz="1100" b="1">
-                <a:solidFill>
-                  <a:srgbClr val="06B6D4"/>
-                </a:solidFill>
-                <a:latin typeface="Arial"/>
-              </a:defRPr>
-            </a:pPr>
-            <a:r>
-              <a:t>🎯 RESULTADO COMPROBADO:</a:t>
-            </a:r>
-          </a:p>
-          <a:p>
-            <a:pPr>
-              <a:spcBef>
-                <a:spcPts val="300"/>
-              </a:spcBef>
-              <a:defRPr sz="1100">
-                <a:solidFill>
-                  <a:srgbClr val="E2E8F0"/>
-                </a:solidFill>
-                <a:latin typeface="Arial"/>
-              </a:defRPr>
-            </a:pPr>
-            <a:r>
-              <a:t>Una decisión clara, un destino concreto y una acción sustentable que deja registro y trazabilidad tanto para el ciudadano como para el municipio.</a:t>
+              <a:defRPr sz="1200" b="1">
+                <a:solidFill>
+                  <a:srgbClr val="0B6B4D"/>
+                </a:solidFill>
+                <a:latin typeface="Arial"/>
+              </a:defRPr>
+            </a:pPr>
+            <a:r>
+              <a:t>Resultado: una decisión clara, un destino concreto y una acción que deja registro.</a:t>
             </a:r>
           </a:p>
         </p:txBody>
@@ -7691,7 +8920,7 @@
             <a:avLst/>
           </a:prstGeom>
           <a:solidFill>
-            <a:srgbClr val="0F172A"/>
+            <a:srgbClr val="FFFFFF"/>
           </a:solidFill>
           <a:ln>
             <a:noFill/>
@@ -7721,20 +8950,128 @@
       </p:sp>
       <p:sp>
         <p:nvSpPr>
-          <p:cNvPr id="3" name="Rounded Rectangle 2"/>
+          <p:cNvPr id="3" name="TextBox 2"/>
+          <p:cNvSpPr txBox="1"/>
+          <p:nvPr/>
+        </p:nvSpPr>
+        <p:spPr>
+          <a:xfrm>
+            <a:off x="685800" y="411480"/>
+            <a:ext cx="5029200" cy="320040"/>
+          </a:xfrm>
+          <a:prstGeom prst="rect">
+            <a:avLst/>
+          </a:prstGeom>
+          <a:noFill/>
+        </p:spPr>
+        <p:txBody>
+          <a:bodyPr wrap="square" lIns="0" tIns="0">
+            <a:spAutoFit/>
+          </a:bodyPr>
+          <a:lstStyle/>
+          <a:p>
+            <a:pPr>
+              <a:defRPr sz="1100" b="1">
+                <a:solidFill>
+                  <a:srgbClr val="0B6B4D"/>
+                </a:solidFill>
+                <a:latin typeface="Arial"/>
+              </a:defRPr>
+            </a:pPr>
+            <a:r>
+              <a:t>05 • EXPERIENCIA</a:t>
+            </a:r>
+          </a:p>
+        </p:txBody>
+      </p:sp>
+      <p:sp>
+        <p:nvSpPr>
+          <p:cNvPr id="4" name="TextBox 3"/>
+          <p:cNvSpPr txBox="1"/>
+          <p:nvPr/>
+        </p:nvSpPr>
+        <p:spPr>
+          <a:xfrm>
+            <a:off x="10789920" y="411480"/>
+            <a:ext cx="731520" cy="320040"/>
+          </a:xfrm>
+          <a:prstGeom prst="rect">
+            <a:avLst/>
+          </a:prstGeom>
+          <a:noFill/>
+        </p:spPr>
+        <p:txBody>
+          <a:bodyPr wrap="none" rIns="0" tIns="0">
+            <a:spAutoFit/>
+          </a:bodyPr>
+          <a:lstStyle/>
+          <a:p>
+            <a:pPr algn="r">
+              <a:defRPr sz="1100" b="1">
+                <a:solidFill>
+                  <a:srgbClr val="5C6B65"/>
+                </a:solidFill>
+                <a:latin typeface="Arial"/>
+              </a:defRPr>
+            </a:pPr>
+            <a:r>
+              <a:t>06</a:t>
+            </a:r>
+          </a:p>
+        </p:txBody>
+      </p:sp>
+      <p:sp>
+        <p:nvSpPr>
+          <p:cNvPr id="5" name="TextBox 4"/>
+          <p:cNvSpPr txBox="1"/>
+          <p:nvPr/>
+        </p:nvSpPr>
+        <p:spPr>
+          <a:xfrm>
+            <a:off x="685800" y="685800"/>
+            <a:ext cx="10789920" cy="685800"/>
+          </a:xfrm>
+          <a:prstGeom prst="rect">
+            <a:avLst/>
+          </a:prstGeom>
+          <a:noFill/>
+        </p:spPr>
+        <p:txBody>
+          <a:bodyPr wrap="square" lIns="0" tIns="0">
+            <a:spAutoFit/>
+          </a:bodyPr>
+          <a:lstStyle/>
+          <a:p>
+            <a:pPr>
+              <a:defRPr sz="2500" b="1">
+                <a:solidFill>
+                  <a:srgbClr val="17352B"/>
+                </a:solidFill>
+                <a:latin typeface="Arial"/>
+              </a:defRPr>
+            </a:pPr>
+            <a:r>
+              <a:t>Demo del Producto</a:t>
+            </a:r>
+          </a:p>
+        </p:txBody>
+      </p:sp>
+      <p:sp>
+        <p:nvSpPr>
+          <p:cNvPr id="6" name="Rectangle 5"/>
           <p:cNvSpPr/>
           <p:nvPr/>
         </p:nvSpPr>
         <p:spPr>
           <a:xfrm>
-            <a:off x="731520" y="384048"/>
-            <a:ext cx="3474720" cy="347472"/>
-          </a:xfrm>
-          <a:prstGeom prst="roundRect">
+            <a:off x="685800" y="1417320"/>
+            <a:ext cx="10817352" cy="13716"/>
+          </a:xfrm>
+          <a:prstGeom prst="rect">
             <a:avLst/>
           </a:prstGeom>
           <a:solidFill>
-            <a:srgbClr val="10B981"/>
+            <a:srgbClr val="CFE2D8"/>
           </a:solidFill>
           <a:ln>
             <a:noFill/>
@@ -7758,23 +9095,49 @@
           <a:bodyPr rtlCol="0" anchor="ctr"/>
           <a:lstStyle/>
           <a:p>
-            <a:pPr algn="ctr">
-              <a:defRPr sz="950" b="1">
-                <a:solidFill>
-                  <a:srgbClr val="FFFFFF"/>
-                </a:solidFill>
-                <a:latin typeface="Arial"/>
-              </a:defRPr>
-            </a:pPr>
-            <a:r>
-              <a:t>05. EXPERIENCIA VISUAL</a:t>
+            <a:pPr algn="ctr"/>
+          </a:p>
+        </p:txBody>
+      </p:sp>
+      <p:sp>
+        <p:nvSpPr>
+          <p:cNvPr id="7" name="TextBox 6"/>
+          <p:cNvSpPr txBox="1"/>
+          <p:nvPr/>
+        </p:nvSpPr>
+        <p:spPr>
+          <a:xfrm>
+            <a:off x="685800" y="6446520"/>
+            <a:ext cx="5486400" cy="274320"/>
+          </a:xfrm>
+          <a:prstGeom prst="rect">
+            <a:avLst/>
+          </a:prstGeom>
+          <a:noFill/>
+        </p:spPr>
+        <p:txBody>
+          <a:bodyPr wrap="none" lIns="0" bIns="0">
+            <a:spAutoFit/>
+          </a:bodyPr>
+          <a:lstStyle/>
+          <a:p>
+            <a:pPr>
+              <a:defRPr sz="950">
+                <a:solidFill>
+                  <a:srgbClr val="5C6B65"/>
+                </a:solidFill>
+                <a:latin typeface="Arial"/>
+              </a:defRPr>
+            </a:pPr>
+            <a:r>
+              <a:t>EcoMapa  •  CivicLoop Technologies S.A.</a:t>
             </a:r>
           </a:p>
         </p:txBody>
       </p:sp>
       <p:pic>
         <p:nvPicPr>
-          <p:cNvPr id="4" name="Picture 3" descr="civicloop_logo_rounded.png"/>
+          <p:cNvPr id="8" name="Picture 7" descr="civicloop_logo_rounded.png"/>
           <p:cNvPicPr>
             <a:picLocks noChangeAspect="1"/>
           </p:cNvPicPr>
@@ -7788,8 +9151,8 @@
         </p:blipFill>
         <p:spPr>
           <a:xfrm>
-            <a:off x="11064240" y="347472"/>
-            <a:ext cx="594360" cy="594360"/>
+            <a:off x="11064240" y="6309360"/>
+            <a:ext cx="438912" cy="438912"/>
           </a:xfrm>
           <a:prstGeom prst="rect">
             <a:avLst/>
@@ -7798,14 +9161,14 @@
       </p:pic>
       <p:sp>
         <p:nvSpPr>
-          <p:cNvPr id="5" name="TextBox 4"/>
+          <p:cNvPr id="9" name="TextBox 8"/>
           <p:cNvSpPr txBox="1"/>
           <p:nvPr/>
         </p:nvSpPr>
         <p:spPr>
           <a:xfrm>
-            <a:off x="731520" y="749808"/>
-            <a:ext cx="10515600" cy="777240"/>
+            <a:off x="685800" y="1645920"/>
+            <a:ext cx="10789920" cy="548640"/>
           </a:xfrm>
           <a:prstGeom prst="rect">
             <a:avLst/>
@@ -7813,61 +9176,45 @@
           <a:noFill/>
         </p:spPr>
         <p:txBody>
-          <a:bodyPr wrap="square">
+          <a:bodyPr wrap="square" lIns="0">
             <a:spAutoFit/>
           </a:bodyPr>
           <a:lstStyle/>
           <a:p>
             <a:pPr>
-              <a:defRPr sz="2500" b="1">
-                <a:solidFill>
-                  <a:srgbClr val="FFFFFF"/>
-                </a:solidFill>
-                <a:latin typeface="Arial"/>
-              </a:defRPr>
-            </a:pPr>
-            <a:r>
-              <a:t>Demo del Producto e Interfaces Principales</a:t>
-            </a:r>
-          </a:p>
-          <a:p>
-            <a:pPr>
-              <a:spcBef>
-                <a:spcPts val="300"/>
-              </a:spcBef>
-              <a:defRPr sz="1300">
-                <a:solidFill>
-                  <a:srgbClr val="94A3B8"/>
-                </a:solidFill>
-                <a:latin typeface="Arial"/>
-              </a:defRPr>
-            </a:pPr>
-            <a:r>
-              <a:t>Herramientas ecológicas inteligentes integradas en una experiencia moderna y accesible</a:t>
-            </a:r>
-          </a:p>
-        </p:txBody>
-      </p:sp>
-      <p:sp>
-        <p:nvSpPr>
-          <p:cNvPr id="6" name="Rounded Rectangle 5"/>
+              <a:defRPr sz="1500" b="1">
+                <a:solidFill>
+                  <a:srgbClr val="17352B"/>
+                </a:solidFill>
+                <a:latin typeface="Arial"/>
+              </a:defRPr>
+            </a:pPr>
+            <a:r>
+              <a:t>La plataforma permite al usuario interactuar fácilmente con herramientas ecológicas inteligentes desde una interfaz moderna y accesible:</a:t>
+            </a:r>
+          </a:p>
+        </p:txBody>
+      </p:sp>
+      <p:sp>
+        <p:nvSpPr>
+          <p:cNvPr id="10" name="Rounded Rectangle 9"/>
           <p:cNvSpPr/>
           <p:nvPr/>
         </p:nvSpPr>
         <p:spPr>
           <a:xfrm>
-            <a:off x="731520" y="1783080"/>
-            <a:ext cx="5486400" cy="1051560"/>
+            <a:off x="685800" y="2423160"/>
+            <a:ext cx="5257800" cy="1508760"/>
           </a:xfrm>
           <a:prstGeom prst="roundRect">
             <a:avLst/>
           </a:prstGeom>
           <a:solidFill>
-            <a:srgbClr val="1E293B"/>
+            <a:srgbClr val="F8FAF8"/>
           </a:solidFill>
-          <a:ln w="19050">
+          <a:ln w="12700">
             <a:solidFill>
-              <a:srgbClr val="10B981"/>
+              <a:srgbClr val="CFE2D8"/>
             </a:solidFill>
           </a:ln>
         </p:spPr>
@@ -7886,59 +9233,59 @@
           </a:fontRef>
         </p:style>
         <p:txBody>
-          <a:bodyPr rtlCol="0" anchor="ctr" wrap="square" lIns="182880" rIns="182880" tIns="109728"/>
+          <a:bodyPr rtlCol="0" anchor="ctr" wrap="square" lIns="274320" rIns="274320" tIns="182880"/>
           <a:lstStyle/>
           <a:p>
             <a:pPr algn="ctr">
-              <a:defRPr sz="1150" b="1">
-                <a:solidFill>
-                  <a:srgbClr val="10B981"/>
-                </a:solidFill>
-                <a:latin typeface="Arial"/>
-              </a:defRPr>
-            </a:pPr>
-            <a:r>
-              <a:t>CHAT Y CÁMARA IA</a:t>
+              <a:defRPr sz="1350" b="1">
+                <a:solidFill>
+                  <a:srgbClr val="0B6B4D"/>
+                </a:solidFill>
+                <a:latin typeface="Arial"/>
+              </a:defRPr>
+            </a:pPr>
+            <a:r>
+              <a:t>•  Chat y Visión IA</a:t>
             </a:r>
           </a:p>
           <a:p>
             <a:pPr>
               <a:spcBef>
-                <a:spcPts val="300"/>
+                <a:spcPts val="400"/>
               </a:spcBef>
-              <a:defRPr sz="1000">
-                <a:solidFill>
-                  <a:srgbClr val="E2E8F0"/>
-                </a:solidFill>
-                <a:latin typeface="Arial"/>
-              </a:defRPr>
-            </a:pPr>
-            <a:r>
-              <a:t>Clasificación inteligente de residuos mediante lenguaje natural y escaneo visual por cámara.</a:t>
-            </a:r>
-          </a:p>
-        </p:txBody>
-      </p:sp>
-      <p:sp>
-        <p:nvSpPr>
-          <p:cNvPr id="7" name="Rounded Rectangle 6"/>
+              <a:defRPr sz="1100">
+                <a:solidFill>
+                  <a:srgbClr val="5C6B65"/>
+                </a:solidFill>
+                <a:latin typeface="Arial"/>
+              </a:defRPr>
+            </a:pPr>
+            <a:r>
+              <a:t>Clasificación inteligente de residuos mediante lenguaje natural y análisis fotográfico en tiempo real.</a:t>
+            </a:r>
+          </a:p>
+        </p:txBody>
+      </p:sp>
+      <p:sp>
+        <p:nvSpPr>
+          <p:cNvPr id="11" name="Rounded Rectangle 10"/>
           <p:cNvSpPr/>
           <p:nvPr/>
         </p:nvSpPr>
         <p:spPr>
           <a:xfrm>
-            <a:off x="731520" y="2926080"/>
-            <a:ext cx="5486400" cy="1051560"/>
+            <a:off x="6126480" y="2423160"/>
+            <a:ext cx="5257800" cy="1508760"/>
           </a:xfrm>
           <a:prstGeom prst="roundRect">
             <a:avLst/>
           </a:prstGeom>
           <a:solidFill>
-            <a:srgbClr val="1E293B"/>
+            <a:srgbClr val="F8FAF8"/>
           </a:solidFill>
-          <a:ln w="19050">
+          <a:ln w="12700">
             <a:solidFill>
-              <a:srgbClr val="06B6D4"/>
+              <a:srgbClr val="CFE2D8"/>
             </a:solidFill>
           </a:ln>
         </p:spPr>
@@ -7957,59 +9304,59 @@
           </a:fontRef>
         </p:style>
         <p:txBody>
-          <a:bodyPr rtlCol="0" anchor="ctr" wrap="square" lIns="182880" rIns="182880" tIns="109728"/>
+          <a:bodyPr rtlCol="0" anchor="ctr" wrap="square" lIns="274320" rIns="274320" tIns="182880"/>
           <a:lstStyle/>
           <a:p>
             <a:pPr algn="ctr">
-              <a:defRPr sz="1150" b="1">
-                <a:solidFill>
-                  <a:srgbClr val="06B6D4"/>
-                </a:solidFill>
-                <a:latin typeface="Arial"/>
-              </a:defRPr>
-            </a:pPr>
-            <a:r>
-              <a:t>MAPA INTERACTIVO</a:t>
+              <a:defRPr sz="1350" b="1">
+                <a:solidFill>
+                  <a:srgbClr val="0B6B4D"/>
+                </a:solidFill>
+                <a:latin typeface="Arial"/>
+              </a:defRPr>
+            </a:pPr>
+            <a:r>
+              <a:t>•  Mapa interactivo</a:t>
             </a:r>
           </a:p>
           <a:p>
             <a:pPr>
               <a:spcBef>
-                <a:spcPts val="300"/>
+                <a:spcPts val="400"/>
               </a:spcBef>
-              <a:defRPr sz="1000">
-                <a:solidFill>
-                  <a:srgbClr val="E2E8F0"/>
-                </a:solidFill>
-                <a:latin typeface="Arial"/>
-              </a:defRPr>
-            </a:pPr>
-            <a:r>
-              <a:t>Ubicación de puntos ecológicos cercanos en tiempo real con badges y navegación en Google Maps.</a:t>
-            </a:r>
-          </a:p>
-        </p:txBody>
-      </p:sp>
-      <p:sp>
-        <p:nvSpPr>
-          <p:cNvPr id="8" name="Rounded Rectangle 7"/>
+              <a:defRPr sz="1100">
+                <a:solidFill>
+                  <a:srgbClr val="5C6B65"/>
+                </a:solidFill>
+                <a:latin typeface="Arial"/>
+              </a:defRPr>
+            </a:pPr>
+            <a:r>
+              <a:t>Ubicación de puntos ecológicos cercanos en tiempo real con badges de categoría y navegación en Google Maps.</a:t>
+            </a:r>
+          </a:p>
+        </p:txBody>
+      </p:sp>
+      <p:sp>
+        <p:nvSpPr>
+          <p:cNvPr id="12" name="Rounded Rectangle 11"/>
           <p:cNvSpPr/>
           <p:nvPr/>
         </p:nvSpPr>
         <p:spPr>
           <a:xfrm>
-            <a:off x="731520" y="4069080"/>
-            <a:ext cx="5486400" cy="1051560"/>
+            <a:off x="685800" y="4114800"/>
+            <a:ext cx="5257800" cy="1508760"/>
           </a:xfrm>
           <a:prstGeom prst="roundRect">
             <a:avLst/>
           </a:prstGeom>
           <a:solidFill>
-            <a:srgbClr val="1E293B"/>
+            <a:srgbClr val="F8FAF8"/>
           </a:solidFill>
-          <a:ln w="19050">
+          <a:ln w="12700">
             <a:solidFill>
-              <a:srgbClr val="F59E0B"/>
+              <a:srgbClr val="CFE2D8"/>
             </a:solidFill>
           </a:ln>
         </p:spPr>
@@ -8028,59 +9375,59 @@
           </a:fontRef>
         </p:style>
         <p:txBody>
-          <a:bodyPr rtlCol="0" anchor="ctr" wrap="square" lIns="182880" rIns="182880" tIns="109728"/>
+          <a:bodyPr rtlCol="0" anchor="ctr" wrap="square" lIns="274320" rIns="274320" tIns="182880"/>
           <a:lstStyle/>
           <a:p>
             <a:pPr algn="ctr">
-              <a:defRPr sz="1150" b="1">
-                <a:solidFill>
-                  <a:srgbClr val="F59E0B"/>
-                </a:solidFill>
-                <a:latin typeface="Arial"/>
-              </a:defRPr>
-            </a:pPr>
-            <a:r>
-              <a:t>SISTEMA DE GAMIFICACIÓN</a:t>
+              <a:defRPr sz="1350" b="1">
+                <a:solidFill>
+                  <a:srgbClr val="F2A65A"/>
+                </a:solidFill>
+                <a:latin typeface="Arial"/>
+              </a:defRPr>
+            </a:pPr>
+            <a:r>
+              <a:t>•  Gamificación</a:t>
             </a:r>
           </a:p>
           <a:p>
             <a:pPr>
               <a:spcBef>
-                <a:spcPts val="300"/>
+                <a:spcPts val="400"/>
               </a:spcBef>
-              <a:defRPr sz="1000">
-                <a:solidFill>
-                  <a:srgbClr val="E2E8F0"/>
-                </a:solidFill>
-                <a:latin typeface="Arial"/>
-              </a:defRPr>
-            </a:pPr>
-            <a:r>
-              <a:t>Recompensas e insignias para incentivar el reciclaje continuo y canje de cupones locales.</a:t>
-            </a:r>
-          </a:p>
-        </p:txBody>
-      </p:sp>
-      <p:sp>
-        <p:nvSpPr>
-          <p:cNvPr id="9" name="Rounded Rectangle 8"/>
+              <a:defRPr sz="1100">
+                <a:solidFill>
+                  <a:srgbClr val="5C6B65"/>
+                </a:solidFill>
+                <a:latin typeface="Arial"/>
+              </a:defRPr>
+            </a:pPr>
+            <a:r>
+              <a:t>Sistema de recompensas, insignias y catálogo de cupones para incentivar y sostener el reciclaje continuo.</a:t>
+            </a:r>
+          </a:p>
+        </p:txBody>
+      </p:sp>
+      <p:sp>
+        <p:nvSpPr>
+          <p:cNvPr id="13" name="Rounded Rectangle 12"/>
           <p:cNvSpPr/>
           <p:nvPr/>
         </p:nvSpPr>
         <p:spPr>
           <a:xfrm>
-            <a:off x="731520" y="5212080"/>
-            <a:ext cx="5486400" cy="1051560"/>
+            <a:off x="6126480" y="4114800"/>
+            <a:ext cx="5257800" cy="1508760"/>
           </a:xfrm>
           <a:prstGeom prst="roundRect">
             <a:avLst/>
           </a:prstGeom>
           <a:solidFill>
-            <a:srgbClr val="1E293B"/>
+            <a:srgbClr val="F8FAF8"/>
           </a:solidFill>
-          <a:ln w="19050">
+          <a:ln w="12700">
             <a:solidFill>
-              <a:srgbClr val="8B5CF6"/>
+              <a:srgbClr val="CFE2D8"/>
             </a:solidFill>
           </a:ln>
         </p:spPr>
@@ -8099,87 +9446,92 @@
           </a:fontRef>
         </p:style>
         <p:txBody>
-          <a:bodyPr rtlCol="0" anchor="ctr" wrap="square" lIns="182880" rIns="182880" tIns="109728"/>
+          <a:bodyPr rtlCol="0" anchor="ctr" wrap="square" lIns="274320" rIns="274320" tIns="182880"/>
+          <a:lstStyle/>
+          <a:p>
+            <a:pPr algn="ctr">
+              <a:defRPr sz="1350" b="1">
+                <a:solidFill>
+                  <a:srgbClr val="5F8DD3"/>
+                </a:solidFill>
+                <a:latin typeface="Arial"/>
+              </a:defRPr>
+            </a:pPr>
+            <a:r>
+              <a:t>•  Panel administrativo</a:t>
+            </a:r>
+          </a:p>
+          <a:p>
+            <a:pPr>
+              <a:spcBef>
+                <a:spcPts val="400"/>
+              </a:spcBef>
+              <a:defRPr sz="1100">
+                <a:solidFill>
+                  <a:srgbClr val="5C6B65"/>
+                </a:solidFill>
+                <a:latin typeface="Arial"/>
+              </a:defRPr>
+            </a:pPr>
+            <a:r>
+              <a:t>Gestión centralizada de puntos limpios, coordinación de retiros domiciliarios y analítica para municipios.</a:t>
+            </a:r>
+          </a:p>
+        </p:txBody>
+      </p:sp>
+      <p:sp>
+        <p:nvSpPr>
+          <p:cNvPr id="14" name="Rounded Rectangle 13"/>
+          <p:cNvSpPr/>
+          <p:nvPr/>
+        </p:nvSpPr>
+        <p:spPr>
+          <a:xfrm>
+            <a:off x="685800" y="5806440"/>
+            <a:ext cx="10817352" cy="594360"/>
+          </a:xfrm>
+          <a:prstGeom prst="roundRect">
+            <a:avLst/>
+          </a:prstGeom>
+          <a:solidFill>
+            <a:srgbClr val="DDF4E9"/>
+          </a:solidFill>
+          <a:ln>
+            <a:noFill/>
+          </a:ln>
+        </p:spPr>
+        <p:style>
+          <a:lnRef idx="1">
+            <a:schemeClr val="accent1"/>
+          </a:lnRef>
+          <a:fillRef idx="3">
+            <a:schemeClr val="accent1"/>
+          </a:fillRef>
+          <a:effectRef idx="2">
+            <a:schemeClr val="accent1"/>
+          </a:effectRef>
+          <a:fontRef idx="minor">
+            <a:schemeClr val="lt1"/>
+          </a:fontRef>
+        </p:style>
+        <p:txBody>
+          <a:bodyPr rtlCol="0" anchor="ctr" lIns="274320"/>
           <a:lstStyle/>
           <a:p>
             <a:pPr algn="ctr">
               <a:defRPr sz="1150" b="1">
                 <a:solidFill>
-                  <a:srgbClr val="8B5CF6"/>
-                </a:solidFill>
-                <a:latin typeface="Arial"/>
-              </a:defRPr>
-            </a:pPr>
-            <a:r>
-              <a:t>PANEL ADMINISTRATIVO</a:t>
-            </a:r>
-          </a:p>
-          <a:p>
-            <a:pPr>
-              <a:spcBef>
-                <a:spcPts val="300"/>
-              </a:spcBef>
-              <a:defRPr sz="1000">
-                <a:solidFill>
-                  <a:srgbClr val="E2E8F0"/>
-                </a:solidFill>
-                <a:latin typeface="Arial"/>
-              </a:defRPr>
-            </a:pPr>
-            <a:r>
-              <a:t>Gestión centralizada de puntos limpios, coordinación de retiros y analítica para municipios.</a:t>
-            </a:r>
-          </a:p>
-        </p:txBody>
-      </p:sp>
-      <p:pic>
-        <p:nvPicPr>
-          <p:cNvPr id="10" name="Picture 9" descr="app_scan_result.png"/>
-          <p:cNvPicPr>
-            <a:picLocks noChangeAspect="1"/>
-          </p:cNvPicPr>
-          <p:nvPr/>
-        </p:nvPicPr>
-        <p:blipFill>
-          <a:blip r:embed="rId3"/>
-          <a:stretch>
-            <a:fillRect/>
-          </a:stretch>
-        </p:blipFill>
-        <p:spPr>
-          <a:xfrm>
-            <a:off x="6583680" y="1783080"/>
-            <a:ext cx="2194560" cy="4480560"/>
-          </a:xfrm>
-          <a:prstGeom prst="rect">
-            <a:avLst/>
-          </a:prstGeom>
-        </p:spPr>
-      </p:pic>
-      <p:pic>
-        <p:nvPicPr>
-          <p:cNvPr id="11" name="Picture 10" descr="app_map_screen.png"/>
-          <p:cNvPicPr>
-            <a:picLocks noChangeAspect="1"/>
-          </p:cNvPicPr>
-          <p:nvPr/>
-        </p:nvPicPr>
-        <p:blipFill>
-          <a:blip r:embed="rId4"/>
-          <a:stretch>
-            <a:fillRect/>
-          </a:stretch>
-        </p:blipFill>
-        <p:spPr>
-          <a:xfrm>
-            <a:off x="8961120" y="1783080"/>
-            <a:ext cx="2468880" cy="4480560"/>
-          </a:xfrm>
-          <a:prstGeom prst="rect">
-            <a:avLst/>
-          </a:prstGeom>
-        </p:spPr>
-      </p:pic>
+                  <a:srgbClr val="0B6B4D"/>
+                </a:solidFill>
+                <a:latin typeface="Arial"/>
+              </a:defRPr>
+            </a:pPr>
+            <a:r>
+              <a:t>📱 Experiencia nativa Android (Jetpack Compose) diseñada para operar de forma ágil y con bajo consumo de batería.</a:t>
+            </a:r>
+          </a:p>
+        </p:txBody>
+      </p:sp>
     </p:spTree>
   </p:cSld>
   <p:clrMapOvr>
@@ -8213,7 +9565,7 @@
             <a:avLst/>
           </a:prstGeom>
           <a:solidFill>
-            <a:srgbClr val="0F172A"/>
+            <a:srgbClr val="FFFFFF"/>
           </a:solidFill>
           <a:ln>
             <a:noFill/>
@@ -8243,20 +9595,128 @@
       </p:sp>
       <p:sp>
         <p:nvSpPr>
-          <p:cNvPr id="3" name="Rounded Rectangle 2"/>
+          <p:cNvPr id="3" name="TextBox 2"/>
+          <p:cNvSpPr txBox="1"/>
+          <p:nvPr/>
+        </p:nvSpPr>
+        <p:spPr>
+          <a:xfrm>
+            <a:off x="685800" y="411480"/>
+            <a:ext cx="5029200" cy="320040"/>
+          </a:xfrm>
+          <a:prstGeom prst="rect">
+            <a:avLst/>
+          </a:prstGeom>
+          <a:noFill/>
+        </p:spPr>
+        <p:txBody>
+          <a:bodyPr wrap="square" lIns="0" tIns="0">
+            <a:spAutoFit/>
+          </a:bodyPr>
+          <a:lstStyle/>
+          <a:p>
+            <a:pPr>
+              <a:defRPr sz="1100" b="1">
+                <a:solidFill>
+                  <a:srgbClr val="0B6B4D"/>
+                </a:solidFill>
+                <a:latin typeface="Arial"/>
+              </a:defRPr>
+            </a:pPr>
+            <a:r>
+              <a:t>06 • FUNCIONALIDADES</a:t>
+            </a:r>
+          </a:p>
+        </p:txBody>
+      </p:sp>
+      <p:sp>
+        <p:nvSpPr>
+          <p:cNvPr id="4" name="TextBox 3"/>
+          <p:cNvSpPr txBox="1"/>
+          <p:nvPr/>
+        </p:nvSpPr>
+        <p:spPr>
+          <a:xfrm>
+            <a:off x="10789920" y="411480"/>
+            <a:ext cx="731520" cy="320040"/>
+          </a:xfrm>
+          <a:prstGeom prst="rect">
+            <a:avLst/>
+          </a:prstGeom>
+          <a:noFill/>
+        </p:spPr>
+        <p:txBody>
+          <a:bodyPr wrap="none" rIns="0" tIns="0">
+            <a:spAutoFit/>
+          </a:bodyPr>
+          <a:lstStyle/>
+          <a:p>
+            <a:pPr algn="r">
+              <a:defRPr sz="1100" b="1">
+                <a:solidFill>
+                  <a:srgbClr val="5C6B65"/>
+                </a:solidFill>
+                <a:latin typeface="Arial"/>
+              </a:defRPr>
+            </a:pPr>
+            <a:r>
+              <a:t>07</a:t>
+            </a:r>
+          </a:p>
+        </p:txBody>
+      </p:sp>
+      <p:sp>
+        <p:nvSpPr>
+          <p:cNvPr id="5" name="TextBox 4"/>
+          <p:cNvSpPr txBox="1"/>
+          <p:nvPr/>
+        </p:nvSpPr>
+        <p:spPr>
+          <a:xfrm>
+            <a:off x="685800" y="685800"/>
+            <a:ext cx="10789920" cy="685800"/>
+          </a:xfrm>
+          <a:prstGeom prst="rect">
+            <a:avLst/>
+          </a:prstGeom>
+          <a:noFill/>
+        </p:spPr>
+        <p:txBody>
+          <a:bodyPr wrap="square" lIns="0" tIns="0">
+            <a:spAutoFit/>
+          </a:bodyPr>
+          <a:lstStyle/>
+          <a:p>
+            <a:pPr>
+              <a:defRPr sz="2500" b="1">
+                <a:solidFill>
+                  <a:srgbClr val="17352B"/>
+                </a:solidFill>
+                <a:latin typeface="Arial"/>
+              </a:defRPr>
+            </a:pPr>
+            <a:r>
+              <a:t>Qué ofrece la plataforma</a:t>
+            </a:r>
+          </a:p>
+        </p:txBody>
+      </p:sp>
+      <p:sp>
+        <p:nvSpPr>
+          <p:cNvPr id="6" name="Rectangle 5"/>
           <p:cNvSpPr/>
           <p:nvPr/>
         </p:nvSpPr>
         <p:spPr>
           <a:xfrm>
-            <a:off x="731520" y="384048"/>
-            <a:ext cx="3474720" cy="347472"/>
-          </a:xfrm>
-          <a:prstGeom prst="roundRect">
+            <a:off x="685800" y="1417320"/>
+            <a:ext cx="10817352" cy="13716"/>
+          </a:xfrm>
+          <a:prstGeom prst="rect">
             <a:avLst/>
           </a:prstGeom>
           <a:solidFill>
-            <a:srgbClr val="F59E0B"/>
+            <a:srgbClr val="CFE2D8"/>
           </a:solidFill>
           <a:ln>
             <a:noFill/>
@@ -8280,23 +9740,49 @@
           <a:bodyPr rtlCol="0" anchor="ctr"/>
           <a:lstStyle/>
           <a:p>
-            <a:pPr algn="ctr">
-              <a:defRPr sz="950" b="1">
-                <a:solidFill>
-                  <a:srgbClr val="FFFFFF"/>
-                </a:solidFill>
-                <a:latin typeface="Arial"/>
-              </a:defRPr>
-            </a:pPr>
-            <a:r>
-              <a:t>06. CAPACIDADES</a:t>
+            <a:pPr algn="ctr"/>
+          </a:p>
+        </p:txBody>
+      </p:sp>
+      <p:sp>
+        <p:nvSpPr>
+          <p:cNvPr id="7" name="TextBox 6"/>
+          <p:cNvSpPr txBox="1"/>
+          <p:nvPr/>
+        </p:nvSpPr>
+        <p:spPr>
+          <a:xfrm>
+            <a:off x="685800" y="6446520"/>
+            <a:ext cx="5486400" cy="274320"/>
+          </a:xfrm>
+          <a:prstGeom prst="rect">
+            <a:avLst/>
+          </a:prstGeom>
+          <a:noFill/>
+        </p:spPr>
+        <p:txBody>
+          <a:bodyPr wrap="none" lIns="0" bIns="0">
+            <a:spAutoFit/>
+          </a:bodyPr>
+          <a:lstStyle/>
+          <a:p>
+            <a:pPr>
+              <a:defRPr sz="950">
+                <a:solidFill>
+                  <a:srgbClr val="5C6B65"/>
+                </a:solidFill>
+                <a:latin typeface="Arial"/>
+              </a:defRPr>
+            </a:pPr>
+            <a:r>
+              <a:t>EcoMapa  •  CivicLoop Technologies S.A.</a:t>
             </a:r>
           </a:p>
         </p:txBody>
       </p:sp>
       <p:pic>
         <p:nvPicPr>
-          <p:cNvPr id="4" name="Picture 3" descr="civicloop_logo_rounded.png"/>
+          <p:cNvPr id="8" name="Picture 7" descr="civicloop_logo_rounded.png"/>
           <p:cNvPicPr>
             <a:picLocks noChangeAspect="1"/>
           </p:cNvPicPr>
@@ -8310,8 +9796,8 @@
         </p:blipFill>
         <p:spPr>
           <a:xfrm>
-            <a:off x="11064240" y="347472"/>
-            <a:ext cx="594360" cy="594360"/>
+            <a:off x="11064240" y="6309360"/>
+            <a:ext cx="438912" cy="438912"/>
           </a:xfrm>
           <a:prstGeom prst="rect">
             <a:avLst/>
@@ -8320,14 +9806,14 @@
       </p:pic>
       <p:sp>
         <p:nvSpPr>
-          <p:cNvPr id="5" name="TextBox 4"/>
+          <p:cNvPr id="9" name="TextBox 8"/>
           <p:cNvSpPr txBox="1"/>
           <p:nvPr/>
         </p:nvSpPr>
         <p:spPr>
           <a:xfrm>
-            <a:off x="731520" y="749808"/>
-            <a:ext cx="10515600" cy="777240"/>
+            <a:off x="685800" y="1645920"/>
+            <a:ext cx="10789920" cy="411480"/>
           </a:xfrm>
           <a:prstGeom prst="rect">
             <a:avLst/>
@@ -8335,61 +9821,45 @@
           <a:noFill/>
         </p:spPr>
         <p:txBody>
-          <a:bodyPr wrap="square">
+          <a:bodyPr wrap="square" lIns="0">
             <a:spAutoFit/>
           </a:bodyPr>
           <a:lstStyle/>
           <a:p>
             <a:pPr>
-              <a:defRPr sz="2500" b="1">
-                <a:solidFill>
-                  <a:srgbClr val="FFFFFF"/>
-                </a:solidFill>
-                <a:latin typeface="Arial"/>
-              </a:defRPr>
-            </a:pPr>
-            <a:r>
-              <a:t>Funcionalidades Principales de la Plataforma</a:t>
-            </a:r>
-          </a:p>
-          <a:p>
-            <a:pPr>
-              <a:spcBef>
-                <a:spcPts val="300"/>
-              </a:spcBef>
-              <a:defRPr sz="1300">
-                <a:solidFill>
-                  <a:srgbClr val="94A3B8"/>
-                </a:solidFill>
-                <a:latin typeface="Arial"/>
-              </a:defRPr>
-            </a:pPr>
-            <a:r>
-              <a:t>Las seis herramientas clave que articulan el ecosistema EcoMapa</a:t>
-            </a:r>
-          </a:p>
-        </p:txBody>
-      </p:sp>
-      <p:sp>
-        <p:nvSpPr>
-          <p:cNvPr id="6" name="Rounded Rectangle 5"/>
+              <a:defRPr sz="1500" b="1">
+                <a:solidFill>
+                  <a:srgbClr val="17352B"/>
+                </a:solidFill>
+                <a:latin typeface="Arial"/>
+              </a:defRPr>
+            </a:pPr>
+            <a:r>
+              <a:t>Las seis herramientas clave integradas en el ecosistema EcoMapa:</a:t>
+            </a:r>
+          </a:p>
+        </p:txBody>
+      </p:sp>
+      <p:sp>
+        <p:nvSpPr>
+          <p:cNvPr id="10" name="Rounded Rectangle 9"/>
           <p:cNvSpPr/>
           <p:nvPr/>
         </p:nvSpPr>
         <p:spPr>
           <a:xfrm>
-            <a:off x="731520" y="1783080"/>
-            <a:ext cx="5257800" cy="1371600"/>
+            <a:off x="685800" y="2240280"/>
+            <a:ext cx="5257800" cy="1234440"/>
           </a:xfrm>
           <a:prstGeom prst="roundRect">
             <a:avLst/>
           </a:prstGeom>
           <a:solidFill>
-            <a:srgbClr val="1E293B"/>
+            <a:srgbClr val="F8FAF8"/>
           </a:solidFill>
-          <a:ln w="19050">
+          <a:ln w="12700">
             <a:solidFill>
-              <a:srgbClr val="10B981"/>
+              <a:srgbClr val="CFE2D8"/>
             </a:solidFill>
           </a:ln>
         </p:spPr>
@@ -8408,60 +9878,32 @@
           </a:fontRef>
         </p:style>
         <p:txBody>
-          <a:bodyPr rtlCol="0" anchor="ctr" wrap="square" lIns="228600" rIns="228600" tIns="164592"/>
-          <a:lstStyle/>
-          <a:p>
-            <a:pPr algn="ctr">
-              <a:defRPr sz="1200" b="1">
-                <a:solidFill>
-                  <a:srgbClr val="10B981"/>
-                </a:solidFill>
-                <a:latin typeface="Arial"/>
-              </a:defRPr>
-            </a:pPr>
-            <a:r>
-              <a:t>1. ASISTENTE IA</a:t>
-            </a:r>
-          </a:p>
-          <a:p>
-            <a:pPr>
-              <a:spcBef>
-                <a:spcPts val="400"/>
-              </a:spcBef>
-              <a:defRPr sz="1050">
-                <a:solidFill>
-                  <a:srgbClr val="E2E8F0"/>
-                </a:solidFill>
-                <a:latin typeface="Arial"/>
-              </a:defRPr>
-            </a:pPr>
-            <a:r>
-              <a:t>Clasifica residuos a partir de una consulta escrita o fotográfica y entrega una recomendación clara y comprensible.</a:t>
-            </a:r>
-          </a:p>
-        </p:txBody>
-      </p:sp>
-      <p:sp>
-        <p:nvSpPr>
-          <p:cNvPr id="7" name="Rounded Rectangle 6"/>
+          <a:bodyPr rtlCol="0" anchor="ctr"/>
+          <a:lstStyle/>
+          <a:p>
+            <a:pPr algn="ctr"/>
+          </a:p>
+        </p:txBody>
+      </p:sp>
+      <p:sp>
+        <p:nvSpPr>
+          <p:cNvPr id="11" name="Rounded Rectangle 10"/>
           <p:cNvSpPr/>
           <p:nvPr/>
         </p:nvSpPr>
         <p:spPr>
           <a:xfrm>
-            <a:off x="6172200" y="1783080"/>
-            <a:ext cx="5257800" cy="1371600"/>
+            <a:off x="868680" y="2404872"/>
+            <a:ext cx="777240" cy="256032"/>
           </a:xfrm>
           <a:prstGeom prst="roundRect">
             <a:avLst/>
           </a:prstGeom>
           <a:solidFill>
-            <a:srgbClr val="1E293B"/>
+            <a:srgbClr val="DDF4E9"/>
           </a:solidFill>
-          <a:ln w="19050">
-            <a:solidFill>
-              <a:srgbClr val="06B6D4"/>
-            </a:solidFill>
+          <a:ln>
+            <a:noFill/>
           </a:ln>
         </p:spPr>
         <p:style>
@@ -8479,59 +9921,95 @@
           </a:fontRef>
         </p:style>
         <p:txBody>
-          <a:bodyPr rtlCol="0" anchor="ctr" wrap="square" lIns="228600" rIns="228600" tIns="164592"/>
+          <a:bodyPr rtlCol="0" anchor="ctr"/>
           <a:lstStyle/>
           <a:p>
             <a:pPr algn="ctr">
+              <a:defRPr sz="850" b="1">
+                <a:solidFill>
+                  <a:srgbClr val="0B6B4D"/>
+                </a:solidFill>
+                <a:latin typeface="Arial"/>
+              </a:defRPr>
+            </a:pPr>
+            <a:r>
+              <a:t>IA</a:t>
+            </a:r>
+          </a:p>
+        </p:txBody>
+      </p:sp>
+      <p:sp>
+        <p:nvSpPr>
+          <p:cNvPr id="12" name="TextBox 11"/>
+          <p:cNvSpPr txBox="1"/>
+          <p:nvPr/>
+        </p:nvSpPr>
+        <p:spPr>
+          <a:xfrm>
+            <a:off x="1737360" y="2350008"/>
+            <a:ext cx="4023360" cy="1051560"/>
+          </a:xfrm>
+          <a:prstGeom prst="rect">
+            <a:avLst/>
+          </a:prstGeom>
+          <a:noFill/>
+        </p:spPr>
+        <p:txBody>
+          <a:bodyPr wrap="square" lIns="0" tIns="0">
+            <a:spAutoFit/>
+          </a:bodyPr>
+          <a:lstStyle/>
+          <a:p>
+            <a:pPr>
               <a:defRPr sz="1200" b="1">
                 <a:solidFill>
-                  <a:srgbClr val="06B6D4"/>
-                </a:solidFill>
-                <a:latin typeface="Arial"/>
-              </a:defRPr>
-            </a:pPr>
-            <a:r>
-              <a:t>2. MAPA INTERACTIVO</a:t>
+                  <a:srgbClr val="17352B"/>
+                </a:solidFill>
+                <a:latin typeface="Arial"/>
+              </a:defRPr>
+            </a:pPr>
+            <a:r>
+              <a:t>1. Asistente IA</a:t>
             </a:r>
           </a:p>
           <a:p>
             <a:pPr>
               <a:spcBef>
-                <a:spcPts val="400"/>
+                <a:spcPts val="200"/>
               </a:spcBef>
-              <a:defRPr sz="1050">
-                <a:solidFill>
-                  <a:srgbClr val="E2E8F0"/>
-                </a:solidFill>
-                <a:latin typeface="Arial"/>
-              </a:defRPr>
-            </a:pPr>
-            <a:r>
-              <a:t>Muestra puntos verdes y centros de recepción con geolocalización, categoría de residuo y navegación guiada.</a:t>
-            </a:r>
-          </a:p>
-        </p:txBody>
-      </p:sp>
-      <p:sp>
-        <p:nvSpPr>
-          <p:cNvPr id="8" name="Rounded Rectangle 7"/>
+              <a:defRPr sz="1000">
+                <a:solidFill>
+                  <a:srgbClr val="5C6B65"/>
+                </a:solidFill>
+                <a:latin typeface="Arial"/>
+              </a:defRPr>
+            </a:pPr>
+            <a:r>
+              <a:t>Clasifica residuos a partir de una consulta escrita o foto y entrega una recomendación comprensible.</a:t>
+            </a:r>
+          </a:p>
+        </p:txBody>
+      </p:sp>
+      <p:sp>
+        <p:nvSpPr>
+          <p:cNvPr id="13" name="Rounded Rectangle 12"/>
           <p:cNvSpPr/>
           <p:nvPr/>
         </p:nvSpPr>
         <p:spPr>
           <a:xfrm>
-            <a:off x="731520" y="3291839"/>
-            <a:ext cx="5257800" cy="1371600"/>
+            <a:off x="6126480" y="2240280"/>
+            <a:ext cx="5257800" cy="1234440"/>
           </a:xfrm>
           <a:prstGeom prst="roundRect">
             <a:avLst/>
           </a:prstGeom>
           <a:solidFill>
-            <a:srgbClr val="1E293B"/>
+            <a:srgbClr val="F8FAF8"/>
           </a:solidFill>
-          <a:ln w="19050">
+          <a:ln w="12700">
             <a:solidFill>
-              <a:srgbClr val="F59E0B"/>
+              <a:srgbClr val="CFE2D8"/>
             </a:solidFill>
           </a:ln>
         </p:spPr>
@@ -8550,60 +10028,32 @@
           </a:fontRef>
         </p:style>
         <p:txBody>
-          <a:bodyPr rtlCol="0" anchor="ctr" wrap="square" lIns="228600" rIns="228600" tIns="164592"/>
-          <a:lstStyle/>
-          <a:p>
-            <a:pPr algn="ctr">
-              <a:defRPr sz="1200" b="1">
-                <a:solidFill>
-                  <a:srgbClr val="F59E0B"/>
-                </a:solidFill>
-                <a:latin typeface="Arial"/>
-              </a:defRPr>
-            </a:pPr>
-            <a:r>
-              <a:t>3. ECOPUNTOS E INSIGNIAS</a:t>
-            </a:r>
-          </a:p>
-          <a:p>
-            <a:pPr>
-              <a:spcBef>
-                <a:spcPts val="400"/>
-              </a:spcBef>
-              <a:defRPr sz="1050">
-                <a:solidFill>
-                  <a:srgbClr val="E2E8F0"/>
-                </a:solidFill>
-                <a:latin typeface="Arial"/>
-              </a:defRPr>
-            </a:pPr>
-            <a:r>
-              <a:t>Premia la participación ambiental y conserva el progreso del usuario directamente en el dispositivo móvil.</a:t>
-            </a:r>
-          </a:p>
-        </p:txBody>
-      </p:sp>
-      <p:sp>
-        <p:nvSpPr>
-          <p:cNvPr id="9" name="Rounded Rectangle 8"/>
+          <a:bodyPr rtlCol="0" anchor="ctr"/>
+          <a:lstStyle/>
+          <a:p>
+            <a:pPr algn="ctr"/>
+          </a:p>
+        </p:txBody>
+      </p:sp>
+      <p:sp>
+        <p:nvSpPr>
+          <p:cNvPr id="14" name="Rounded Rectangle 13"/>
           <p:cNvSpPr/>
           <p:nvPr/>
         </p:nvSpPr>
         <p:spPr>
           <a:xfrm>
-            <a:off x="6172200" y="3291839"/>
-            <a:ext cx="5257800" cy="1371600"/>
+            <a:off x="6309360" y="2404872"/>
+            <a:ext cx="777240" cy="256032"/>
           </a:xfrm>
           <a:prstGeom prst="roundRect">
             <a:avLst/>
           </a:prstGeom>
           <a:solidFill>
-            <a:srgbClr val="1E293B"/>
+            <a:srgbClr val="DDF4E9"/>
           </a:solidFill>
-          <a:ln w="19050">
-            <a:solidFill>
-              <a:srgbClr val="8B5CF6"/>
-            </a:solidFill>
+          <a:ln>
+            <a:noFill/>
           </a:ln>
         </p:spPr>
         <p:style>
@@ -8621,59 +10071,95 @@
           </a:fontRef>
         </p:style>
         <p:txBody>
-          <a:bodyPr rtlCol="0" anchor="ctr" wrap="square" lIns="228600" rIns="228600" tIns="164592"/>
+          <a:bodyPr rtlCol="0" anchor="ctr"/>
           <a:lstStyle/>
           <a:p>
             <a:pPr algn="ctr">
+              <a:defRPr sz="850" b="1">
+                <a:solidFill>
+                  <a:srgbClr val="0B6B4D"/>
+                </a:solidFill>
+                <a:latin typeface="Arial"/>
+              </a:defRPr>
+            </a:pPr>
+            <a:r>
+              <a:t>MAPA</a:t>
+            </a:r>
+          </a:p>
+        </p:txBody>
+      </p:sp>
+      <p:sp>
+        <p:nvSpPr>
+          <p:cNvPr id="15" name="TextBox 14"/>
+          <p:cNvSpPr txBox="1"/>
+          <p:nvPr/>
+        </p:nvSpPr>
+        <p:spPr>
+          <a:xfrm>
+            <a:off x="7178040" y="2350008"/>
+            <a:ext cx="4023360" cy="1051560"/>
+          </a:xfrm>
+          <a:prstGeom prst="rect">
+            <a:avLst/>
+          </a:prstGeom>
+          <a:noFill/>
+        </p:spPr>
+        <p:txBody>
+          <a:bodyPr wrap="square" lIns="0" tIns="0">
+            <a:spAutoFit/>
+          </a:bodyPr>
+          <a:lstStyle/>
+          <a:p>
+            <a:pPr>
               <a:defRPr sz="1200" b="1">
                 <a:solidFill>
-                  <a:srgbClr val="8B5CF6"/>
-                </a:solidFill>
-                <a:latin typeface="Arial"/>
-              </a:defRPr>
-            </a:pPr>
-            <a:r>
-              <a:t>4. RETIROS A DOMICILIO</a:t>
+                  <a:srgbClr val="17352B"/>
+                </a:solidFill>
+                <a:latin typeface="Arial"/>
+              </a:defRPr>
+            </a:pPr>
+            <a:r>
+              <a:t>2. Mapa interactivo</a:t>
             </a:r>
           </a:p>
           <a:p>
             <a:pPr>
               <a:spcBef>
-                <a:spcPts val="400"/>
+                <a:spcPts val="200"/>
               </a:spcBef>
-              <a:defRPr sz="1050">
-                <a:solidFill>
-                  <a:srgbClr val="E2E8F0"/>
-                </a:solidFill>
-                <a:latin typeface="Arial"/>
-              </a:defRPr>
-            </a:pPr>
-            <a:r>
-              <a:t>Permite solicitar la recolección de muebles, escombros, chatarra y restos de poda con selección de turnos.</a:t>
-            </a:r>
-          </a:p>
-        </p:txBody>
-      </p:sp>
-      <p:sp>
-        <p:nvSpPr>
-          <p:cNvPr id="10" name="Rounded Rectangle 9"/>
+              <a:defRPr sz="1000">
+                <a:solidFill>
+                  <a:srgbClr val="5C6B65"/>
+                </a:solidFill>
+                <a:latin typeface="Arial"/>
+              </a:defRPr>
+            </a:pPr>
+            <a:r>
+              <a:t>Muestra puntos verdes y centros de recepción con ubicación, categoría y guiado turn-by-turn.</a:t>
+            </a:r>
+          </a:p>
+        </p:txBody>
+      </p:sp>
+      <p:sp>
+        <p:nvSpPr>
+          <p:cNvPr id="16" name="Rounded Rectangle 15"/>
           <p:cNvSpPr/>
           <p:nvPr/>
         </p:nvSpPr>
         <p:spPr>
           <a:xfrm>
-            <a:off x="731520" y="4800600"/>
-            <a:ext cx="5257800" cy="1371600"/>
+            <a:off x="685800" y="3611880"/>
+            <a:ext cx="5257800" cy="1234440"/>
           </a:xfrm>
           <a:prstGeom prst="roundRect">
             <a:avLst/>
           </a:prstGeom>
           <a:solidFill>
-            <a:srgbClr val="1E293B"/>
+            <a:srgbClr val="F8FAF8"/>
           </a:solidFill>
-          <a:ln w="19050">
+          <a:ln w="12700">
             <a:solidFill>
-              <a:srgbClr val="3B82F6"/>
+              <a:srgbClr val="CFE2D8"/>
             </a:solidFill>
           </a:ln>
         </p:spPr>
@@ -8692,60 +10178,32 @@
           </a:fontRef>
         </p:style>
         <p:txBody>
-          <a:bodyPr rtlCol="0" anchor="ctr" wrap="square" lIns="228600" rIns="228600" tIns="164592"/>
-          <a:lstStyle/>
-          <a:p>
-            <a:pPr algn="ctr">
-              <a:defRPr sz="1200" b="1">
-                <a:solidFill>
-                  <a:srgbClr val="3B82F6"/>
-                </a:solidFill>
-                <a:latin typeface="Arial"/>
-              </a:defRPr>
-            </a:pPr>
-            <a:r>
-              <a:t>5. PANEL ADMINISTRATIVO</a:t>
-            </a:r>
-          </a:p>
-          <a:p>
-            <a:pPr>
-              <a:spcBef>
-                <a:spcPts val="400"/>
-              </a:spcBef>
-              <a:defRPr sz="1050">
-                <a:solidFill>
-                  <a:srgbClr val="E2E8F0"/>
-                </a:solidFill>
-                <a:latin typeface="Arial"/>
-              </a:defRPr>
-            </a:pPr>
-            <a:r>
-              <a:t>Municipios y empresas gestionan puntos, solicitudes de retiro, catálogo de recompensas y métricas.</a:t>
-            </a:r>
-          </a:p>
-        </p:txBody>
-      </p:sp>
-      <p:sp>
-        <p:nvSpPr>
-          <p:cNvPr id="11" name="Rounded Rectangle 10"/>
+          <a:bodyPr rtlCol="0" anchor="ctr"/>
+          <a:lstStyle/>
+          <a:p>
+            <a:pPr algn="ctr"/>
+          </a:p>
+        </p:txBody>
+      </p:sp>
+      <p:sp>
+        <p:nvSpPr>
+          <p:cNvPr id="17" name="Rounded Rectangle 16"/>
           <p:cNvSpPr/>
           <p:nvPr/>
         </p:nvSpPr>
         <p:spPr>
           <a:xfrm>
-            <a:off x="6172200" y="4800600"/>
-            <a:ext cx="5257800" cy="1371600"/>
+            <a:off x="868680" y="3776472"/>
+            <a:ext cx="777240" cy="256032"/>
           </a:xfrm>
           <a:prstGeom prst="roundRect">
             <a:avLst/>
           </a:prstGeom>
           <a:solidFill>
-            <a:srgbClr val="1E293B"/>
+            <a:srgbClr val="DDF4E9"/>
           </a:solidFill>
-          <a:ln w="19050">
-            <a:solidFill>
-              <a:srgbClr val="F43F5E"/>
-            </a:solidFill>
+          <a:ln>
+            <a:noFill/>
           </a:ln>
         </p:spPr>
         <p:style>
@@ -8763,35 +10221,521 @@
           </a:fontRef>
         </p:style>
         <p:txBody>
-          <a:bodyPr rtlCol="0" anchor="ctr" wrap="square" lIns="228600" rIns="228600" tIns="164592"/>
+          <a:bodyPr rtlCol="0" anchor="ctr"/>
           <a:lstStyle/>
           <a:p>
             <a:pPr algn="ctr">
+              <a:defRPr sz="850" b="1">
+                <a:solidFill>
+                  <a:srgbClr val="0B6B4D"/>
+                </a:solidFill>
+                <a:latin typeface="Arial"/>
+              </a:defRPr>
+            </a:pPr>
+            <a:r>
+              <a:t>LOGRO</a:t>
+            </a:r>
+          </a:p>
+        </p:txBody>
+      </p:sp>
+      <p:sp>
+        <p:nvSpPr>
+          <p:cNvPr id="18" name="TextBox 17"/>
+          <p:cNvSpPr txBox="1"/>
+          <p:nvPr/>
+        </p:nvSpPr>
+        <p:spPr>
+          <a:xfrm>
+            <a:off x="1737360" y="3721608"/>
+            <a:ext cx="4023360" cy="1051560"/>
+          </a:xfrm>
+          <a:prstGeom prst="rect">
+            <a:avLst/>
+          </a:prstGeom>
+          <a:noFill/>
+        </p:spPr>
+        <p:txBody>
+          <a:bodyPr wrap="square" lIns="0" tIns="0">
+            <a:spAutoFit/>
+          </a:bodyPr>
+          <a:lstStyle/>
+          <a:p>
+            <a:pPr>
               <a:defRPr sz="1200" b="1">
                 <a:solidFill>
-                  <a:srgbClr val="F43F5E"/>
-                </a:solidFill>
-                <a:latin typeface="Arial"/>
-              </a:defRPr>
-            </a:pPr>
-            <a:r>
-              <a:t>6. MÓDULO REP</a:t>
+                  <a:srgbClr val="17352B"/>
+                </a:solidFill>
+                <a:latin typeface="Arial"/>
+              </a:defRPr>
+            </a:pPr>
+            <a:r>
+              <a:t>3. Ecopuntos e insignias</a:t>
             </a:r>
           </a:p>
           <a:p>
             <a:pPr>
               <a:spcBef>
-                <a:spcPts val="400"/>
+                <a:spcPts val="200"/>
               </a:spcBef>
-              <a:defRPr sz="1050">
-                <a:solidFill>
-                  <a:srgbClr val="E2E8F0"/>
-                </a:solidFill>
-                <a:latin typeface="Arial"/>
-              </a:defRPr>
-            </a:pPr>
-            <a:r>
-              <a:t>Da visibilidad a marcas y programas oficiales de recuperación de residuos especiales (pilas, baterías, RAEEs).</a:t>
+              <a:defRPr sz="1000">
+                <a:solidFill>
+                  <a:srgbClr val="5C6B65"/>
+                </a:solidFill>
+                <a:latin typeface="Arial"/>
+              </a:defRPr>
+            </a:pPr>
+            <a:r>
+              <a:t>Premia la participación y conserva el progreso del usuario directamente en el dispositivo.</a:t>
+            </a:r>
+          </a:p>
+        </p:txBody>
+      </p:sp>
+      <p:sp>
+        <p:nvSpPr>
+          <p:cNvPr id="19" name="Rounded Rectangle 18"/>
+          <p:cNvSpPr/>
+          <p:nvPr/>
+        </p:nvSpPr>
+        <p:spPr>
+          <a:xfrm>
+            <a:off x="6126480" y="3611880"/>
+            <a:ext cx="5257800" cy="1234440"/>
+          </a:xfrm>
+          <a:prstGeom prst="roundRect">
+            <a:avLst/>
+          </a:prstGeom>
+          <a:solidFill>
+            <a:srgbClr val="F8FAF8"/>
+          </a:solidFill>
+          <a:ln w="12700">
+            <a:solidFill>
+              <a:srgbClr val="CFE2D8"/>
+            </a:solidFill>
+          </a:ln>
+        </p:spPr>
+        <p:style>
+          <a:lnRef idx="1">
+            <a:schemeClr val="accent1"/>
+          </a:lnRef>
+          <a:fillRef idx="3">
+            <a:schemeClr val="accent1"/>
+          </a:fillRef>
+          <a:effectRef idx="2">
+            <a:schemeClr val="accent1"/>
+          </a:effectRef>
+          <a:fontRef idx="minor">
+            <a:schemeClr val="lt1"/>
+          </a:fontRef>
+        </p:style>
+        <p:txBody>
+          <a:bodyPr rtlCol="0" anchor="ctr"/>
+          <a:lstStyle/>
+          <a:p>
+            <a:pPr algn="ctr"/>
+          </a:p>
+        </p:txBody>
+      </p:sp>
+      <p:sp>
+        <p:nvSpPr>
+          <p:cNvPr id="20" name="Rounded Rectangle 19"/>
+          <p:cNvSpPr/>
+          <p:nvPr/>
+        </p:nvSpPr>
+        <p:spPr>
+          <a:xfrm>
+            <a:off x="6309360" y="3776472"/>
+            <a:ext cx="777240" cy="256032"/>
+          </a:xfrm>
+          <a:prstGeom prst="roundRect">
+            <a:avLst/>
+          </a:prstGeom>
+          <a:solidFill>
+            <a:srgbClr val="DDF4E9"/>
+          </a:solidFill>
+          <a:ln>
+            <a:noFill/>
+          </a:ln>
+        </p:spPr>
+        <p:style>
+          <a:lnRef idx="1">
+            <a:schemeClr val="accent1"/>
+          </a:lnRef>
+          <a:fillRef idx="3">
+            <a:schemeClr val="accent1"/>
+          </a:fillRef>
+          <a:effectRef idx="2">
+            <a:schemeClr val="accent1"/>
+          </a:effectRef>
+          <a:fontRef idx="minor">
+            <a:schemeClr val="lt1"/>
+          </a:fontRef>
+        </p:style>
+        <p:txBody>
+          <a:bodyPr rtlCol="0" anchor="ctr"/>
+          <a:lstStyle/>
+          <a:p>
+            <a:pPr algn="ctr">
+              <a:defRPr sz="850" b="1">
+                <a:solidFill>
+                  <a:srgbClr val="0B6B4D"/>
+                </a:solidFill>
+                <a:latin typeface="Arial"/>
+              </a:defRPr>
+            </a:pPr>
+            <a:r>
+              <a:t>RETIRO</a:t>
+            </a:r>
+          </a:p>
+        </p:txBody>
+      </p:sp>
+      <p:sp>
+        <p:nvSpPr>
+          <p:cNvPr id="21" name="TextBox 20"/>
+          <p:cNvSpPr txBox="1"/>
+          <p:nvPr/>
+        </p:nvSpPr>
+        <p:spPr>
+          <a:xfrm>
+            <a:off x="7178040" y="3721608"/>
+            <a:ext cx="4023360" cy="1051560"/>
+          </a:xfrm>
+          <a:prstGeom prst="rect">
+            <a:avLst/>
+          </a:prstGeom>
+          <a:noFill/>
+        </p:spPr>
+        <p:txBody>
+          <a:bodyPr wrap="square" lIns="0" tIns="0">
+            <a:spAutoFit/>
+          </a:bodyPr>
+          <a:lstStyle/>
+          <a:p>
+            <a:pPr>
+              <a:defRPr sz="1200" b="1">
+                <a:solidFill>
+                  <a:srgbClr val="17352B"/>
+                </a:solidFill>
+                <a:latin typeface="Arial"/>
+              </a:defRPr>
+            </a:pPr>
+            <a:r>
+              <a:t>4. Retiros a domicilio</a:t>
+            </a:r>
+          </a:p>
+          <a:p>
+            <a:pPr>
+              <a:spcBef>
+                <a:spcPts val="200"/>
+              </a:spcBef>
+              <a:defRPr sz="1000">
+                <a:solidFill>
+                  <a:srgbClr val="5C6B65"/>
+                </a:solidFill>
+                <a:latin typeface="Arial"/>
+              </a:defRPr>
+            </a:pPr>
+            <a:r>
+              <a:t>Permite solicitar la recolección de muebles, escombros, chatarra y restos de poda con turnos.</a:t>
+            </a:r>
+          </a:p>
+        </p:txBody>
+      </p:sp>
+      <p:sp>
+        <p:nvSpPr>
+          <p:cNvPr id="22" name="Rounded Rectangle 21"/>
+          <p:cNvSpPr/>
+          <p:nvPr/>
+        </p:nvSpPr>
+        <p:spPr>
+          <a:xfrm>
+            <a:off x="685800" y="4983480"/>
+            <a:ext cx="5257800" cy="1234440"/>
+          </a:xfrm>
+          <a:prstGeom prst="roundRect">
+            <a:avLst/>
+          </a:prstGeom>
+          <a:solidFill>
+            <a:srgbClr val="F8FAF8"/>
+          </a:solidFill>
+          <a:ln w="12700">
+            <a:solidFill>
+              <a:srgbClr val="CFE2D8"/>
+            </a:solidFill>
+          </a:ln>
+        </p:spPr>
+        <p:style>
+          <a:lnRef idx="1">
+            <a:schemeClr val="accent1"/>
+          </a:lnRef>
+          <a:fillRef idx="3">
+            <a:schemeClr val="accent1"/>
+          </a:fillRef>
+          <a:effectRef idx="2">
+            <a:schemeClr val="accent1"/>
+          </a:effectRef>
+          <a:fontRef idx="minor">
+            <a:schemeClr val="lt1"/>
+          </a:fontRef>
+        </p:style>
+        <p:txBody>
+          <a:bodyPr rtlCol="0" anchor="ctr"/>
+          <a:lstStyle/>
+          <a:p>
+            <a:pPr algn="ctr"/>
+          </a:p>
+        </p:txBody>
+      </p:sp>
+      <p:sp>
+        <p:nvSpPr>
+          <p:cNvPr id="23" name="Rounded Rectangle 22"/>
+          <p:cNvSpPr/>
+          <p:nvPr/>
+        </p:nvSpPr>
+        <p:spPr>
+          <a:xfrm>
+            <a:off x="868680" y="5148072"/>
+            <a:ext cx="777240" cy="256032"/>
+          </a:xfrm>
+          <a:prstGeom prst="roundRect">
+            <a:avLst/>
+          </a:prstGeom>
+          <a:solidFill>
+            <a:srgbClr val="DDF4E9"/>
+          </a:solidFill>
+          <a:ln>
+            <a:noFill/>
+          </a:ln>
+        </p:spPr>
+        <p:style>
+          <a:lnRef idx="1">
+            <a:schemeClr val="accent1"/>
+          </a:lnRef>
+          <a:fillRef idx="3">
+            <a:schemeClr val="accent1"/>
+          </a:fillRef>
+          <a:effectRef idx="2">
+            <a:schemeClr val="accent1"/>
+          </a:effectRef>
+          <a:fontRef idx="minor">
+            <a:schemeClr val="lt1"/>
+          </a:fontRef>
+        </p:style>
+        <p:txBody>
+          <a:bodyPr rtlCol="0" anchor="ctr"/>
+          <a:lstStyle/>
+          <a:p>
+            <a:pPr algn="ctr">
+              <a:defRPr sz="850" b="1">
+                <a:solidFill>
+                  <a:srgbClr val="0B6B4D"/>
+                </a:solidFill>
+                <a:latin typeface="Arial"/>
+              </a:defRPr>
+            </a:pPr>
+            <a:r>
+              <a:t>GESTIÓN</a:t>
+            </a:r>
+          </a:p>
+        </p:txBody>
+      </p:sp>
+      <p:sp>
+        <p:nvSpPr>
+          <p:cNvPr id="24" name="TextBox 23"/>
+          <p:cNvSpPr txBox="1"/>
+          <p:nvPr/>
+        </p:nvSpPr>
+        <p:spPr>
+          <a:xfrm>
+            <a:off x="1737360" y="5093208"/>
+            <a:ext cx="4023360" cy="1051560"/>
+          </a:xfrm>
+          <a:prstGeom prst="rect">
+            <a:avLst/>
+          </a:prstGeom>
+          <a:noFill/>
+        </p:spPr>
+        <p:txBody>
+          <a:bodyPr wrap="square" lIns="0" tIns="0">
+            <a:spAutoFit/>
+          </a:bodyPr>
+          <a:lstStyle/>
+          <a:p>
+            <a:pPr>
+              <a:defRPr sz="1200" b="1">
+                <a:solidFill>
+                  <a:srgbClr val="17352B"/>
+                </a:solidFill>
+                <a:latin typeface="Arial"/>
+              </a:defRPr>
+            </a:pPr>
+            <a:r>
+              <a:t>5. Panel administrativo</a:t>
+            </a:r>
+          </a:p>
+          <a:p>
+            <a:pPr>
+              <a:spcBef>
+                <a:spcPts val="200"/>
+              </a:spcBef>
+              <a:defRPr sz="1000">
+                <a:solidFill>
+                  <a:srgbClr val="5C6B65"/>
+                </a:solidFill>
+                <a:latin typeface="Arial"/>
+              </a:defRPr>
+            </a:pPr>
+            <a:r>
+              <a:t>Municipios y empresas gestionan puntos limpios, retiros, recompensas y métricas territoriales.</a:t>
+            </a:r>
+          </a:p>
+        </p:txBody>
+      </p:sp>
+      <p:sp>
+        <p:nvSpPr>
+          <p:cNvPr id="25" name="Rounded Rectangle 24"/>
+          <p:cNvSpPr/>
+          <p:nvPr/>
+        </p:nvSpPr>
+        <p:spPr>
+          <a:xfrm>
+            <a:off x="6126480" y="4983480"/>
+            <a:ext cx="5257800" cy="1234440"/>
+          </a:xfrm>
+          <a:prstGeom prst="roundRect">
+            <a:avLst/>
+          </a:prstGeom>
+          <a:solidFill>
+            <a:srgbClr val="F8FAF8"/>
+          </a:solidFill>
+          <a:ln w="12700">
+            <a:solidFill>
+              <a:srgbClr val="CFE2D8"/>
+            </a:solidFill>
+          </a:ln>
+        </p:spPr>
+        <p:style>
+          <a:lnRef idx="1">
+            <a:schemeClr val="accent1"/>
+          </a:lnRef>
+          <a:fillRef idx="3">
+            <a:schemeClr val="accent1"/>
+          </a:fillRef>
+          <a:effectRef idx="2">
+            <a:schemeClr val="accent1"/>
+          </a:effectRef>
+          <a:fontRef idx="minor">
+            <a:schemeClr val="lt1"/>
+          </a:fontRef>
+        </p:style>
+        <p:txBody>
+          <a:bodyPr rtlCol="0" anchor="ctr"/>
+          <a:lstStyle/>
+          <a:p>
+            <a:pPr algn="ctr"/>
+          </a:p>
+        </p:txBody>
+      </p:sp>
+      <p:sp>
+        <p:nvSpPr>
+          <p:cNvPr id="26" name="Rounded Rectangle 25"/>
+          <p:cNvSpPr/>
+          <p:nvPr/>
+        </p:nvSpPr>
+        <p:spPr>
+          <a:xfrm>
+            <a:off x="6309360" y="5148072"/>
+            <a:ext cx="777240" cy="256032"/>
+          </a:xfrm>
+          <a:prstGeom prst="roundRect">
+            <a:avLst/>
+          </a:prstGeom>
+          <a:solidFill>
+            <a:srgbClr val="DDF4E9"/>
+          </a:solidFill>
+          <a:ln>
+            <a:noFill/>
+          </a:ln>
+        </p:spPr>
+        <p:style>
+          <a:lnRef idx="1">
+            <a:schemeClr val="accent1"/>
+          </a:lnRef>
+          <a:fillRef idx="3">
+            <a:schemeClr val="accent1"/>
+          </a:fillRef>
+          <a:effectRef idx="2">
+            <a:schemeClr val="accent1"/>
+          </a:effectRef>
+          <a:fontRef idx="minor">
+            <a:schemeClr val="lt1"/>
+          </a:fontRef>
+        </p:style>
+        <p:txBody>
+          <a:bodyPr rtlCol="0" anchor="ctr"/>
+          <a:lstStyle/>
+          <a:p>
+            <a:pPr algn="ctr">
+              <a:defRPr sz="850" b="1">
+                <a:solidFill>
+                  <a:srgbClr val="0B6B4D"/>
+                </a:solidFill>
+                <a:latin typeface="Arial"/>
+              </a:defRPr>
+            </a:pPr>
+            <a:r>
+              <a:t>REP</a:t>
+            </a:r>
+          </a:p>
+        </p:txBody>
+      </p:sp>
+      <p:sp>
+        <p:nvSpPr>
+          <p:cNvPr id="27" name="TextBox 26"/>
+          <p:cNvSpPr txBox="1"/>
+          <p:nvPr/>
+        </p:nvSpPr>
+        <p:spPr>
+          <a:xfrm>
+            <a:off x="7178040" y="5093208"/>
+            <a:ext cx="4023360" cy="1051560"/>
+          </a:xfrm>
+          <a:prstGeom prst="rect">
+            <a:avLst/>
+          </a:prstGeom>
+          <a:noFill/>
+        </p:spPr>
+        <p:txBody>
+          <a:bodyPr wrap="square" lIns="0" tIns="0">
+            <a:spAutoFit/>
+          </a:bodyPr>
+          <a:lstStyle/>
+          <a:p>
+            <a:pPr>
+              <a:defRPr sz="1200" b="1">
+                <a:solidFill>
+                  <a:srgbClr val="17352B"/>
+                </a:solidFill>
+                <a:latin typeface="Arial"/>
+              </a:defRPr>
+            </a:pPr>
+            <a:r>
+              <a:t>6. Módulo REP</a:t>
+            </a:r>
+          </a:p>
+          <a:p>
+            <a:pPr>
+              <a:spcBef>
+                <a:spcPts val="200"/>
+              </a:spcBef>
+              <a:defRPr sz="1000">
+                <a:solidFill>
+                  <a:srgbClr val="5C6B65"/>
+                </a:solidFill>
+                <a:latin typeface="Arial"/>
+              </a:defRPr>
+            </a:pPr>
+            <a:r>
+              <a:t>Da visibilidad a marcas y programas oficiales de recuperación de residuos especiales (pilas, RAEEs).</a:t>
             </a:r>
           </a:p>
         </p:txBody>
@@ -8829,7 +10773,7 @@
             <a:avLst/>
           </a:prstGeom>
           <a:solidFill>
-            <a:srgbClr val="0F172A"/>
+            <a:srgbClr val="FFFFFF"/>
           </a:solidFill>
           <a:ln>
             <a:noFill/>
@@ -8859,20 +10803,128 @@
       </p:sp>
       <p:sp>
         <p:nvSpPr>
-          <p:cNvPr id="3" name="Rounded Rectangle 2"/>
+          <p:cNvPr id="3" name="TextBox 2"/>
+          <p:cNvSpPr txBox="1"/>
+          <p:nvPr/>
+        </p:nvSpPr>
+        <p:spPr>
+          <a:xfrm>
+            <a:off x="685800" y="411480"/>
+            <a:ext cx="5029200" cy="320040"/>
+          </a:xfrm>
+          <a:prstGeom prst="rect">
+            <a:avLst/>
+          </a:prstGeom>
+          <a:noFill/>
+        </p:spPr>
+        <p:txBody>
+          <a:bodyPr wrap="square" lIns="0" tIns="0">
+            <a:spAutoFit/>
+          </a:bodyPr>
+          <a:lstStyle/>
+          <a:p>
+            <a:pPr>
+              <a:defRPr sz="1100" b="1">
+                <a:solidFill>
+                  <a:srgbClr val="0B6B4D"/>
+                </a:solidFill>
+                <a:latin typeface="Arial"/>
+              </a:defRPr>
+            </a:pPr>
+            <a:r>
+              <a:t>07 • MERCADO</a:t>
+            </a:r>
+          </a:p>
+        </p:txBody>
+      </p:sp>
+      <p:sp>
+        <p:nvSpPr>
+          <p:cNvPr id="4" name="TextBox 3"/>
+          <p:cNvSpPr txBox="1"/>
+          <p:nvPr/>
+        </p:nvSpPr>
+        <p:spPr>
+          <a:xfrm>
+            <a:off x="10789920" y="411480"/>
+            <a:ext cx="731520" cy="320040"/>
+          </a:xfrm>
+          <a:prstGeom prst="rect">
+            <a:avLst/>
+          </a:prstGeom>
+          <a:noFill/>
+        </p:spPr>
+        <p:txBody>
+          <a:bodyPr wrap="none" rIns="0" tIns="0">
+            <a:spAutoFit/>
+          </a:bodyPr>
+          <a:lstStyle/>
+          <a:p>
+            <a:pPr algn="r">
+              <a:defRPr sz="1100" b="1">
+                <a:solidFill>
+                  <a:srgbClr val="5C6B65"/>
+                </a:solidFill>
+                <a:latin typeface="Arial"/>
+              </a:defRPr>
+            </a:pPr>
+            <a:r>
+              <a:t>08</a:t>
+            </a:r>
+          </a:p>
+        </p:txBody>
+      </p:sp>
+      <p:sp>
+        <p:nvSpPr>
+          <p:cNvPr id="5" name="TextBox 4"/>
+          <p:cNvSpPr txBox="1"/>
+          <p:nvPr/>
+        </p:nvSpPr>
+        <p:spPr>
+          <a:xfrm>
+            <a:off x="685800" y="685800"/>
+            <a:ext cx="10789920" cy="685800"/>
+          </a:xfrm>
+          <a:prstGeom prst="rect">
+            <a:avLst/>
+          </a:prstGeom>
+          <a:noFill/>
+        </p:spPr>
+        <p:txBody>
+          <a:bodyPr wrap="square" lIns="0" tIns="0">
+            <a:spAutoFit/>
+          </a:bodyPr>
+          <a:lstStyle/>
+          <a:p>
+            <a:pPr>
+              <a:defRPr sz="2500" b="1">
+                <a:solidFill>
+                  <a:srgbClr val="17352B"/>
+                </a:solidFill>
+                <a:latin typeface="Arial"/>
+              </a:defRPr>
+            </a:pPr>
+            <a:r>
+              <a:t>Mercado y Oportunidades</a:t>
+            </a:r>
+          </a:p>
+        </p:txBody>
+      </p:sp>
+      <p:sp>
+        <p:nvSpPr>
+          <p:cNvPr id="6" name="Rectangle 5"/>
           <p:cNvSpPr/>
           <p:nvPr/>
         </p:nvSpPr>
         <p:spPr>
           <a:xfrm>
-            <a:off x="731520" y="384048"/>
-            <a:ext cx="3474720" cy="347472"/>
-          </a:xfrm>
-          <a:prstGeom prst="roundRect">
+            <a:off x="685800" y="1417320"/>
+            <a:ext cx="10817352" cy="13716"/>
+          </a:xfrm>
+          <a:prstGeom prst="rect">
             <a:avLst/>
           </a:prstGeom>
           <a:solidFill>
-            <a:srgbClr val="10B981"/>
+            <a:srgbClr val="CFE2D8"/>
           </a:solidFill>
           <a:ln>
             <a:noFill/>
@@ -8896,23 +10948,49 @@
           <a:bodyPr rtlCol="0" anchor="ctr"/>
           <a:lstStyle/>
           <a:p>
-            <a:pPr algn="ctr">
-              <a:defRPr sz="950" b="1">
-                <a:solidFill>
-                  <a:srgbClr val="FFFFFF"/>
-                </a:solidFill>
-                <a:latin typeface="Arial"/>
-              </a:defRPr>
-            </a:pPr>
-            <a:r>
-              <a:t>07. OPORTUNIDAD</a:t>
+            <a:pPr algn="ctr"/>
+          </a:p>
+        </p:txBody>
+      </p:sp>
+      <p:sp>
+        <p:nvSpPr>
+          <p:cNvPr id="7" name="TextBox 6"/>
+          <p:cNvSpPr txBox="1"/>
+          <p:nvPr/>
+        </p:nvSpPr>
+        <p:spPr>
+          <a:xfrm>
+            <a:off x="685800" y="6446520"/>
+            <a:ext cx="5486400" cy="274320"/>
+          </a:xfrm>
+          <a:prstGeom prst="rect">
+            <a:avLst/>
+          </a:prstGeom>
+          <a:noFill/>
+        </p:spPr>
+        <p:txBody>
+          <a:bodyPr wrap="none" lIns="0" bIns="0">
+            <a:spAutoFit/>
+          </a:bodyPr>
+          <a:lstStyle/>
+          <a:p>
+            <a:pPr>
+              <a:defRPr sz="950">
+                <a:solidFill>
+                  <a:srgbClr val="5C6B65"/>
+                </a:solidFill>
+                <a:latin typeface="Arial"/>
+              </a:defRPr>
+            </a:pPr>
+            <a:r>
+              <a:t>EcoMapa  •  CivicLoop Technologies S.A.</a:t>
             </a:r>
           </a:p>
         </p:txBody>
       </p:sp>
       <p:pic>
         <p:nvPicPr>
-          <p:cNvPr id="4" name="Picture 3" descr="civicloop_logo_rounded.png"/>
+          <p:cNvPr id="8" name="Picture 7" descr="civicloop_logo_rounded.png"/>
           <p:cNvPicPr>
             <a:picLocks noChangeAspect="1"/>
           </p:cNvPicPr>
@@ -8926,8 +11004,8 @@
         </p:blipFill>
         <p:spPr>
           <a:xfrm>
-            <a:off x="11064240" y="347472"/>
-            <a:ext cx="594360" cy="594360"/>
+            <a:off x="11064240" y="6309360"/>
+            <a:ext cx="438912" cy="438912"/>
           </a:xfrm>
           <a:prstGeom prst="rect">
             <a:avLst/>
@@ -8936,14 +11014,14 @@
       </p:pic>
       <p:sp>
         <p:nvSpPr>
-          <p:cNvPr id="5" name="TextBox 4"/>
+          <p:cNvPr id="9" name="TextBox 8"/>
           <p:cNvSpPr txBox="1"/>
           <p:nvPr/>
         </p:nvSpPr>
         <p:spPr>
           <a:xfrm>
-            <a:off x="731520" y="749808"/>
-            <a:ext cx="10515600" cy="777240"/>
+            <a:off x="685800" y="1645920"/>
+            <a:ext cx="10789920" cy="548640"/>
           </a:xfrm>
           <a:prstGeom prst="rect">
             <a:avLst/>
@@ -8951,61 +11029,45 @@
           <a:noFill/>
         </p:spPr>
         <p:txBody>
-          <a:bodyPr wrap="square">
+          <a:bodyPr wrap="square" lIns="0">
             <a:spAutoFit/>
           </a:bodyPr>
           <a:lstStyle/>
           <a:p>
             <a:pPr>
-              <a:defRPr sz="2500" b="1">
-                <a:solidFill>
-                  <a:srgbClr val="FFFFFF"/>
-                </a:solidFill>
-                <a:latin typeface="Arial"/>
-              </a:defRPr>
-            </a:pPr>
-            <a:r>
-              <a:t>Mercado y Oportunidades de Crecimiento</a:t>
-            </a:r>
-          </a:p>
-          <a:p>
-            <a:pPr>
-              <a:spcBef>
-                <a:spcPts val="300"/>
-              </a:spcBef>
-              <a:defRPr sz="1300">
-                <a:solidFill>
-                  <a:srgbClr val="94A3B8"/>
-                </a:solidFill>
-                <a:latin typeface="Arial"/>
-              </a:defRPr>
-            </a:pPr>
-            <a:r>
-              <a:t>El contexto favorable para la integración de tecnología y cuidado ambiental urbano</a:t>
-            </a:r>
-          </a:p>
-        </p:txBody>
-      </p:sp>
-      <p:sp>
-        <p:nvSpPr>
-          <p:cNvPr id="6" name="Rounded Rectangle 5"/>
+              <a:defRPr sz="1500" b="1">
+                <a:solidFill>
+                  <a:srgbClr val="17352B"/>
+                </a:solidFill>
+                <a:latin typeface="Arial"/>
+              </a:defRPr>
+            </a:pPr>
+            <a:r>
+              <a:t>El crecimiento de las ciudades inteligentes y la necesidad de soluciones sustentables generan una gran oportunidad para integrar tecnología y cuidado ambiental:</a:t>
+            </a:r>
+          </a:p>
+        </p:txBody>
+      </p:sp>
+      <p:sp>
+        <p:nvSpPr>
+          <p:cNvPr id="10" name="Rounded Rectangle 9"/>
           <p:cNvSpPr/>
           <p:nvPr/>
         </p:nvSpPr>
         <p:spPr>
           <a:xfrm>
-            <a:off x="731520" y="1783080"/>
-            <a:ext cx="2560320" cy="3108960"/>
+            <a:off x="685800" y="2423160"/>
+            <a:ext cx="2606040" cy="2926080"/>
           </a:xfrm>
           <a:prstGeom prst="roundRect">
             <a:avLst/>
           </a:prstGeom>
           <a:solidFill>
-            <a:srgbClr val="1E293B"/>
+            <a:srgbClr val="F8FAF8"/>
           </a:solidFill>
-          <a:ln w="19050">
+          <a:ln w="12700">
             <a:solidFill>
-              <a:srgbClr val="10B981"/>
+              <a:srgbClr val="CFE2D8"/>
             </a:solidFill>
           </a:ln>
         </p:spPr>
@@ -9027,57 +11089,45 @@
           <a:bodyPr rtlCol="0" anchor="ctr" wrap="square" lIns="182880" rIns="182880" tIns="201168"/>
           <a:lstStyle/>
           <a:p>
-            <a:pPr algn="ctr">
-              <a:defRPr sz="1200" b="1">
-                <a:solidFill>
-                  <a:srgbClr val="10B981"/>
-                </a:solidFill>
-                <a:latin typeface="Arial"/>
-              </a:defRPr>
-            </a:pPr>
-            <a:r>
-              <a:t>CONCIENCIA ECOLÓGICA</a:t>
-            </a:r>
+            <a:pPr algn="ctr"/>
           </a:p>
           <a:p>
             <a:pPr>
               <a:spcBef>
-                <a:spcPts val="800"/>
+                <a:spcPts val="3800"/>
               </a:spcBef>
               <a:defRPr sz="1050">
                 <a:solidFill>
-                  <a:srgbClr val="E2E8F0"/>
-                </a:solidFill>
-                <a:latin typeface="Arial"/>
-              </a:defRPr>
-            </a:pPr>
-            <a:r>
-              <a:t>Creciente interés de la ciudadanía en adoptar hábitos sustentables y reducir el impacto de sus residuos cotidianos.</a:t>
-            </a:r>
-          </a:p>
-        </p:txBody>
-      </p:sp>
-      <p:sp>
-        <p:nvSpPr>
-          <p:cNvPr id="7" name="Rounded Rectangle 6"/>
+                  <a:srgbClr val="5C6B65"/>
+                </a:solidFill>
+                <a:latin typeface="Arial"/>
+              </a:defRPr>
+            </a:pPr>
+            <a:r>
+              <a:t>La sociedad demanda herramientas prácticas para reducir su impacto ambiental y separar residuos de forma correcta.</a:t>
+            </a:r>
+          </a:p>
+        </p:txBody>
+      </p:sp>
+      <p:sp>
+        <p:nvSpPr>
+          <p:cNvPr id="11" name="Oval 10"/>
           <p:cNvSpPr/>
           <p:nvPr/>
         </p:nvSpPr>
         <p:spPr>
           <a:xfrm>
-            <a:off x="3429000" y="1783080"/>
-            <a:ext cx="2560320" cy="3108960"/>
-          </a:xfrm>
-          <a:prstGeom prst="roundRect">
+            <a:off x="868680" y="2651760"/>
+            <a:ext cx="109728" cy="109728"/>
+          </a:xfrm>
+          <a:prstGeom prst="ellipse">
             <a:avLst/>
           </a:prstGeom>
           <a:solidFill>
-            <a:srgbClr val="1E293B"/>
+            <a:srgbClr val="0B6B4D"/>
           </a:solidFill>
-          <a:ln w="19050">
-            <a:solidFill>
-              <a:srgbClr val="06B6D4"/>
-            </a:solidFill>
+          <a:ln>
+            <a:noFill/>
           </a:ln>
         </p:spPr>
         <p:style>
@@ -9095,59 +11145,69 @@
           </a:fontRef>
         </p:style>
         <p:txBody>
-          <a:bodyPr rtlCol="0" anchor="ctr" wrap="square" lIns="182880" rIns="182880" tIns="201168"/>
-          <a:lstStyle/>
-          <a:p>
-            <a:pPr algn="ctr">
-              <a:defRPr sz="1200" b="1">
-                <a:solidFill>
-                  <a:srgbClr val="06B6D4"/>
-                </a:solidFill>
-                <a:latin typeface="Arial"/>
-              </a:defRPr>
-            </a:pPr>
-            <a:r>
-              <a:t>USO MASIVO DE SMARTPHONES</a:t>
-            </a:r>
-          </a:p>
-          <a:p>
-            <a:pPr>
-              <a:spcBef>
-                <a:spcPts val="800"/>
-              </a:spcBef>
-              <a:defRPr sz="1050">
-                <a:solidFill>
-                  <a:srgbClr val="E2E8F0"/>
-                </a:solidFill>
-                <a:latin typeface="Arial"/>
-              </a:defRPr>
-            </a:pPr>
-            <a:r>
-              <a:t>Penetración superior al 85% de dispositivos móviles en la población, permitiendo llegada directa al hogar.</a:t>
-            </a:r>
-          </a:p>
-        </p:txBody>
-      </p:sp>
-      <p:sp>
-        <p:nvSpPr>
-          <p:cNvPr id="8" name="Rounded Rectangle 7"/>
+          <a:bodyPr rtlCol="0" anchor="ctr"/>
+          <a:lstStyle/>
+          <a:p>
+            <a:pPr algn="ctr"/>
+          </a:p>
+        </p:txBody>
+      </p:sp>
+      <p:sp>
+        <p:nvSpPr>
+          <p:cNvPr id="12" name="TextBox 11"/>
+          <p:cNvSpPr txBox="1"/>
+          <p:nvPr/>
+        </p:nvSpPr>
+        <p:spPr>
+          <a:xfrm>
+            <a:off x="1051560" y="2542032"/>
+            <a:ext cx="2103120" cy="365760"/>
+          </a:xfrm>
+          <a:prstGeom prst="rect">
+            <a:avLst/>
+          </a:prstGeom>
+          <a:noFill/>
+        </p:spPr>
+        <p:txBody>
+          <a:bodyPr wrap="none" lIns="0" tIns="0">
+            <a:spAutoFit/>
+          </a:bodyPr>
+          <a:lstStyle/>
+          <a:p>
+            <a:pPr>
+              <a:defRPr sz="1150" b="1">
+                <a:solidFill>
+                  <a:srgbClr val="17352B"/>
+                </a:solidFill>
+                <a:latin typeface="Arial"/>
+              </a:defRPr>
+            </a:pPr>
+            <a:r>
+              <a:t>Mayor conciencia ecológica</a:t>
+            </a:r>
+          </a:p>
+        </p:txBody>
+      </p:sp>
+      <p:sp>
+        <p:nvSpPr>
+          <p:cNvPr id="13" name="Rounded Rectangle 12"/>
           <p:cNvSpPr/>
           <p:nvPr/>
         </p:nvSpPr>
         <p:spPr>
           <a:xfrm>
-            <a:off x="6126480" y="1783080"/>
-            <a:ext cx="2560320" cy="3108960"/>
+            <a:off x="3429000" y="2423160"/>
+            <a:ext cx="2606040" cy="2926080"/>
           </a:xfrm>
           <a:prstGeom prst="roundRect">
             <a:avLst/>
           </a:prstGeom>
           <a:solidFill>
-            <a:srgbClr val="1E293B"/>
+            <a:srgbClr val="F8FAF8"/>
           </a:solidFill>
-          <a:ln w="19050">
+          <a:ln w="12700">
             <a:solidFill>
-              <a:srgbClr val="F59E0B"/>
+              <a:srgbClr val="CFE2D8"/>
             </a:solidFill>
           </a:ln>
         </p:spPr>
@@ -9169,57 +11229,45 @@
           <a:bodyPr rtlCol="0" anchor="ctr" wrap="square" lIns="182880" rIns="182880" tIns="201168"/>
           <a:lstStyle/>
           <a:p>
-            <a:pPr algn="ctr">
-              <a:defRPr sz="1200" b="1">
-                <a:solidFill>
-                  <a:srgbClr val="F59E0B"/>
-                </a:solidFill>
-                <a:latin typeface="Arial"/>
-              </a:defRPr>
-            </a:pPr>
-            <a:r>
-              <a:t>AUGE DE SOLUCIONES CON IA</a:t>
-            </a:r>
+            <a:pPr algn="ctr"/>
           </a:p>
           <a:p>
             <a:pPr>
               <a:spcBef>
-                <a:spcPts val="800"/>
+                <a:spcPts val="3800"/>
               </a:spcBef>
               <a:defRPr sz="1050">
                 <a:solidFill>
-                  <a:srgbClr val="E2E8F0"/>
-                </a:solidFill>
-                <a:latin typeface="Arial"/>
-              </a:defRPr>
-            </a:pPr>
-            <a:r>
-              <a:t>Madurez de modelos multimodales como Google Gemini capaces de resolver consultas complejas al instante.</a:t>
-            </a:r>
-          </a:p>
-        </p:txBody>
-      </p:sp>
-      <p:sp>
-        <p:nvSpPr>
-          <p:cNvPr id="9" name="Rounded Rectangle 8"/>
+                  <a:srgbClr val="5C6B65"/>
+                </a:solidFill>
+                <a:latin typeface="Arial"/>
+              </a:defRPr>
+            </a:pPr>
+            <a:r>
+              <a:t>Los smartphones se han convertido en la principal vía de acceso a servicios públicos y comunitarios en el hogar.</a:t>
+            </a:r>
+          </a:p>
+        </p:txBody>
+      </p:sp>
+      <p:sp>
+        <p:nvSpPr>
+          <p:cNvPr id="14" name="Oval 13"/>
           <p:cNvSpPr/>
           <p:nvPr/>
         </p:nvSpPr>
         <p:spPr>
           <a:xfrm>
-            <a:off x="8823960" y="1783080"/>
-            <a:ext cx="2560320" cy="3108960"/>
-          </a:xfrm>
-          <a:prstGeom prst="roundRect">
+            <a:off x="3611880" y="2651760"/>
+            <a:ext cx="109728" cy="109728"/>
+          </a:xfrm>
+          <a:prstGeom prst="ellipse">
             <a:avLst/>
           </a:prstGeom>
           <a:solidFill>
-            <a:srgbClr val="1E293B"/>
+            <a:srgbClr val="0B6B4D"/>
           </a:solidFill>
-          <a:ln w="19050">
-            <a:solidFill>
-              <a:srgbClr val="8B5CF6"/>
-            </a:solidFill>
+          <a:ln>
+            <a:noFill/>
           </a:ln>
         </p:spPr>
         <p:style>
@@ -9237,59 +11285,69 @@
           </a:fontRef>
         </p:style>
         <p:txBody>
-          <a:bodyPr rtlCol="0" anchor="ctr" wrap="square" lIns="182880" rIns="182880" tIns="201168"/>
-          <a:lstStyle/>
-          <a:p>
-            <a:pPr algn="ctr">
-              <a:defRPr sz="1200" b="1">
-                <a:solidFill>
-                  <a:srgbClr val="8B5CF6"/>
-                </a:solidFill>
-                <a:latin typeface="Arial"/>
-              </a:defRPr>
-            </a:pPr>
-            <a:r>
-              <a:t>SOSTENIBILIDAD Y CIUDADES INTELIGENTES</a:t>
-            </a:r>
-          </a:p>
-          <a:p>
-            <a:pPr>
-              <a:spcBef>
-                <a:spcPts val="800"/>
-              </a:spcBef>
-              <a:defRPr sz="1050">
-                <a:solidFill>
-                  <a:srgbClr val="E2E8F0"/>
-                </a:solidFill>
-                <a:latin typeface="Arial"/>
-              </a:defRPr>
-            </a:pPr>
-            <a:r>
-              <a:t>Municipios con presupuestos activos para modernización GIRSU y cumplimiento de metas ambientales.</a:t>
-            </a:r>
-          </a:p>
-        </p:txBody>
-      </p:sp>
-      <p:sp>
-        <p:nvSpPr>
-          <p:cNvPr id="10" name="Rounded Rectangle 9"/>
+          <a:bodyPr rtlCol="0" anchor="ctr"/>
+          <a:lstStyle/>
+          <a:p>
+            <a:pPr algn="ctr"/>
+          </a:p>
+        </p:txBody>
+      </p:sp>
+      <p:sp>
+        <p:nvSpPr>
+          <p:cNvPr id="15" name="TextBox 14"/>
+          <p:cNvSpPr txBox="1"/>
+          <p:nvPr/>
+        </p:nvSpPr>
+        <p:spPr>
+          <a:xfrm>
+            <a:off x="3794760" y="2542032"/>
+            <a:ext cx="2103120" cy="365760"/>
+          </a:xfrm>
+          <a:prstGeom prst="rect">
+            <a:avLst/>
+          </a:prstGeom>
+          <a:noFill/>
+        </p:spPr>
+        <p:txBody>
+          <a:bodyPr wrap="none" lIns="0" tIns="0">
+            <a:spAutoFit/>
+          </a:bodyPr>
+          <a:lstStyle/>
+          <a:p>
+            <a:pPr>
+              <a:defRPr sz="1150" b="1">
+                <a:solidFill>
+                  <a:srgbClr val="17352B"/>
+                </a:solidFill>
+                <a:latin typeface="Arial"/>
+              </a:defRPr>
+            </a:pPr>
+            <a:r>
+              <a:t>Uso masivo de tecnología móvil</a:t>
+            </a:r>
+          </a:p>
+        </p:txBody>
+      </p:sp>
+      <p:sp>
+        <p:nvSpPr>
+          <p:cNvPr id="16" name="Rounded Rectangle 15"/>
           <p:cNvSpPr/>
           <p:nvPr/>
         </p:nvSpPr>
         <p:spPr>
           <a:xfrm>
-            <a:off x="731520" y="5074920"/>
-            <a:ext cx="10698480" cy="1234440"/>
+            <a:off x="6172200" y="2423160"/>
+            <a:ext cx="2606040" cy="2926080"/>
           </a:xfrm>
           <a:prstGeom prst="roundRect">
             <a:avLst/>
           </a:prstGeom>
           <a:solidFill>
-            <a:srgbClr val="1E293B"/>
+            <a:srgbClr val="F8FAF8"/>
           </a:solidFill>
           <a:ln w="12700">
             <a:solidFill>
-              <a:srgbClr val="10B981"/>
+              <a:srgbClr val="CFE2D8"/>
             </a:solidFill>
           </a:ln>
         </p:spPr>
@@ -9308,13 +11366,291 @@
           </a:fontRef>
         </p:style>
         <p:txBody>
-          <a:bodyPr rtlCol="0" anchor="ctr" wrap="square" lIns="274320" tIns="182880"/>
+          <a:bodyPr rtlCol="0" anchor="ctr" wrap="square" lIns="182880" rIns="182880" tIns="201168"/>
+          <a:lstStyle/>
+          <a:p>
+            <a:pPr algn="ctr"/>
+          </a:p>
+          <a:p>
+            <a:pPr>
+              <a:spcBef>
+                <a:spcPts val="3800"/>
+              </a:spcBef>
+              <a:defRPr sz="1050">
+                <a:solidFill>
+                  <a:srgbClr val="5C6B65"/>
+                </a:solidFill>
+                <a:latin typeface="Arial"/>
+              </a:defRPr>
+            </a:pPr>
+            <a:r>
+              <a:t>Modelos multimodales accesibles permiten clasificar materiales y orientar consultas complejas en tiempo real.</a:t>
+            </a:r>
+          </a:p>
+        </p:txBody>
+      </p:sp>
+      <p:sp>
+        <p:nvSpPr>
+          <p:cNvPr id="17" name="Oval 16"/>
+          <p:cNvSpPr/>
+          <p:nvPr/>
+        </p:nvSpPr>
+        <p:spPr>
+          <a:xfrm>
+            <a:off x="6355080" y="2651760"/>
+            <a:ext cx="109728" cy="109728"/>
+          </a:xfrm>
+          <a:prstGeom prst="ellipse">
+            <a:avLst/>
+          </a:prstGeom>
+          <a:solidFill>
+            <a:srgbClr val="F2A65A"/>
+          </a:solidFill>
+          <a:ln>
+            <a:noFill/>
+          </a:ln>
+        </p:spPr>
+        <p:style>
+          <a:lnRef idx="1">
+            <a:schemeClr val="accent1"/>
+          </a:lnRef>
+          <a:fillRef idx="3">
+            <a:schemeClr val="accent1"/>
+          </a:fillRef>
+          <a:effectRef idx="2">
+            <a:schemeClr val="accent1"/>
+          </a:effectRef>
+          <a:fontRef idx="minor">
+            <a:schemeClr val="lt1"/>
+          </a:fontRef>
+        </p:style>
+        <p:txBody>
+          <a:bodyPr rtlCol="0" anchor="ctr"/>
+          <a:lstStyle/>
+          <a:p>
+            <a:pPr algn="ctr"/>
+          </a:p>
+        </p:txBody>
+      </p:sp>
+      <p:sp>
+        <p:nvSpPr>
+          <p:cNvPr id="18" name="TextBox 17"/>
+          <p:cNvSpPr txBox="1"/>
+          <p:nvPr/>
+        </p:nvSpPr>
+        <p:spPr>
+          <a:xfrm>
+            <a:off x="6537960" y="2542032"/>
+            <a:ext cx="2103120" cy="365760"/>
+          </a:xfrm>
+          <a:prstGeom prst="rect">
+            <a:avLst/>
+          </a:prstGeom>
+          <a:noFill/>
+        </p:spPr>
+        <p:txBody>
+          <a:bodyPr wrap="none" lIns="0" tIns="0">
+            <a:spAutoFit/>
+          </a:bodyPr>
+          <a:lstStyle/>
+          <a:p>
+            <a:pPr>
+              <a:defRPr sz="1150" b="1">
+                <a:solidFill>
+                  <a:srgbClr val="17352B"/>
+                </a:solidFill>
+                <a:latin typeface="Arial"/>
+              </a:defRPr>
+            </a:pPr>
+            <a:r>
+              <a:t>Expansión de soluciones con IA</a:t>
+            </a:r>
+          </a:p>
+        </p:txBody>
+      </p:sp>
+      <p:sp>
+        <p:nvSpPr>
+          <p:cNvPr id="19" name="Rounded Rectangle 18"/>
+          <p:cNvSpPr/>
+          <p:nvPr/>
+        </p:nvSpPr>
+        <p:spPr>
+          <a:xfrm>
+            <a:off x="8915400" y="2423160"/>
+            <a:ext cx="2606040" cy="2926080"/>
+          </a:xfrm>
+          <a:prstGeom prst="roundRect">
+            <a:avLst/>
+          </a:prstGeom>
+          <a:solidFill>
+            <a:srgbClr val="F8FAF8"/>
+          </a:solidFill>
+          <a:ln w="12700">
+            <a:solidFill>
+              <a:srgbClr val="CFE2D8"/>
+            </a:solidFill>
+          </a:ln>
+        </p:spPr>
+        <p:style>
+          <a:lnRef idx="1">
+            <a:schemeClr val="accent1"/>
+          </a:lnRef>
+          <a:fillRef idx="3">
+            <a:schemeClr val="accent1"/>
+          </a:fillRef>
+          <a:effectRef idx="2">
+            <a:schemeClr val="accent1"/>
+          </a:effectRef>
+          <a:fontRef idx="minor">
+            <a:schemeClr val="lt1"/>
+          </a:fontRef>
+        </p:style>
+        <p:txBody>
+          <a:bodyPr rtlCol="0" anchor="ctr" wrap="square" lIns="182880" rIns="182880" tIns="201168"/>
+          <a:lstStyle/>
+          <a:p>
+            <a:pPr algn="ctr"/>
+          </a:p>
+          <a:p>
+            <a:pPr>
+              <a:spcBef>
+                <a:spcPts val="3800"/>
+              </a:spcBef>
+              <a:defRPr sz="1050">
+                <a:solidFill>
+                  <a:srgbClr val="5C6B65"/>
+                </a:solidFill>
+                <a:latin typeface="Arial"/>
+              </a:defRPr>
+            </a:pPr>
+            <a:r>
+              <a:t>Municipios y comunas buscan modernizar su gestión GIRSU, reducir basurales y cumplir metas ambientales.</a:t>
+            </a:r>
+          </a:p>
+        </p:txBody>
+      </p:sp>
+      <p:sp>
+        <p:nvSpPr>
+          <p:cNvPr id="20" name="Oval 19"/>
+          <p:cNvSpPr/>
+          <p:nvPr/>
+        </p:nvSpPr>
+        <p:spPr>
+          <a:xfrm>
+            <a:off x="9098280" y="2651760"/>
+            <a:ext cx="109728" cy="109728"/>
+          </a:xfrm>
+          <a:prstGeom prst="ellipse">
+            <a:avLst/>
+          </a:prstGeom>
+          <a:solidFill>
+            <a:srgbClr val="5F8DD3"/>
+          </a:solidFill>
+          <a:ln>
+            <a:noFill/>
+          </a:ln>
+        </p:spPr>
+        <p:style>
+          <a:lnRef idx="1">
+            <a:schemeClr val="accent1"/>
+          </a:lnRef>
+          <a:fillRef idx="3">
+            <a:schemeClr val="accent1"/>
+          </a:fillRef>
+          <a:effectRef idx="2">
+            <a:schemeClr val="accent1"/>
+          </a:effectRef>
+          <a:fontRef idx="minor">
+            <a:schemeClr val="lt1"/>
+          </a:fontRef>
+        </p:style>
+        <p:txBody>
+          <a:bodyPr rtlCol="0" anchor="ctr"/>
+          <a:lstStyle/>
+          <a:p>
+            <a:pPr algn="ctr"/>
+          </a:p>
+        </p:txBody>
+      </p:sp>
+      <p:sp>
+        <p:nvSpPr>
+          <p:cNvPr id="21" name="TextBox 20"/>
+          <p:cNvSpPr txBox="1"/>
+          <p:nvPr/>
+        </p:nvSpPr>
+        <p:spPr>
+          <a:xfrm>
+            <a:off x="9281160" y="2542032"/>
+            <a:ext cx="2103120" cy="365760"/>
+          </a:xfrm>
+          <a:prstGeom prst="rect">
+            <a:avLst/>
+          </a:prstGeom>
+          <a:noFill/>
+        </p:spPr>
+        <p:txBody>
+          <a:bodyPr wrap="none" lIns="0" tIns="0">
+            <a:spAutoFit/>
+          </a:bodyPr>
+          <a:lstStyle/>
+          <a:p>
+            <a:pPr>
+              <a:defRPr sz="1150" b="1">
+                <a:solidFill>
+                  <a:srgbClr val="17352B"/>
+                </a:solidFill>
+                <a:latin typeface="Arial"/>
+              </a:defRPr>
+            </a:pPr>
+            <a:r>
+              <a:t>Sostenibilidad urbana</a:t>
+            </a:r>
+          </a:p>
+        </p:txBody>
+      </p:sp>
+      <p:sp>
+        <p:nvSpPr>
+          <p:cNvPr id="22" name="Rounded Rectangle 21"/>
+          <p:cNvSpPr/>
+          <p:nvPr/>
+        </p:nvSpPr>
+        <p:spPr>
+          <a:xfrm>
+            <a:off x="685800" y="5532120"/>
+            <a:ext cx="10817352" cy="777240"/>
+          </a:xfrm>
+          <a:prstGeom prst="roundRect">
+            <a:avLst/>
+          </a:prstGeom>
+          <a:solidFill>
+            <a:srgbClr val="DDF4E9"/>
+          </a:solidFill>
+          <a:ln>
+            <a:noFill/>
+          </a:ln>
+        </p:spPr>
+        <p:style>
+          <a:lnRef idx="1">
+            <a:schemeClr val="accent1"/>
+          </a:lnRef>
+          <a:fillRef idx="3">
+            <a:schemeClr val="accent1"/>
+          </a:fillRef>
+          <a:effectRef idx="2">
+            <a:schemeClr val="accent1"/>
+          </a:effectRef>
+          <a:fontRef idx="minor">
+            <a:schemeClr val="lt1"/>
+          </a:fontRef>
+        </p:style>
+        <p:txBody>
+          <a:bodyPr rtlCol="0" anchor="ctr" wrap="square" lIns="274320" tIns="109728"/>
           <a:lstStyle/>
           <a:p>
             <a:pPr algn="ctr">
-              <a:defRPr sz="1300" b="1">
-                <a:solidFill>
-                  <a:srgbClr val="34D399"/>
+              <a:defRPr sz="1250" b="1">
+                <a:solidFill>
+                  <a:srgbClr val="0B6B4D"/>
                 </a:solidFill>
                 <a:latin typeface="Arial"/>
               </a:defRPr>
@@ -9326,17 +11662,17 @@
           <a:p>
             <a:pPr>
               <a:spcBef>
-                <a:spcPts val="400"/>
+                <a:spcPts val="200"/>
               </a:spcBef>
               <a:defRPr sz="1100">
                 <a:solidFill>
-                  <a:srgbClr val="E2E8F0"/>
-                </a:solidFill>
-                <a:latin typeface="Arial"/>
-              </a:defRPr>
-            </a:pPr>
-            <a:r>
-              <a:t>El crecimiento de las ciudades inteligentes y la necesidad urgente de soluciones sustentables generan una ventana estratégica inmejorable para EcoMapa en los municipios de la provincia.</a:t>
+                  <a:srgbClr val="17352B"/>
+                </a:solidFill>
+                <a:latin typeface="Arial"/>
+              </a:defRPr>
+            </a:pPr>
+            <a:r>
+              <a:t>Facilitando la transición hacia ciudades limpias, circulares y con participación ciudadana medible.</a:t>
             </a:r>
           </a:p>
         </p:txBody>
@@ -9374,7 +11710,7 @@
             <a:avLst/>
           </a:prstGeom>
           <a:solidFill>
-            <a:srgbClr val="0F172A"/>
+            <a:srgbClr val="FFFFFF"/>
           </a:solidFill>
           <a:ln>
             <a:noFill/>
@@ -9404,20 +11740,128 @@
       </p:sp>
       <p:sp>
         <p:nvSpPr>
-          <p:cNvPr id="3" name="Rounded Rectangle 2"/>
+          <p:cNvPr id="3" name="TextBox 2"/>
+          <p:cNvSpPr txBox="1"/>
+          <p:nvPr/>
+        </p:nvSpPr>
+        <p:spPr>
+          <a:xfrm>
+            <a:off x="685800" y="411480"/>
+            <a:ext cx="5029200" cy="320040"/>
+          </a:xfrm>
+          <a:prstGeom prst="rect">
+            <a:avLst/>
+          </a:prstGeom>
+          <a:noFill/>
+        </p:spPr>
+        <p:txBody>
+          <a:bodyPr wrap="square" lIns="0" tIns="0">
+            <a:spAutoFit/>
+          </a:bodyPr>
+          <a:lstStyle/>
+          <a:p>
+            <a:pPr>
+              <a:defRPr sz="1100" b="1">
+                <a:solidFill>
+                  <a:srgbClr val="0B6B4D"/>
+                </a:solidFill>
+                <a:latin typeface="Arial"/>
+              </a:defRPr>
+            </a:pPr>
+            <a:r>
+              <a:t>08 • MODELO DE NEGOCIOS</a:t>
+            </a:r>
+          </a:p>
+        </p:txBody>
+      </p:sp>
+      <p:sp>
+        <p:nvSpPr>
+          <p:cNvPr id="4" name="TextBox 3"/>
+          <p:cNvSpPr txBox="1"/>
+          <p:nvPr/>
+        </p:nvSpPr>
+        <p:spPr>
+          <a:xfrm>
+            <a:off x="10789920" y="411480"/>
+            <a:ext cx="731520" cy="320040"/>
+          </a:xfrm>
+          <a:prstGeom prst="rect">
+            <a:avLst/>
+          </a:prstGeom>
+          <a:noFill/>
+        </p:spPr>
+        <p:txBody>
+          <a:bodyPr wrap="none" rIns="0" tIns="0">
+            <a:spAutoFit/>
+          </a:bodyPr>
+          <a:lstStyle/>
+          <a:p>
+            <a:pPr algn="r">
+              <a:defRPr sz="1100" b="1">
+                <a:solidFill>
+                  <a:srgbClr val="5C6B65"/>
+                </a:solidFill>
+                <a:latin typeface="Arial"/>
+              </a:defRPr>
+            </a:pPr>
+            <a:r>
+              <a:t>09</a:t>
+            </a:r>
+          </a:p>
+        </p:txBody>
+      </p:sp>
+      <p:sp>
+        <p:nvSpPr>
+          <p:cNvPr id="5" name="TextBox 4"/>
+          <p:cNvSpPr txBox="1"/>
+          <p:nvPr/>
+        </p:nvSpPr>
+        <p:spPr>
+          <a:xfrm>
+            <a:off x="685800" y="685800"/>
+            <a:ext cx="10789920" cy="685800"/>
+          </a:xfrm>
+          <a:prstGeom prst="rect">
+            <a:avLst/>
+          </a:prstGeom>
+          <a:noFill/>
+        </p:spPr>
+        <p:txBody>
+          <a:bodyPr wrap="square" lIns="0" tIns="0">
+            <a:spAutoFit/>
+          </a:bodyPr>
+          <a:lstStyle/>
+          <a:p>
+            <a:pPr>
+              <a:defRPr sz="2500" b="1">
+                <a:solidFill>
+                  <a:srgbClr val="17352B"/>
+                </a:solidFill>
+                <a:latin typeface="Arial"/>
+              </a:defRPr>
+            </a:pPr>
+            <a:r>
+              <a:t>Modelo de Negocios — B2B y B2G SaaS</a:t>
+            </a:r>
+          </a:p>
+        </p:txBody>
+      </p:sp>
+      <p:sp>
+        <p:nvSpPr>
+          <p:cNvPr id="6" name="Rectangle 5"/>
           <p:cNvSpPr/>
           <p:nvPr/>
         </p:nvSpPr>
         <p:spPr>
           <a:xfrm>
-            <a:off x="731520" y="384048"/>
-            <a:ext cx="3474720" cy="347472"/>
-          </a:xfrm>
-          <a:prstGeom prst="roundRect">
+            <a:off x="685800" y="1417320"/>
+            <a:ext cx="10817352" cy="13716"/>
+          </a:xfrm>
+          <a:prstGeom prst="rect">
             <a:avLst/>
           </a:prstGeom>
           <a:solidFill>
-            <a:srgbClr val="06B6D4"/>
+            <a:srgbClr val="CFE2D8"/>
           </a:solidFill>
           <a:ln>
             <a:noFill/>
@@ -9441,23 +11885,49 @@
           <a:bodyPr rtlCol="0" anchor="ctr"/>
           <a:lstStyle/>
           <a:p>
-            <a:pPr algn="ctr">
-              <a:defRPr sz="950" b="1">
-                <a:solidFill>
-                  <a:srgbClr val="FFFFFF"/>
-                </a:solidFill>
-                <a:latin typeface="Arial"/>
-              </a:defRPr>
-            </a:pPr>
-            <a:r>
-              <a:t>08. MODELO DE NEGOCIOS</a:t>
+            <a:pPr algn="ctr"/>
+          </a:p>
+        </p:txBody>
+      </p:sp>
+      <p:sp>
+        <p:nvSpPr>
+          <p:cNvPr id="7" name="TextBox 6"/>
+          <p:cNvSpPr txBox="1"/>
+          <p:nvPr/>
+        </p:nvSpPr>
+        <p:spPr>
+          <a:xfrm>
+            <a:off x="685800" y="6446520"/>
+            <a:ext cx="5486400" cy="274320"/>
+          </a:xfrm>
+          <a:prstGeom prst="rect">
+            <a:avLst/>
+          </a:prstGeom>
+          <a:noFill/>
+        </p:spPr>
+        <p:txBody>
+          <a:bodyPr wrap="none" lIns="0" bIns="0">
+            <a:spAutoFit/>
+          </a:bodyPr>
+          <a:lstStyle/>
+          <a:p>
+            <a:pPr>
+              <a:defRPr sz="950">
+                <a:solidFill>
+                  <a:srgbClr val="5C6B65"/>
+                </a:solidFill>
+                <a:latin typeface="Arial"/>
+              </a:defRPr>
+            </a:pPr>
+            <a:r>
+              <a:t>EcoMapa  •  CivicLoop Technologies S.A.</a:t>
             </a:r>
           </a:p>
         </p:txBody>
       </p:sp>
       <p:pic>
         <p:nvPicPr>
-          <p:cNvPr id="4" name="Picture 3" descr="civicloop_logo_rounded.png"/>
+          <p:cNvPr id="8" name="Picture 7" descr="civicloop_logo_rounded.png"/>
           <p:cNvPicPr>
             <a:picLocks noChangeAspect="1"/>
           </p:cNvPicPr>
@@ -9471,8 +11941,8 @@
         </p:blipFill>
         <p:spPr>
           <a:xfrm>
-            <a:off x="11064240" y="347472"/>
-            <a:ext cx="594360" cy="594360"/>
+            <a:off x="11064240" y="6309360"/>
+            <a:ext cx="438912" cy="438912"/>
           </a:xfrm>
           <a:prstGeom prst="rect">
             <a:avLst/>
@@ -9481,14 +11951,14 @@
       </p:pic>
       <p:sp>
         <p:nvSpPr>
-          <p:cNvPr id="5" name="TextBox 4"/>
+          <p:cNvPr id="9" name="TextBox 8"/>
           <p:cNvSpPr txBox="1"/>
           <p:nvPr/>
         </p:nvSpPr>
         <p:spPr>
           <a:xfrm>
-            <a:off x="731520" y="749808"/>
-            <a:ext cx="10515600" cy="777240"/>
+            <a:off x="685800" y="1645920"/>
+            <a:ext cx="10789920" cy="548640"/>
           </a:xfrm>
           <a:prstGeom prst="rect">
             <a:avLst/>
@@ -9496,61 +11966,45 @@
           <a:noFill/>
         </p:spPr>
         <p:txBody>
-          <a:bodyPr wrap="square">
+          <a:bodyPr wrap="square" lIns="0">
             <a:spAutoFit/>
           </a:bodyPr>
           <a:lstStyle/>
           <a:p>
             <a:pPr>
-              <a:defRPr sz="2500" b="1">
-                <a:solidFill>
-                  <a:srgbClr val="FFFFFF"/>
-                </a:solidFill>
-                <a:latin typeface="Arial"/>
-              </a:defRPr>
-            </a:pPr>
-            <a:r>
-              <a:t>Modelo de Negocios: B2B y B2G SaaS</a:t>
-            </a:r>
-          </a:p>
-          <a:p>
-            <a:pPr>
-              <a:spcBef>
-                <a:spcPts val="300"/>
-              </a:spcBef>
-              <a:defRPr sz="1300">
-                <a:solidFill>
-                  <a:srgbClr val="94A3B8"/>
-                </a:solidFill>
-                <a:latin typeface="Arial"/>
-              </a:defRPr>
-            </a:pPr>
-            <a:r>
-              <a:t>Generando triple impacto ambiental, social y comercial al mismo tiempo</a:t>
-            </a:r>
-          </a:p>
-        </p:txBody>
-      </p:sp>
-      <p:sp>
-        <p:nvSpPr>
-          <p:cNvPr id="6" name="Rounded Rectangle 5"/>
+              <a:defRPr sz="1500" b="1">
+                <a:solidFill>
+                  <a:srgbClr val="17352B"/>
+                </a:solidFill>
+                <a:latin typeface="Arial"/>
+              </a:defRPr>
+            </a:pPr>
+            <a:r>
+              <a:t>Esquema de sostenibilidad económica basado en suscripciones para el sector público y privado:</a:t>
+            </a:r>
+          </a:p>
+        </p:txBody>
+      </p:sp>
+      <p:sp>
+        <p:nvSpPr>
+          <p:cNvPr id="10" name="Rounded Rectangle 9"/>
           <p:cNvSpPr/>
           <p:nvPr/>
         </p:nvSpPr>
         <p:spPr>
           <a:xfrm>
-            <a:off x="731520" y="1783080"/>
-            <a:ext cx="2560320" cy="3108960"/>
+            <a:off x="685800" y="2423160"/>
+            <a:ext cx="2606040" cy="2926080"/>
           </a:xfrm>
           <a:prstGeom prst="roundRect">
             <a:avLst/>
           </a:prstGeom>
           <a:solidFill>
-            <a:srgbClr val="1E293B"/>
+            <a:srgbClr val="F8FAF8"/>
           </a:solidFill>
-          <a:ln w="19050">
+          <a:ln w="12700">
             <a:solidFill>
-              <a:srgbClr val="06B6D4"/>
+              <a:srgbClr val="CFE2D8"/>
             </a:solidFill>
           </a:ln>
         </p:spPr>
@@ -9573,9 +12027,9 @@
           <a:lstStyle/>
           <a:p>
             <a:pPr algn="ctr">
-              <a:defRPr sz="1200" b="1">
-                <a:solidFill>
-                  <a:srgbClr val="06B6D4"/>
+              <a:defRPr sz="1150" b="1">
+                <a:solidFill>
+                  <a:srgbClr val="0B6B4D"/>
                 </a:solidFill>
                 <a:latin typeface="Arial"/>
               </a:defRPr>
@@ -9591,37 +12045,37 @@
               </a:spcBef>
               <a:defRPr sz="1050">
                 <a:solidFill>
-                  <a:srgbClr val="E2E8F0"/>
-                </a:solidFill>
-                <a:latin typeface="Arial"/>
-              </a:defRPr>
-            </a:pPr>
-            <a:r>
-              <a:t>Suscripciones mensuales a gobiernos locales para administrar sus puntos limpios, monitorear cuadrillas y certificar estadísticas GIRSU.</a:t>
-            </a:r>
-          </a:p>
-        </p:txBody>
-      </p:sp>
-      <p:sp>
-        <p:nvSpPr>
-          <p:cNvPr id="7" name="Rounded Rectangle 6"/>
+                  <a:srgbClr val="5C6B65"/>
+                </a:solidFill>
+                <a:latin typeface="Arial"/>
+              </a:defRPr>
+            </a:pPr>
+            <a:r>
+              <a:t>Suscripciones a gobiernos locales para gestionar sus puntos limpios, coordinar cuadrillas de retiros de voluminosos y acceder a métricas GIRSU de impacto.</a:t>
+            </a:r>
+          </a:p>
+        </p:txBody>
+      </p:sp>
+      <p:sp>
+        <p:nvSpPr>
+          <p:cNvPr id="11" name="Rounded Rectangle 10"/>
           <p:cNvSpPr/>
           <p:nvPr/>
         </p:nvSpPr>
         <p:spPr>
           <a:xfrm>
-            <a:off x="3429000" y="1783080"/>
-            <a:ext cx="2560320" cy="3108960"/>
+            <a:off x="3429000" y="2423160"/>
+            <a:ext cx="2606040" cy="2926080"/>
           </a:xfrm>
           <a:prstGeom prst="roundRect">
             <a:avLst/>
           </a:prstGeom>
           <a:solidFill>
-            <a:srgbClr val="1E293B"/>
+            <a:srgbClr val="F8FAF8"/>
           </a:solidFill>
-          <a:ln w="19050">
+          <a:ln w="12700">
             <a:solidFill>
-              <a:srgbClr val="8B5CF6"/>
+              <a:srgbClr val="CFE2D8"/>
             </a:solidFill>
           </a:ln>
         </p:spPr>
@@ -9644,9 +12098,9 @@
           <a:lstStyle/>
           <a:p>
             <a:pPr algn="ctr">
-              <a:defRPr sz="1200" b="1">
-                <a:solidFill>
-                  <a:srgbClr val="8B5CF6"/>
+              <a:defRPr sz="1150" b="1">
+                <a:solidFill>
+                  <a:srgbClr val="0B6B4D"/>
                 </a:solidFill>
                 <a:latin typeface="Arial"/>
               </a:defRPr>
@@ -9662,37 +12116,37 @@
               </a:spcBef>
               <a:defRPr sz="1050">
                 <a:solidFill>
-                  <a:srgbClr val="E2E8F0"/>
-                </a:solidFill>
-                <a:latin typeface="Arial"/>
-              </a:defRPr>
-            </a:pPr>
-            <a:r>
-              <a:t>Suscripciones a comercios privados para figurar como Eco-Puntos oficiales y publicar cupones de descuento patrocinados.</a:t>
-            </a:r>
-          </a:p>
-        </p:txBody>
-      </p:sp>
-      <p:sp>
-        <p:nvSpPr>
-          <p:cNvPr id="8" name="Rounded Rectangle 7"/>
+                  <a:srgbClr val="5C6B65"/>
+                </a:solidFill>
+                <a:latin typeface="Arial"/>
+              </a:defRPr>
+            </a:pPr>
+            <a:r>
+              <a:t>Suscripciones a empresas y comercios para figurar como Eco-Puntos oficiales en el mapa, publicar cupones de descuento y cumplir normativas de reciclaje.</a:t>
+            </a:r>
+          </a:p>
+        </p:txBody>
+      </p:sp>
+      <p:sp>
+        <p:nvSpPr>
+          <p:cNvPr id="12" name="Rounded Rectangle 11"/>
           <p:cNvSpPr/>
           <p:nvPr/>
         </p:nvSpPr>
         <p:spPr>
           <a:xfrm>
-            <a:off x="6126480" y="1783080"/>
-            <a:ext cx="2560320" cy="3108960"/>
+            <a:off x="6172200" y="2423160"/>
+            <a:ext cx="2606040" cy="2926080"/>
           </a:xfrm>
           <a:prstGeom prst="roundRect">
             <a:avLst/>
           </a:prstGeom>
           <a:solidFill>
-            <a:srgbClr val="1E293B"/>
+            <a:srgbClr val="F8FAF8"/>
           </a:solidFill>
-          <a:ln w="19050">
+          <a:ln w="12700">
             <a:solidFill>
-              <a:srgbClr val="10B981"/>
+              <a:srgbClr val="CFE2D8"/>
             </a:solidFill>
           </a:ln>
         </p:spPr>
@@ -9715,9 +12169,9 @@
           <a:lstStyle/>
           <a:p>
             <a:pPr algn="ctr">
-              <a:defRPr sz="1200" b="1">
-                <a:solidFill>
-                  <a:srgbClr val="10B981"/>
+              <a:defRPr sz="1150" b="1">
+                <a:solidFill>
+                  <a:srgbClr val="0B6B4D"/>
                 </a:solidFill>
                 <a:latin typeface="Arial"/>
               </a:defRPr>
@@ -9733,37 +12187,37 @@
               </a:spcBef>
               <a:defRPr sz="1050">
                 <a:solidFill>
-                  <a:srgbClr val="E2E8F0"/>
-                </a:solidFill>
-                <a:latin typeface="Arial"/>
-              </a:defRPr>
-            </a:pPr>
-            <a:r>
-              <a:t>Acceso totalmente libre para el vecino, sin muros de pago ni publicidad molesta, fomentando la máxima adopción ciudadana.</a:t>
-            </a:r>
-          </a:p>
-        </p:txBody>
-      </p:sp>
-      <p:sp>
-        <p:nvSpPr>
-          <p:cNvPr id="9" name="Rounded Rectangle 8"/>
+                  <a:srgbClr val="5C6B65"/>
+                </a:solidFill>
+                <a:latin typeface="Arial"/>
+              </a:defRPr>
+            </a:pPr>
+            <a:r>
+              <a:t>Acceso libre y sin costo para los usuarios finales y vecinos, asegurando la máxima adopción ciudadana y democratización del servicio.</a:t>
+            </a:r>
+          </a:p>
+        </p:txBody>
+      </p:sp>
+      <p:sp>
+        <p:nvSpPr>
+          <p:cNvPr id="13" name="Rounded Rectangle 12"/>
           <p:cNvSpPr/>
           <p:nvPr/>
         </p:nvSpPr>
         <p:spPr>
           <a:xfrm>
-            <a:off x="8823960" y="1783080"/>
-            <a:ext cx="2560320" cy="3108960"/>
+            <a:off x="8915400" y="2423160"/>
+            <a:ext cx="2606040" cy="2926080"/>
           </a:xfrm>
           <a:prstGeom prst="roundRect">
             <a:avLst/>
           </a:prstGeom>
           <a:solidFill>
-            <a:srgbClr val="1E293B"/>
+            <a:srgbClr val="F8FAF8"/>
           </a:solidFill>
-          <a:ln w="19050">
+          <a:ln w="12700">
             <a:solidFill>
-              <a:srgbClr val="F59E0B"/>
+              <a:srgbClr val="CFE2D8"/>
             </a:solidFill>
           </a:ln>
         </p:spPr>
@@ -9786,9 +12240,9 @@
           <a:lstStyle/>
           <a:p>
             <a:pPr algn="ctr">
-              <a:defRPr sz="1200" b="1">
-                <a:solidFill>
-                  <a:srgbClr val="F59E0B"/>
+              <a:defRPr sz="1150" b="1">
+                <a:solidFill>
+                  <a:srgbClr val="0B6B4D"/>
                 </a:solidFill>
                 <a:latin typeface="Arial"/>
               </a:defRPr>
@@ -9804,38 +12258,36 @@
               </a:spcBef>
               <a:defRPr sz="1050">
                 <a:solidFill>
-                  <a:srgbClr val="E2E8F0"/>
-                </a:solidFill>
-                <a:latin typeface="Arial"/>
-              </a:defRPr>
-            </a:pPr>
-            <a:r>
-              <a:t>Planes escalables (Basic • Pro • Enterprise) adaptados a la cantidad de habitantes y volumen de puntos limpios.</a:t>
-            </a:r>
-          </a:p>
-        </p:txBody>
-      </p:sp>
-      <p:sp>
-        <p:nvSpPr>
-          <p:cNvPr id="10" name="Rounded Rectangle 9"/>
+                  <a:srgbClr val="5C6B65"/>
+                </a:solidFill>
+                <a:latin typeface="Arial"/>
+              </a:defRPr>
+            </a:pPr>
+            <a:r>
+              <a:t>Planes escalables (Basic • Pro • Enterprise) adaptados a la cantidad de habitantes, puntos verdes administrados y funcionalidades avanzadas.</a:t>
+            </a:r>
+          </a:p>
+        </p:txBody>
+      </p:sp>
+      <p:sp>
+        <p:nvSpPr>
+          <p:cNvPr id="14" name="Rounded Rectangle 13"/>
           <p:cNvSpPr/>
           <p:nvPr/>
         </p:nvSpPr>
         <p:spPr>
           <a:xfrm>
-            <a:off x="731520" y="5074920"/>
-            <a:ext cx="10698480" cy="1234440"/>
+            <a:off x="685800" y="5532120"/>
+            <a:ext cx="10817352" cy="777240"/>
           </a:xfrm>
           <a:prstGeom prst="roundRect">
             <a:avLst/>
           </a:prstGeom>
           <a:solidFill>
-            <a:srgbClr val="1E293B"/>
+            <a:srgbClr val="DDF4E9"/>
           </a:solidFill>
-          <a:ln w="12700">
-            <a:solidFill>
-              <a:srgbClr val="06B6D4"/>
-            </a:solidFill>
+          <a:ln>
+            <a:noFill/>
           </a:ln>
         </p:spPr>
         <p:style>
@@ -9853,13 +12305,13 @@
           </a:fontRef>
         </p:style>
         <p:txBody>
-          <a:bodyPr rtlCol="0" anchor="ctr" wrap="square" lIns="274320" tIns="182880"/>
+          <a:bodyPr rtlCol="0" anchor="ctr" wrap="square" lIns="274320" tIns="109728"/>
           <a:lstStyle/>
           <a:p>
             <a:pPr algn="ctr">
-              <a:defRPr sz="1300" b="1">
-                <a:solidFill>
-                  <a:srgbClr val="06B6D4"/>
+              <a:defRPr sz="1250" b="1">
+                <a:solidFill>
+                  <a:srgbClr val="0B6B4D"/>
                 </a:solidFill>
                 <a:latin typeface="Arial"/>
               </a:defRPr>
@@ -9871,17 +12323,17 @@
           <a:p>
             <a:pPr>
               <a:spcBef>
-                <a:spcPts val="400"/>
+                <a:spcPts val="200"/>
               </a:spcBef>
               <a:defRPr sz="1100">
                 <a:solidFill>
-                  <a:srgbClr val="E2E8F0"/>
-                </a:solidFill>
-                <a:latin typeface="Arial"/>
-              </a:defRPr>
-            </a:pPr>
-            <a:r>
-              <a:t>Un modelo autosustentable donde los municipios ahorran costos de logística y las empresas posicionan su marca verde mientras la comunidad recicla mejor.</a:t>
+                  <a:srgbClr val="17352B"/>
+                </a:solidFill>
+                <a:latin typeface="Arial"/>
+              </a:defRPr>
+            </a:pPr>
+            <a:r>
+              <a:t>Un modelo autosustentable con costos operativos reducidos gracias a su infraestructura serverless en la nube.</a:t>
             </a:r>
           </a:p>
         </p:txBody>
